--- a/reports/presentation.pptx
+++ b/reports/presentation.pptx
@@ -2851,7 +2851,7 @@
       </p:sp>
       <p:pic>
         <p:nvPicPr>
-          <p:cNvPr id="6" name="Image 0" descr="/sessions/peaceful-trusting-darwin/mnt/Hackathon/figures/fig4_series_panel.png">    </p:cNvPr>
+          <p:cNvPr id="6" name="Image 0" descr="C:\Users\aakas\Documents\Projects\Hackathon\figures\input_series.png">    </p:cNvPr>
           <p:cNvPicPr>
             <a:picLocks noChangeAspect="1"/>
           </p:cNvPicPr>
@@ -2906,7 +2906,7 @@
                 <a:ea typeface="Arial" pitchFamily="34" charset="-122"/>
                 <a:cs typeface="Arial" pitchFamily="34" charset="-120"/>
               </a:rPr>
-              <a:t>SARB. MARKET_RATES 1.0.0. Pretoria: SARB [producer]. Johannesburg: EconData [distributor], 2026. Verification script: code/econdata_verify.py.</a:t>
+              <a:t>SARB. MARKET_RATES 1.0.0. Pretoria: SARB [producer]. Johannesburg: EconData [distributor], 2026. Verification script: src/verify_provenance.py.</a:t>
             </a:r>
             <a:endParaRPr lang="en-US" sz="1300" dirty="0"/>
           </a:p>
@@ -3049,7 +3049,7 @@
       </p:sp>
       <p:pic>
         <p:nvPicPr>
-          <p:cNvPr id="5" name="Image 0" descr="/sessions/peaceful-trusting-darwin/mnt/Hackathon/figures/fig5_weights.png">    </p:cNvPr>
+          <p:cNvPr id="5" name="Image 0" descr="C:\Users\aakas\Documents\Projects\Hackathon\figures\combination_weights.png">    </p:cNvPr>
           <p:cNvPicPr>
             <a:picLocks noChangeAspect="1"/>
           </p:cNvPicPr>
@@ -3793,7 +3793,7 @@
       </p:sp>
       <p:pic>
         <p:nvPicPr>
-          <p:cNvPr id="5" name="Image 0" descr="/sessions/peaceful-trusting-darwin/mnt/Hackathon/figures/fig3_forecasts.png">    </p:cNvPr>
+          <p:cNvPr id="5" name="Image 0" descr="C:\Users\aakas\Documents\Projects\Hackathon\figures\forecasts_vs_actual.png">    </p:cNvPr>
           <p:cNvPicPr>
             <a:picLocks noChangeAspect="1"/>
           </p:cNvPicPr>
@@ -6683,7 +6683,7 @@
       </p:sp>
       <p:pic>
         <p:nvPicPr>
-          <p:cNvPr id="4" name="Image 0" descr="/sessions/peaceful-trusting-darwin/mnt/Hackathon/figures/slides/slide_cumse.png">    </p:cNvPr>
+          <p:cNvPr id="4" name="Image 0" descr="C:\Users\aakas\Documents\Projects\Hackathon\figures\presentation\cumse.png">    </p:cNvPr>
           <p:cNvPicPr>
             <a:picLocks noChangeAspect="1"/>
           </p:cNvPicPr>
@@ -6943,7 +6943,7 @@
                 <a:ea typeface="Arial" pitchFamily="34" charset="-122"/>
                 <a:cs typeface="Arial" pitchFamily="34" charset="-120"/>
               </a:rPr>
-              <a:t>Own calculation. AR(1) refitted at each of the 261 origins; reproducible via code/verify_charts.py in the submission.</a:t>
+              <a:t>Own calculation. AR(1) refitted at each of the 261 origins; reproducible via src/validate_results.py in the submission.</a:t>
             </a:r>
             <a:endParaRPr lang="en-US" sz="1300" dirty="0"/>
           </a:p>
@@ -7047,7 +7047,7 @@
       </p:sp>
       <p:pic>
         <p:nvPicPr>
-          <p:cNvPr id="4" name="Image 0" descr="/sessions/peaceful-trusting-darwin/mnt/Hackathon/figures/slides/slide_rmse.png">    </p:cNvPr>
+          <p:cNvPr id="4" name="Image 0" descr="C:\Users\aakas\Documents\Projects\Hackathon\figures\presentation\rmse.png">    </p:cNvPr>
           <p:cNvPicPr>
             <a:picLocks noChangeAspect="1"/>
           </p:cNvPicPr>
@@ -11939,7 +11939,7 @@
       </p:sp>
       <p:pic>
         <p:nvPicPr>
-          <p:cNvPr id="5" name="Image 0" descr="/sessions/peaceful-trusting-darwin/mnt/Hackathon/figures/slides/slide_yearly.png">    </p:cNvPr>
+          <p:cNvPr id="5" name="Image 0" descr="C:\Users\aakas\Documents\Projects\Hackathon\figures\presentation\yearly.png">    </p:cNvPr>
           <p:cNvPicPr>
             <a:picLocks noChangeAspect="1"/>
           </p:cNvPicPr>

--- a/reports/presentation.pptx
+++ b/reports/presentation.pptx
@@ -2347,7 +2347,7 @@
                 <a:ea typeface="Arial" pitchFamily="34" charset="-122"/>
                 <a:cs typeface="Arial" pitchFamily="34" charset="-120"/>
               </a:rPr>
-              <a:t>+0.42%</a:t>
+              <a:t>+0.43%</a:t>
             </a:r>
             <a:endParaRPr lang="en-US" sz="3400" dirty="0"/>
           </a:p>
@@ -3337,7 +3337,7 @@
                 <a:ea typeface="Arial" pitchFamily="34" charset="-122"/>
                 <a:cs typeface="Arial" pitchFamily="34" charset="-120"/>
               </a:rPr>
-              <a:t>We ran machine learning under identical rules and it lost by 7.5%</a:t>
+              <a:t>We ran machine learning under identical rules and it lost by 7.6%</a:t>
             </a:r>
             <a:endParaRPr lang="en-US" sz="2600" dirty="0"/>
           </a:p>
@@ -7185,7 +7185,7 @@
                 <a:ea typeface="Arial" pitchFamily="34" charset="-122"/>
                 <a:cs typeface="Arial" pitchFamily="34" charset="-120"/>
               </a:rPr>
-              <a:t>Gradient boosting, same data and discipline, loses by 7.5%. About 850 noisy observations cannot support a flexible learner.</a:t>
+              <a:t>Gradient boosting, same data and discipline, loses by 7.6%. About 850 noisy observations cannot support a flexible learner.</a:t>
             </a:r>
             <a:endParaRPr lang="en-US" sz="1800" dirty="0"/>
           </a:p>
@@ -7453,7 +7453,7 @@
                 <a:ea typeface="Arial" pitchFamily="34" charset="-122"/>
                 <a:cs typeface="Arial" pitchFamily="34" charset="-120"/>
               </a:rPr>
-              <a:t>Gradient boosting, run under identical rules, lost by 7.5%.</a:t>
+              <a:t>Gradient boosting, run under identical rules, lost by 7.6%.</a:t>
             </a:r>
             <a:endParaRPr lang="en-US" sz="1900" dirty="0"/>
           </a:p>
@@ -7490,7 +7490,7 @@
                 <a:ea typeface="Arial" pitchFamily="34" charset="-122"/>
                 <a:cs typeface="Arial" pitchFamily="34" charset="-120"/>
               </a:rPr>
-              <a:t>Not statistically significant (DM p = 0.47). The benchmark wins on MAE and in 2025. Untested as a trading strategy.</a:t>
+              <a:t>Not statistically significant (DM p = 0.46). The benchmark wins on MAE and in 2025. Untested as a trading strategy.</a:t>
             </a:r>
             <a:endParaRPr lang="en-US" sz="1900" dirty="0"/>
           </a:p>
@@ -10209,7 +10209,7 @@
                           <a:ea typeface="Arial" pitchFamily="34" charset="-122"/>
                           <a:cs typeface="Arial" pitchFamily="34" charset="-120"/>
                         </a:rPr>
-                        <a:t>+0.31%</a:t>
+                        <a:t>+0.32%</a:t>
                       </a:r>
                       <a:endParaRPr lang="en-US" sz="1300" dirty="0">
                         <a:latin typeface="Arial" charset="0"/>
@@ -10274,7 +10274,7 @@
                           <a:ea typeface="Arial" pitchFamily="34" charset="-122"/>
                           <a:cs typeface="Arial" pitchFamily="34" charset="-120"/>
                         </a:rPr>
-                        <a:t>0.768</a:t>
+                        <a:t>0.760</a:t>
                       </a:r>
                       <a:endParaRPr lang="en-US" sz="1300" dirty="0">
                         <a:latin typeface="Arial" charset="0"/>
@@ -10339,7 +10339,7 @@
                           <a:ea typeface="Arial" pitchFamily="34" charset="-122"/>
                           <a:cs typeface="Arial" pitchFamily="34" charset="-120"/>
                         </a:rPr>
-                        <a:t>0.5624</a:t>
+                        <a:t>0.5623</a:t>
                       </a:r>
                       <a:endParaRPr lang="en-US" sz="1300" dirty="0">
                         <a:latin typeface="Arial" charset="0"/>
@@ -10471,7 +10471,7 @@
                           <a:ea typeface="Arial" pitchFamily="34" charset="-122"/>
                           <a:cs typeface="Arial" pitchFamily="34" charset="-120"/>
                         </a:rPr>
-                        <a:t>0.5605</a:t>
+                        <a:t>0.5604</a:t>
                       </a:r>
                       <a:endParaRPr lang="en-US" sz="1300" dirty="0">
                         <a:latin typeface="Arial" charset="0"/>
@@ -10536,7 +10536,7 @@
                           <a:ea typeface="Arial" pitchFamily="34" charset="-122"/>
                           <a:cs typeface="Arial" pitchFamily="34" charset="-120"/>
                         </a:rPr>
-                        <a:t>0.4482</a:t>
+                        <a:t>0.4481</a:t>
                       </a:r>
                       <a:endParaRPr lang="en-US" sz="1300" dirty="0">
                         <a:latin typeface="Arial" charset="0"/>
@@ -10601,7 +10601,7 @@
                           <a:ea typeface="Arial" pitchFamily="34" charset="-122"/>
                           <a:cs typeface="Arial" pitchFamily="34" charset="-120"/>
                         </a:rPr>
-                        <a:t>46.4%</a:t>
+                        <a:t>51.0%</a:t>
                       </a:r>
                       <a:endParaRPr lang="en-US" sz="1300" dirty="0">
                         <a:latin typeface="Arial" charset="0"/>
@@ -10666,7 +10666,7 @@
                           <a:ea typeface="Arial" pitchFamily="34" charset="-122"/>
                           <a:cs typeface="Arial" pitchFamily="34" charset="-120"/>
                         </a:rPr>
-                        <a:t>+0.34%</a:t>
+                        <a:t>+0.35%</a:t>
                       </a:r>
                       <a:endParaRPr lang="en-US" sz="1300" dirty="0">
                         <a:latin typeface="Arial" charset="0"/>
@@ -10731,7 +10731,7 @@
                           <a:ea typeface="Arial" pitchFamily="34" charset="-122"/>
                           <a:cs typeface="Arial" pitchFamily="34" charset="-120"/>
                         </a:rPr>
-                        <a:t>0.334</a:t>
+                        <a:t>0.319</a:t>
                       </a:r>
                       <a:endParaRPr lang="en-US" sz="1300" dirty="0">
                         <a:latin typeface="Arial" charset="0"/>
@@ -10796,7 +10796,7 @@
                           <a:ea typeface="Arial" pitchFamily="34" charset="-122"/>
                           <a:cs typeface="Arial" pitchFamily="34" charset="-120"/>
                         </a:rPr>
-                        <a:t>0.5627</a:t>
+                        <a:t>0.5626</a:t>
                       </a:r>
                       <a:endParaRPr lang="en-US" sz="1300" dirty="0">
                         <a:latin typeface="Arial" charset="0"/>
@@ -10928,7 +10928,7 @@
                           <a:ea typeface="Arial" pitchFamily="34" charset="-122"/>
                           <a:cs typeface="Arial" pitchFamily="34" charset="-120"/>
                         </a:rPr>
-                        <a:t>0.6046</a:t>
+                        <a:t>0.6051</a:t>
                       </a:r>
                       <a:endParaRPr lang="en-US" sz="1300" dirty="0">
                         <a:latin typeface="Arial" charset="0"/>
@@ -10993,7 +10993,7 @@
                           <a:ea typeface="Arial" pitchFamily="34" charset="-122"/>
                           <a:cs typeface="Arial" pitchFamily="34" charset="-120"/>
                         </a:rPr>
-                        <a:t>0.4919</a:t>
+                        <a:t>0.4967</a:t>
                       </a:r>
                       <a:endParaRPr lang="en-US" sz="1300" dirty="0">
                         <a:latin typeface="Arial" charset="0"/>
@@ -11058,7 +11058,7 @@
                           <a:ea typeface="Arial" pitchFamily="34" charset="-122"/>
                           <a:cs typeface="Arial" pitchFamily="34" charset="-120"/>
                         </a:rPr>
-                        <a:t>49.4%</a:t>
+                        <a:t>46.4%</a:t>
                       </a:r>
                       <a:endParaRPr lang="en-US" sz="1300" dirty="0">
                         <a:latin typeface="Arial" charset="0"/>
@@ -11123,7 +11123,7 @@
                           <a:ea typeface="Arial" pitchFamily="34" charset="-122"/>
                           <a:cs typeface="Arial" pitchFamily="34" charset="-120"/>
                         </a:rPr>
-                        <a:t>-7.51%</a:t>
+                        <a:t>-7.60%</a:t>
                       </a:r>
                       <a:endParaRPr lang="en-US" sz="1300" dirty="0">
                         <a:latin typeface="Arial" charset="0"/>
@@ -11188,7 +11188,7 @@
                           <a:ea typeface="Arial" pitchFamily="34" charset="-122"/>
                           <a:cs typeface="Arial" pitchFamily="34" charset="-120"/>
                         </a:rPr>
-                        <a:t>0.042</a:t>
+                        <a:t>0.016</a:t>
                       </a:r>
                       <a:endParaRPr lang="en-US" sz="1300" dirty="0">
                         <a:latin typeface="Arial" charset="0"/>
@@ -11253,7 +11253,7 @@
                           <a:ea typeface="Arial" pitchFamily="34" charset="-122"/>
                           <a:cs typeface="Arial" pitchFamily="34" charset="-120"/>
                         </a:rPr>
-                        <a:t>0.6071</a:t>
+                        <a:t>0.6070</a:t>
                       </a:r>
                       <a:endParaRPr lang="en-US" sz="1300" dirty="0">
                         <a:latin typeface="Arial" charset="0"/>
@@ -11450,7 +11450,7 @@
                           <a:ea typeface="Arial" pitchFamily="34" charset="-122"/>
                           <a:cs typeface="Arial" pitchFamily="34" charset="-120"/>
                         </a:rPr>
-                        <a:t>0.4496</a:t>
+                        <a:t>0.4495</a:t>
                       </a:r>
                       <a:endParaRPr lang="en-US" sz="1300" dirty="0">
                         <a:latin typeface="Arial" charset="0"/>
@@ -11580,7 +11580,7 @@
                           <a:ea typeface="Arial" pitchFamily="34" charset="-122"/>
                           <a:cs typeface="Arial" pitchFamily="34" charset="-120"/>
                         </a:rPr>
-                        <a:t>+0.42%</a:t>
+                        <a:t>+0.43%</a:t>
                       </a:r>
                       <a:endParaRPr lang="en-US" sz="1300" dirty="0">
                         <a:latin typeface="Arial" charset="0"/>
@@ -11645,7 +11645,7 @@
                           <a:ea typeface="Arial" pitchFamily="34" charset="-122"/>
                           <a:cs typeface="Arial" pitchFamily="34" charset="-120"/>
                         </a:rPr>
-                        <a:t>0.469</a:t>
+                        <a:t>0.463</a:t>
                       </a:r>
                       <a:endParaRPr lang="en-US" sz="1300" dirty="0">
                         <a:latin typeface="Arial" charset="0"/>
@@ -11710,7 +11710,7 @@
                           <a:ea typeface="Arial" pitchFamily="34" charset="-122"/>
                           <a:cs typeface="Arial" pitchFamily="34" charset="-120"/>
                         </a:rPr>
-                        <a:t>0.5621</a:t>
+                        <a:t>0.5620</a:t>
                       </a:r>
                       <a:endParaRPr lang="en-US" sz="1300" dirty="0">
                         <a:latin typeface="Arial" charset="0"/>

--- a/reports/presentation.pptx
+++ b/reports/presentation.pptx
@@ -2191,7 +2191,7 @@
                 <a:ea typeface="Arial" pitchFamily="34" charset="-122"/>
                 <a:cs typeface="Arial" pitchFamily="34" charset="-120"/>
               </a:rPr>
-              <a:t>0.5600</a:t>
+              <a:t>0.5599</a:t>
             </a:r>
             <a:endParaRPr lang="en-US" sz="3400" dirty="0"/>
           </a:p>
@@ -2347,7 +2347,7 @@
                 <a:ea typeface="Arial" pitchFamily="34" charset="-122"/>
                 <a:cs typeface="Arial" pitchFamily="34" charset="-120"/>
               </a:rPr>
-              <a:t>+0.43%</a:t>
+              <a:t>+0.44%</a:t>
             </a:r>
             <a:endParaRPr lang="en-US" sz="3400" dirty="0"/>
           </a:p>
@@ -3128,7 +3128,7 @@
                 <a:ea typeface="Arial" pitchFamily="34" charset="-122"/>
                 <a:cs typeface="Arial" pitchFamily="34" charset="-120"/>
               </a:rPr>
-              <a:t>ridge on the compact feature set, no intercept</a:t>
+              <a:t>ridge on the full feature set, no intercept</a:t>
             </a:r>
             <a:endParaRPr lang="en-US" sz="1700" dirty="0"/>
           </a:p>
@@ -3337,7 +3337,7 @@
                 <a:ea typeface="Arial" pitchFamily="34" charset="-122"/>
                 <a:cs typeface="Arial" pitchFamily="34" charset="-120"/>
               </a:rPr>
-              <a:t>We ran machine learning under identical rules and it lost by 7.6%</a:t>
+              <a:t>We ran machine learning under identical rules and it lost by 2.2%</a:t>
             </a:r>
             <a:endParaRPr lang="en-US" sz="2600" dirty="0"/>
           </a:p>
@@ -3506,7 +3506,7 @@
                 <a:ea typeface="Arial" pitchFamily="34" charset="-122"/>
                 <a:cs typeface="Arial" pitchFamily="34" charset="-120"/>
               </a:rPr>
-              <a:t>HistGradientBoosting, max depth 2, learning rate 0.05, 150 iterations, L2 regularisation 1.0, fixed seed. Identical information set, identical embargo, identical walk-forward loop as every other model.</a:t>
+              <a:t>HistGradientBoosting with a fixed seed. Once a year, purged cross-validation picks its depth, learning rate, iterations, L2 penalty and leaf size from 12 configurations. Same information set, same embargo and same walk-forward loop as every other model.</a:t>
             </a:r>
             <a:endParaRPr lang="en-US" sz="1800" dirty="0"/>
           </a:p>
@@ -7185,7 +7185,7 @@
                 <a:ea typeface="Arial" pitchFamily="34" charset="-122"/>
                 <a:cs typeface="Arial" pitchFamily="34" charset="-120"/>
               </a:rPr>
-              <a:t>Gradient boosting, same data and discipline, loses by 7.6%. About 850 noisy observations cannot support a flexible learner.</a:t>
+              <a:t>Gradient boosting, same data and discipline, loses by 2.2%. About 850 noisy observations cannot support a flexible learner.</a:t>
             </a:r>
             <a:endParaRPr lang="en-US" sz="1800" dirty="0"/>
           </a:p>
@@ -7453,7 +7453,7 @@
                 <a:ea typeface="Arial" pitchFamily="34" charset="-122"/>
                 <a:cs typeface="Arial" pitchFamily="34" charset="-120"/>
               </a:rPr>
-              <a:t>Gradient boosting, run under identical rules, lost by 7.6%.</a:t>
+              <a:t>Gradient boosting, run under identical rules, lost by 2.2%.</a:t>
             </a:r>
             <a:endParaRPr lang="en-US" sz="1900" dirty="0"/>
           </a:p>
@@ -7490,7 +7490,7 @@
                 <a:ea typeface="Arial" pitchFamily="34" charset="-122"/>
                 <a:cs typeface="Arial" pitchFamily="34" charset="-120"/>
               </a:rPr>
-              <a:t>Not statistically significant (DM p = 0.46). The benchmark wins on MAE and in 2025. Untested as a trading strategy.</a:t>
+              <a:t>Not statistically significant (DM p = 0.45). The benchmark wins on MAE and in 2025. Untested as a trading strategy.</a:t>
             </a:r>
             <a:endParaRPr lang="en-US" sz="1900" dirty="0"/>
           </a:p>
@@ -10471,7 +10471,7 @@
                           <a:ea typeface="Arial" pitchFamily="34" charset="-122"/>
                           <a:cs typeface="Arial" pitchFamily="34" charset="-120"/>
                         </a:rPr>
-                        <a:t>0.5604</a:t>
+                        <a:t>0.5602</a:t>
                       </a:r>
                       <a:endParaRPr lang="en-US" sz="1300" dirty="0">
                         <a:latin typeface="Arial" charset="0"/>
@@ -10536,7 +10536,7 @@
                           <a:ea typeface="Arial" pitchFamily="34" charset="-122"/>
                           <a:cs typeface="Arial" pitchFamily="34" charset="-120"/>
                         </a:rPr>
-                        <a:t>0.4481</a:t>
+                        <a:t>0.4479</a:t>
                       </a:r>
                       <a:endParaRPr lang="en-US" sz="1300" dirty="0">
                         <a:latin typeface="Arial" charset="0"/>
@@ -10601,7 +10601,7 @@
                           <a:ea typeface="Arial" pitchFamily="34" charset="-122"/>
                           <a:cs typeface="Arial" pitchFamily="34" charset="-120"/>
                         </a:rPr>
-                        <a:t>51.0%</a:t>
+                        <a:t>52.5%</a:t>
                       </a:r>
                       <a:endParaRPr lang="en-US" sz="1300" dirty="0">
                         <a:latin typeface="Arial" charset="0"/>
@@ -10666,7 +10666,7 @@
                           <a:ea typeface="Arial" pitchFamily="34" charset="-122"/>
                           <a:cs typeface="Arial" pitchFamily="34" charset="-120"/>
                         </a:rPr>
-                        <a:t>+0.35%</a:t>
+                        <a:t>+0.38%</a:t>
                       </a:r>
                       <a:endParaRPr lang="en-US" sz="1300" dirty="0">
                         <a:latin typeface="Arial" charset="0"/>
@@ -10731,7 +10731,7 @@
                           <a:ea typeface="Arial" pitchFamily="34" charset="-122"/>
                           <a:cs typeface="Arial" pitchFamily="34" charset="-120"/>
                         </a:rPr>
-                        <a:t>0.319</a:t>
+                        <a:t>0.264</a:t>
                       </a:r>
                       <a:endParaRPr lang="en-US" sz="1300" dirty="0">
                         <a:latin typeface="Arial" charset="0"/>
@@ -10796,7 +10796,7 @@
                           <a:ea typeface="Arial" pitchFamily="34" charset="-122"/>
                           <a:cs typeface="Arial" pitchFamily="34" charset="-120"/>
                         </a:rPr>
-                        <a:t>0.5626</a:t>
+                        <a:t>0.5623</a:t>
                       </a:r>
                       <a:endParaRPr lang="en-US" sz="1300" dirty="0">
                         <a:latin typeface="Arial" charset="0"/>
@@ -10928,7 +10928,7 @@
                           <a:ea typeface="Arial" pitchFamily="34" charset="-122"/>
                           <a:cs typeface="Arial" pitchFamily="34" charset="-120"/>
                         </a:rPr>
-                        <a:t>0.6051</a:t>
+                        <a:t>0.5745</a:t>
                       </a:r>
                       <a:endParaRPr lang="en-US" sz="1300" dirty="0">
                         <a:latin typeface="Arial" charset="0"/>
@@ -10993,7 +10993,7 @@
                           <a:ea typeface="Arial" pitchFamily="34" charset="-122"/>
                           <a:cs typeface="Arial" pitchFamily="34" charset="-120"/>
                         </a:rPr>
-                        <a:t>0.4967</a:t>
+                        <a:t>0.4723</a:t>
                       </a:r>
                       <a:endParaRPr lang="en-US" sz="1300" dirty="0">
                         <a:latin typeface="Arial" charset="0"/>
@@ -11058,7 +11058,7 @@
                           <a:ea typeface="Arial" pitchFamily="34" charset="-122"/>
                           <a:cs typeface="Arial" pitchFamily="34" charset="-120"/>
                         </a:rPr>
-                        <a:t>46.4%</a:t>
+                        <a:t>44.4%</a:t>
                       </a:r>
                       <a:endParaRPr lang="en-US" sz="1300" dirty="0">
                         <a:latin typeface="Arial" charset="0"/>
@@ -11123,7 +11123,7 @@
                           <a:ea typeface="Arial" pitchFamily="34" charset="-122"/>
                           <a:cs typeface="Arial" pitchFamily="34" charset="-120"/>
                         </a:rPr>
-                        <a:t>-7.60%</a:t>
+                        <a:t>-2.16%</a:t>
                       </a:r>
                       <a:endParaRPr lang="en-US" sz="1300" dirty="0">
                         <a:latin typeface="Arial" charset="0"/>
@@ -11188,7 +11188,7 @@
                           <a:ea typeface="Arial" pitchFamily="34" charset="-122"/>
                           <a:cs typeface="Arial" pitchFamily="34" charset="-120"/>
                         </a:rPr>
-                        <a:t>0.016</a:t>
+                        <a:t>0.362</a:t>
                       </a:r>
                       <a:endParaRPr lang="en-US" sz="1300" dirty="0">
                         <a:latin typeface="Arial" charset="0"/>
@@ -11253,7 +11253,7 @@
                           <a:ea typeface="Arial" pitchFamily="34" charset="-122"/>
                           <a:cs typeface="Arial" pitchFamily="34" charset="-120"/>
                         </a:rPr>
-                        <a:t>0.6070</a:t>
+                        <a:t>0.5755</a:t>
                       </a:r>
                       <a:endParaRPr lang="en-US" sz="1300" dirty="0">
                         <a:latin typeface="Arial" charset="0"/>
@@ -11385,7 +11385,7 @@
                           <a:ea typeface="Arial" pitchFamily="34" charset="-122"/>
                           <a:cs typeface="Arial" pitchFamily="34" charset="-120"/>
                         </a:rPr>
-                        <a:t>0.5600</a:t>
+                        <a:t>0.5599</a:t>
                       </a:r>
                       <a:endParaRPr lang="en-US" sz="1300" dirty="0">
                         <a:latin typeface="Arial" charset="0"/>
@@ -11580,7 +11580,7 @@
                           <a:ea typeface="Arial" pitchFamily="34" charset="-122"/>
                           <a:cs typeface="Arial" pitchFamily="34" charset="-120"/>
                         </a:rPr>
-                        <a:t>+0.43%</a:t>
+                        <a:t>+0.44%</a:t>
                       </a:r>
                       <a:endParaRPr lang="en-US" sz="1300" dirty="0">
                         <a:latin typeface="Arial" charset="0"/>
@@ -11645,7 +11645,7 @@
                           <a:ea typeface="Arial" pitchFamily="34" charset="-122"/>
                           <a:cs typeface="Arial" pitchFamily="34" charset="-120"/>
                         </a:rPr>
-                        <a:t>0.463</a:t>
+                        <a:t>0.449</a:t>
                       </a:r>
                       <a:endParaRPr lang="en-US" sz="1300" dirty="0">
                         <a:latin typeface="Arial" charset="0"/>
@@ -11710,7 +11710,7 @@
                           <a:ea typeface="Arial" pitchFamily="34" charset="-122"/>
                           <a:cs typeface="Arial" pitchFamily="34" charset="-120"/>
                         </a:rPr>
-                        <a:t>0.5620</a:t>
+                        <a:t>0.5619</a:t>
                       </a:r>
                       <a:endParaRPr lang="en-US" sz="1300" dirty="0">
                         <a:latin typeface="Arial" charset="0"/>

--- a/reports/presentation.pptx
+++ b/reports/presentation.pptx
@@ -19,9 +19,10 @@
     <p:sldId id="267" r:id="rId13"/>
     <p:sldId id="268" r:id="rId14"/>
     <p:sldId id="269" r:id="rId15"/>
+    <p:sldId id="270" r:id="rId16"/>
   </p:sldIdLst>
   <p:notesMasterIdLst>
-    <p:notesMasterId r:id="rId16"/>
+    <p:notesMasterId r:id="rId17"/>
   </p:notesMasterIdLst>
   <p:sldSz cx="12192000" cy="6858000"/>
   <p:notesSz cx="6858000" cy="12192000"/>
@@ -515,7 +516,7 @@
           <a:p>
             <a:r>
               <a:rPr lang="en-US" dirty="0"/>
-              <a:t>[0:00-0:40] We're team Spurious Decision, and the name is the warning we set ourselves. A spurious relationship looks real in your data and isn't there in the world. In FX forecasting that's the default outcome, so the whole project was built to avoid one. At one month the rand is almost a random walk. We didn't try to out-muscle that. We disciplined it. 0.5600 against the benchmark's 0.5624.</a:t>
+              <a:t>[0:00-0:40] We're team Spurious Decision, and the name is the warning we set ourselves. A spurious relationship looks real in your data and isn't there in the world. At one month the rand is almost a random walk, so we didn't try to out-muscle it. Our combination scores 0.5599 against the AR(1)'s 0.5624 and the random walk's 0.5600. That gap is not statistically significant, and we'll say so throughout.</a:t>
             </a:r>
             <a:endParaRPr lang="en-US" dirty="0"/>
           </a:p>
@@ -691,7 +692,7 @@
           <a:p>
             <a:r>
               <a:rPr lang="en-US" dirty="0"/>
-              <a:t>Use for: how does the combination adapt, and how do we know settings were frozen.</a:t>
+              <a:t>Use for: how does the combination adapt, and how do we know settings were frozen before the judged window.</a:t>
             </a:r>
             <a:endParaRPr lang="en-US" dirty="0"/>
           </a:p>
@@ -779,7 +780,7 @@
           <a:p>
             <a:r>
               <a:rPr lang="en-US" dirty="0"/>
-              <a:t>Use for: why didn't you use machine learning, deep learning, or an LSTM. We did, honestly, and here is the number.</a:t>
+              <a:t>Use for: why didn't you use machine learning. We did, with a small tuned grid, and it scored worst here. That says nothing general about machine learning: the M5 results paper reports the top methods there were ML methods, mostly LightGBM, and that combinations helped.</a:t>
             </a:r>
             <a:endParaRPr lang="en-US" dirty="0"/>
           </a:p>
@@ -997,6 +998,94 @@
 </p:notes>
 </file>
 
+<file path=ppt/notesSlides/notesSlide15.xml><?xml version="1.0" encoding="utf-8"?>
+<p:notes xmlns:a="http://schemas.openxmlformats.org/drawingml/2006/main" xmlns:r="http://schemas.openxmlformats.org/officeDocument/2006/relationships" xmlns:p="http://schemas.openxmlformats.org/presentationml/2006/main">
+  <p:cSld>
+    <p:spTree>
+      <p:nvGrpSpPr>
+        <p:cNvPr id="1" name=""/>
+        <p:cNvGrpSpPr/>
+        <p:nvPr/>
+      </p:nvGrpSpPr>
+      <p:grpSpPr>
+        <a:xfrm>
+          <a:off x="0" y="0"/>
+          <a:ext cx="0" cy="0"/>
+          <a:chOff x="0" y="0"/>
+          <a:chExt cx="0" cy="0"/>
+        </a:xfrm>
+      </p:grpSpPr>
+      <p:sp>
+        <p:nvSpPr>
+          <p:cNvPr id="2" name="Slide Image Placeholder 1"/>
+          <p:cNvSpPr>
+            <a:spLocks noGrp="1" noRot="1" noChangeAspect="1"/>
+          </p:cNvSpPr>
+          <p:nvPr>
+            <p:ph type="sldImg"/>
+          </p:nvPr>
+        </p:nvSpPr>
+        <p:spPr/>
+      </p:sp>
+      <p:sp>
+        <p:nvSpPr>
+          <p:cNvPr id="3" name="Notes Placeholder 2"/>
+          <p:cNvSpPr>
+            <a:spLocks noGrp="1"/>
+          </p:cNvSpPr>
+          <p:nvPr>
+            <p:ph type="body" idx="1"/>
+          </p:nvPr>
+        </p:nvSpPr>
+        <p:spPr/>
+        <p:txBody>
+          <a:bodyPr/>
+          <a:lstStyle/>
+          <a:p>
+            <a:r>
+              <a:rPr lang="en-US" dirty="0"/>
+              <a:t>Use for: how would you test this properly. The 2021 to 2025 window was scored repeatedly during development, so a clean test needs new origins.</a:t>
+            </a:r>
+            <a:endParaRPr lang="en-US" dirty="0"/>
+          </a:p>
+        </p:txBody>
+      </p:sp>
+      <p:sp>
+        <p:nvSpPr>
+          <p:cNvPr id="4" name="Slide Number Placeholder 3"/>
+          <p:cNvSpPr>
+            <a:spLocks noGrp="1"/>
+          </p:cNvSpPr>
+          <p:nvPr>
+            <p:ph type="sldNum" sz="quarter" idx="10"/>
+          </p:nvPr>
+        </p:nvSpPr>
+        <p:spPr/>
+        <p:txBody>
+          <a:bodyPr/>
+          <a:lstStyle/>
+          <a:p>
+            <a:fld id="{F7021451-1387-4CA6-816F-3879F97B5CBC}" type="slidenum">
+              <a:rPr lang="en-US"/>
+              <a:t>15</a:t>
+            </a:fld>
+            <a:endParaRPr lang="en-US"/>
+          </a:p>
+        </p:txBody>
+      </p:sp>
+    </p:spTree>
+    <p:extLst>
+      <p:ext uri="{BB962C8B-B14F-4D97-AF65-F5344CB8AC3E}">
+        <p14:creationId xmlns:p14="http://schemas.microsoft.com/office/powerpoint/2010/main" val="1024086991"/>
+      </p:ext>
+    </p:extLst>
+  </p:cSld>
+  <p:clrMapOvr>
+    <a:masterClrMapping/>
+  </p:clrMapOvr>
+</p:notes>
+</file>
+
 <file path=ppt/notesSlides/notesSlide2.xml><?xml version="1.0" encoding="utf-8"?>
 <p:notes xmlns:a="http://schemas.openxmlformats.org/drawingml/2006/main" xmlns:r="http://schemas.openxmlformats.org/officeDocument/2006/relationships" xmlns:p="http://schemas.openxmlformats.org/presentationml/2006/main">
   <p:cSld>
@@ -1043,7 +1132,7 @@
           <a:p>
             <a:r>
               <a:rPr lang="en-US" dirty="0"/>
-              <a:t>[0:40-1:20] The question. Forecast the rand a month ahead, every Friday, five years, beat an AR(1) on RMSE out of sample. Why it's hard: since Meese and Rogoff in 1983, structural FX models lose to a simple no-change forecast at this horizon, and honest published gains are one to five per cent. Our answer is yes, by 0.42 per cent, and we can name the mechanism.</a:t>
+              <a:t>[0:40-1:20] The question. Forecast the rand a month ahead, every Friday, five years, and compare RMSE with an AR(1) out of sample. It is hard because since Meese and Rogoff in 1983 structural models lose to a no-change forecast at this horizon. Our answer is a small gain over the AR(1), 0.44 per cent, that we cannot distinguish from noise, and no gain over the random walk.</a:t>
             </a:r>
             <a:endParaRPr lang="en-US" dirty="0"/>
           </a:p>
@@ -1131,7 +1220,7 @@
           <a:p>
             <a:r>
               <a:rPr lang="en-US" dirty="0"/>
-              <a:t>[1:20-2:15] Three simple pieces. A random walk anchor. A carry tilt from the interest gap. A heavily regularised regression on gold, platinum, the dollar and the VIX. Combined by inverse recent error, so weight moves to whatever is working. On the right is why the numbers hold: information sets, resolved-only training, embargoed weights, settings frozen on 2015 to 2020 before we touched the judged window, and every forecast logged. Nothing here is a black box.</a:t>
+              <a:t>[1:20-2:15] Three simple pieces. A random walk anchor. A carry tilt from the interest gap. A heavily regularised regression on commodity, dollar and risk predictors. Combined by inverse recent error. On the right is how the test is protected: every input joined on when it was public, training only on resolved outcomes, purged cross-validation, weights from resolved errors, and every forecast logged. The ridge variant, decay and sharpness were chosen on 309 validation origins from 2 January 2015 to 27 November 2020. Those scores were used for selection, so they are not independent evidence.</a:t>
             </a:r>
             <a:endParaRPr lang="en-US" dirty="0"/>
           </a:p>
@@ -1219,7 +1308,7 @@
           <a:p>
             <a:r>
               <a:rPr lang="en-US" dirty="0"/>
-              <a:t>[2:15-3:15] Why is the benchmark beatable? Its persistence is just below one, so every forecast is pulled toward an implied long-run mean. We computed that mean at all 261 origins. It sat below the actual spot rate at every single one, by 2.11 rand on average. So it leaned downward for five years against a currency going up. The chart is cumulative squared error: above zero we're ahead. The edge builds through the 2022-23 trend, peaks at 1.29, and gives some back. I'd rather show you that than crop it at the peak.</a:t>
+              <a:t>[2:15-3:15] The chart is the cumulative squared-error difference against the AR(1); above zero the combination is ahead. It peaked at 1.32 on 28 March 2025 and finished at 0.72, so most of the gain was given back. Separately, the AR(1) is pulled towards a long-run level that sat below spot at every origin, by R2.11 on average, and it never forecast a rise. Squared bias accounts for 55 per cent of its excess squared error against the combination. That is an observation. We have not shown it is the whole explanation.</a:t>
             </a:r>
             <a:endParaRPr lang="en-US" dirty="0"/>
           </a:p>
@@ -1307,7 +1396,7 @@
           <a:p>
             <a:r>
               <a:rPr lang="en-US" dirty="0"/>
-              <a:t>[3:15-4:10] The numbers. Benchmark 0.5624, our combination 0.5600, about 0.42 per cent better. Carry and ridge also beat it, so four of five did. Note the axis starts at 0.50 so the differences are visible, I'd rather say that than have you spot it. Two things. On the robustness cut with targets strictly inside 2025 we lead every model including the random walk. And the one model that loses badly is the gradient booster, by seven and a half per cent, same data, same discipline. That's the M4 and M5 finding and we built it into the design.</a:t>
+              <a:t>[3:15-4:10] The chart shows each model's RMSE difference from the random walk on the left and from the AR(1) on the right, with 95 per cent intervals. Green is the two comparisons we fixed in advance. The combination is 0.44 per cent below the AR(1) but the interval includes zero, and against the random walk it is level. An equal-weight average of the same three scores 0.5599. Gradient boosting scores 0.5745, the highest of the 13 models, and that covers this specification only.</a:t>
             </a:r>
             <a:endParaRPr lang="en-US" dirty="0"/>
           </a:p>
@@ -1395,7 +1484,7 @@
           <a:p>
             <a:r>
               <a:rPr lang="en-US" dirty="0"/>
-              <a:t>[4:10-4:40] So, four things. The benchmark is beatable and we can say why. The gain is real but small, which is the size of the true signal here. Discipline beat complexity. And what we won't claim: it isn't statistically significant, p is 0.47, the benchmark wins on MAE and in 2025, and we never tested it as a trading strategy. Happy to walk through the code line by line. Are there questions or feedback?  --- LEAVE THIS SLIDE UP FOR Q&amp;A ---</a:t>
+              <a:t>[4:10-4:40] Four things. A small gain over the AR(1) that is not statistically established, p 0.449, and level with the random walk. Adaptive weighting adds nothing measurable. The AR(1) leans downward, which we report as an observation. And what we won't claim: significance, directional skill, or profitability, and every 2021 to 2025 result is exploratory. Happy to walk through the code line by line. Are there questions or feedback?  --- LEAVE THIS SLIDE UP FOR Q&amp;A ---</a:t>
             </a:r>
             <a:endParaRPr lang="en-US" dirty="0"/>
           </a:p>
@@ -1571,7 +1660,7 @@
           <a:p>
             <a:r>
               <a:rPr lang="en-US" dirty="0"/>
-              <a:t>Use for any numeric question: MAE, directional accuracy, DM p-values, robustness cut.</a:t>
+              <a:t>Use for any numeric question: MAE, rank, share of origins at which each model forecast a rise. The AR(1) variants, drift, equal-weight average and adaptive pairs are exploratory.</a:t>
             </a:r>
             <a:endParaRPr lang="en-US" dirty="0"/>
           </a:p>
@@ -1659,7 +1748,7 @@
           <a:p>
             <a:r>
               <a:rPr lang="en-US" dirty="0"/>
-              <a:t>2025 goes against us because the rand strengthened back toward the AR(1)'s mean, so its bias finally helped. That is regime dependence, and it is the argument for combining rather than picking one model.</a:t>
+              <a:t>The AR(1) scored 0.4523 in 2025 against 0.4629 for the combination and 0.4574 for the random walk. We have not tested a reason.</a:t>
             </a:r>
             <a:endParaRPr lang="en-US" dirty="0"/>
           </a:p>
@@ -2128,7 +2217,7 @@
         <p:spPr>
           <a:xfrm>
             <a:off x="822960" y="2926080"/>
-            <a:ext cx="9966960" cy="777240"/>
+            <a:ext cx="9966960" cy="868680"/>
           </a:xfrm>
           <a:prstGeom prst="rect">
             <a:avLst/>
@@ -2152,7 +2241,7 @@
                 <a:ea typeface="Arial" pitchFamily="34" charset="-122"/>
                 <a:cs typeface="Arial" pitchFamily="34" charset="-120"/>
               </a:rPr>
-              <a:t>A combination of three simple models forecasts USDZAR one month ahead more accurately than the AR(1) benchmark, over 261 out-of-sample forecasts.</a:t>
+              <a:t>A combination of three simple models scores 0.44% lower RMSE than the AR(1) benchmark over 261 out-of-sample forecasts. The gap is not statistically significant, and the combination is level with the random walk.</a:t>
             </a:r>
             <a:endParaRPr lang="en-US" sz="1900" dirty="0"/>
           </a:p>
@@ -2230,7 +2319,7 @@
                 <a:ea typeface="Arial" pitchFamily="34" charset="-122"/>
                 <a:cs typeface="Arial" pitchFamily="34" charset="-120"/>
               </a:rPr>
-              <a:t>our RMSE</a:t>
+              <a:t>combination RMSE</a:t>
             </a:r>
             <a:endParaRPr lang="en-US" sz="1400" dirty="0"/>
           </a:p>
@@ -2347,7 +2436,7 @@
                 <a:ea typeface="Arial" pitchFamily="34" charset="-122"/>
                 <a:cs typeface="Arial" pitchFamily="34" charset="-120"/>
               </a:rPr>
-              <a:t>+0.44%</a:t>
+              <a:t>0.5600</a:t>
             </a:r>
             <a:endParaRPr lang="en-US" sz="3400" dirty="0"/>
           </a:p>
@@ -2386,7 +2475,7 @@
                 <a:ea typeface="Arial" pitchFamily="34" charset="-122"/>
                 <a:cs typeface="Arial" pitchFamily="34" charset="-120"/>
               </a:rPr>
-              <a:t>more accurate</a:t>
+              <a:t>random walk</a:t>
             </a:r>
             <a:endParaRPr lang="en-US" sz="1400" dirty="0"/>
           </a:p>
@@ -2425,7 +2514,7 @@
                 <a:ea typeface="Arial" pitchFamily="34" charset="-122"/>
                 <a:cs typeface="Arial" pitchFamily="34" charset="-120"/>
               </a:rPr>
-              <a:t>261</a:t>
+              <a:t>p = 0.449</a:t>
             </a:r>
             <a:endParaRPr lang="en-US" sz="3400" dirty="0"/>
           </a:p>
@@ -2464,7 +2553,7 @@
                 <a:ea typeface="Arial" pitchFamily="34" charset="-122"/>
                 <a:cs typeface="Arial" pitchFamily="34" charset="-120"/>
               </a:rPr>
-              <a:t>logged forecasts</a:t>
+              <a:t>against the AR(1)</a:t>
             </a:r>
             <a:endParaRPr lang="en-US" sz="1400" dirty="0"/>
           </a:p>
@@ -2608,7 +2697,7 @@
                 <a:ea typeface="Arial" pitchFamily="34" charset="-122"/>
                 <a:cs typeface="Arial" pitchFamily="34" charset="-120"/>
               </a:rPr>
-              <a:t>The target series is the one the rules specify, verified against an independent source</a:t>
+              <a:t>The target is verified against an independent source, and predictors join on publication time</a:t>
             </a:r>
             <a:endParaRPr lang="en-US" sz="2600" dirty="0"/>
           </a:p>
@@ -2707,7 +2796,7 @@
               <a:buChar char="•"/>
             </a:pPr>
             <a:r>
-              <a:rPr lang="en-US" sz="1800" b="1" dirty="0">
+              <a:rPr lang="en-US" sz="1700" b="1" dirty="0">
                 <a:solidFill>
                   <a:srgbClr val="1F2937"/>
                 </a:solidFill>
@@ -2724,7 +2813,7 @@
               <a:buNone/>
             </a:pPr>
             <a:r>
-              <a:rPr lang="en-US" sz="1800" dirty="0">
+              <a:rPr lang="en-US" sz="1700" dirty="0">
                 <a:solidFill>
                   <a:srgbClr val="1F2937"/>
                 </a:solidFill>
@@ -2732,9 +2821,9 @@
                 <a:ea typeface="Arial" pitchFamily="34" charset="-122"/>
                 <a:cs typeface="Arial" pitchFamily="34" charset="-120"/>
               </a:rPr>
-              <a:t>Official EconData export, MARKET_RATES 1.0.0, series EXCX135.B.A, 14 173 daily observations from 2 January 1970.</a:t>
+              <a:t>Official EconData export, MARKET_RATES 1.0.0, series EXCX135.B.A, 14,173 daily observations from 2 January 1970.</a:t>
             </a:r>
-            <a:endParaRPr lang="en-US" sz="1800" dirty="0"/>
+            <a:endParaRPr lang="en-US" sz="1700" dirty="0"/>
           </a:p>
           <a:p>
             <a:pPr indent="0" marL="0">
@@ -2744,7 +2833,7 @@
               <a:buNone/>
             </a:pPr>
             <a:r>
-              <a:rPr lang="en-US" sz="1800" b="1" dirty="0">
+              <a:rPr lang="en-US" sz="1700" b="1" dirty="0">
                 <a:solidFill>
                   <a:srgbClr val="1F2937"/>
                 </a:solidFill>
@@ -2761,7 +2850,7 @@
               <a:buNone/>
             </a:pPr>
             <a:r>
-              <a:rPr lang="en-US" sz="1800" dirty="0">
+              <a:rPr lang="en-US" sz="1700" dirty="0">
                 <a:solidFill>
                   <a:srgbClr val="1F2937"/>
                 </a:solidFill>
@@ -2769,9 +2858,9 @@
                 <a:ea typeface="Arial" pitchFamily="34" charset="-122"/>
                 <a:cs typeface="Arial" pitchFamily="34" charset="-120"/>
               </a:rPr>
-              <a:t>Checked value by value against the SARB Web API (EXCX135D): 9 141 overlapping observations, maximum difference 0.000000, zero mismatches.</a:t>
+              <a:t>Compared value by value with the SARB Web API (EXCX135D): 9,141 overlapping observations, largest difference 0.000000, 0 mismatches.</a:t>
             </a:r>
-            <a:endParaRPr lang="en-US" sz="1800" dirty="0"/>
+            <a:endParaRPr lang="en-US" sz="1700" dirty="0"/>
           </a:p>
           <a:p>
             <a:pPr indent="0" marL="0">
@@ -2781,44 +2870,7 @@
               <a:buNone/>
             </a:pPr>
             <a:r>
-              <a:rPr lang="en-US" sz="1800" b="1" dirty="0">
-                <a:solidFill>
-                  <a:srgbClr val="1F2937"/>
-                </a:solidFill>
-                <a:latin typeface="Arial" pitchFamily="34" charset="0"/>
-                <a:ea typeface="Arial" pitchFamily="34" charset="-122"/>
-                <a:cs typeface="Arial" pitchFamily="34" charset="-120"/>
-              </a:rPr>
-              <a:t>Consequence. </a:t>
-            </a:r>
-            <a:pPr indent="0" marL="0">
-              <a:spcAft>
-                <a:spcPts val="1500"/>
-              </a:spcAft>
-              <a:buNone/>
-            </a:pPr>
-            <a:r>
-              <a:rPr lang="en-US" sz="1800" dirty="0">
-                <a:solidFill>
-                  <a:srgbClr val="1F2937"/>
-                </a:solidFill>
-                <a:latin typeface="Arial" pitchFamily="34" charset="0"/>
-                <a:ea typeface="Arial" pitchFamily="34" charset="-122"/>
-                <a:cs typeface="Arial" pitchFamily="34" charset="-120"/>
-              </a:rPr>
-              <a:t>Backtests run off either source give RMSEs identical to twelve decimal places.</a:t>
-            </a:r>
-            <a:endParaRPr lang="en-US" sz="1800" dirty="0"/>
-          </a:p>
-          <a:p>
-            <a:pPr indent="0" marL="0">
-              <a:spcAft>
-                <a:spcPts val="1500"/>
-              </a:spcAft>
-              <a:buNone/>
-            </a:pPr>
-            <a:r>
-              <a:rPr lang="en-US" sz="1800" b="1" dirty="0">
+              <a:rPr lang="en-US" sz="1700" b="1" dirty="0">
                 <a:solidFill>
                   <a:srgbClr val="1F2937"/>
                 </a:solidFill>
@@ -2835,7 +2887,7 @@
               <a:buNone/>
             </a:pPr>
             <a:r>
-              <a:rPr lang="en-US" sz="1800" dirty="0">
+              <a:rPr lang="en-US" sz="1700" dirty="0">
                 <a:solidFill>
                   <a:srgbClr val="1F2937"/>
                 </a:solidFill>
@@ -2843,9 +2895,46 @@
                 <a:ea typeface="Arial" pitchFamily="34" charset="-122"/>
                 <a:cs typeface="Arial" pitchFamily="34" charset="-120"/>
               </a:rPr>
-              <a:t>All daily market prices. Never revised, no publication lag, so look-ahead bias is impossible by construction rather than merely avoided.</a:t>
+              <a:t>Daily market series joined on when each value became public, with the vintage then current for revised series. Rules and sources are in series_metadata.json.</a:t>
             </a:r>
-            <a:endParaRPr lang="en-US" sz="1800" dirty="0"/>
+            <a:endParaRPr lang="en-US" sz="1700" dirty="0"/>
+          </a:p>
+          <a:p>
+            <a:pPr indent="0" marL="0">
+              <a:spcAft>
+                <a:spcPts val="1500"/>
+              </a:spcAft>
+              <a:buNone/>
+            </a:pPr>
+            <a:r>
+              <a:rPr lang="en-US" sz="1700" b="1" dirty="0">
+                <a:solidFill>
+                  <a:srgbClr val="1F2937"/>
+                </a:solidFill>
+                <a:latin typeface="Arial" pitchFamily="34" charset="0"/>
+                <a:ea typeface="Arial" pitchFamily="34" charset="-122"/>
+                <a:cs typeface="Arial" pitchFamily="34" charset="-120"/>
+              </a:rPr>
+              <a:t>Timing check. </a:t>
+            </a:r>
+            <a:pPr indent="0" marL="0">
+              <a:spcAft>
+                <a:spcPts val="1500"/>
+              </a:spcAft>
+              <a:buNone/>
+            </a:pPr>
+            <a:r>
+              <a:rPr lang="en-US" sz="1700" dirty="0">
+                <a:solidFill>
+                  <a:srgbClr val="1F2937"/>
+                </a:solidFill>
+                <a:latin typeface="Arial" pitchFamily="34" charset="0"/>
+                <a:ea typeface="Arial" pitchFamily="34" charset="-122"/>
+                <a:cs typeface="Arial" pitchFamily="34" charset="-120"/>
+              </a:rPr>
+              <a:t>With every non-spot predictor a week later the combination moves from 0.5599 to 0.5598.</a:t>
+            </a:r>
+            <a:endParaRPr lang="en-US" sz="1700" dirty="0"/>
           </a:p>
         </p:txBody>
       </p:sp>
@@ -2977,7 +3066,7 @@
                 <a:ea typeface="Arial" pitchFamily="34" charset="-122"/>
                 <a:cs typeface="Arial" pitchFamily="34" charset="-120"/>
               </a:rPr>
-              <a:t>The random walk's role as anchor was learned from performance, not imposed</a:t>
+              <a:t>Adaptive weights stayed between 0.306 and 0.353, close to equal weighting</a:t>
             </a:r>
             <a:endParaRPr lang="en-US" sz="2600" dirty="0"/>
           </a:p>
@@ -3108,7 +3197,7 @@
                 <a:ea typeface="Arial" pitchFamily="34" charset="-122"/>
                 <a:cs typeface="Arial" pitchFamily="34" charset="-120"/>
               </a:rPr>
-              <a:t>Frozen on the 2015 to 2020 validation era:</a:t>
+              <a:t>Chosen on 2 January 2015 to 27 November 2020:</a:t>
             </a:r>
             <a:endParaRPr lang="en-US" sz="1700" dirty="0"/>
           </a:p>
@@ -3128,7 +3217,7 @@
                 <a:ea typeface="Arial" pitchFamily="34" charset="-122"/>
                 <a:cs typeface="Arial" pitchFamily="34" charset="-120"/>
               </a:rPr>
-              <a:t>ridge on the full feature set, no intercept</a:t>
+              <a:t>ridge on the full predictor set, no intercept</a:t>
             </a:r>
             <a:endParaRPr lang="en-US" sz="1700" dirty="0"/>
           </a:p>
@@ -3203,7 +3292,7 @@
         <p:spPr>
           <a:xfrm>
             <a:off x="566928" y="4754880"/>
-            <a:ext cx="11064240" cy="822960"/>
+            <a:ext cx="11064240" cy="1097280"/>
           </a:xfrm>
           <a:prstGeom prst="rect">
             <a:avLst/>
@@ -3227,7 +3316,7 @@
                 <a:ea typeface="Arial" pitchFamily="34" charset="-122"/>
                 <a:cs typeface="Arial" pitchFamily="34" charset="-120"/>
               </a:rPr>
-              <a:t>When carry earned its way in during 2022 and 2023, weight moved to it. When nothing worked in 2024 and 2025, weight collapsed back to the anchor. A fixed no-change rule cannot do that.</a:t>
+              <a:t>The three components' errors are almost the same series (correlation up to 0.99998), so inverse-error weights barely move off one third each. An equal-weight average scores 0.5599 against 0.5599 for the adaptive combination.</a:t>
             </a:r>
             <a:endParaRPr lang="en-US" sz="1800" dirty="0"/>
           </a:p>
@@ -3266,7 +3355,7 @@
                 <a:ea typeface="Arial" pitchFamily="34" charset="-122"/>
                 <a:cs typeface="Arial" pitchFamily="34" charset="-120"/>
               </a:rPr>
-              <a:t>Own calculation. Full validation grid in validation_metrics.json.</a:t>
+              <a:t>Own calculation. Full validation grid in validation_metrics.json; those scores were used for selection.</a:t>
             </a:r>
             <a:endParaRPr lang="en-US" sz="1300" dirty="0"/>
           </a:p>
@@ -3337,7 +3426,7 @@
                 <a:ea typeface="Arial" pitchFamily="34" charset="-122"/>
                 <a:cs typeface="Arial" pitchFamily="34" charset="-120"/>
               </a:rPr>
-              <a:t>We ran machine learning under identical rules and it lost by 2.2%</a:t>
+              <a:t>Gradient boosting scored 0.5745, the highest of 13 models, for this specification</a:t>
             </a:r>
             <a:endParaRPr lang="en-US" sz="2600" dirty="0"/>
           </a:p>
@@ -3506,7 +3595,7 @@
                 <a:ea typeface="Arial" pitchFamily="34" charset="-122"/>
                 <a:cs typeface="Arial" pitchFamily="34" charset="-120"/>
               </a:rPr>
-              <a:t>HistGradientBoosting with a fixed seed. Once a year, purged cross-validation picks its depth, learning rate, iterations, L2 penalty and leaf size from 12 configurations. Same information set, same embargo and same walk-forward loop as every other model.</a:t>
+              <a:t>HistGradientBoosting with a fixed seed. Every 52 weeks, purged cross-validation picks its depth, learning rate, iterations, L2 penalty and leaf size from 12 configurations. Same information set, same embargo and same walk-forward loop as every other model.</a:t>
             </a:r>
             <a:endParaRPr lang="en-US" sz="1800" dirty="0"/>
           </a:p>
@@ -3572,7 +3661,7 @@
                 <a:ea typeface="Arial" pitchFamily="34" charset="-122"/>
                 <a:cs typeface="Arial" pitchFamily="34" charset="-120"/>
               </a:rPr>
-              <a:t>Why it lost</a:t>
+              <a:t>What we can say</a:t>
             </a:r>
             <a:endParaRPr lang="en-US" sz="2000" dirty="0"/>
           </a:p>
@@ -3611,7 +3700,7 @@
                 <a:ea typeface="Arial" pitchFamily="34" charset="-122"/>
                 <a:cs typeface="Arial" pitchFamily="34" charset="-120"/>
               </a:rPr>
-              <a:t>About 850 weekly observations, heavily overlapping, with a tiny signal. A learner that can represent thresholds and interactions finds plenty of both, but those patterns belong to that stretch of history rather than to the currency, so they do not repeat out of sample.</a:t>
+              <a:t>It is 2.2% above the AR(1) and 2.6% above the random walk, and neither difference is significant (p = 0.363, 0.273). With every predictor a week later its RMSE moves from 0.5745 to 0.5638. We have not diagnosed why it does worse, and the result covers this feature set, grid and sample only.</a:t>
             </a:r>
             <a:endParaRPr lang="en-US" sz="1800" dirty="0"/>
           </a:p>
@@ -3650,7 +3739,7 @@
                 <a:ea typeface="Arial" pitchFamily="34" charset="-122"/>
                 <a:cs typeface="Arial" pitchFamily="34" charset="-120"/>
               </a:rPr>
-              <a:t>Makridakis, Spiliotis and Assimakopoulos (2020, 2022) report the same conclusion across thousands of series.</a:t>
+              <a:t>The M5 accuracy results paper (Makridakis, Spiliotis and Assimakopoulos, 2022) reports that the top methods were ML methods, mostly LightGBM, and that combinations helped.</a:t>
             </a:r>
             <a:endParaRPr lang="en-US" sz="1300" dirty="0"/>
           </a:p>
@@ -3721,7 +3810,7 @@
                 <a:ea typeface="Arial" pitchFamily="34" charset="-122"/>
                 <a:cs typeface="Arial" pitchFamily="34" charset="-120"/>
               </a:rPr>
-              <a:t>Forecasts track the realised series closely and lag it slightly, as a near-random walk should</a:t>
+              <a:t>Forecasts stay close to the current rate and lag the realised series</a:t>
             </a:r>
             <a:endParaRPr lang="en-US" sz="2600" dirty="0"/>
           </a:p>
@@ -3895,7 +3984,7 @@
         <p:spPr>
           <a:xfrm>
             <a:off x="566928" y="310896"/>
-            <a:ext cx="11064240" cy="914400"/>
+            <a:ext cx="11064240" cy="603504"/>
           </a:xfrm>
           <a:prstGeom prst="rect">
             <a:avLst/>
@@ -3919,7 +4008,7 @@
                 <a:ea typeface="Arial" pitchFamily="34" charset="-122"/>
                 <a:cs typeface="Arial" pitchFamily="34" charset="-120"/>
               </a:rPr>
-              <a:t>One forecast in full: on 3 June 2022 the AR(1) was the worst of the sensible models</a:t>
+              <a:t>One forecast in full: 3 June 2022</a:t>
             </a:r>
             <a:endParaRPr lang="en-US" sz="2600" dirty="0"/>
           </a:p>
@@ -3933,7 +4022,7 @@
         </p:nvSpPr>
         <p:spPr>
           <a:xfrm>
-            <a:off x="566928" y="1243584"/>
+            <a:off x="566928" y="969264"/>
             <a:ext cx="11064240" cy="18288"/>
           </a:xfrm>
           <a:prstGeom prst="rect">
@@ -4012,12 +4101,12 @@
             <a:tbl>
               <a:tblPr/>
               <a:tblGrid>
-                <a:gridCol w="2194560"/>
-                <a:gridCol w="1737360"/>
-                <a:gridCol w="5120640"/>
-                <a:gridCol w="2011680"/>
+                <a:gridCol w="2926080"/>
+                <a:gridCol w="1554480"/>
+                <a:gridCol w="4754880"/>
+                <a:gridCol w="1828800"/>
               </a:tblGrid>
-              <a:tr h="502920">
+              <a:tr h="457200">
                 <a:tc>
                   <a:txBody>
                     <a:bodyPr/>
@@ -4291,7 +4380,1055 @@
                   </a:tcPr>
                 </a:tc>
               </a:tr>
-              <a:tr h="502920">
+              <a:tr h="457200">
+                <a:tc>
+                  <a:txBody>
+                    <a:bodyPr/>
+                    <a:lstStyle/>
+                    <a:p>
+                      <a:pPr indent="0" marL="0">
+                        <a:buNone/>
+                      </a:pPr>
+                      <a:r>
+                        <a:rPr lang="en-US" sz="1400" dirty="0">
+                          <a:solidFill>
+                            <a:srgbClr val="1F2937"/>
+                          </a:solidFill>
+                          <a:latin typeface="Arial" pitchFamily="34" charset="0"/>
+                          <a:ea typeface="Arial" pitchFamily="34" charset="-122"/>
+                          <a:cs typeface="Arial" pitchFamily="34" charset="-120"/>
+                        </a:rPr>
+                        <a:t>Gradient boosting</a:t>
+                      </a:r>
+                      <a:endParaRPr lang="en-US" sz="1400" dirty="0">
+                        <a:latin typeface="Arial" charset="0"/>
+                        <a:ea typeface="Arial" charset="0"/>
+                        <a:cs typeface="Arial" charset="0"/>
+                      </a:endParaRPr>
+                    </a:p>
+                  </a:txBody>
+                  <a:tcPr marL="54864" marR="54864" marT="54864" marB="54864" anchor="ctr">
+                    <a:lnL w="6350" cap="flat" cmpd="sng" algn="ctr">
+                      <a:solidFill>
+                        <a:srgbClr val="D6DEE6"/>
+                      </a:solidFill>
+                      <a:prstDash val="solid"/>
+                      <a:round/>
+                      <a:headEnd type="none" w="med" len="med"/>
+                      <a:tailEnd type="none" w="med" len="med"/>
+                    </a:lnL>
+                    <a:lnR w="6350" cap="flat" cmpd="sng" algn="ctr">
+                      <a:solidFill>
+                        <a:srgbClr val="D6DEE6"/>
+                      </a:solidFill>
+                      <a:prstDash val="solid"/>
+                      <a:round/>
+                      <a:headEnd type="none" w="med" len="med"/>
+                      <a:tailEnd type="none" w="med" len="med"/>
+                    </a:lnR>
+                    <a:lnT w="6350" cap="flat" cmpd="sng" algn="ctr">
+                      <a:solidFill>
+                        <a:srgbClr val="D6DEE6"/>
+                      </a:solidFill>
+                      <a:prstDash val="solid"/>
+                      <a:round/>
+                      <a:headEnd type="none" w="med" len="med"/>
+                      <a:tailEnd type="none" w="med" len="med"/>
+                    </a:lnT>
+                    <a:lnB w="6350" cap="flat" cmpd="sng" algn="ctr">
+                      <a:solidFill>
+                        <a:srgbClr val="D6DEE6"/>
+                      </a:solidFill>
+                      <a:prstDash val="solid"/>
+                      <a:round/>
+                      <a:headEnd type="none" w="med" len="med"/>
+                      <a:tailEnd type="none" w="med" len="med"/>
+                    </a:lnB>
+                  </a:tcPr>
+                </a:tc>
+                <a:tc>
+                  <a:txBody>
+                    <a:bodyPr/>
+                    <a:lstStyle/>
+                    <a:p>
+                      <a:pPr indent="0" marL="0">
+                        <a:buNone/>
+                      </a:pPr>
+                      <a:r>
+                        <a:rPr lang="en-US" sz="1400" dirty="0">
+                          <a:solidFill>
+                            <a:srgbClr val="1F2937"/>
+                          </a:solidFill>
+                          <a:latin typeface="Arial" pitchFamily="34" charset="0"/>
+                          <a:ea typeface="Arial" pitchFamily="34" charset="-122"/>
+                          <a:cs typeface="Arial" pitchFamily="34" charset="-120"/>
+                        </a:rPr>
+                        <a:t>15.5674</a:t>
+                      </a:r>
+                      <a:endParaRPr lang="en-US" sz="1400" dirty="0">
+                        <a:latin typeface="Arial" charset="0"/>
+                        <a:ea typeface="Arial" charset="0"/>
+                        <a:cs typeface="Arial" charset="0"/>
+                      </a:endParaRPr>
+                    </a:p>
+                  </a:txBody>
+                  <a:tcPr marL="54864" marR="54864" marT="54864" marB="54864" anchor="ctr">
+                    <a:lnL w="6350" cap="flat" cmpd="sng" algn="ctr">
+                      <a:solidFill>
+                        <a:srgbClr val="D6DEE6"/>
+                      </a:solidFill>
+                      <a:prstDash val="solid"/>
+                      <a:round/>
+                      <a:headEnd type="none" w="med" len="med"/>
+                      <a:tailEnd type="none" w="med" len="med"/>
+                    </a:lnL>
+                    <a:lnR w="6350" cap="flat" cmpd="sng" algn="ctr">
+                      <a:solidFill>
+                        <a:srgbClr val="D6DEE6"/>
+                      </a:solidFill>
+                      <a:prstDash val="solid"/>
+                      <a:round/>
+                      <a:headEnd type="none" w="med" len="med"/>
+                      <a:tailEnd type="none" w="med" len="med"/>
+                    </a:lnR>
+                    <a:lnT w="6350" cap="flat" cmpd="sng" algn="ctr">
+                      <a:solidFill>
+                        <a:srgbClr val="D6DEE6"/>
+                      </a:solidFill>
+                      <a:prstDash val="solid"/>
+                      <a:round/>
+                      <a:headEnd type="none" w="med" len="med"/>
+                      <a:tailEnd type="none" w="med" len="med"/>
+                    </a:lnT>
+                    <a:lnB w="6350" cap="flat" cmpd="sng" algn="ctr">
+                      <a:solidFill>
+                        <a:srgbClr val="D6DEE6"/>
+                      </a:solidFill>
+                      <a:prstDash val="solid"/>
+                      <a:round/>
+                      <a:headEnd type="none" w="med" len="med"/>
+                      <a:tailEnd type="none" w="med" len="med"/>
+                    </a:lnB>
+                  </a:tcPr>
+                </a:tc>
+                <a:tc>
+                  <a:txBody>
+                    <a:bodyPr/>
+                    <a:lstStyle/>
+                    <a:p>
+                      <a:pPr indent="0" marL="0">
+                        <a:buNone/>
+                      </a:pPr>
+                      <a:r>
+                        <a:rPr lang="en-US" sz="1400" dirty="0">
+                          <a:solidFill>
+                            <a:srgbClr val="1F2937"/>
+                          </a:solidFill>
+                          <a:latin typeface="Arial" pitchFamily="34" charset="0"/>
+                          <a:ea typeface="Arial" pitchFamily="34" charset="-122"/>
+                          <a:cs typeface="Arial" pitchFamily="34" charset="-120"/>
+                        </a:rPr>
+                        <a:t>boosted trees on the same predictors</a:t>
+                      </a:r>
+                      <a:endParaRPr lang="en-US" sz="1400" dirty="0">
+                        <a:latin typeface="Arial" charset="0"/>
+                        <a:ea typeface="Arial" charset="0"/>
+                        <a:cs typeface="Arial" charset="0"/>
+                      </a:endParaRPr>
+                    </a:p>
+                  </a:txBody>
+                  <a:tcPr marL="54864" marR="54864" marT="54864" marB="54864" anchor="ctr">
+                    <a:lnL w="6350" cap="flat" cmpd="sng" algn="ctr">
+                      <a:solidFill>
+                        <a:srgbClr val="D6DEE6"/>
+                      </a:solidFill>
+                      <a:prstDash val="solid"/>
+                      <a:round/>
+                      <a:headEnd type="none" w="med" len="med"/>
+                      <a:tailEnd type="none" w="med" len="med"/>
+                    </a:lnL>
+                    <a:lnR w="6350" cap="flat" cmpd="sng" algn="ctr">
+                      <a:solidFill>
+                        <a:srgbClr val="D6DEE6"/>
+                      </a:solidFill>
+                      <a:prstDash val="solid"/>
+                      <a:round/>
+                      <a:headEnd type="none" w="med" len="med"/>
+                      <a:tailEnd type="none" w="med" len="med"/>
+                    </a:lnR>
+                    <a:lnT w="6350" cap="flat" cmpd="sng" algn="ctr">
+                      <a:solidFill>
+                        <a:srgbClr val="D6DEE6"/>
+                      </a:solidFill>
+                      <a:prstDash val="solid"/>
+                      <a:round/>
+                      <a:headEnd type="none" w="med" len="med"/>
+                      <a:tailEnd type="none" w="med" len="med"/>
+                    </a:lnT>
+                    <a:lnB w="6350" cap="flat" cmpd="sng" algn="ctr">
+                      <a:solidFill>
+                        <a:srgbClr val="D6DEE6"/>
+                      </a:solidFill>
+                      <a:prstDash val="solid"/>
+                      <a:round/>
+                      <a:headEnd type="none" w="med" len="med"/>
+                      <a:tailEnd type="none" w="med" len="med"/>
+                    </a:lnB>
+                  </a:tcPr>
+                </a:tc>
+                <a:tc>
+                  <a:txBody>
+                    <a:bodyPr/>
+                    <a:lstStyle/>
+                    <a:p>
+                      <a:pPr indent="0" marL="0">
+                        <a:buNone/>
+                      </a:pPr>
+                      <a:r>
+                        <a:rPr lang="en-US" sz="1400" dirty="0">
+                          <a:solidFill>
+                            <a:srgbClr val="1F2937"/>
+                          </a:solidFill>
+                          <a:latin typeface="Arial" pitchFamily="34" charset="0"/>
+                          <a:ea typeface="Arial" pitchFamily="34" charset="-122"/>
+                          <a:cs typeface="Arial" pitchFamily="34" charset="-120"/>
+                        </a:rPr>
+                        <a:t>-0.7808</a:t>
+                      </a:r>
+                      <a:endParaRPr lang="en-US" sz="1400" dirty="0">
+                        <a:latin typeface="Arial" charset="0"/>
+                        <a:ea typeface="Arial" charset="0"/>
+                        <a:cs typeface="Arial" charset="0"/>
+                      </a:endParaRPr>
+                    </a:p>
+                  </a:txBody>
+                  <a:tcPr marL="54864" marR="54864" marT="54864" marB="54864" anchor="ctr">
+                    <a:lnL w="6350" cap="flat" cmpd="sng" algn="ctr">
+                      <a:solidFill>
+                        <a:srgbClr val="D6DEE6"/>
+                      </a:solidFill>
+                      <a:prstDash val="solid"/>
+                      <a:round/>
+                      <a:headEnd type="none" w="med" len="med"/>
+                      <a:tailEnd type="none" w="med" len="med"/>
+                    </a:lnL>
+                    <a:lnR w="6350" cap="flat" cmpd="sng" algn="ctr">
+                      <a:solidFill>
+                        <a:srgbClr val="D6DEE6"/>
+                      </a:solidFill>
+                      <a:prstDash val="solid"/>
+                      <a:round/>
+                      <a:headEnd type="none" w="med" len="med"/>
+                      <a:tailEnd type="none" w="med" len="med"/>
+                    </a:lnR>
+                    <a:lnT w="6350" cap="flat" cmpd="sng" algn="ctr">
+                      <a:solidFill>
+                        <a:srgbClr val="D6DEE6"/>
+                      </a:solidFill>
+                      <a:prstDash val="solid"/>
+                      <a:round/>
+                      <a:headEnd type="none" w="med" len="med"/>
+                      <a:tailEnd type="none" w="med" len="med"/>
+                    </a:lnT>
+                    <a:lnB w="6350" cap="flat" cmpd="sng" algn="ctr">
+                      <a:solidFill>
+                        <a:srgbClr val="D6DEE6"/>
+                      </a:solidFill>
+                      <a:prstDash val="solid"/>
+                      <a:round/>
+                      <a:headEnd type="none" w="med" len="med"/>
+                      <a:tailEnd type="none" w="med" len="med"/>
+                    </a:lnB>
+                  </a:tcPr>
+                </a:tc>
+              </a:tr>
+              <a:tr h="457200">
+                <a:tc>
+                  <a:txBody>
+                    <a:bodyPr/>
+                    <a:lstStyle/>
+                    <a:p>
+                      <a:pPr indent="0" marL="0">
+                        <a:buNone/>
+                      </a:pPr>
+                      <a:r>
+                        <a:rPr lang="en-US" sz="1400" dirty="0">
+                          <a:solidFill>
+                            <a:srgbClr val="1F2937"/>
+                          </a:solidFill>
+                          <a:latin typeface="Arial" pitchFamily="34" charset="0"/>
+                          <a:ea typeface="Arial" pitchFamily="34" charset="-122"/>
+                          <a:cs typeface="Arial" pitchFamily="34" charset="-120"/>
+                        </a:rPr>
+                        <a:t>Carry</a:t>
+                      </a:r>
+                      <a:endParaRPr lang="en-US" sz="1400" dirty="0">
+                        <a:latin typeface="Arial" charset="0"/>
+                        <a:ea typeface="Arial" charset="0"/>
+                        <a:cs typeface="Arial" charset="0"/>
+                      </a:endParaRPr>
+                    </a:p>
+                  </a:txBody>
+                  <a:tcPr marL="54864" marR="54864" marT="54864" marB="54864" anchor="ctr">
+                    <a:lnL w="6350" cap="flat" cmpd="sng" algn="ctr">
+                      <a:solidFill>
+                        <a:srgbClr val="D6DEE6"/>
+                      </a:solidFill>
+                      <a:prstDash val="solid"/>
+                      <a:round/>
+                      <a:headEnd type="none" w="med" len="med"/>
+                      <a:tailEnd type="none" w="med" len="med"/>
+                    </a:lnL>
+                    <a:lnR w="6350" cap="flat" cmpd="sng" algn="ctr">
+                      <a:solidFill>
+                        <a:srgbClr val="D6DEE6"/>
+                      </a:solidFill>
+                      <a:prstDash val="solid"/>
+                      <a:round/>
+                      <a:headEnd type="none" w="med" len="med"/>
+                      <a:tailEnd type="none" w="med" len="med"/>
+                    </a:lnR>
+                    <a:lnT w="6350" cap="flat" cmpd="sng" algn="ctr">
+                      <a:solidFill>
+                        <a:srgbClr val="D6DEE6"/>
+                      </a:solidFill>
+                      <a:prstDash val="solid"/>
+                      <a:round/>
+                      <a:headEnd type="none" w="med" len="med"/>
+                      <a:tailEnd type="none" w="med" len="med"/>
+                    </a:lnT>
+                    <a:lnB w="6350" cap="flat" cmpd="sng" algn="ctr">
+                      <a:solidFill>
+                        <a:srgbClr val="D6DEE6"/>
+                      </a:solidFill>
+                      <a:prstDash val="solid"/>
+                      <a:round/>
+                      <a:headEnd type="none" w="med" len="med"/>
+                      <a:tailEnd type="none" w="med" len="med"/>
+                    </a:lnB>
+                  </a:tcPr>
+                </a:tc>
+                <a:tc>
+                  <a:txBody>
+                    <a:bodyPr/>
+                    <a:lstStyle/>
+                    <a:p>
+                      <a:pPr indent="0" marL="0">
+                        <a:buNone/>
+                      </a:pPr>
+                      <a:r>
+                        <a:rPr lang="en-US" sz="1400" dirty="0">
+                          <a:solidFill>
+                            <a:srgbClr val="1F2937"/>
+                          </a:solidFill>
+                          <a:latin typeface="Arial" pitchFamily="34" charset="0"/>
+                          <a:ea typeface="Arial" pitchFamily="34" charset="-122"/>
+                          <a:cs typeface="Arial" pitchFamily="34" charset="-120"/>
+                        </a:rPr>
+                        <a:t>15.4563</a:t>
+                      </a:r>
+                      <a:endParaRPr lang="en-US" sz="1400" dirty="0">
+                        <a:latin typeface="Arial" charset="0"/>
+                        <a:ea typeface="Arial" charset="0"/>
+                        <a:cs typeface="Arial" charset="0"/>
+                      </a:endParaRPr>
+                    </a:p>
+                  </a:txBody>
+                  <a:tcPr marL="54864" marR="54864" marT="54864" marB="54864" anchor="ctr">
+                    <a:lnL w="6350" cap="flat" cmpd="sng" algn="ctr">
+                      <a:solidFill>
+                        <a:srgbClr val="D6DEE6"/>
+                      </a:solidFill>
+                      <a:prstDash val="solid"/>
+                      <a:round/>
+                      <a:headEnd type="none" w="med" len="med"/>
+                      <a:tailEnd type="none" w="med" len="med"/>
+                    </a:lnL>
+                    <a:lnR w="6350" cap="flat" cmpd="sng" algn="ctr">
+                      <a:solidFill>
+                        <a:srgbClr val="D6DEE6"/>
+                      </a:solidFill>
+                      <a:prstDash val="solid"/>
+                      <a:round/>
+                      <a:headEnd type="none" w="med" len="med"/>
+                      <a:tailEnd type="none" w="med" len="med"/>
+                    </a:lnR>
+                    <a:lnT w="6350" cap="flat" cmpd="sng" algn="ctr">
+                      <a:solidFill>
+                        <a:srgbClr val="D6DEE6"/>
+                      </a:solidFill>
+                      <a:prstDash val="solid"/>
+                      <a:round/>
+                      <a:headEnd type="none" w="med" len="med"/>
+                      <a:tailEnd type="none" w="med" len="med"/>
+                    </a:lnT>
+                    <a:lnB w="6350" cap="flat" cmpd="sng" algn="ctr">
+                      <a:solidFill>
+                        <a:srgbClr val="D6DEE6"/>
+                      </a:solidFill>
+                      <a:prstDash val="solid"/>
+                      <a:round/>
+                      <a:headEnd type="none" w="med" len="med"/>
+                      <a:tailEnd type="none" w="med" len="med"/>
+                    </a:lnB>
+                  </a:tcPr>
+                </a:tc>
+                <a:tc>
+                  <a:txBody>
+                    <a:bodyPr/>
+                    <a:lstStyle/>
+                    <a:p>
+                      <a:pPr indent="0" marL="0">
+                        <a:buNone/>
+                      </a:pPr>
+                      <a:r>
+                        <a:rPr lang="en-US" sz="1400" dirty="0">
+                          <a:solidFill>
+                            <a:srgbClr val="1F2937"/>
+                          </a:solidFill>
+                          <a:latin typeface="Arial" pitchFamily="34" charset="0"/>
+                          <a:ea typeface="Arial" pitchFamily="34" charset="-122"/>
+                          <a:cs typeface="Arial" pitchFamily="34" charset="-120"/>
+                        </a:rPr>
+                        <a:t>15.4117 x (1 + 0.0377 x 28/365)</a:t>
+                      </a:r>
+                      <a:endParaRPr lang="en-US" sz="1400" dirty="0">
+                        <a:latin typeface="Arial" charset="0"/>
+                        <a:ea typeface="Arial" charset="0"/>
+                        <a:cs typeface="Arial" charset="0"/>
+                      </a:endParaRPr>
+                    </a:p>
+                  </a:txBody>
+                  <a:tcPr marL="54864" marR="54864" marT="54864" marB="54864" anchor="ctr">
+                    <a:lnL w="6350" cap="flat" cmpd="sng" algn="ctr">
+                      <a:solidFill>
+                        <a:srgbClr val="D6DEE6"/>
+                      </a:solidFill>
+                      <a:prstDash val="solid"/>
+                      <a:round/>
+                      <a:headEnd type="none" w="med" len="med"/>
+                      <a:tailEnd type="none" w="med" len="med"/>
+                    </a:lnL>
+                    <a:lnR w="6350" cap="flat" cmpd="sng" algn="ctr">
+                      <a:solidFill>
+                        <a:srgbClr val="D6DEE6"/>
+                      </a:solidFill>
+                      <a:prstDash val="solid"/>
+                      <a:round/>
+                      <a:headEnd type="none" w="med" len="med"/>
+                      <a:tailEnd type="none" w="med" len="med"/>
+                    </a:lnR>
+                    <a:lnT w="6350" cap="flat" cmpd="sng" algn="ctr">
+                      <a:solidFill>
+                        <a:srgbClr val="D6DEE6"/>
+                      </a:solidFill>
+                      <a:prstDash val="solid"/>
+                      <a:round/>
+                      <a:headEnd type="none" w="med" len="med"/>
+                      <a:tailEnd type="none" w="med" len="med"/>
+                    </a:lnT>
+                    <a:lnB w="6350" cap="flat" cmpd="sng" algn="ctr">
+                      <a:solidFill>
+                        <a:srgbClr val="D6DEE6"/>
+                      </a:solidFill>
+                      <a:prstDash val="solid"/>
+                      <a:round/>
+                      <a:headEnd type="none" w="med" len="med"/>
+                      <a:tailEnd type="none" w="med" len="med"/>
+                    </a:lnB>
+                  </a:tcPr>
+                </a:tc>
+                <a:tc>
+                  <a:txBody>
+                    <a:bodyPr/>
+                    <a:lstStyle/>
+                    <a:p>
+                      <a:pPr indent="0" marL="0">
+                        <a:buNone/>
+                      </a:pPr>
+                      <a:r>
+                        <a:rPr lang="en-US" sz="1400" dirty="0">
+                          <a:solidFill>
+                            <a:srgbClr val="1F2937"/>
+                          </a:solidFill>
+                          <a:latin typeface="Arial" pitchFamily="34" charset="0"/>
+                          <a:ea typeface="Arial" pitchFamily="34" charset="-122"/>
+                          <a:cs typeface="Arial" pitchFamily="34" charset="-120"/>
+                        </a:rPr>
+                        <a:t>-0.8919</a:t>
+                      </a:r>
+                      <a:endParaRPr lang="en-US" sz="1400" dirty="0">
+                        <a:latin typeface="Arial" charset="0"/>
+                        <a:ea typeface="Arial" charset="0"/>
+                        <a:cs typeface="Arial" charset="0"/>
+                      </a:endParaRPr>
+                    </a:p>
+                  </a:txBody>
+                  <a:tcPr marL="54864" marR="54864" marT="54864" marB="54864" anchor="ctr">
+                    <a:lnL w="6350" cap="flat" cmpd="sng" algn="ctr">
+                      <a:solidFill>
+                        <a:srgbClr val="D6DEE6"/>
+                      </a:solidFill>
+                      <a:prstDash val="solid"/>
+                      <a:round/>
+                      <a:headEnd type="none" w="med" len="med"/>
+                      <a:tailEnd type="none" w="med" len="med"/>
+                    </a:lnL>
+                    <a:lnR w="6350" cap="flat" cmpd="sng" algn="ctr">
+                      <a:solidFill>
+                        <a:srgbClr val="D6DEE6"/>
+                      </a:solidFill>
+                      <a:prstDash val="solid"/>
+                      <a:round/>
+                      <a:headEnd type="none" w="med" len="med"/>
+                      <a:tailEnd type="none" w="med" len="med"/>
+                    </a:lnR>
+                    <a:lnT w="6350" cap="flat" cmpd="sng" algn="ctr">
+                      <a:solidFill>
+                        <a:srgbClr val="D6DEE6"/>
+                      </a:solidFill>
+                      <a:prstDash val="solid"/>
+                      <a:round/>
+                      <a:headEnd type="none" w="med" len="med"/>
+                      <a:tailEnd type="none" w="med" len="med"/>
+                    </a:lnT>
+                    <a:lnB w="6350" cap="flat" cmpd="sng" algn="ctr">
+                      <a:solidFill>
+                        <a:srgbClr val="D6DEE6"/>
+                      </a:solidFill>
+                      <a:prstDash val="solid"/>
+                      <a:round/>
+                      <a:headEnd type="none" w="med" len="med"/>
+                      <a:tailEnd type="none" w="med" len="med"/>
+                    </a:lnB>
+                  </a:tcPr>
+                </a:tc>
+              </a:tr>
+              <a:tr h="457200">
+                <a:tc>
+                  <a:txBody>
+                    <a:bodyPr/>
+                    <a:lstStyle/>
+                    <a:p>
+                      <a:pPr indent="0" marL="0">
+                        <a:buNone/>
+                      </a:pPr>
+                      <a:r>
+                        <a:rPr lang="en-US" sz="1400" b="1" dirty="0">
+                          <a:solidFill>
+                            <a:srgbClr val="1F2937"/>
+                          </a:solidFill>
+                          <a:latin typeface="Arial" pitchFamily="34" charset="0"/>
+                          <a:ea typeface="Arial" pitchFamily="34" charset="-122"/>
+                          <a:cs typeface="Arial" pitchFamily="34" charset="-120"/>
+                        </a:rPr>
+                        <a:t>Combination</a:t>
+                      </a:r>
+                      <a:endParaRPr lang="en-US" sz="1400" dirty="0">
+                        <a:latin typeface="Arial" charset="0"/>
+                        <a:ea typeface="Arial" charset="0"/>
+                        <a:cs typeface="Arial" charset="0"/>
+                      </a:endParaRPr>
+                    </a:p>
+                  </a:txBody>
+                  <a:tcPr marL="54864" marR="54864" marT="54864" marB="54864" anchor="ctr">
+                    <a:lnL w="6350" cap="flat" cmpd="sng" algn="ctr">
+                      <a:solidFill>
+                        <a:srgbClr val="D6DEE6"/>
+                      </a:solidFill>
+                      <a:prstDash val="solid"/>
+                      <a:round/>
+                      <a:headEnd type="none" w="med" len="med"/>
+                      <a:tailEnd type="none" w="med" len="med"/>
+                    </a:lnL>
+                    <a:lnR w="6350" cap="flat" cmpd="sng" algn="ctr">
+                      <a:solidFill>
+                        <a:srgbClr val="D6DEE6"/>
+                      </a:solidFill>
+                      <a:prstDash val="solid"/>
+                      <a:round/>
+                      <a:headEnd type="none" w="med" len="med"/>
+                      <a:tailEnd type="none" w="med" len="med"/>
+                    </a:lnR>
+                    <a:lnT w="6350" cap="flat" cmpd="sng" algn="ctr">
+                      <a:solidFill>
+                        <a:srgbClr val="D6DEE6"/>
+                      </a:solidFill>
+                      <a:prstDash val="solid"/>
+                      <a:round/>
+                      <a:headEnd type="none" w="med" len="med"/>
+                      <a:tailEnd type="none" w="med" len="med"/>
+                    </a:lnT>
+                    <a:lnB w="6350" cap="flat" cmpd="sng" algn="ctr">
+                      <a:solidFill>
+                        <a:srgbClr val="D6DEE6"/>
+                      </a:solidFill>
+                      <a:prstDash val="solid"/>
+                      <a:round/>
+                      <a:headEnd type="none" w="med" len="med"/>
+                      <a:tailEnd type="none" w="med" len="med"/>
+                    </a:lnB>
+                  </a:tcPr>
+                </a:tc>
+                <a:tc>
+                  <a:txBody>
+                    <a:bodyPr/>
+                    <a:lstStyle/>
+                    <a:p>
+                      <a:pPr indent="0" marL="0">
+                        <a:buNone/>
+                      </a:pPr>
+                      <a:r>
+                        <a:rPr lang="en-US" sz="1400" b="1" dirty="0">
+                          <a:solidFill>
+                            <a:srgbClr val="1F2937"/>
+                          </a:solidFill>
+                          <a:latin typeface="Arial" pitchFamily="34" charset="0"/>
+                          <a:ea typeface="Arial" pitchFamily="34" charset="-122"/>
+                          <a:cs typeface="Arial" pitchFamily="34" charset="-120"/>
+                        </a:rPr>
+                        <a:t>15.4275</a:t>
+                      </a:r>
+                      <a:endParaRPr lang="en-US" sz="1400" dirty="0">
+                        <a:latin typeface="Arial" charset="0"/>
+                        <a:ea typeface="Arial" charset="0"/>
+                        <a:cs typeface="Arial" charset="0"/>
+                      </a:endParaRPr>
+                    </a:p>
+                  </a:txBody>
+                  <a:tcPr marL="54864" marR="54864" marT="54864" marB="54864" anchor="ctr">
+                    <a:lnL w="6350" cap="flat" cmpd="sng" algn="ctr">
+                      <a:solidFill>
+                        <a:srgbClr val="D6DEE6"/>
+                      </a:solidFill>
+                      <a:prstDash val="solid"/>
+                      <a:round/>
+                      <a:headEnd type="none" w="med" len="med"/>
+                      <a:tailEnd type="none" w="med" len="med"/>
+                    </a:lnL>
+                    <a:lnR w="6350" cap="flat" cmpd="sng" algn="ctr">
+                      <a:solidFill>
+                        <a:srgbClr val="D6DEE6"/>
+                      </a:solidFill>
+                      <a:prstDash val="solid"/>
+                      <a:round/>
+                      <a:headEnd type="none" w="med" len="med"/>
+                      <a:tailEnd type="none" w="med" len="med"/>
+                    </a:lnR>
+                    <a:lnT w="6350" cap="flat" cmpd="sng" algn="ctr">
+                      <a:solidFill>
+                        <a:srgbClr val="D6DEE6"/>
+                      </a:solidFill>
+                      <a:prstDash val="solid"/>
+                      <a:round/>
+                      <a:headEnd type="none" w="med" len="med"/>
+                      <a:tailEnd type="none" w="med" len="med"/>
+                    </a:lnT>
+                    <a:lnB w="6350" cap="flat" cmpd="sng" algn="ctr">
+                      <a:solidFill>
+                        <a:srgbClr val="D6DEE6"/>
+                      </a:solidFill>
+                      <a:prstDash val="solid"/>
+                      <a:round/>
+                      <a:headEnd type="none" w="med" len="med"/>
+                      <a:tailEnd type="none" w="med" len="med"/>
+                    </a:lnB>
+                  </a:tcPr>
+                </a:tc>
+                <a:tc>
+                  <a:txBody>
+                    <a:bodyPr/>
+                    <a:lstStyle/>
+                    <a:p>
+                      <a:pPr indent="0" marL="0">
+                        <a:buNone/>
+                      </a:pPr>
+                      <a:r>
+                        <a:rPr lang="en-US" sz="1400" dirty="0">
+                          <a:solidFill>
+                            <a:srgbClr val="1F2937"/>
+                          </a:solidFill>
+                          <a:latin typeface="Arial" pitchFamily="34" charset="0"/>
+                          <a:ea typeface="Arial" pitchFamily="34" charset="-122"/>
+                          <a:cs typeface="Arial" pitchFamily="34" charset="-120"/>
+                        </a:rPr>
+                        <a:t>0.333 x RW + 0.337 x Carry + 0.331 x Ridge</a:t>
+                      </a:r>
+                      <a:endParaRPr lang="en-US" sz="1400" dirty="0">
+                        <a:latin typeface="Arial" charset="0"/>
+                        <a:ea typeface="Arial" charset="0"/>
+                        <a:cs typeface="Arial" charset="0"/>
+                      </a:endParaRPr>
+                    </a:p>
+                  </a:txBody>
+                  <a:tcPr marL="54864" marR="54864" marT="54864" marB="54864" anchor="ctr">
+                    <a:lnL w="6350" cap="flat" cmpd="sng" algn="ctr">
+                      <a:solidFill>
+                        <a:srgbClr val="D6DEE6"/>
+                      </a:solidFill>
+                      <a:prstDash val="solid"/>
+                      <a:round/>
+                      <a:headEnd type="none" w="med" len="med"/>
+                      <a:tailEnd type="none" w="med" len="med"/>
+                    </a:lnL>
+                    <a:lnR w="6350" cap="flat" cmpd="sng" algn="ctr">
+                      <a:solidFill>
+                        <a:srgbClr val="D6DEE6"/>
+                      </a:solidFill>
+                      <a:prstDash val="solid"/>
+                      <a:round/>
+                      <a:headEnd type="none" w="med" len="med"/>
+                      <a:tailEnd type="none" w="med" len="med"/>
+                    </a:lnR>
+                    <a:lnT w="6350" cap="flat" cmpd="sng" algn="ctr">
+                      <a:solidFill>
+                        <a:srgbClr val="D6DEE6"/>
+                      </a:solidFill>
+                      <a:prstDash val="solid"/>
+                      <a:round/>
+                      <a:headEnd type="none" w="med" len="med"/>
+                      <a:tailEnd type="none" w="med" len="med"/>
+                    </a:lnT>
+                    <a:lnB w="6350" cap="flat" cmpd="sng" algn="ctr">
+                      <a:solidFill>
+                        <a:srgbClr val="D6DEE6"/>
+                      </a:solidFill>
+                      <a:prstDash val="solid"/>
+                      <a:round/>
+                      <a:headEnd type="none" w="med" len="med"/>
+                      <a:tailEnd type="none" w="med" len="med"/>
+                    </a:lnB>
+                  </a:tcPr>
+                </a:tc>
+                <a:tc>
+                  <a:txBody>
+                    <a:bodyPr/>
+                    <a:lstStyle/>
+                    <a:p>
+                      <a:pPr indent="0" marL="0">
+                        <a:buNone/>
+                      </a:pPr>
+                      <a:r>
+                        <a:rPr lang="en-US" sz="1400" b="1" dirty="0">
+                          <a:solidFill>
+                            <a:srgbClr val="1F2937"/>
+                          </a:solidFill>
+                          <a:latin typeface="Arial" pitchFamily="34" charset="0"/>
+                          <a:ea typeface="Arial" pitchFamily="34" charset="-122"/>
+                          <a:cs typeface="Arial" pitchFamily="34" charset="-120"/>
+                        </a:rPr>
+                        <a:t>-0.9207</a:t>
+                      </a:r>
+                      <a:endParaRPr lang="en-US" sz="1400" dirty="0">
+                        <a:latin typeface="Arial" charset="0"/>
+                        <a:ea typeface="Arial" charset="0"/>
+                        <a:cs typeface="Arial" charset="0"/>
+                      </a:endParaRPr>
+                    </a:p>
+                  </a:txBody>
+                  <a:tcPr marL="54864" marR="54864" marT="54864" marB="54864" anchor="ctr">
+                    <a:lnL w="6350" cap="flat" cmpd="sng" algn="ctr">
+                      <a:solidFill>
+                        <a:srgbClr val="D6DEE6"/>
+                      </a:solidFill>
+                      <a:prstDash val="solid"/>
+                      <a:round/>
+                      <a:headEnd type="none" w="med" len="med"/>
+                      <a:tailEnd type="none" w="med" len="med"/>
+                    </a:lnL>
+                    <a:lnR w="6350" cap="flat" cmpd="sng" algn="ctr">
+                      <a:solidFill>
+                        <a:srgbClr val="D6DEE6"/>
+                      </a:solidFill>
+                      <a:prstDash val="solid"/>
+                      <a:round/>
+                      <a:headEnd type="none" w="med" len="med"/>
+                      <a:tailEnd type="none" w="med" len="med"/>
+                    </a:lnR>
+                    <a:lnT w="6350" cap="flat" cmpd="sng" algn="ctr">
+                      <a:solidFill>
+                        <a:srgbClr val="D6DEE6"/>
+                      </a:solidFill>
+                      <a:prstDash val="solid"/>
+                      <a:round/>
+                      <a:headEnd type="none" w="med" len="med"/>
+                      <a:tailEnd type="none" w="med" len="med"/>
+                    </a:lnT>
+                    <a:lnB w="6350" cap="flat" cmpd="sng" algn="ctr">
+                      <a:solidFill>
+                        <a:srgbClr val="D6DEE6"/>
+                      </a:solidFill>
+                      <a:prstDash val="solid"/>
+                      <a:round/>
+                      <a:headEnd type="none" w="med" len="med"/>
+                      <a:tailEnd type="none" w="med" len="med"/>
+                    </a:lnB>
+                  </a:tcPr>
+                </a:tc>
+              </a:tr>
+              <a:tr h="457200">
+                <a:tc>
+                  <a:txBody>
+                    <a:bodyPr/>
+                    <a:lstStyle/>
+                    <a:p>
+                      <a:pPr indent="0" marL="0">
+                        <a:buNone/>
+                      </a:pPr>
+                      <a:r>
+                        <a:rPr lang="en-US" sz="1400" dirty="0">
+                          <a:solidFill>
+                            <a:srgbClr val="1F2937"/>
+                          </a:solidFill>
+                          <a:latin typeface="Arial" pitchFamily="34" charset="0"/>
+                          <a:ea typeface="Arial" pitchFamily="34" charset="-122"/>
+                          <a:cs typeface="Arial" pitchFamily="34" charset="-120"/>
+                        </a:rPr>
+                        <a:t>Ridge</a:t>
+                      </a:r>
+                      <a:endParaRPr lang="en-US" sz="1400" dirty="0">
+                        <a:latin typeface="Arial" charset="0"/>
+                        <a:ea typeface="Arial" charset="0"/>
+                        <a:cs typeface="Arial" charset="0"/>
+                      </a:endParaRPr>
+                    </a:p>
+                  </a:txBody>
+                  <a:tcPr marL="54864" marR="54864" marT="54864" marB="54864" anchor="ctr">
+                    <a:lnL w="6350" cap="flat" cmpd="sng" algn="ctr">
+                      <a:solidFill>
+                        <a:srgbClr val="D6DEE6"/>
+                      </a:solidFill>
+                      <a:prstDash val="solid"/>
+                      <a:round/>
+                      <a:headEnd type="none" w="med" len="med"/>
+                      <a:tailEnd type="none" w="med" len="med"/>
+                    </a:lnL>
+                    <a:lnR w="6350" cap="flat" cmpd="sng" algn="ctr">
+                      <a:solidFill>
+                        <a:srgbClr val="D6DEE6"/>
+                      </a:solidFill>
+                      <a:prstDash val="solid"/>
+                      <a:round/>
+                      <a:headEnd type="none" w="med" len="med"/>
+                      <a:tailEnd type="none" w="med" len="med"/>
+                    </a:lnR>
+                    <a:lnT w="6350" cap="flat" cmpd="sng" algn="ctr">
+                      <a:solidFill>
+                        <a:srgbClr val="D6DEE6"/>
+                      </a:solidFill>
+                      <a:prstDash val="solid"/>
+                      <a:round/>
+                      <a:headEnd type="none" w="med" len="med"/>
+                      <a:tailEnd type="none" w="med" len="med"/>
+                    </a:lnT>
+                    <a:lnB w="6350" cap="flat" cmpd="sng" algn="ctr">
+                      <a:solidFill>
+                        <a:srgbClr val="D6DEE6"/>
+                      </a:solidFill>
+                      <a:prstDash val="solid"/>
+                      <a:round/>
+                      <a:headEnd type="none" w="med" len="med"/>
+                      <a:tailEnd type="none" w="med" len="med"/>
+                    </a:lnB>
+                  </a:tcPr>
+                </a:tc>
+                <a:tc>
+                  <a:txBody>
+                    <a:bodyPr/>
+                    <a:lstStyle/>
+                    <a:p>
+                      <a:pPr indent="0" marL="0">
+                        <a:buNone/>
+                      </a:pPr>
+                      <a:r>
+                        <a:rPr lang="en-US" sz="1400" dirty="0">
+                          <a:solidFill>
+                            <a:srgbClr val="1F2937"/>
+                          </a:solidFill>
+                          <a:latin typeface="Arial" pitchFamily="34" charset="0"/>
+                          <a:ea typeface="Arial" pitchFamily="34" charset="-122"/>
+                          <a:cs typeface="Arial" pitchFamily="34" charset="-120"/>
+                        </a:rPr>
+                        <a:t>15.4141</a:t>
+                      </a:r>
+                      <a:endParaRPr lang="en-US" sz="1400" dirty="0">
+                        <a:latin typeface="Arial" charset="0"/>
+                        <a:ea typeface="Arial" charset="0"/>
+                        <a:cs typeface="Arial" charset="0"/>
+                      </a:endParaRPr>
+                    </a:p>
+                  </a:txBody>
+                  <a:tcPr marL="54864" marR="54864" marT="54864" marB="54864" anchor="ctr">
+                    <a:lnL w="6350" cap="flat" cmpd="sng" algn="ctr">
+                      <a:solidFill>
+                        <a:srgbClr val="D6DEE6"/>
+                      </a:solidFill>
+                      <a:prstDash val="solid"/>
+                      <a:round/>
+                      <a:headEnd type="none" w="med" len="med"/>
+                      <a:tailEnd type="none" w="med" len="med"/>
+                    </a:lnL>
+                    <a:lnR w="6350" cap="flat" cmpd="sng" algn="ctr">
+                      <a:solidFill>
+                        <a:srgbClr val="D6DEE6"/>
+                      </a:solidFill>
+                      <a:prstDash val="solid"/>
+                      <a:round/>
+                      <a:headEnd type="none" w="med" len="med"/>
+                      <a:tailEnd type="none" w="med" len="med"/>
+                    </a:lnR>
+                    <a:lnT w="6350" cap="flat" cmpd="sng" algn="ctr">
+                      <a:solidFill>
+                        <a:srgbClr val="D6DEE6"/>
+                      </a:solidFill>
+                      <a:prstDash val="solid"/>
+                      <a:round/>
+                      <a:headEnd type="none" w="med" len="med"/>
+                      <a:tailEnd type="none" w="med" len="med"/>
+                    </a:lnT>
+                    <a:lnB w="6350" cap="flat" cmpd="sng" algn="ctr">
+                      <a:solidFill>
+                        <a:srgbClr val="D6DEE6"/>
+                      </a:solidFill>
+                      <a:prstDash val="solid"/>
+                      <a:round/>
+                      <a:headEnd type="none" w="med" len="med"/>
+                      <a:tailEnd type="none" w="med" len="med"/>
+                    </a:lnB>
+                  </a:tcPr>
+                </a:tc>
+                <a:tc>
+                  <a:txBody>
+                    <a:bodyPr/>
+                    <a:lstStyle/>
+                    <a:p>
+                      <a:pPr indent="0" marL="0">
+                        <a:buNone/>
+                      </a:pPr>
+                      <a:r>
+                        <a:rPr lang="en-US" sz="1400" dirty="0">
+                          <a:solidFill>
+                            <a:srgbClr val="1F2937"/>
+                          </a:solidFill>
+                          <a:latin typeface="Arial" pitchFamily="34" charset="0"/>
+                          <a:ea typeface="Arial" pitchFamily="34" charset="-122"/>
+                          <a:cs typeface="Arial" pitchFamily="34" charset="-120"/>
+                        </a:rPr>
+                        <a:t>small tilt away from spot</a:t>
+                      </a:r>
+                      <a:endParaRPr lang="en-US" sz="1400" dirty="0">
+                        <a:latin typeface="Arial" charset="0"/>
+                        <a:ea typeface="Arial" charset="0"/>
+                        <a:cs typeface="Arial" charset="0"/>
+                      </a:endParaRPr>
+                    </a:p>
+                  </a:txBody>
+                  <a:tcPr marL="54864" marR="54864" marT="54864" marB="54864" anchor="ctr">
+                    <a:lnL w="6350" cap="flat" cmpd="sng" algn="ctr">
+                      <a:solidFill>
+                        <a:srgbClr val="D6DEE6"/>
+                      </a:solidFill>
+                      <a:prstDash val="solid"/>
+                      <a:round/>
+                      <a:headEnd type="none" w="med" len="med"/>
+                      <a:tailEnd type="none" w="med" len="med"/>
+                    </a:lnL>
+                    <a:lnR w="6350" cap="flat" cmpd="sng" algn="ctr">
+                      <a:solidFill>
+                        <a:srgbClr val="D6DEE6"/>
+                      </a:solidFill>
+                      <a:prstDash val="solid"/>
+                      <a:round/>
+                      <a:headEnd type="none" w="med" len="med"/>
+                      <a:tailEnd type="none" w="med" len="med"/>
+                    </a:lnR>
+                    <a:lnT w="6350" cap="flat" cmpd="sng" algn="ctr">
+                      <a:solidFill>
+                        <a:srgbClr val="D6DEE6"/>
+                      </a:solidFill>
+                      <a:prstDash val="solid"/>
+                      <a:round/>
+                      <a:headEnd type="none" w="med" len="med"/>
+                      <a:tailEnd type="none" w="med" len="med"/>
+                    </a:lnT>
+                    <a:lnB w="6350" cap="flat" cmpd="sng" algn="ctr">
+                      <a:solidFill>
+                        <a:srgbClr val="D6DEE6"/>
+                      </a:solidFill>
+                      <a:prstDash val="solid"/>
+                      <a:round/>
+                      <a:headEnd type="none" w="med" len="med"/>
+                      <a:tailEnd type="none" w="med" len="med"/>
+                    </a:lnB>
+                  </a:tcPr>
+                </a:tc>
+                <a:tc>
+                  <a:txBody>
+                    <a:bodyPr/>
+                    <a:lstStyle/>
+                    <a:p>
+                      <a:pPr indent="0" marL="0">
+                        <a:buNone/>
+                      </a:pPr>
+                      <a:r>
+                        <a:rPr lang="en-US" sz="1400" dirty="0">
+                          <a:solidFill>
+                            <a:srgbClr val="1F2937"/>
+                          </a:solidFill>
+                          <a:latin typeface="Arial" pitchFamily="34" charset="0"/>
+                          <a:ea typeface="Arial" pitchFamily="34" charset="-122"/>
+                          <a:cs typeface="Arial" pitchFamily="34" charset="-120"/>
+                        </a:rPr>
+                        <a:t>-0.9341</a:t>
+                      </a:r>
+                      <a:endParaRPr lang="en-US" sz="1400" dirty="0">
+                        <a:latin typeface="Arial" charset="0"/>
+                        <a:ea typeface="Arial" charset="0"/>
+                        <a:cs typeface="Arial" charset="0"/>
+                      </a:endParaRPr>
+                    </a:p>
+                  </a:txBody>
+                  <a:tcPr marL="54864" marR="54864" marT="54864" marB="54864" anchor="ctr">
+                    <a:lnL w="6350" cap="flat" cmpd="sng" algn="ctr">
+                      <a:solidFill>
+                        <a:srgbClr val="D6DEE6"/>
+                      </a:solidFill>
+                      <a:prstDash val="solid"/>
+                      <a:round/>
+                      <a:headEnd type="none" w="med" len="med"/>
+                      <a:tailEnd type="none" w="med" len="med"/>
+                    </a:lnL>
+                    <a:lnR w="6350" cap="flat" cmpd="sng" algn="ctr">
+                      <a:solidFill>
+                        <a:srgbClr val="D6DEE6"/>
+                      </a:solidFill>
+                      <a:prstDash val="solid"/>
+                      <a:round/>
+                      <a:headEnd type="none" w="med" len="med"/>
+                      <a:tailEnd type="none" w="med" len="med"/>
+                    </a:lnR>
+                    <a:lnT w="6350" cap="flat" cmpd="sng" algn="ctr">
+                      <a:solidFill>
+                        <a:srgbClr val="D6DEE6"/>
+                      </a:solidFill>
+                      <a:prstDash val="solid"/>
+                      <a:round/>
+                      <a:headEnd type="none" w="med" len="med"/>
+                      <a:tailEnd type="none" w="med" len="med"/>
+                    </a:lnT>
+                    <a:lnB w="6350" cap="flat" cmpd="sng" algn="ctr">
+                      <a:solidFill>
+                        <a:srgbClr val="D6DEE6"/>
+                      </a:solidFill>
+                      <a:prstDash val="solid"/>
+                      <a:round/>
+                      <a:headEnd type="none" w="med" len="med"/>
+                      <a:tailEnd type="none" w="med" len="med"/>
+                    </a:lnB>
+                  </a:tcPr>
+                </a:tc>
+              </a:tr>
+              <a:tr h="457200">
                 <a:tc>
                   <a:txBody>
                     <a:bodyPr/>
@@ -4553,7 +5690,7 @@
                   </a:tcPr>
                 </a:tc>
               </a:tr>
-              <a:tr h="502920">
+              <a:tr h="457200">
                 <a:tc>
                   <a:txBody>
                     <a:bodyPr/>
@@ -4571,269 +5708,7 @@
                           <a:ea typeface="Arial" pitchFamily="34" charset="-122"/>
                           <a:cs typeface="Arial" pitchFamily="34" charset="-120"/>
                         </a:rPr>
-                        <a:t>Carry</a:t>
-                      </a:r>
-                      <a:endParaRPr lang="en-US" sz="1400" dirty="0">
-                        <a:latin typeface="Arial" charset="0"/>
-                        <a:ea typeface="Arial" charset="0"/>
-                        <a:cs typeface="Arial" charset="0"/>
-                      </a:endParaRPr>
-                    </a:p>
-                  </a:txBody>
-                  <a:tcPr marL="54864" marR="54864" marT="54864" marB="54864" anchor="ctr">
-                    <a:lnL w="6350" cap="flat" cmpd="sng" algn="ctr">
-                      <a:solidFill>
-                        <a:srgbClr val="D6DEE6"/>
-                      </a:solidFill>
-                      <a:prstDash val="solid"/>
-                      <a:round/>
-                      <a:headEnd type="none" w="med" len="med"/>
-                      <a:tailEnd type="none" w="med" len="med"/>
-                    </a:lnL>
-                    <a:lnR w="6350" cap="flat" cmpd="sng" algn="ctr">
-                      <a:solidFill>
-                        <a:srgbClr val="D6DEE6"/>
-                      </a:solidFill>
-                      <a:prstDash val="solid"/>
-                      <a:round/>
-                      <a:headEnd type="none" w="med" len="med"/>
-                      <a:tailEnd type="none" w="med" len="med"/>
-                    </a:lnR>
-                    <a:lnT w="6350" cap="flat" cmpd="sng" algn="ctr">
-                      <a:solidFill>
-                        <a:srgbClr val="D6DEE6"/>
-                      </a:solidFill>
-                      <a:prstDash val="solid"/>
-                      <a:round/>
-                      <a:headEnd type="none" w="med" len="med"/>
-                      <a:tailEnd type="none" w="med" len="med"/>
-                    </a:lnT>
-                    <a:lnB w="6350" cap="flat" cmpd="sng" algn="ctr">
-                      <a:solidFill>
-                        <a:srgbClr val="D6DEE6"/>
-                      </a:solidFill>
-                      <a:prstDash val="solid"/>
-                      <a:round/>
-                      <a:headEnd type="none" w="med" len="med"/>
-                      <a:tailEnd type="none" w="med" len="med"/>
-                    </a:lnB>
-                  </a:tcPr>
-                </a:tc>
-                <a:tc>
-                  <a:txBody>
-                    <a:bodyPr/>
-                    <a:lstStyle/>
-                    <a:p>
-                      <a:pPr indent="0" marL="0">
-                        <a:buNone/>
-                      </a:pPr>
-                      <a:r>
-                        <a:rPr lang="en-US" sz="1400" dirty="0">
-                          <a:solidFill>
-                            <a:srgbClr val="1F2937"/>
-                          </a:solidFill>
-                          <a:latin typeface="Arial" pitchFamily="34" charset="0"/>
-                          <a:ea typeface="Arial" pitchFamily="34" charset="-122"/>
-                          <a:cs typeface="Arial" pitchFamily="34" charset="-120"/>
-                        </a:rPr>
-                        <a:t>15.4557</a:t>
-                      </a:r>
-                      <a:endParaRPr lang="en-US" sz="1400" dirty="0">
-                        <a:latin typeface="Arial" charset="0"/>
-                        <a:ea typeface="Arial" charset="0"/>
-                        <a:cs typeface="Arial" charset="0"/>
-                      </a:endParaRPr>
-                    </a:p>
-                  </a:txBody>
-                  <a:tcPr marL="54864" marR="54864" marT="54864" marB="54864" anchor="ctr">
-                    <a:lnL w="6350" cap="flat" cmpd="sng" algn="ctr">
-                      <a:solidFill>
-                        <a:srgbClr val="D6DEE6"/>
-                      </a:solidFill>
-                      <a:prstDash val="solid"/>
-                      <a:round/>
-                      <a:headEnd type="none" w="med" len="med"/>
-                      <a:tailEnd type="none" w="med" len="med"/>
-                    </a:lnL>
-                    <a:lnR w="6350" cap="flat" cmpd="sng" algn="ctr">
-                      <a:solidFill>
-                        <a:srgbClr val="D6DEE6"/>
-                      </a:solidFill>
-                      <a:prstDash val="solid"/>
-                      <a:round/>
-                      <a:headEnd type="none" w="med" len="med"/>
-                      <a:tailEnd type="none" w="med" len="med"/>
-                    </a:lnR>
-                    <a:lnT w="6350" cap="flat" cmpd="sng" algn="ctr">
-                      <a:solidFill>
-                        <a:srgbClr val="D6DEE6"/>
-                      </a:solidFill>
-                      <a:prstDash val="solid"/>
-                      <a:round/>
-                      <a:headEnd type="none" w="med" len="med"/>
-                      <a:tailEnd type="none" w="med" len="med"/>
-                    </a:lnT>
-                    <a:lnB w="6350" cap="flat" cmpd="sng" algn="ctr">
-                      <a:solidFill>
-                        <a:srgbClr val="D6DEE6"/>
-                      </a:solidFill>
-                      <a:prstDash val="solid"/>
-                      <a:round/>
-                      <a:headEnd type="none" w="med" len="med"/>
-                      <a:tailEnd type="none" w="med" len="med"/>
-                    </a:lnB>
-                  </a:tcPr>
-                </a:tc>
-                <a:tc>
-                  <a:txBody>
-                    <a:bodyPr/>
-                    <a:lstStyle/>
-                    <a:p>
-                      <a:pPr indent="0" marL="0">
-                        <a:buNone/>
-                      </a:pPr>
-                      <a:r>
-                        <a:rPr lang="en-US" sz="1400" dirty="0">
-                          <a:solidFill>
-                            <a:srgbClr val="1F2937"/>
-                          </a:solidFill>
-                          <a:latin typeface="Arial" pitchFamily="34" charset="0"/>
-                          <a:ea typeface="Arial" pitchFamily="34" charset="-122"/>
-                          <a:cs typeface="Arial" pitchFamily="34" charset="-120"/>
-                        </a:rPr>
-                        <a:t>15.4117 x (1 + 0.0372 x 28/365)</a:t>
-                      </a:r>
-                      <a:endParaRPr lang="en-US" sz="1400" dirty="0">
-                        <a:latin typeface="Arial" charset="0"/>
-                        <a:ea typeface="Arial" charset="0"/>
-                        <a:cs typeface="Arial" charset="0"/>
-                      </a:endParaRPr>
-                    </a:p>
-                  </a:txBody>
-                  <a:tcPr marL="54864" marR="54864" marT="54864" marB="54864" anchor="ctr">
-                    <a:lnL w="6350" cap="flat" cmpd="sng" algn="ctr">
-                      <a:solidFill>
-                        <a:srgbClr val="D6DEE6"/>
-                      </a:solidFill>
-                      <a:prstDash val="solid"/>
-                      <a:round/>
-                      <a:headEnd type="none" w="med" len="med"/>
-                      <a:tailEnd type="none" w="med" len="med"/>
-                    </a:lnL>
-                    <a:lnR w="6350" cap="flat" cmpd="sng" algn="ctr">
-                      <a:solidFill>
-                        <a:srgbClr val="D6DEE6"/>
-                      </a:solidFill>
-                      <a:prstDash val="solid"/>
-                      <a:round/>
-                      <a:headEnd type="none" w="med" len="med"/>
-                      <a:tailEnd type="none" w="med" len="med"/>
-                    </a:lnR>
-                    <a:lnT w="6350" cap="flat" cmpd="sng" algn="ctr">
-                      <a:solidFill>
-                        <a:srgbClr val="D6DEE6"/>
-                      </a:solidFill>
-                      <a:prstDash val="solid"/>
-                      <a:round/>
-                      <a:headEnd type="none" w="med" len="med"/>
-                      <a:tailEnd type="none" w="med" len="med"/>
-                    </a:lnT>
-                    <a:lnB w="6350" cap="flat" cmpd="sng" algn="ctr">
-                      <a:solidFill>
-                        <a:srgbClr val="D6DEE6"/>
-                      </a:solidFill>
-                      <a:prstDash val="solid"/>
-                      <a:round/>
-                      <a:headEnd type="none" w="med" len="med"/>
-                      <a:tailEnd type="none" w="med" len="med"/>
-                    </a:lnB>
-                  </a:tcPr>
-                </a:tc>
-                <a:tc>
-                  <a:txBody>
-                    <a:bodyPr/>
-                    <a:lstStyle/>
-                    <a:p>
-                      <a:pPr indent="0" marL="0">
-                        <a:buNone/>
-                      </a:pPr>
-                      <a:r>
-                        <a:rPr lang="en-US" sz="1400" dirty="0">
-                          <a:solidFill>
-                            <a:srgbClr val="1F2937"/>
-                          </a:solidFill>
-                          <a:latin typeface="Arial" pitchFamily="34" charset="0"/>
-                          <a:ea typeface="Arial" pitchFamily="34" charset="-122"/>
-                          <a:cs typeface="Arial" pitchFamily="34" charset="-120"/>
-                        </a:rPr>
-                        <a:t>-0.8925</a:t>
-                      </a:r>
-                      <a:endParaRPr lang="en-US" sz="1400" dirty="0">
-                        <a:latin typeface="Arial" charset="0"/>
-                        <a:ea typeface="Arial" charset="0"/>
-                        <a:cs typeface="Arial" charset="0"/>
-                      </a:endParaRPr>
-                    </a:p>
-                  </a:txBody>
-                  <a:tcPr marL="54864" marR="54864" marT="54864" marB="54864" anchor="ctr">
-                    <a:lnL w="6350" cap="flat" cmpd="sng" algn="ctr">
-                      <a:solidFill>
-                        <a:srgbClr val="D6DEE6"/>
-                      </a:solidFill>
-                      <a:prstDash val="solid"/>
-                      <a:round/>
-                      <a:headEnd type="none" w="med" len="med"/>
-                      <a:tailEnd type="none" w="med" len="med"/>
-                    </a:lnL>
-                    <a:lnR w="6350" cap="flat" cmpd="sng" algn="ctr">
-                      <a:solidFill>
-                        <a:srgbClr val="D6DEE6"/>
-                      </a:solidFill>
-                      <a:prstDash val="solid"/>
-                      <a:round/>
-                      <a:headEnd type="none" w="med" len="med"/>
-                      <a:tailEnd type="none" w="med" len="med"/>
-                    </a:lnR>
-                    <a:lnT w="6350" cap="flat" cmpd="sng" algn="ctr">
-                      <a:solidFill>
-                        <a:srgbClr val="D6DEE6"/>
-                      </a:solidFill>
-                      <a:prstDash val="solid"/>
-                      <a:round/>
-                      <a:headEnd type="none" w="med" len="med"/>
-                      <a:tailEnd type="none" w="med" len="med"/>
-                    </a:lnT>
-                    <a:lnB w="6350" cap="flat" cmpd="sng" algn="ctr">
-                      <a:solidFill>
-                        <a:srgbClr val="D6DEE6"/>
-                      </a:solidFill>
-                      <a:prstDash val="solid"/>
-                      <a:round/>
-                      <a:headEnd type="none" w="med" len="med"/>
-                      <a:tailEnd type="none" w="med" len="med"/>
-                    </a:lnB>
-                  </a:tcPr>
-                </a:tc>
-              </a:tr>
-              <a:tr h="502920">
-                <a:tc>
-                  <a:txBody>
-                    <a:bodyPr/>
-                    <a:lstStyle/>
-                    <a:p>
-                      <a:pPr indent="0" marL="0">
-                        <a:buNone/>
-                      </a:pPr>
-                      <a:r>
-                        <a:rPr lang="en-US" sz="1400" dirty="0">
-                          <a:solidFill>
-                            <a:srgbClr val="1F2937"/>
-                          </a:solidFill>
-                          <a:latin typeface="Arial" pitchFamily="34" charset="0"/>
-                          <a:ea typeface="Arial" pitchFamily="34" charset="-122"/>
-                          <a:cs typeface="Arial" pitchFamily="34" charset="-120"/>
-                        </a:rPr>
-                        <a:t>AR(1)</a:t>
+                        <a:t>AR(1), log level (benchmark)</a:t>
                       </a:r>
                       <a:endParaRPr lang="en-US" sz="1400" dirty="0">
                         <a:latin typeface="Arial" charset="0"/>
@@ -4963,7 +5838,7 @@
                           <a:ea typeface="Arial" pitchFamily="34" charset="-122"/>
                           <a:cs typeface="Arial" pitchFamily="34" charset="-120"/>
                         </a:rPr>
-                        <a:t>iterated 4 steps toward its implied mean, R13.01 that day</a:t>
+                        <a:t>iterated 4 steps towards its long-run level, R13.01 that day</a:t>
                       </a:r>
                       <a:endParaRPr lang="en-US" sz="1400" dirty="0">
                         <a:latin typeface="Arial" charset="0"/>
@@ -5077,530 +5952,6 @@
                   </a:tcPr>
                 </a:tc>
               </a:tr>
-              <a:tr h="502920">
-                <a:tc>
-                  <a:txBody>
-                    <a:bodyPr/>
-                    <a:lstStyle/>
-                    <a:p>
-                      <a:pPr indent="0" marL="0">
-                        <a:buNone/>
-                      </a:pPr>
-                      <a:r>
-                        <a:rPr lang="en-US" sz="1400" dirty="0">
-                          <a:solidFill>
-                            <a:srgbClr val="1F2937"/>
-                          </a:solidFill>
-                          <a:latin typeface="Arial" pitchFamily="34" charset="0"/>
-                          <a:ea typeface="Arial" pitchFamily="34" charset="-122"/>
-                          <a:cs typeface="Arial" pitchFamily="34" charset="-120"/>
-                        </a:rPr>
-                        <a:t>Ridge</a:t>
-                      </a:r>
-                      <a:endParaRPr lang="en-US" sz="1400" dirty="0">
-                        <a:latin typeface="Arial" charset="0"/>
-                        <a:ea typeface="Arial" charset="0"/>
-                        <a:cs typeface="Arial" charset="0"/>
-                      </a:endParaRPr>
-                    </a:p>
-                  </a:txBody>
-                  <a:tcPr marL="54864" marR="54864" marT="54864" marB="54864" anchor="ctr">
-                    <a:lnL w="6350" cap="flat" cmpd="sng" algn="ctr">
-                      <a:solidFill>
-                        <a:srgbClr val="D6DEE6"/>
-                      </a:solidFill>
-                      <a:prstDash val="solid"/>
-                      <a:round/>
-                      <a:headEnd type="none" w="med" len="med"/>
-                      <a:tailEnd type="none" w="med" len="med"/>
-                    </a:lnL>
-                    <a:lnR w="6350" cap="flat" cmpd="sng" algn="ctr">
-                      <a:solidFill>
-                        <a:srgbClr val="D6DEE6"/>
-                      </a:solidFill>
-                      <a:prstDash val="solid"/>
-                      <a:round/>
-                      <a:headEnd type="none" w="med" len="med"/>
-                      <a:tailEnd type="none" w="med" len="med"/>
-                    </a:lnR>
-                    <a:lnT w="6350" cap="flat" cmpd="sng" algn="ctr">
-                      <a:solidFill>
-                        <a:srgbClr val="D6DEE6"/>
-                      </a:solidFill>
-                      <a:prstDash val="solid"/>
-                      <a:round/>
-                      <a:headEnd type="none" w="med" len="med"/>
-                      <a:tailEnd type="none" w="med" len="med"/>
-                    </a:lnT>
-                    <a:lnB w="6350" cap="flat" cmpd="sng" algn="ctr">
-                      <a:solidFill>
-                        <a:srgbClr val="D6DEE6"/>
-                      </a:solidFill>
-                      <a:prstDash val="solid"/>
-                      <a:round/>
-                      <a:headEnd type="none" w="med" len="med"/>
-                      <a:tailEnd type="none" w="med" len="med"/>
-                    </a:lnB>
-                  </a:tcPr>
-                </a:tc>
-                <a:tc>
-                  <a:txBody>
-                    <a:bodyPr/>
-                    <a:lstStyle/>
-                    <a:p>
-                      <a:pPr indent="0" marL="0">
-                        <a:buNone/>
-                      </a:pPr>
-                      <a:r>
-                        <a:rPr lang="en-US" sz="1400" dirty="0">
-                          <a:solidFill>
-                            <a:srgbClr val="1F2937"/>
-                          </a:solidFill>
-                          <a:latin typeface="Arial" pitchFamily="34" charset="0"/>
-                          <a:ea typeface="Arial" pitchFamily="34" charset="-122"/>
-                          <a:cs typeface="Arial" pitchFamily="34" charset="-120"/>
-                        </a:rPr>
-                        <a:t>15.4089</a:t>
-                      </a:r>
-                      <a:endParaRPr lang="en-US" sz="1400" dirty="0">
-                        <a:latin typeface="Arial" charset="0"/>
-                        <a:ea typeface="Arial" charset="0"/>
-                        <a:cs typeface="Arial" charset="0"/>
-                      </a:endParaRPr>
-                    </a:p>
-                  </a:txBody>
-                  <a:tcPr marL="54864" marR="54864" marT="54864" marB="54864" anchor="ctr">
-                    <a:lnL w="6350" cap="flat" cmpd="sng" algn="ctr">
-                      <a:solidFill>
-                        <a:srgbClr val="D6DEE6"/>
-                      </a:solidFill>
-                      <a:prstDash val="solid"/>
-                      <a:round/>
-                      <a:headEnd type="none" w="med" len="med"/>
-                      <a:tailEnd type="none" w="med" len="med"/>
-                    </a:lnL>
-                    <a:lnR w="6350" cap="flat" cmpd="sng" algn="ctr">
-                      <a:solidFill>
-                        <a:srgbClr val="D6DEE6"/>
-                      </a:solidFill>
-                      <a:prstDash val="solid"/>
-                      <a:round/>
-                      <a:headEnd type="none" w="med" len="med"/>
-                      <a:tailEnd type="none" w="med" len="med"/>
-                    </a:lnR>
-                    <a:lnT w="6350" cap="flat" cmpd="sng" algn="ctr">
-                      <a:solidFill>
-                        <a:srgbClr val="D6DEE6"/>
-                      </a:solidFill>
-                      <a:prstDash val="solid"/>
-                      <a:round/>
-                      <a:headEnd type="none" w="med" len="med"/>
-                      <a:tailEnd type="none" w="med" len="med"/>
-                    </a:lnT>
-                    <a:lnB w="6350" cap="flat" cmpd="sng" algn="ctr">
-                      <a:solidFill>
-                        <a:srgbClr val="D6DEE6"/>
-                      </a:solidFill>
-                      <a:prstDash val="solid"/>
-                      <a:round/>
-                      <a:headEnd type="none" w="med" len="med"/>
-                      <a:tailEnd type="none" w="med" len="med"/>
-                    </a:lnB>
-                  </a:tcPr>
-                </a:tc>
-                <a:tc>
-                  <a:txBody>
-                    <a:bodyPr/>
-                    <a:lstStyle/>
-                    <a:p>
-                      <a:pPr indent="0" marL="0">
-                        <a:buNone/>
-                      </a:pPr>
-                      <a:r>
-                        <a:rPr lang="en-US" sz="1400" dirty="0">
-                          <a:solidFill>
-                            <a:srgbClr val="1F2937"/>
-                          </a:solidFill>
-                          <a:latin typeface="Arial" pitchFamily="34" charset="0"/>
-                          <a:ea typeface="Arial" pitchFamily="34" charset="-122"/>
-                          <a:cs typeface="Arial" pitchFamily="34" charset="-120"/>
-                        </a:rPr>
-                        <a:t>small tilt away from spot</a:t>
-                      </a:r>
-                      <a:endParaRPr lang="en-US" sz="1400" dirty="0">
-                        <a:latin typeface="Arial" charset="0"/>
-                        <a:ea typeface="Arial" charset="0"/>
-                        <a:cs typeface="Arial" charset="0"/>
-                      </a:endParaRPr>
-                    </a:p>
-                  </a:txBody>
-                  <a:tcPr marL="54864" marR="54864" marT="54864" marB="54864" anchor="ctr">
-                    <a:lnL w="6350" cap="flat" cmpd="sng" algn="ctr">
-                      <a:solidFill>
-                        <a:srgbClr val="D6DEE6"/>
-                      </a:solidFill>
-                      <a:prstDash val="solid"/>
-                      <a:round/>
-                      <a:headEnd type="none" w="med" len="med"/>
-                      <a:tailEnd type="none" w="med" len="med"/>
-                    </a:lnL>
-                    <a:lnR w="6350" cap="flat" cmpd="sng" algn="ctr">
-                      <a:solidFill>
-                        <a:srgbClr val="D6DEE6"/>
-                      </a:solidFill>
-                      <a:prstDash val="solid"/>
-                      <a:round/>
-                      <a:headEnd type="none" w="med" len="med"/>
-                      <a:tailEnd type="none" w="med" len="med"/>
-                    </a:lnR>
-                    <a:lnT w="6350" cap="flat" cmpd="sng" algn="ctr">
-                      <a:solidFill>
-                        <a:srgbClr val="D6DEE6"/>
-                      </a:solidFill>
-                      <a:prstDash val="solid"/>
-                      <a:round/>
-                      <a:headEnd type="none" w="med" len="med"/>
-                      <a:tailEnd type="none" w="med" len="med"/>
-                    </a:lnT>
-                    <a:lnB w="6350" cap="flat" cmpd="sng" algn="ctr">
-                      <a:solidFill>
-                        <a:srgbClr val="D6DEE6"/>
-                      </a:solidFill>
-                      <a:prstDash val="solid"/>
-                      <a:round/>
-                      <a:headEnd type="none" w="med" len="med"/>
-                      <a:tailEnd type="none" w="med" len="med"/>
-                    </a:lnB>
-                  </a:tcPr>
-                </a:tc>
-                <a:tc>
-                  <a:txBody>
-                    <a:bodyPr/>
-                    <a:lstStyle/>
-                    <a:p>
-                      <a:pPr indent="0" marL="0">
-                        <a:buNone/>
-                      </a:pPr>
-                      <a:r>
-                        <a:rPr lang="en-US" sz="1400" dirty="0">
-                          <a:solidFill>
-                            <a:srgbClr val="1F2937"/>
-                          </a:solidFill>
-                          <a:latin typeface="Arial" pitchFamily="34" charset="0"/>
-                          <a:ea typeface="Arial" pitchFamily="34" charset="-122"/>
-                          <a:cs typeface="Arial" pitchFamily="34" charset="-120"/>
-                        </a:rPr>
-                        <a:t>-0.9393</a:t>
-                      </a:r>
-                      <a:endParaRPr lang="en-US" sz="1400" dirty="0">
-                        <a:latin typeface="Arial" charset="0"/>
-                        <a:ea typeface="Arial" charset="0"/>
-                        <a:cs typeface="Arial" charset="0"/>
-                      </a:endParaRPr>
-                    </a:p>
-                  </a:txBody>
-                  <a:tcPr marL="54864" marR="54864" marT="54864" marB="54864" anchor="ctr">
-                    <a:lnL w="6350" cap="flat" cmpd="sng" algn="ctr">
-                      <a:solidFill>
-                        <a:srgbClr val="D6DEE6"/>
-                      </a:solidFill>
-                      <a:prstDash val="solid"/>
-                      <a:round/>
-                      <a:headEnd type="none" w="med" len="med"/>
-                      <a:tailEnd type="none" w="med" len="med"/>
-                    </a:lnL>
-                    <a:lnR w="6350" cap="flat" cmpd="sng" algn="ctr">
-                      <a:solidFill>
-                        <a:srgbClr val="D6DEE6"/>
-                      </a:solidFill>
-                      <a:prstDash val="solid"/>
-                      <a:round/>
-                      <a:headEnd type="none" w="med" len="med"/>
-                      <a:tailEnd type="none" w="med" len="med"/>
-                    </a:lnR>
-                    <a:lnT w="6350" cap="flat" cmpd="sng" algn="ctr">
-                      <a:solidFill>
-                        <a:srgbClr val="D6DEE6"/>
-                      </a:solidFill>
-                      <a:prstDash val="solid"/>
-                      <a:round/>
-                      <a:headEnd type="none" w="med" len="med"/>
-                      <a:tailEnd type="none" w="med" len="med"/>
-                    </a:lnT>
-                    <a:lnB w="6350" cap="flat" cmpd="sng" algn="ctr">
-                      <a:solidFill>
-                        <a:srgbClr val="D6DEE6"/>
-                      </a:solidFill>
-                      <a:prstDash val="solid"/>
-                      <a:round/>
-                      <a:headEnd type="none" w="med" len="med"/>
-                      <a:tailEnd type="none" w="med" len="med"/>
-                    </a:lnB>
-                  </a:tcPr>
-                </a:tc>
-              </a:tr>
-              <a:tr h="502920">
-                <a:tc>
-                  <a:txBody>
-                    <a:bodyPr/>
-                    <a:lstStyle/>
-                    <a:p>
-                      <a:pPr indent="0" marL="0">
-                        <a:buNone/>
-                      </a:pPr>
-                      <a:r>
-                        <a:rPr lang="en-US" sz="1400" b="1" dirty="0">
-                          <a:solidFill>
-                            <a:srgbClr val="1F2937"/>
-                          </a:solidFill>
-                          <a:latin typeface="Arial" pitchFamily="34" charset="0"/>
-                          <a:ea typeface="Arial" pitchFamily="34" charset="-122"/>
-                          <a:cs typeface="Arial" pitchFamily="34" charset="-120"/>
-                        </a:rPr>
-                        <a:t>Combination</a:t>
-                      </a:r>
-                      <a:endParaRPr lang="en-US" sz="1400" dirty="0">
-                        <a:latin typeface="Arial" charset="0"/>
-                        <a:ea typeface="Arial" charset="0"/>
-                        <a:cs typeface="Arial" charset="0"/>
-                      </a:endParaRPr>
-                    </a:p>
-                  </a:txBody>
-                  <a:tcPr marL="54864" marR="54864" marT="54864" marB="54864" anchor="ctr">
-                    <a:lnL w="6350" cap="flat" cmpd="sng" algn="ctr">
-                      <a:solidFill>
-                        <a:srgbClr val="D6DEE6"/>
-                      </a:solidFill>
-                      <a:prstDash val="solid"/>
-                      <a:round/>
-                      <a:headEnd type="none" w="med" len="med"/>
-                      <a:tailEnd type="none" w="med" len="med"/>
-                    </a:lnL>
-                    <a:lnR w="6350" cap="flat" cmpd="sng" algn="ctr">
-                      <a:solidFill>
-                        <a:srgbClr val="D6DEE6"/>
-                      </a:solidFill>
-                      <a:prstDash val="solid"/>
-                      <a:round/>
-                      <a:headEnd type="none" w="med" len="med"/>
-                      <a:tailEnd type="none" w="med" len="med"/>
-                    </a:lnR>
-                    <a:lnT w="6350" cap="flat" cmpd="sng" algn="ctr">
-                      <a:solidFill>
-                        <a:srgbClr val="D6DEE6"/>
-                      </a:solidFill>
-                      <a:prstDash val="solid"/>
-                      <a:round/>
-                      <a:headEnd type="none" w="med" len="med"/>
-                      <a:tailEnd type="none" w="med" len="med"/>
-                    </a:lnT>
-                    <a:lnB w="6350" cap="flat" cmpd="sng" algn="ctr">
-                      <a:solidFill>
-                        <a:srgbClr val="D6DEE6"/>
-                      </a:solidFill>
-                      <a:prstDash val="solid"/>
-                      <a:round/>
-                      <a:headEnd type="none" w="med" len="med"/>
-                      <a:tailEnd type="none" w="med" len="med"/>
-                    </a:lnB>
-                  </a:tcPr>
-                </a:tc>
-                <a:tc>
-                  <a:txBody>
-                    <a:bodyPr/>
-                    <a:lstStyle/>
-                    <a:p>
-                      <a:pPr indent="0" marL="0">
-                        <a:buNone/>
-                      </a:pPr>
-                      <a:r>
-                        <a:rPr lang="en-US" sz="1400" b="1" dirty="0">
-                          <a:solidFill>
-                            <a:srgbClr val="1F2937"/>
-                          </a:solidFill>
-                          <a:latin typeface="Arial" pitchFamily="34" charset="0"/>
-                          <a:ea typeface="Arial" pitchFamily="34" charset="-122"/>
-                          <a:cs typeface="Arial" pitchFamily="34" charset="-120"/>
-                        </a:rPr>
-                        <a:t>15.4256</a:t>
-                      </a:r>
-                      <a:endParaRPr lang="en-US" sz="1400" dirty="0">
-                        <a:latin typeface="Arial" charset="0"/>
-                        <a:ea typeface="Arial" charset="0"/>
-                        <a:cs typeface="Arial" charset="0"/>
-                      </a:endParaRPr>
-                    </a:p>
-                  </a:txBody>
-                  <a:tcPr marL="54864" marR="54864" marT="54864" marB="54864" anchor="ctr">
-                    <a:lnL w="6350" cap="flat" cmpd="sng" algn="ctr">
-                      <a:solidFill>
-                        <a:srgbClr val="D6DEE6"/>
-                      </a:solidFill>
-                      <a:prstDash val="solid"/>
-                      <a:round/>
-                      <a:headEnd type="none" w="med" len="med"/>
-                      <a:tailEnd type="none" w="med" len="med"/>
-                    </a:lnL>
-                    <a:lnR w="6350" cap="flat" cmpd="sng" algn="ctr">
-                      <a:solidFill>
-                        <a:srgbClr val="D6DEE6"/>
-                      </a:solidFill>
-                      <a:prstDash val="solid"/>
-                      <a:round/>
-                      <a:headEnd type="none" w="med" len="med"/>
-                      <a:tailEnd type="none" w="med" len="med"/>
-                    </a:lnR>
-                    <a:lnT w="6350" cap="flat" cmpd="sng" algn="ctr">
-                      <a:solidFill>
-                        <a:srgbClr val="D6DEE6"/>
-                      </a:solidFill>
-                      <a:prstDash val="solid"/>
-                      <a:round/>
-                      <a:headEnd type="none" w="med" len="med"/>
-                      <a:tailEnd type="none" w="med" len="med"/>
-                    </a:lnT>
-                    <a:lnB w="6350" cap="flat" cmpd="sng" algn="ctr">
-                      <a:solidFill>
-                        <a:srgbClr val="D6DEE6"/>
-                      </a:solidFill>
-                      <a:prstDash val="solid"/>
-                      <a:round/>
-                      <a:headEnd type="none" w="med" len="med"/>
-                      <a:tailEnd type="none" w="med" len="med"/>
-                    </a:lnB>
-                  </a:tcPr>
-                </a:tc>
-                <a:tc>
-                  <a:txBody>
-                    <a:bodyPr/>
-                    <a:lstStyle/>
-                    <a:p>
-                      <a:pPr indent="0" marL="0">
-                        <a:buNone/>
-                      </a:pPr>
-                      <a:r>
-                        <a:rPr lang="en-US" sz="1400" dirty="0">
-                          <a:solidFill>
-                            <a:srgbClr val="1F2937"/>
-                          </a:solidFill>
-                          <a:latin typeface="Arial" pitchFamily="34" charset="0"/>
-                          <a:ea typeface="Arial" pitchFamily="34" charset="-122"/>
-                          <a:cs typeface="Arial" pitchFamily="34" charset="-120"/>
-                        </a:rPr>
-                        <a:t>0.333 x RW + 0.337 x Carry + 0.331 x Ridge</a:t>
-                      </a:r>
-                      <a:endParaRPr lang="en-US" sz="1400" dirty="0">
-                        <a:latin typeface="Arial" charset="0"/>
-                        <a:ea typeface="Arial" charset="0"/>
-                        <a:cs typeface="Arial" charset="0"/>
-                      </a:endParaRPr>
-                    </a:p>
-                  </a:txBody>
-                  <a:tcPr marL="54864" marR="54864" marT="54864" marB="54864" anchor="ctr">
-                    <a:lnL w="6350" cap="flat" cmpd="sng" algn="ctr">
-                      <a:solidFill>
-                        <a:srgbClr val="D6DEE6"/>
-                      </a:solidFill>
-                      <a:prstDash val="solid"/>
-                      <a:round/>
-                      <a:headEnd type="none" w="med" len="med"/>
-                      <a:tailEnd type="none" w="med" len="med"/>
-                    </a:lnL>
-                    <a:lnR w="6350" cap="flat" cmpd="sng" algn="ctr">
-                      <a:solidFill>
-                        <a:srgbClr val="D6DEE6"/>
-                      </a:solidFill>
-                      <a:prstDash val="solid"/>
-                      <a:round/>
-                      <a:headEnd type="none" w="med" len="med"/>
-                      <a:tailEnd type="none" w="med" len="med"/>
-                    </a:lnR>
-                    <a:lnT w="6350" cap="flat" cmpd="sng" algn="ctr">
-                      <a:solidFill>
-                        <a:srgbClr val="D6DEE6"/>
-                      </a:solidFill>
-                      <a:prstDash val="solid"/>
-                      <a:round/>
-                      <a:headEnd type="none" w="med" len="med"/>
-                      <a:tailEnd type="none" w="med" len="med"/>
-                    </a:lnT>
-                    <a:lnB w="6350" cap="flat" cmpd="sng" algn="ctr">
-                      <a:solidFill>
-                        <a:srgbClr val="D6DEE6"/>
-                      </a:solidFill>
-                      <a:prstDash val="solid"/>
-                      <a:round/>
-                      <a:headEnd type="none" w="med" len="med"/>
-                      <a:tailEnd type="none" w="med" len="med"/>
-                    </a:lnB>
-                  </a:tcPr>
-                </a:tc>
-                <a:tc>
-                  <a:txBody>
-                    <a:bodyPr/>
-                    <a:lstStyle/>
-                    <a:p>
-                      <a:pPr indent="0" marL="0">
-                        <a:buNone/>
-                      </a:pPr>
-                      <a:r>
-                        <a:rPr lang="en-US" sz="1400" b="1" dirty="0">
-                          <a:solidFill>
-                            <a:srgbClr val="1F2937"/>
-                          </a:solidFill>
-                          <a:latin typeface="Arial" pitchFamily="34" charset="0"/>
-                          <a:ea typeface="Arial" pitchFamily="34" charset="-122"/>
-                          <a:cs typeface="Arial" pitchFamily="34" charset="-120"/>
-                        </a:rPr>
-                        <a:t>-0.9226</a:t>
-                      </a:r>
-                      <a:endParaRPr lang="en-US" sz="1400" dirty="0">
-                        <a:latin typeface="Arial" charset="0"/>
-                        <a:ea typeface="Arial" charset="0"/>
-                        <a:cs typeface="Arial" charset="0"/>
-                      </a:endParaRPr>
-                    </a:p>
-                  </a:txBody>
-                  <a:tcPr marL="54864" marR="54864" marT="54864" marB="54864" anchor="ctr">
-                    <a:lnL w="6350" cap="flat" cmpd="sng" algn="ctr">
-                      <a:solidFill>
-                        <a:srgbClr val="D6DEE6"/>
-                      </a:solidFill>
-                      <a:prstDash val="solid"/>
-                      <a:round/>
-                      <a:headEnd type="none" w="med" len="med"/>
-                      <a:tailEnd type="none" w="med" len="med"/>
-                    </a:lnL>
-                    <a:lnR w="6350" cap="flat" cmpd="sng" algn="ctr">
-                      <a:solidFill>
-                        <a:srgbClr val="D6DEE6"/>
-                      </a:solidFill>
-                      <a:prstDash val="solid"/>
-                      <a:round/>
-                      <a:headEnd type="none" w="med" len="med"/>
-                      <a:tailEnd type="none" w="med" len="med"/>
-                    </a:lnR>
-                    <a:lnT w="6350" cap="flat" cmpd="sng" algn="ctr">
-                      <a:solidFill>
-                        <a:srgbClr val="D6DEE6"/>
-                      </a:solidFill>
-                      <a:prstDash val="solid"/>
-                      <a:round/>
-                      <a:headEnd type="none" w="med" len="med"/>
-                      <a:tailEnd type="none" w="med" len="med"/>
-                    </a:lnT>
-                    <a:lnB w="6350" cap="flat" cmpd="sng" algn="ctr">
-                      <a:solidFill>
-                        <a:srgbClr val="D6DEE6"/>
-                      </a:solidFill>
-                      <a:prstDash val="solid"/>
-                      <a:round/>
-                      <a:headEnd type="none" w="med" len="med"/>
-                      <a:tailEnd type="none" w="med" len="med"/>
-                    </a:lnB>
-                  </a:tcPr>
-                </a:tc>
-              </a:tr>
             </a:tbl>
           </a:graphicData>
         </a:graphic>
@@ -5613,7 +5964,7 @@
         </p:nvSpPr>
         <p:spPr>
           <a:xfrm>
-            <a:off x="566928" y="4572000"/>
+            <a:off x="566928" y="4846320"/>
             <a:ext cx="11064240" cy="1097280"/>
           </a:xfrm>
           <a:prstGeom prst="rect">
@@ -5638,7 +5989,7 @@
                 <a:ea typeface="Arial" pitchFamily="34" charset="-122"/>
                 <a:cs typeface="Arial" pitchFamily="34" charset="-120"/>
               </a:rPr>
-              <a:t>Origin Friday 3 June 2022, spot R15.4117. Target 1 July 2022, actual R16.3482. Every model was too low that month. The AR(1) was worst because its implied mean that day was R13.01, and that pull dragged its forecast down exactly when the rand was heading up.</a:t>
+              <a:t>Origin 3 June 2022, spot R15.4117. Target 1 July 2022, actual R16.3482. Every model forecast too low. The forecasts span 18 cents against an actual move of 94 cents.</a:t>
             </a:r>
             <a:endParaRPr lang="en-US" sz="1800" dirty="0"/>
           </a:p>
@@ -5677,7 +6028,1210 @@
                 <a:ea typeface="Arial" pitchFamily="34" charset="-122"/>
                 <a:cs typeface="Arial" pitchFamily="34" charset="-120"/>
               </a:rPr>
-              <a:t>Own calculation from forecast_log.csv and combo_weights.csv.</a:t>
+              <a:t>Own calculation from forecast_log.csv and combo_weights.csv. Rows sorted by forecast.</a:t>
+            </a:r>
+            <a:endParaRPr lang="en-US" sz="1300" dirty="0"/>
+          </a:p>
+        </p:txBody>
+      </p:sp>
+    </p:spTree>
+  </p:cSld>
+  <p:clrMapOvr>
+    <a:masterClrMapping/>
+  </p:clrMapOvr>
+</p:sld>
+</file>
+
+<file path=ppt/slides/slide15.xml><?xml version="1.0" encoding="utf-8"?>
+<p:sld xmlns:a="http://schemas.openxmlformats.org/drawingml/2006/main" xmlns:r="http://schemas.openxmlformats.org/officeDocument/2006/relationships" xmlns:p="http://schemas.openxmlformats.org/presentationml/2006/main">
+  <p:cSld name="Slide 15">
+    <p:bg>
+      <p:bgPr>
+        <a:solidFill>
+          <a:srgbClr val="FFFFFF"/>
+        </a:solidFill>
+      </p:bgPr>
+    </p:bg>
+    <p:spTree>
+      <p:nvGrpSpPr>
+        <p:cNvPr id="1" name=""/>
+        <p:cNvGrpSpPr/>
+        <p:nvPr/>
+      </p:nvGrpSpPr>
+      <p:grpSpPr>
+        <a:xfrm>
+          <a:off x="0" y="0"/>
+          <a:ext cx="0" cy="0"/>
+          <a:chOff x="0" y="0"/>
+          <a:chExt cx="0" cy="0"/>
+        </a:xfrm>
+      </p:grpSpPr>
+      <p:sp>
+        <p:nvSpPr>
+          <p:cNvPr id="2" name="Text 0"/>
+          <p:cNvSpPr/>
+          <p:nvPr/>
+        </p:nvSpPr>
+        <p:spPr>
+          <a:xfrm>
+            <a:off x="566928" y="310896"/>
+            <a:ext cx="11064240" cy="914400"/>
+          </a:xfrm>
+          <a:prstGeom prst="rect">
+            <a:avLst/>
+          </a:prstGeom>
+          <a:noFill/>
+          <a:ln/>
+        </p:spPr>
+        <p:txBody>
+          <a:bodyPr wrap="square" lIns="0" tIns="0" rIns="0" bIns="0" rtlCol="0" anchor="t"/>
+          <a:lstStyle/>
+          <a:p>
+            <a:pPr indent="0" marL="0">
+              <a:buNone/>
+            </a:pPr>
+            <a:r>
+              <a:rPr lang="en-US" sz="2600" b="1" dirty="0">
+                <a:solidFill>
+                  <a:srgbClr val="0E2A3B"/>
+                </a:solidFill>
+                <a:latin typeface="Arial" pitchFamily="34" charset="0"/>
+                <a:ea typeface="Arial" pitchFamily="34" charset="-122"/>
+                <a:cs typeface="Arial" pitchFamily="34" charset="-120"/>
+              </a:rPr>
+              <a:t>All 2021 to 2025 results are exploratory; a prospective test needs forecasts made after the design is frozen</a:t>
+            </a:r>
+            <a:endParaRPr lang="en-US" sz="2600" dirty="0"/>
+          </a:p>
+        </p:txBody>
+      </p:sp>
+      <p:sp>
+        <p:nvSpPr>
+          <p:cNvPr id="3" name="Shape 1"/>
+          <p:cNvSpPr/>
+          <p:nvPr/>
+        </p:nvSpPr>
+        <p:spPr>
+          <a:xfrm>
+            <a:off x="566928" y="1243584"/>
+            <a:ext cx="11064240" cy="18288"/>
+          </a:xfrm>
+          <a:prstGeom prst="rect">
+            <a:avLst/>
+          </a:prstGeom>
+          <a:solidFill>
+            <a:srgbClr val="D6DEE6"/>
+          </a:solidFill>
+          <a:ln w="12700">
+            <a:solidFill>
+              <a:srgbClr val="D6DEE6"/>
+            </a:solidFill>
+            <a:prstDash val="solid"/>
+          </a:ln>
+        </p:spPr>
+      </p:sp>
+      <p:sp>
+        <p:nvSpPr>
+          <p:cNvPr id="4" name="Text 2"/>
+          <p:cNvSpPr/>
+          <p:nvPr/>
+        </p:nvSpPr>
+        <p:spPr>
+          <a:xfrm>
+            <a:off x="566928" y="54864"/>
+            <a:ext cx="11064240" cy="237744"/>
+          </a:xfrm>
+          <a:prstGeom prst="rect">
+            <a:avLst/>
+          </a:prstGeom>
+          <a:noFill/>
+          <a:ln/>
+        </p:spPr>
+        <p:txBody>
+          <a:bodyPr wrap="square" lIns="0" tIns="0" rIns="0" bIns="0" rtlCol="0" anchor="ctr"/>
+          <a:lstStyle/>
+          <a:p>
+            <a:pPr indent="0" marL="0">
+              <a:buNone/>
+            </a:pPr>
+            <a:r>
+              <a:rPr lang="en-US" sz="1300" i="1" dirty="0">
+                <a:solidFill>
+                  <a:srgbClr val="6B7280"/>
+                </a:solidFill>
+                <a:latin typeface="Arial" pitchFamily="34" charset="0"/>
+                <a:ea typeface="Arial" pitchFamily="34" charset="-122"/>
+                <a:cs typeface="Arial" pitchFamily="34" charset="-120"/>
+              </a:rPr>
+              <a:t>Appendix H</a:t>
+            </a:r>
+            <a:endParaRPr lang="en-US" sz="1300" dirty="0"/>
+          </a:p>
+        </p:txBody>
+      </p:sp>
+      <p:graphicFrame>
+        <p:nvGraphicFramePr>
+          <p:cNvPr id="16" name="Table 0"/>
+          <p:cNvGraphicFramePr>
+            <a:graphicFrameLocks noGrp="1"/>
+          </p:cNvGraphicFramePr>
+          <p:nvPr>
+            <p:extLst>
+              <p:ext uri="{D42A27DB-BD31-4B8C-83A1-F6EECF244321}">
+                <p14:modId xmlns:p14="http://schemas.microsoft.com/office/powerpoint/2010/main" val="1579011935"/>
+              </p:ext>
+            </p:extLst>
+          </p:nvPr>
+        </p:nvGraphicFramePr>
+        <p:xfrm>
+          <a:off x="566928" y="1508760"/>
+          <a:ext cx="5394960" cy="914400"/>
+        </p:xfrm>
+        <a:graphic>
+          <a:graphicData uri="http://schemas.openxmlformats.org/drawingml/2006/table">
+            <a:tbl>
+              <a:tblPr/>
+              <a:tblGrid>
+                <a:gridCol w="1280160"/>
+                <a:gridCol w="2194560"/>
+                <a:gridCol w="1920240"/>
+              </a:tblGrid>
+              <a:tr h="457200">
+                <a:tc>
+                  <a:txBody>
+                    <a:bodyPr/>
+                    <a:lstStyle/>
+                    <a:p>
+                      <a:pPr algn="ctr" indent="0" marL="0">
+                        <a:buNone/>
+                      </a:pPr>
+                      <a:r>
+                        <a:rPr lang="en-US" sz="1500" b="1" dirty="0">
+                          <a:solidFill>
+                            <a:srgbClr val="FFFFFF"/>
+                          </a:solidFill>
+                          <a:latin typeface="Arial" pitchFamily="34" charset="0"/>
+                          <a:ea typeface="Arial" pitchFamily="34" charset="-122"/>
+                          <a:cs typeface="Arial" pitchFamily="34" charset="-120"/>
+                        </a:rPr>
+                        <a:t>RMSE cut</a:t>
+                      </a:r>
+                      <a:endParaRPr lang="en-US" sz="1500" dirty="0">
+                        <a:latin typeface="Arial" charset="0"/>
+                        <a:ea typeface="Arial" charset="0"/>
+                        <a:cs typeface="Arial" charset="0"/>
+                      </a:endParaRPr>
+                    </a:p>
+                  </a:txBody>
+                  <a:tcPr marL="54864" marR="54864" marT="54864" marB="54864" anchor="ctr">
+                    <a:lnL w="6350" cap="flat" cmpd="sng" algn="ctr">
+                      <a:solidFill>
+                        <a:srgbClr val="D6DEE6"/>
+                      </a:solidFill>
+                      <a:prstDash val="solid"/>
+                      <a:round/>
+                      <a:headEnd type="none" w="med" len="med"/>
+                      <a:tailEnd type="none" w="med" len="med"/>
+                    </a:lnL>
+                    <a:lnR w="6350" cap="flat" cmpd="sng" algn="ctr">
+                      <a:solidFill>
+                        <a:srgbClr val="D6DEE6"/>
+                      </a:solidFill>
+                      <a:prstDash val="solid"/>
+                      <a:round/>
+                      <a:headEnd type="none" w="med" len="med"/>
+                      <a:tailEnd type="none" w="med" len="med"/>
+                    </a:lnR>
+                    <a:lnT w="6350" cap="flat" cmpd="sng" algn="ctr">
+                      <a:solidFill>
+                        <a:srgbClr val="D6DEE6"/>
+                      </a:solidFill>
+                      <a:prstDash val="solid"/>
+                      <a:round/>
+                      <a:headEnd type="none" w="med" len="med"/>
+                      <a:tailEnd type="none" w="med" len="med"/>
+                    </a:lnT>
+                    <a:lnB w="6350" cap="flat" cmpd="sng" algn="ctr">
+                      <a:solidFill>
+                        <a:srgbClr val="D6DEE6"/>
+                      </a:solidFill>
+                      <a:prstDash val="solid"/>
+                      <a:round/>
+                      <a:headEnd type="none" w="med" len="med"/>
+                      <a:tailEnd type="none" w="med" len="med"/>
+                    </a:lnB>
+                    <a:solidFill>
+                      <a:srgbClr val="0E2A3B"/>
+                    </a:solidFill>
+                  </a:tcPr>
+                </a:tc>
+                <a:tc>
+                  <a:txBody>
+                    <a:bodyPr/>
+                    <a:lstStyle/>
+                    <a:p>
+                      <a:pPr algn="ctr" indent="0" marL="0">
+                        <a:buNone/>
+                      </a:pPr>
+                      <a:r>
+                        <a:rPr lang="en-US" sz="1500" b="1" dirty="0">
+                          <a:solidFill>
+                            <a:srgbClr val="FFFFFF"/>
+                          </a:solidFill>
+                          <a:latin typeface="Arial" pitchFamily="34" charset="0"/>
+                          <a:ea typeface="Arial" pitchFamily="34" charset="-122"/>
+                          <a:cs typeface="Arial" pitchFamily="34" charset="-120"/>
+                        </a:rPr>
+                        <a:t>Origins needed vs AR(1)</a:t>
+                      </a:r>
+                      <a:endParaRPr lang="en-US" sz="1500" dirty="0">
+                        <a:latin typeface="Arial" charset="0"/>
+                        <a:ea typeface="Arial" charset="0"/>
+                        <a:cs typeface="Arial" charset="0"/>
+                      </a:endParaRPr>
+                    </a:p>
+                  </a:txBody>
+                  <a:tcPr marL="54864" marR="54864" marT="54864" marB="54864" anchor="ctr">
+                    <a:lnL w="6350" cap="flat" cmpd="sng" algn="ctr">
+                      <a:solidFill>
+                        <a:srgbClr val="D6DEE6"/>
+                      </a:solidFill>
+                      <a:prstDash val="solid"/>
+                      <a:round/>
+                      <a:headEnd type="none" w="med" len="med"/>
+                      <a:tailEnd type="none" w="med" len="med"/>
+                    </a:lnL>
+                    <a:lnR w="6350" cap="flat" cmpd="sng" algn="ctr">
+                      <a:solidFill>
+                        <a:srgbClr val="D6DEE6"/>
+                      </a:solidFill>
+                      <a:prstDash val="solid"/>
+                      <a:round/>
+                      <a:headEnd type="none" w="med" len="med"/>
+                      <a:tailEnd type="none" w="med" len="med"/>
+                    </a:lnR>
+                    <a:lnT w="6350" cap="flat" cmpd="sng" algn="ctr">
+                      <a:solidFill>
+                        <a:srgbClr val="D6DEE6"/>
+                      </a:solidFill>
+                      <a:prstDash val="solid"/>
+                      <a:round/>
+                      <a:headEnd type="none" w="med" len="med"/>
+                      <a:tailEnd type="none" w="med" len="med"/>
+                    </a:lnT>
+                    <a:lnB w="6350" cap="flat" cmpd="sng" algn="ctr">
+                      <a:solidFill>
+                        <a:srgbClr val="D6DEE6"/>
+                      </a:solidFill>
+                      <a:prstDash val="solid"/>
+                      <a:round/>
+                      <a:headEnd type="none" w="med" len="med"/>
+                      <a:tailEnd type="none" w="med" len="med"/>
+                    </a:lnB>
+                    <a:solidFill>
+                      <a:srgbClr val="0E2A3B"/>
+                    </a:solidFill>
+                  </a:tcPr>
+                </a:tc>
+                <a:tc>
+                  <a:txBody>
+                    <a:bodyPr/>
+                    <a:lstStyle/>
+                    <a:p>
+                      <a:pPr algn="ctr" indent="0" marL="0">
+                        <a:buNone/>
+                      </a:pPr>
+                      <a:r>
+                        <a:rPr lang="en-US" sz="1500" b="1" dirty="0">
+                          <a:solidFill>
+                            <a:srgbClr val="FFFFFF"/>
+                          </a:solidFill>
+                          <a:latin typeface="Arial" pitchFamily="34" charset="0"/>
+                          <a:ea typeface="Arial" pitchFamily="34" charset="-122"/>
+                          <a:cs typeface="Arial" pitchFamily="34" charset="-120"/>
+                        </a:rPr>
+                        <a:t>Origins needed vs RW</a:t>
+                      </a:r>
+                      <a:endParaRPr lang="en-US" sz="1500" dirty="0">
+                        <a:latin typeface="Arial" charset="0"/>
+                        <a:ea typeface="Arial" charset="0"/>
+                        <a:cs typeface="Arial" charset="0"/>
+                      </a:endParaRPr>
+                    </a:p>
+                  </a:txBody>
+                  <a:tcPr marL="54864" marR="54864" marT="54864" marB="54864" anchor="ctr">
+                    <a:lnL w="6350" cap="flat" cmpd="sng" algn="ctr">
+                      <a:solidFill>
+                        <a:srgbClr val="D6DEE6"/>
+                      </a:solidFill>
+                      <a:prstDash val="solid"/>
+                      <a:round/>
+                      <a:headEnd type="none" w="med" len="med"/>
+                      <a:tailEnd type="none" w="med" len="med"/>
+                    </a:lnL>
+                    <a:lnR w="6350" cap="flat" cmpd="sng" algn="ctr">
+                      <a:solidFill>
+                        <a:srgbClr val="D6DEE6"/>
+                      </a:solidFill>
+                      <a:prstDash val="solid"/>
+                      <a:round/>
+                      <a:headEnd type="none" w="med" len="med"/>
+                      <a:tailEnd type="none" w="med" len="med"/>
+                    </a:lnR>
+                    <a:lnT w="6350" cap="flat" cmpd="sng" algn="ctr">
+                      <a:solidFill>
+                        <a:srgbClr val="D6DEE6"/>
+                      </a:solidFill>
+                      <a:prstDash val="solid"/>
+                      <a:round/>
+                      <a:headEnd type="none" w="med" len="med"/>
+                      <a:tailEnd type="none" w="med" len="med"/>
+                    </a:lnT>
+                    <a:lnB w="6350" cap="flat" cmpd="sng" algn="ctr">
+                      <a:solidFill>
+                        <a:srgbClr val="D6DEE6"/>
+                      </a:solidFill>
+                      <a:prstDash val="solid"/>
+                      <a:round/>
+                      <a:headEnd type="none" w="med" len="med"/>
+                      <a:tailEnd type="none" w="med" len="med"/>
+                    </a:lnB>
+                    <a:solidFill>
+                      <a:srgbClr val="0E2A3B"/>
+                    </a:solidFill>
+                  </a:tcPr>
+                </a:tc>
+              </a:tr>
+              <a:tr h="457200">
+                <a:tc>
+                  <a:txBody>
+                    <a:bodyPr/>
+                    <a:lstStyle/>
+                    <a:p>
+                      <a:pPr algn="ctr" indent="0" marL="0">
+                        <a:buNone/>
+                      </a:pPr>
+                      <a:r>
+                        <a:rPr lang="en-US" sz="1500" dirty="0">
+                          <a:solidFill>
+                            <a:srgbClr val="1F2937"/>
+                          </a:solidFill>
+                          <a:latin typeface="Arial" pitchFamily="34" charset="0"/>
+                          <a:ea typeface="Arial" pitchFamily="34" charset="-122"/>
+                          <a:cs typeface="Arial" pitchFamily="34" charset="-120"/>
+                        </a:rPr>
+                        <a:t>1%</a:t>
+                      </a:r>
+                      <a:endParaRPr lang="en-US" sz="1500" dirty="0">
+                        <a:latin typeface="Arial" charset="0"/>
+                        <a:ea typeface="Arial" charset="0"/>
+                        <a:cs typeface="Arial" charset="0"/>
+                      </a:endParaRPr>
+                    </a:p>
+                  </a:txBody>
+                  <a:tcPr marL="54864" marR="54864" marT="54864" marB="54864" anchor="ctr">
+                    <a:lnL w="6350" cap="flat" cmpd="sng" algn="ctr">
+                      <a:solidFill>
+                        <a:srgbClr val="D6DEE6"/>
+                      </a:solidFill>
+                      <a:prstDash val="solid"/>
+                      <a:round/>
+                      <a:headEnd type="none" w="med" len="med"/>
+                      <a:tailEnd type="none" w="med" len="med"/>
+                    </a:lnL>
+                    <a:lnR w="6350" cap="flat" cmpd="sng" algn="ctr">
+                      <a:solidFill>
+                        <a:srgbClr val="D6DEE6"/>
+                      </a:solidFill>
+                      <a:prstDash val="solid"/>
+                      <a:round/>
+                      <a:headEnd type="none" w="med" len="med"/>
+                      <a:tailEnd type="none" w="med" len="med"/>
+                    </a:lnR>
+                    <a:lnT w="6350" cap="flat" cmpd="sng" algn="ctr">
+                      <a:solidFill>
+                        <a:srgbClr val="D6DEE6"/>
+                      </a:solidFill>
+                      <a:prstDash val="solid"/>
+                      <a:round/>
+                      <a:headEnd type="none" w="med" len="med"/>
+                      <a:tailEnd type="none" w="med" len="med"/>
+                    </a:lnT>
+                    <a:lnB w="6350" cap="flat" cmpd="sng" algn="ctr">
+                      <a:solidFill>
+                        <a:srgbClr val="D6DEE6"/>
+                      </a:solidFill>
+                      <a:prstDash val="solid"/>
+                      <a:round/>
+                      <a:headEnd type="none" w="med" len="med"/>
+                      <a:tailEnd type="none" w="med" len="med"/>
+                    </a:lnB>
+                  </a:tcPr>
+                </a:tc>
+                <a:tc>
+                  <a:txBody>
+                    <a:bodyPr/>
+                    <a:lstStyle/>
+                    <a:p>
+                      <a:pPr algn="ctr" indent="0" marL="0">
+                        <a:buNone/>
+                      </a:pPr>
+                      <a:r>
+                        <a:rPr lang="en-US" sz="1500" dirty="0">
+                          <a:solidFill>
+                            <a:srgbClr val="1F2937"/>
+                          </a:solidFill>
+                          <a:latin typeface="Arial" pitchFamily="34" charset="0"/>
+                          <a:ea typeface="Arial" pitchFamily="34" charset="-122"/>
+                          <a:cs typeface="Arial" pitchFamily="34" charset="-120"/>
+                        </a:rPr>
+                        <a:t>680</a:t>
+                      </a:r>
+                      <a:endParaRPr lang="en-US" sz="1500" dirty="0">
+                        <a:latin typeface="Arial" charset="0"/>
+                        <a:ea typeface="Arial" charset="0"/>
+                        <a:cs typeface="Arial" charset="0"/>
+                      </a:endParaRPr>
+                    </a:p>
+                  </a:txBody>
+                  <a:tcPr marL="54864" marR="54864" marT="54864" marB="54864" anchor="ctr">
+                    <a:lnL w="6350" cap="flat" cmpd="sng" algn="ctr">
+                      <a:solidFill>
+                        <a:srgbClr val="D6DEE6"/>
+                      </a:solidFill>
+                      <a:prstDash val="solid"/>
+                      <a:round/>
+                      <a:headEnd type="none" w="med" len="med"/>
+                      <a:tailEnd type="none" w="med" len="med"/>
+                    </a:lnL>
+                    <a:lnR w="6350" cap="flat" cmpd="sng" algn="ctr">
+                      <a:solidFill>
+                        <a:srgbClr val="D6DEE6"/>
+                      </a:solidFill>
+                      <a:prstDash val="solid"/>
+                      <a:round/>
+                      <a:headEnd type="none" w="med" len="med"/>
+                      <a:tailEnd type="none" w="med" len="med"/>
+                    </a:lnR>
+                    <a:lnT w="6350" cap="flat" cmpd="sng" algn="ctr">
+                      <a:solidFill>
+                        <a:srgbClr val="D6DEE6"/>
+                      </a:solidFill>
+                      <a:prstDash val="solid"/>
+                      <a:round/>
+                      <a:headEnd type="none" w="med" len="med"/>
+                      <a:tailEnd type="none" w="med" len="med"/>
+                    </a:lnT>
+                    <a:lnB w="6350" cap="flat" cmpd="sng" algn="ctr">
+                      <a:solidFill>
+                        <a:srgbClr val="D6DEE6"/>
+                      </a:solidFill>
+                      <a:prstDash val="solid"/>
+                      <a:round/>
+                      <a:headEnd type="none" w="med" len="med"/>
+                      <a:tailEnd type="none" w="med" len="med"/>
+                    </a:lnB>
+                  </a:tcPr>
+                </a:tc>
+                <a:tc>
+                  <a:txBody>
+                    <a:bodyPr/>
+                    <a:lstStyle/>
+                    <a:p>
+                      <a:pPr algn="ctr" indent="0" marL="0">
+                        <a:buNone/>
+                      </a:pPr>
+                      <a:r>
+                        <a:rPr lang="en-US" sz="1500" dirty="0">
+                          <a:solidFill>
+                            <a:srgbClr val="1F2937"/>
+                          </a:solidFill>
+                          <a:latin typeface="Arial" pitchFamily="34" charset="0"/>
+                          <a:ea typeface="Arial" pitchFamily="34" charset="-122"/>
+                          <a:cs typeface="Arial" pitchFamily="34" charset="-120"/>
+                        </a:rPr>
+                        <a:t>120</a:t>
+                      </a:r>
+                      <a:endParaRPr lang="en-US" sz="1500" dirty="0">
+                        <a:latin typeface="Arial" charset="0"/>
+                        <a:ea typeface="Arial" charset="0"/>
+                        <a:cs typeface="Arial" charset="0"/>
+                      </a:endParaRPr>
+                    </a:p>
+                  </a:txBody>
+                  <a:tcPr marL="54864" marR="54864" marT="54864" marB="54864" anchor="ctr">
+                    <a:lnL w="6350" cap="flat" cmpd="sng" algn="ctr">
+                      <a:solidFill>
+                        <a:srgbClr val="D6DEE6"/>
+                      </a:solidFill>
+                      <a:prstDash val="solid"/>
+                      <a:round/>
+                      <a:headEnd type="none" w="med" len="med"/>
+                      <a:tailEnd type="none" w="med" len="med"/>
+                    </a:lnL>
+                    <a:lnR w="6350" cap="flat" cmpd="sng" algn="ctr">
+                      <a:solidFill>
+                        <a:srgbClr val="D6DEE6"/>
+                      </a:solidFill>
+                      <a:prstDash val="solid"/>
+                      <a:round/>
+                      <a:headEnd type="none" w="med" len="med"/>
+                      <a:tailEnd type="none" w="med" len="med"/>
+                    </a:lnR>
+                    <a:lnT w="6350" cap="flat" cmpd="sng" algn="ctr">
+                      <a:solidFill>
+                        <a:srgbClr val="D6DEE6"/>
+                      </a:solidFill>
+                      <a:prstDash val="solid"/>
+                      <a:round/>
+                      <a:headEnd type="none" w="med" len="med"/>
+                      <a:tailEnd type="none" w="med" len="med"/>
+                    </a:lnT>
+                    <a:lnB w="6350" cap="flat" cmpd="sng" algn="ctr">
+                      <a:solidFill>
+                        <a:srgbClr val="D6DEE6"/>
+                      </a:solidFill>
+                      <a:prstDash val="solid"/>
+                      <a:round/>
+                      <a:headEnd type="none" w="med" len="med"/>
+                      <a:tailEnd type="none" w="med" len="med"/>
+                    </a:lnB>
+                  </a:tcPr>
+                </a:tc>
+              </a:tr>
+              <a:tr h="457200">
+                <a:tc>
+                  <a:txBody>
+                    <a:bodyPr/>
+                    <a:lstStyle/>
+                    <a:p>
+                      <a:pPr algn="ctr" indent="0" marL="0">
+                        <a:buNone/>
+                      </a:pPr>
+                      <a:r>
+                        <a:rPr lang="en-US" sz="1500" dirty="0">
+                          <a:solidFill>
+                            <a:srgbClr val="1F2937"/>
+                          </a:solidFill>
+                          <a:latin typeface="Arial" pitchFamily="34" charset="0"/>
+                          <a:ea typeface="Arial" pitchFamily="34" charset="-122"/>
+                          <a:cs typeface="Arial" pitchFamily="34" charset="-120"/>
+                        </a:rPr>
+                        <a:t>2%</a:t>
+                      </a:r>
+                      <a:endParaRPr lang="en-US" sz="1500" dirty="0">
+                        <a:latin typeface="Arial" charset="0"/>
+                        <a:ea typeface="Arial" charset="0"/>
+                        <a:cs typeface="Arial" charset="0"/>
+                      </a:endParaRPr>
+                    </a:p>
+                  </a:txBody>
+                  <a:tcPr marL="54864" marR="54864" marT="54864" marB="54864" anchor="ctr">
+                    <a:lnL w="6350" cap="flat" cmpd="sng" algn="ctr">
+                      <a:solidFill>
+                        <a:srgbClr val="D6DEE6"/>
+                      </a:solidFill>
+                      <a:prstDash val="solid"/>
+                      <a:round/>
+                      <a:headEnd type="none" w="med" len="med"/>
+                      <a:tailEnd type="none" w="med" len="med"/>
+                    </a:lnL>
+                    <a:lnR w="6350" cap="flat" cmpd="sng" algn="ctr">
+                      <a:solidFill>
+                        <a:srgbClr val="D6DEE6"/>
+                      </a:solidFill>
+                      <a:prstDash val="solid"/>
+                      <a:round/>
+                      <a:headEnd type="none" w="med" len="med"/>
+                      <a:tailEnd type="none" w="med" len="med"/>
+                    </a:lnR>
+                    <a:lnT w="6350" cap="flat" cmpd="sng" algn="ctr">
+                      <a:solidFill>
+                        <a:srgbClr val="D6DEE6"/>
+                      </a:solidFill>
+                      <a:prstDash val="solid"/>
+                      <a:round/>
+                      <a:headEnd type="none" w="med" len="med"/>
+                      <a:tailEnd type="none" w="med" len="med"/>
+                    </a:lnT>
+                    <a:lnB w="6350" cap="flat" cmpd="sng" algn="ctr">
+                      <a:solidFill>
+                        <a:srgbClr val="D6DEE6"/>
+                      </a:solidFill>
+                      <a:prstDash val="solid"/>
+                      <a:round/>
+                      <a:headEnd type="none" w="med" len="med"/>
+                      <a:tailEnd type="none" w="med" len="med"/>
+                    </a:lnB>
+                  </a:tcPr>
+                </a:tc>
+                <a:tc>
+                  <a:txBody>
+                    <a:bodyPr/>
+                    <a:lstStyle/>
+                    <a:p>
+                      <a:pPr algn="ctr" indent="0" marL="0">
+                        <a:buNone/>
+                      </a:pPr>
+                      <a:r>
+                        <a:rPr lang="en-US" sz="1500" dirty="0">
+                          <a:solidFill>
+                            <a:srgbClr val="1F2937"/>
+                          </a:solidFill>
+                          <a:latin typeface="Arial" pitchFamily="34" charset="0"/>
+                          <a:ea typeface="Arial" pitchFamily="34" charset="-122"/>
+                          <a:cs typeface="Arial" pitchFamily="34" charset="-120"/>
+                        </a:rPr>
+                        <a:t>172</a:t>
+                      </a:r>
+                      <a:endParaRPr lang="en-US" sz="1500" dirty="0">
+                        <a:latin typeface="Arial" charset="0"/>
+                        <a:ea typeface="Arial" charset="0"/>
+                        <a:cs typeface="Arial" charset="0"/>
+                      </a:endParaRPr>
+                    </a:p>
+                  </a:txBody>
+                  <a:tcPr marL="54864" marR="54864" marT="54864" marB="54864" anchor="ctr">
+                    <a:lnL w="6350" cap="flat" cmpd="sng" algn="ctr">
+                      <a:solidFill>
+                        <a:srgbClr val="D6DEE6"/>
+                      </a:solidFill>
+                      <a:prstDash val="solid"/>
+                      <a:round/>
+                      <a:headEnd type="none" w="med" len="med"/>
+                      <a:tailEnd type="none" w="med" len="med"/>
+                    </a:lnL>
+                    <a:lnR w="6350" cap="flat" cmpd="sng" algn="ctr">
+                      <a:solidFill>
+                        <a:srgbClr val="D6DEE6"/>
+                      </a:solidFill>
+                      <a:prstDash val="solid"/>
+                      <a:round/>
+                      <a:headEnd type="none" w="med" len="med"/>
+                      <a:tailEnd type="none" w="med" len="med"/>
+                    </a:lnR>
+                    <a:lnT w="6350" cap="flat" cmpd="sng" algn="ctr">
+                      <a:solidFill>
+                        <a:srgbClr val="D6DEE6"/>
+                      </a:solidFill>
+                      <a:prstDash val="solid"/>
+                      <a:round/>
+                      <a:headEnd type="none" w="med" len="med"/>
+                      <a:tailEnd type="none" w="med" len="med"/>
+                    </a:lnT>
+                    <a:lnB w="6350" cap="flat" cmpd="sng" algn="ctr">
+                      <a:solidFill>
+                        <a:srgbClr val="D6DEE6"/>
+                      </a:solidFill>
+                      <a:prstDash val="solid"/>
+                      <a:round/>
+                      <a:headEnd type="none" w="med" len="med"/>
+                      <a:tailEnd type="none" w="med" len="med"/>
+                    </a:lnB>
+                  </a:tcPr>
+                </a:tc>
+                <a:tc>
+                  <a:txBody>
+                    <a:bodyPr/>
+                    <a:lstStyle/>
+                    <a:p>
+                      <a:pPr algn="ctr" indent="0" marL="0">
+                        <a:buNone/>
+                      </a:pPr>
+                      <a:r>
+                        <a:rPr lang="en-US" sz="1500" dirty="0">
+                          <a:solidFill>
+                            <a:srgbClr val="1F2937"/>
+                          </a:solidFill>
+                          <a:latin typeface="Arial" pitchFamily="34" charset="0"/>
+                          <a:ea typeface="Arial" pitchFamily="34" charset="-122"/>
+                          <a:cs typeface="Arial" pitchFamily="34" charset="-120"/>
+                        </a:rPr>
+                        <a:t>31</a:t>
+                      </a:r>
+                      <a:endParaRPr lang="en-US" sz="1500" dirty="0">
+                        <a:latin typeface="Arial" charset="0"/>
+                        <a:ea typeface="Arial" charset="0"/>
+                        <a:cs typeface="Arial" charset="0"/>
+                      </a:endParaRPr>
+                    </a:p>
+                  </a:txBody>
+                  <a:tcPr marL="54864" marR="54864" marT="54864" marB="54864" anchor="ctr">
+                    <a:lnL w="6350" cap="flat" cmpd="sng" algn="ctr">
+                      <a:solidFill>
+                        <a:srgbClr val="D6DEE6"/>
+                      </a:solidFill>
+                      <a:prstDash val="solid"/>
+                      <a:round/>
+                      <a:headEnd type="none" w="med" len="med"/>
+                      <a:tailEnd type="none" w="med" len="med"/>
+                    </a:lnL>
+                    <a:lnR w="6350" cap="flat" cmpd="sng" algn="ctr">
+                      <a:solidFill>
+                        <a:srgbClr val="D6DEE6"/>
+                      </a:solidFill>
+                      <a:prstDash val="solid"/>
+                      <a:round/>
+                      <a:headEnd type="none" w="med" len="med"/>
+                      <a:tailEnd type="none" w="med" len="med"/>
+                    </a:lnR>
+                    <a:lnT w="6350" cap="flat" cmpd="sng" algn="ctr">
+                      <a:solidFill>
+                        <a:srgbClr val="D6DEE6"/>
+                      </a:solidFill>
+                      <a:prstDash val="solid"/>
+                      <a:round/>
+                      <a:headEnd type="none" w="med" len="med"/>
+                      <a:tailEnd type="none" w="med" len="med"/>
+                    </a:lnT>
+                    <a:lnB w="6350" cap="flat" cmpd="sng" algn="ctr">
+                      <a:solidFill>
+                        <a:srgbClr val="D6DEE6"/>
+                      </a:solidFill>
+                      <a:prstDash val="solid"/>
+                      <a:round/>
+                      <a:headEnd type="none" w="med" len="med"/>
+                      <a:tailEnd type="none" w="med" len="med"/>
+                    </a:lnB>
+                  </a:tcPr>
+                </a:tc>
+              </a:tr>
+              <a:tr h="457200">
+                <a:tc>
+                  <a:txBody>
+                    <a:bodyPr/>
+                    <a:lstStyle/>
+                    <a:p>
+                      <a:pPr algn="ctr" indent="0" marL="0">
+                        <a:buNone/>
+                      </a:pPr>
+                      <a:r>
+                        <a:rPr lang="en-US" sz="1500" dirty="0">
+                          <a:solidFill>
+                            <a:srgbClr val="1F2937"/>
+                          </a:solidFill>
+                          <a:latin typeface="Arial" pitchFamily="34" charset="0"/>
+                          <a:ea typeface="Arial" pitchFamily="34" charset="-122"/>
+                          <a:cs typeface="Arial" pitchFamily="34" charset="-120"/>
+                        </a:rPr>
+                        <a:t>5%</a:t>
+                      </a:r>
+                      <a:endParaRPr lang="en-US" sz="1500" dirty="0">
+                        <a:latin typeface="Arial" charset="0"/>
+                        <a:ea typeface="Arial" charset="0"/>
+                        <a:cs typeface="Arial" charset="0"/>
+                      </a:endParaRPr>
+                    </a:p>
+                  </a:txBody>
+                  <a:tcPr marL="54864" marR="54864" marT="54864" marB="54864" anchor="ctr">
+                    <a:lnL w="6350" cap="flat" cmpd="sng" algn="ctr">
+                      <a:solidFill>
+                        <a:srgbClr val="D6DEE6"/>
+                      </a:solidFill>
+                      <a:prstDash val="solid"/>
+                      <a:round/>
+                      <a:headEnd type="none" w="med" len="med"/>
+                      <a:tailEnd type="none" w="med" len="med"/>
+                    </a:lnL>
+                    <a:lnR w="6350" cap="flat" cmpd="sng" algn="ctr">
+                      <a:solidFill>
+                        <a:srgbClr val="D6DEE6"/>
+                      </a:solidFill>
+                      <a:prstDash val="solid"/>
+                      <a:round/>
+                      <a:headEnd type="none" w="med" len="med"/>
+                      <a:tailEnd type="none" w="med" len="med"/>
+                    </a:lnR>
+                    <a:lnT w="6350" cap="flat" cmpd="sng" algn="ctr">
+                      <a:solidFill>
+                        <a:srgbClr val="D6DEE6"/>
+                      </a:solidFill>
+                      <a:prstDash val="solid"/>
+                      <a:round/>
+                      <a:headEnd type="none" w="med" len="med"/>
+                      <a:tailEnd type="none" w="med" len="med"/>
+                    </a:lnT>
+                    <a:lnB w="6350" cap="flat" cmpd="sng" algn="ctr">
+                      <a:solidFill>
+                        <a:srgbClr val="D6DEE6"/>
+                      </a:solidFill>
+                      <a:prstDash val="solid"/>
+                      <a:round/>
+                      <a:headEnd type="none" w="med" len="med"/>
+                      <a:tailEnd type="none" w="med" len="med"/>
+                    </a:lnB>
+                  </a:tcPr>
+                </a:tc>
+                <a:tc>
+                  <a:txBody>
+                    <a:bodyPr/>
+                    <a:lstStyle/>
+                    <a:p>
+                      <a:pPr algn="ctr" indent="0" marL="0">
+                        <a:buNone/>
+                      </a:pPr>
+                      <a:r>
+                        <a:rPr lang="en-US" sz="1500" dirty="0">
+                          <a:solidFill>
+                            <a:srgbClr val="1F2937"/>
+                          </a:solidFill>
+                          <a:latin typeface="Arial" pitchFamily="34" charset="0"/>
+                          <a:ea typeface="Arial" pitchFamily="34" charset="-122"/>
+                          <a:cs typeface="Arial" pitchFamily="34" charset="-120"/>
+                        </a:rPr>
+                        <a:t>29</a:t>
+                      </a:r>
+                      <a:endParaRPr lang="en-US" sz="1500" dirty="0">
+                        <a:latin typeface="Arial" charset="0"/>
+                        <a:ea typeface="Arial" charset="0"/>
+                        <a:cs typeface="Arial" charset="0"/>
+                      </a:endParaRPr>
+                    </a:p>
+                  </a:txBody>
+                  <a:tcPr marL="54864" marR="54864" marT="54864" marB="54864" anchor="ctr">
+                    <a:lnL w="6350" cap="flat" cmpd="sng" algn="ctr">
+                      <a:solidFill>
+                        <a:srgbClr val="D6DEE6"/>
+                      </a:solidFill>
+                      <a:prstDash val="solid"/>
+                      <a:round/>
+                      <a:headEnd type="none" w="med" len="med"/>
+                      <a:tailEnd type="none" w="med" len="med"/>
+                    </a:lnL>
+                    <a:lnR w="6350" cap="flat" cmpd="sng" algn="ctr">
+                      <a:solidFill>
+                        <a:srgbClr val="D6DEE6"/>
+                      </a:solidFill>
+                      <a:prstDash val="solid"/>
+                      <a:round/>
+                      <a:headEnd type="none" w="med" len="med"/>
+                      <a:tailEnd type="none" w="med" len="med"/>
+                    </a:lnR>
+                    <a:lnT w="6350" cap="flat" cmpd="sng" algn="ctr">
+                      <a:solidFill>
+                        <a:srgbClr val="D6DEE6"/>
+                      </a:solidFill>
+                      <a:prstDash val="solid"/>
+                      <a:round/>
+                      <a:headEnd type="none" w="med" len="med"/>
+                      <a:tailEnd type="none" w="med" len="med"/>
+                    </a:lnT>
+                    <a:lnB w="6350" cap="flat" cmpd="sng" algn="ctr">
+                      <a:solidFill>
+                        <a:srgbClr val="D6DEE6"/>
+                      </a:solidFill>
+                      <a:prstDash val="solid"/>
+                      <a:round/>
+                      <a:headEnd type="none" w="med" len="med"/>
+                      <a:tailEnd type="none" w="med" len="med"/>
+                    </a:lnB>
+                  </a:tcPr>
+                </a:tc>
+                <a:tc>
+                  <a:txBody>
+                    <a:bodyPr/>
+                    <a:lstStyle/>
+                    <a:p>
+                      <a:pPr algn="ctr" indent="0" marL="0">
+                        <a:buNone/>
+                      </a:pPr>
+                      <a:r>
+                        <a:rPr lang="en-US" sz="1500" dirty="0">
+                          <a:solidFill>
+                            <a:srgbClr val="1F2937"/>
+                          </a:solidFill>
+                          <a:latin typeface="Arial" pitchFamily="34" charset="0"/>
+                          <a:ea typeface="Arial" pitchFamily="34" charset="-122"/>
+                          <a:cs typeface="Arial" pitchFamily="34" charset="-120"/>
+                        </a:rPr>
+                        <a:t>5</a:t>
+                      </a:r>
+                      <a:endParaRPr lang="en-US" sz="1500" dirty="0">
+                        <a:latin typeface="Arial" charset="0"/>
+                        <a:ea typeface="Arial" charset="0"/>
+                        <a:cs typeface="Arial" charset="0"/>
+                      </a:endParaRPr>
+                    </a:p>
+                  </a:txBody>
+                  <a:tcPr marL="54864" marR="54864" marT="54864" marB="54864" anchor="ctr">
+                    <a:lnL w="6350" cap="flat" cmpd="sng" algn="ctr">
+                      <a:solidFill>
+                        <a:srgbClr val="D6DEE6"/>
+                      </a:solidFill>
+                      <a:prstDash val="solid"/>
+                      <a:round/>
+                      <a:headEnd type="none" w="med" len="med"/>
+                      <a:tailEnd type="none" w="med" len="med"/>
+                    </a:lnL>
+                    <a:lnR w="6350" cap="flat" cmpd="sng" algn="ctr">
+                      <a:solidFill>
+                        <a:srgbClr val="D6DEE6"/>
+                      </a:solidFill>
+                      <a:prstDash val="solid"/>
+                      <a:round/>
+                      <a:headEnd type="none" w="med" len="med"/>
+                      <a:tailEnd type="none" w="med" len="med"/>
+                    </a:lnR>
+                    <a:lnT w="6350" cap="flat" cmpd="sng" algn="ctr">
+                      <a:solidFill>
+                        <a:srgbClr val="D6DEE6"/>
+                      </a:solidFill>
+                      <a:prstDash val="solid"/>
+                      <a:round/>
+                      <a:headEnd type="none" w="med" len="med"/>
+                      <a:tailEnd type="none" w="med" len="med"/>
+                    </a:lnT>
+                    <a:lnB w="6350" cap="flat" cmpd="sng" algn="ctr">
+                      <a:solidFill>
+                        <a:srgbClr val="D6DEE6"/>
+                      </a:solidFill>
+                      <a:prstDash val="solid"/>
+                      <a:round/>
+                      <a:headEnd type="none" w="med" len="med"/>
+                      <a:tailEnd type="none" w="med" len="med"/>
+                    </a:lnB>
+                  </a:tcPr>
+                </a:tc>
+              </a:tr>
+            </a:tbl>
+          </a:graphicData>
+        </a:graphic>
+      </p:graphicFrame>
+      <p:sp>
+        <p:nvSpPr>
+          <p:cNvPr id="6" name="Text 3"/>
+          <p:cNvSpPr/>
+          <p:nvPr/>
+        </p:nvSpPr>
+        <p:spPr>
+          <a:xfrm>
+            <a:off x="566928" y="3931920"/>
+            <a:ext cx="5394960" cy="2194560"/>
+          </a:xfrm>
+          <a:prstGeom prst="rect">
+            <a:avLst/>
+          </a:prstGeom>
+          <a:noFill/>
+          <a:ln/>
+        </p:spPr>
+        <p:txBody>
+          <a:bodyPr wrap="square" lIns="0" tIns="0" rIns="0" bIns="0" rtlCol="0" anchor="ctr"/>
+          <a:lstStyle/>
+          <a:p>
+            <a:pPr indent="0" marL="0">
+              <a:buNone/>
+            </a:pPr>
+            <a:r>
+              <a:rPr lang="en-US" sz="1400" dirty="0">
+                <a:solidFill>
+                  <a:srgbClr val="1F2937"/>
+                </a:solidFill>
+                <a:latin typeface="Arial" pitchFamily="34" charset="0"/>
+                <a:ea typeface="Arial" pitchFamily="34" charset="-122"/>
+                <a:cs typeface="Arial" pitchFamily="34" charset="-120"/>
+              </a:rPr>
+              <a:t>Two-sided 5% test, 80% power, with the loss differential's spread and the benchmark's MSE held at their 2021 to 2025 values. Against the random walk the counts are small only because the combination and the random walk are nearly the same forecast, so a 1 to 5% cut between them is implausible. Effect sizes are round numbers fixed in advance. The table says nothing about any other forecaster.</a:t>
+            </a:r>
+            <a:endParaRPr lang="en-US" sz="1400" dirty="0"/>
+          </a:p>
+        </p:txBody>
+      </p:sp>
+      <p:sp>
+        <p:nvSpPr>
+          <p:cNvPr id="7" name="Text 4"/>
+          <p:cNvSpPr/>
+          <p:nvPr/>
+        </p:nvSpPr>
+        <p:spPr>
+          <a:xfrm>
+            <a:off x="6400800" y="1417320"/>
+            <a:ext cx="5120640" cy="310896"/>
+          </a:xfrm>
+          <a:prstGeom prst="rect">
+            <a:avLst/>
+          </a:prstGeom>
+          <a:noFill/>
+          <a:ln/>
+        </p:spPr>
+        <p:txBody>
+          <a:bodyPr wrap="square" lIns="0" tIns="0" rIns="0" bIns="0" rtlCol="0" anchor="ctr"/>
+          <a:lstStyle/>
+          <a:p>
+            <a:pPr indent="0" marL="0">
+              <a:buNone/>
+            </a:pPr>
+            <a:r>
+              <a:rPr lang="en-US" sz="2000" b="1" dirty="0">
+                <a:solidFill>
+                  <a:srgbClr val="1A7A4A"/>
+                </a:solidFill>
+                <a:latin typeface="Arial" pitchFamily="34" charset="0"/>
+                <a:ea typeface="Arial" pitchFamily="34" charset="-122"/>
+                <a:cs typeface="Arial" pitchFamily="34" charset="-120"/>
+              </a:rPr>
+              <a:t>Protocol</a:t>
+            </a:r>
+            <a:endParaRPr lang="en-US" sz="2000" dirty="0"/>
+          </a:p>
+        </p:txBody>
+      </p:sp>
+      <p:sp>
+        <p:nvSpPr>
+          <p:cNvPr id="8" name="Text 5"/>
+          <p:cNvSpPr/>
+          <p:nvPr/>
+        </p:nvSpPr>
+        <p:spPr>
+          <a:xfrm>
+            <a:off x="6400800" y="1828800"/>
+            <a:ext cx="5212080" cy="4023360"/>
+          </a:xfrm>
+          <a:prstGeom prst="rect">
+            <a:avLst/>
+          </a:prstGeom>
+          <a:noFill/>
+          <a:ln/>
+        </p:spPr>
+        <p:txBody>
+          <a:bodyPr wrap="square" lIns="0" tIns="0" rIns="0" bIns="0" rtlCol="0" anchor="ctr"/>
+          <a:lstStyle/>
+          <a:p>
+            <a:pPr marL="342900" indent="-342900">
+              <a:spcAft>
+                <a:spcPts val="1200"/>
+              </a:spcAft>
+              <a:buSzPct val="100000"/>
+              <a:buChar char="•"/>
+            </a:pPr>
+            <a:r>
+              <a:rPr lang="en-US" sz="1700" dirty="0">
+                <a:solidFill>
+                  <a:srgbClr val="1F2937"/>
+                </a:solidFill>
+                <a:latin typeface="Arial" pitchFamily="34" charset="0"/>
+                <a:ea typeface="Arial" pitchFamily="34" charset="-122"/>
+                <a:cs typeface="Arial" pitchFamily="34" charset="-120"/>
+              </a:rPr>
+              <a:t>Freeze the commit, the chosen configuration and the data snapshot before the first new origin.</a:t>
+            </a:r>
+            <a:endParaRPr lang="en-US" sz="1700" dirty="0"/>
+          </a:p>
+          <a:p>
+            <a:pPr indent="0" marL="0">
+              <a:spcAft>
+                <a:spcPts val="1200"/>
+              </a:spcAft>
+              <a:buNone/>
+            </a:pPr>
+            <a:r>
+              <a:rPr lang="en-US" sz="1700" dirty="0">
+                <a:solidFill>
+                  <a:srgbClr val="1F2937"/>
+                </a:solidFill>
+                <a:latin typeface="Arial" pitchFamily="34" charset="0"/>
+                <a:ea typeface="Arial" pitchFamily="34" charset="-122"/>
+                <a:cs typeface="Arial" pitchFamily="34" charset="-120"/>
+              </a:rPr>
+              <a:t>Prespecify two tests: combination against the AR(1) and against the random walk.</a:t>
+            </a:r>
+            <a:endParaRPr lang="en-US" sz="1700" dirty="0"/>
+          </a:p>
+          <a:p>
+            <a:pPr indent="0" marL="0">
+              <a:spcAft>
+                <a:spcPts val="1200"/>
+              </a:spcAft>
+              <a:buNone/>
+            </a:pPr>
+            <a:r>
+              <a:rPr lang="en-US" sz="1700" dirty="0">
+                <a:solidFill>
+                  <a:srgbClr val="1F2937"/>
+                </a:solidFill>
+                <a:latin typeface="Arial" pitchFamily="34" charset="0"/>
+                <a:ea typeface="Arial" pitchFamily="34" charset="-122"/>
+                <a:cs typeface="Arial" pitchFamily="34" charset="-120"/>
+              </a:rPr>
+              <a:t>Fix the sample size and stop date from the planning table.</a:t>
+            </a:r>
+            <a:endParaRPr lang="en-US" sz="1700" dirty="0"/>
+          </a:p>
+          <a:p>
+            <a:pPr indent="0" marL="0">
+              <a:spcAft>
+                <a:spcPts val="1200"/>
+              </a:spcAft>
+              <a:buNone/>
+            </a:pPr>
+            <a:r>
+              <a:rPr lang="en-US" sz="1700" dirty="0">
+                <a:solidFill>
+                  <a:srgbClr val="1F2937"/>
+                </a:solidFill>
+                <a:latin typeface="Arial" pitchFamily="34" charset="0"/>
+                <a:ea typeface="Arial" pitchFamily="34" charset="-122"/>
+                <a:cs typeface="Arial" pitchFamily="34" charset="-120"/>
+              </a:rPr>
+              <a:t>Score each origin once, in a log that is only appended to.</a:t>
+            </a:r>
+            <a:endParaRPr lang="en-US" sz="1700" dirty="0"/>
+          </a:p>
+          <a:p>
+            <a:pPr indent="0" marL="0">
+              <a:spcAft>
+                <a:spcPts val="1200"/>
+              </a:spcAft>
+              <a:buNone/>
+            </a:pPr>
+            <a:r>
+              <a:rPr lang="en-US" sz="1700" dirty="0">
+                <a:solidFill>
+                  <a:srgbClr val="1F2937"/>
+                </a:solidFill>
+                <a:latin typeface="Arial" pitchFamily="34" charset="0"/>
+                <a:ea typeface="Arial" pitchFamily="34" charset="-122"/>
+                <a:cs typeface="Arial" pitchFamily="34" charset="-120"/>
+              </a:rPr>
+              <a:t>Report the result whatever it is.</a:t>
+            </a:r>
+            <a:endParaRPr lang="en-US" sz="1700" dirty="0"/>
+          </a:p>
+        </p:txBody>
+      </p:sp>
+      <p:sp>
+        <p:nvSpPr>
+          <p:cNvPr id="9" name="Text 6"/>
+          <p:cNvSpPr/>
+          <p:nvPr/>
+        </p:nvSpPr>
+        <p:spPr>
+          <a:xfrm>
+            <a:off x="566928" y="6327648"/>
+            <a:ext cx="11064240" cy="274320"/>
+          </a:xfrm>
+          <a:prstGeom prst="rect">
+            <a:avLst/>
+          </a:prstGeom>
+          <a:noFill/>
+          <a:ln/>
+        </p:spPr>
+        <p:txBody>
+          <a:bodyPr wrap="square" lIns="0" tIns="0" rIns="0" bIns="0" rtlCol="0" anchor="ctr"/>
+          <a:lstStyle/>
+          <a:p>
+            <a:pPr indent="0" marL="0">
+              <a:buNone/>
+            </a:pPr>
+            <a:r>
+              <a:rPr lang="en-US" sz="1300" dirty="0">
+                <a:solidFill>
+                  <a:srgbClr val="6B7280"/>
+                </a:solidFill>
+                <a:latin typeface="Arial" pitchFamily="34" charset="0"/>
+                <a:ea typeface="Arial" pitchFamily="34" charset="-122"/>
+                <a:cs typeface="Arial" pitchFamily="34" charset="-120"/>
+              </a:rPr>
+              <a:t>Details in docs/METHODOLOGY.md, section 13.</a:t>
             </a:r>
             <a:endParaRPr lang="en-US" sz="1300" dirty="0"/>
           </a:p>
@@ -5748,7 +7302,7 @@
                 <a:ea typeface="Arial" pitchFamily="34" charset="-122"/>
                 <a:cs typeface="Arial" pitchFamily="34" charset="-120"/>
               </a:rPr>
-              <a:t>Can the AR(1) benchmark be beaten out of sample, and can we say why?</a:t>
+              <a:t>Can the AR(1) benchmark be beaten out of sample, and by how much?</a:t>
             </a:r>
             <a:endParaRPr lang="en-US" sz="2600" dirty="0"/>
           </a:p>
@@ -5856,7 +7410,7 @@
                 <a:ea typeface="Arial" pitchFamily="34" charset="-122"/>
                 <a:cs typeface="Arial" pitchFamily="34" charset="-120"/>
               </a:rPr>
-              <a:t>Beat an AR(1) on RMSE, out of sample, and explain the mechanism.</a:t>
+              <a:t>Compare RMSE with an AR(1), out of sample, and say how far the result can be trusted.</a:t>
             </a:r>
             <a:endParaRPr lang="en-US" sz="2100" dirty="0"/>
           </a:p>
@@ -5871,7 +7425,7 @@
         <p:spPr>
           <a:xfrm>
             <a:off x="566928" y="3291840"/>
-            <a:ext cx="11064240" cy="1828800"/>
+            <a:ext cx="11064240" cy="2194560"/>
           </a:xfrm>
           <a:prstGeom prst="rect">
             <a:avLst/>
@@ -5916,7 +7470,7 @@
                 <a:ea typeface="Arial" pitchFamily="34" charset="-122"/>
                 <a:cs typeface="Arial" pitchFamily="34" charset="-120"/>
               </a:rPr>
-              <a:t>Since Meese and Rogoff (1983), structural FX models lose to a no-change forecast at this horizon. Honest published gains run 1 to 5% (Rossi 2013).</a:t>
+              <a:t>Since Meese and Rogoff (1983), structural FX models lose to a no-change forecast at this horizon. Rossi (2013) finds that success depends on the sample, predictor, horizon and benchmark.</a:t>
             </a:r>
             <a:endParaRPr lang="en-US" sz="2000" dirty="0"/>
           </a:p>
@@ -5953,7 +7507,7 @@
                 <a:ea typeface="Arial" pitchFamily="34" charset="-122"/>
                 <a:cs typeface="Arial" pitchFamily="34" charset="-120"/>
               </a:rPr>
-              <a:t>Yes, by 0.42%, and the mechanism is a measurable bias in the benchmark itself.</a:t>
+              <a:t>A gain of 0.44% in RMSE over the AR(1) that is not statistically established, and no gain over the random walk.</a:t>
             </a:r>
             <a:endParaRPr lang="en-US" sz="2000" dirty="0"/>
           </a:p>
@@ -6063,7 +7617,7 @@
                 <a:ea typeface="Arial" pitchFamily="34" charset="-122"/>
                 <a:cs typeface="Arial" pitchFamily="34" charset="-120"/>
               </a:rPr>
-              <a:t>Three simple models combined by recent accuracy, with every setting frozen before we saw the judged window</a:t>
+              <a:t>Three simple models combined by recent accuracy, with settings chosen on 2015 to 2020, before the judged window</a:t>
             </a:r>
             <a:endParaRPr lang="en-US" sz="2600" dirty="0"/>
           </a:p>
@@ -6261,7 +7815,7 @@
                 <a:ea typeface="Arial" pitchFamily="34" charset="-122"/>
                 <a:cs typeface="Arial" pitchFamily="34" charset="-120"/>
               </a:rPr>
-              <a:t>Gold, platinum, dollar, VIX. Heavily shrunk.</a:t>
+              <a:t>Commodity, dollar and risk predictors. Heavily shrunk.</a:t>
             </a:r>
             <a:endParaRPr lang="en-US" sz="2000" dirty="0"/>
           </a:p>
@@ -6337,7 +7891,7 @@
                 <a:ea typeface="Arial" pitchFamily="34" charset="-122"/>
                 <a:cs typeface="Arial" pitchFamily="34" charset="-120"/>
               </a:rPr>
-              <a:t>Why the numbers hold</a:t>
+              <a:t>How the test is protected</a:t>
             </a:r>
             <a:endParaRPr lang="en-US" sz="2000" dirty="0"/>
           </a:p>
@@ -6380,7 +7934,7 @@
                 <a:ea typeface="Arial" pitchFamily="34" charset="-122"/>
                 <a:cs typeface="Arial" pitchFamily="34" charset="-120"/>
               </a:rPr>
-              <a:t>Inputs dated on or before each Friday.</a:t>
+              <a:t>Inputs public by Friday 17:00 Johannesburg.</a:t>
             </a:r>
             <a:endParaRPr lang="en-US" sz="2000" dirty="0"/>
           </a:p>
@@ -6420,7 +7974,7 @@
                 <a:ea typeface="Arial" pitchFamily="34" charset="-122"/>
                 <a:cs typeface="Arial" pitchFamily="34" charset="-120"/>
               </a:rPr>
-              <a:t>Weights embargoed by 28 days.</a:t>
+              <a:t>Purged cross-validation, scaler inside folds.</a:t>
             </a:r>
             <a:endParaRPr lang="en-US" sz="2000" dirty="0"/>
           </a:p>
@@ -6440,7 +7994,7 @@
                 <a:ea typeface="Arial" pitchFamily="34" charset="-122"/>
                 <a:cs typeface="Arial" pitchFamily="34" charset="-120"/>
               </a:rPr>
-              <a:t>All settings frozen on 2015 to 2020.</a:t>
+              <a:t>Weights use only resolved errors.</a:t>
             </a:r>
             <a:endParaRPr lang="en-US" sz="2000" dirty="0"/>
           </a:p>
@@ -6650,7 +8204,7 @@
                 <a:ea typeface="Arial" pitchFamily="34" charset="-122"/>
                 <a:cs typeface="Arial" pitchFamily="34" charset="-120"/>
               </a:rPr>
-              <a:t>The AR(1)'s implied long-run mean sat below the market at all 261 origins</a:t>
+              <a:t>The combination gained on the AR(1) until 28 March 2025, then gave most of it back</a:t>
             </a:r>
             <a:endParaRPr lang="en-US" sz="2600" dirty="0"/>
           </a:p>
@@ -6773,7 +8327,7 @@
               <a:buChar char="•"/>
             </a:pPr>
             <a:r>
-              <a:rPr lang="en-US" sz="1800" dirty="0">
+              <a:rPr lang="en-US" sz="1700" dirty="0">
                 <a:solidFill>
                   <a:srgbClr val="1F2937"/>
                 </a:solidFill>
@@ -6781,9 +8335,9 @@
                 <a:ea typeface="Arial" pitchFamily="34" charset="-122"/>
                 <a:cs typeface="Arial" pitchFamily="34" charset="-120"/>
               </a:rPr>
-              <a:t>Persistence 0.997 to 0.999, just below one, so each forecast is pulled toward c/(1-phi).</a:t>
+              <a:t>Cumulative squared-error gain peaked at 1.32 and ended at 0.72.</a:t>
             </a:r>
-            <a:endParaRPr lang="en-US" sz="1800" dirty="0"/>
+            <a:endParaRPr lang="en-US" sz="1700" dirty="0"/>
           </a:p>
           <a:p>
             <a:pPr indent="0" marL="0">
@@ -6793,7 +8347,7 @@
               <a:buNone/>
             </a:pPr>
             <a:r>
-              <a:rPr lang="en-US" sz="1800" dirty="0">
+              <a:rPr lang="en-US" sz="1700" dirty="0">
                 <a:solidFill>
                   <a:srgbClr val="1F2937"/>
                 </a:solidFill>
@@ -6801,9 +8355,9 @@
                 <a:ea typeface="Arial" pitchFamily="34" charset="-122"/>
                 <a:cs typeface="Arial" pitchFamily="34" charset="-120"/>
               </a:rPr>
-              <a:t>That mean ranged R11.80 to R19.18 and sat BELOW spot at 261 of 261 origins, by R2.11 on average.</a:t>
+              <a:t>The AR(1)'s implied long-run level sat below spot at 261 of 261 origins, by R2.11 on average, and it never forecast a rise.</a:t>
             </a:r>
-            <a:endParaRPr lang="en-US" sz="1800" dirty="0"/>
+            <a:endParaRPr lang="en-US" sz="1700" dirty="0"/>
           </a:p>
           <a:p>
             <a:pPr indent="0" marL="0">
@@ -6813,7 +8367,7 @@
               <a:buNone/>
             </a:pPr>
             <a:r>
-              <a:rPr lang="en-US" sz="1800" dirty="0">
+              <a:rPr lang="en-US" sz="1700" dirty="0">
                 <a:solidFill>
                   <a:srgbClr val="1F2937"/>
                 </a:solidFill>
@@ -6821,9 +8375,9 @@
                 <a:ea typeface="Arial" pitchFamily="34" charset="-122"/>
                 <a:cs typeface="Arial" pitchFamily="34" charset="-120"/>
               </a:rPr>
-              <a:t>A downward lean against a rand that rose from R14.62 to R19.74.</a:t>
+              <a:t>Squared bias is 55% of its excess squared error. The rest is variance.</a:t>
             </a:r>
-            <a:endParaRPr lang="en-US" sz="1800" dirty="0"/>
+            <a:endParaRPr lang="en-US" sz="1700" dirty="0"/>
           </a:p>
         </p:txBody>
       </p:sp>
@@ -6904,7 +8458,7 @@
                 <a:ea typeface="Arial" pitchFamily="34" charset="-122"/>
                 <a:cs typeface="Arial" pitchFamily="34" charset="-120"/>
               </a:rPr>
-              <a:t>average gap, below spot at every origin</a:t>
+              <a:t>average gap, implied level below spot</a:t>
             </a:r>
             <a:endParaRPr lang="en-US" sz="3000" dirty="0"/>
           </a:p>
@@ -6943,7 +8497,7 @@
                 <a:ea typeface="Arial" pitchFamily="34" charset="-122"/>
                 <a:cs typeface="Arial" pitchFamily="34" charset="-120"/>
               </a:rPr>
-              <a:t>Own calculation. AR(1) refitted at each of the 261 origins; reproducible via src/validate_results.py in the submission.</a:t>
+              <a:t>Own calculation from forecast_log.csv. The downward lean is an observation, not shown to be the full explanation.</a:t>
             </a:r>
             <a:endParaRPr lang="en-US" sz="1300" dirty="0"/>
           </a:p>
@@ -7014,7 +8568,7 @@
                 <a:ea typeface="Arial" pitchFamily="34" charset="-122"/>
                 <a:cs typeface="Arial" pitchFamily="34" charset="-120"/>
               </a:rPr>
-              <a:t>The combination cuts RMSE 0.42% below the benchmark; four of five models beat it</a:t>
+              <a:t>The combination's RMSE is 0.44% below the AR(1)'s and level with the random walk's</a:t>
             </a:r>
             <a:endParaRPr lang="en-US" sz="2600" dirty="0"/>
           </a:p>
@@ -7117,7 +8671,7 @@
         <p:spPr>
           <a:xfrm>
             <a:off x="7635240" y="1783080"/>
-            <a:ext cx="4114800" cy="3840480"/>
+            <a:ext cx="4114800" cy="4023360"/>
           </a:xfrm>
           <a:prstGeom prst="rect">
             <a:avLst/>
@@ -7131,13 +8685,13 @@
           <a:p>
             <a:pPr marL="342900" indent="-342900">
               <a:spcAft>
-                <a:spcPts val="1600"/>
+                <a:spcPts val="1400"/>
               </a:spcAft>
               <a:buSzPct val="100000"/>
               <a:buChar char="•"/>
             </a:pPr>
             <a:r>
-              <a:rPr lang="en-US" sz="1800" dirty="0">
+              <a:rPr lang="en-US" sz="1700" dirty="0">
                 <a:solidFill>
                   <a:srgbClr val="1F2937"/>
                 </a:solidFill>
@@ -7145,19 +8699,19 @@
                 <a:ea typeface="Arial" pitchFamily="34" charset="-122"/>
                 <a:cs typeface="Arial" pitchFamily="34" charset="-120"/>
               </a:rPr>
-              <a:t>Combination 0.5600 against the AR(1)'s 0.5624, over 261 forecasts.</a:t>
+              <a:t>Combination 0.5599, AR(1) 0.5624, random walk 0.5600, over 261 forecasts.</a:t>
             </a:r>
-            <a:endParaRPr lang="en-US" sz="1800" dirty="0"/>
+            <a:endParaRPr lang="en-US" sz="1700" dirty="0"/>
           </a:p>
           <a:p>
             <a:pPr indent="0" marL="0">
               <a:spcAft>
-                <a:spcPts val="1600"/>
+                <a:spcPts val="1400"/>
               </a:spcAft>
               <a:buNone/>
             </a:pPr>
             <a:r>
-              <a:rPr lang="en-US" sz="1800" dirty="0">
+              <a:rPr lang="en-US" sz="1700" dirty="0">
                 <a:solidFill>
                   <a:srgbClr val="1F2937"/>
                 </a:solidFill>
@@ -7165,19 +8719,19 @@
                 <a:ea typeface="Arial" pitchFamily="34" charset="-122"/>
                 <a:cs typeface="Arial" pitchFamily="34" charset="-120"/>
               </a:rPr>
-              <a:t>Robustness: with targets strictly inside 2025 we lead every model, random walk included.</a:t>
+              <a:t>Both prespecified intervals include zero: p = 0.449 against the AR(1), 0.967 against the random walk.</a:t>
             </a:r>
-            <a:endParaRPr lang="en-US" sz="1800" dirty="0"/>
+            <a:endParaRPr lang="en-US" sz="1700" dirty="0"/>
           </a:p>
           <a:p>
             <a:pPr indent="0" marL="0">
               <a:spcAft>
-                <a:spcPts val="1600"/>
+                <a:spcPts val="1400"/>
               </a:spcAft>
               <a:buNone/>
             </a:pPr>
             <a:r>
-              <a:rPr lang="en-US" sz="1800" dirty="0">
+              <a:rPr lang="en-US" sz="1700" dirty="0">
                 <a:solidFill>
                   <a:srgbClr val="1F2937"/>
                 </a:solidFill>
@@ -7185,9 +8739,29 @@
                 <a:ea typeface="Arial" pitchFamily="34" charset="-122"/>
                 <a:cs typeface="Arial" pitchFamily="34" charset="-120"/>
               </a:rPr>
-              <a:t>Gradient boosting, same data and discipline, loses by 2.2%. About 850 noisy observations cannot support a flexible learner.</a:t>
+              <a:t>Equal weights score 0.5599, so adaptive weighting adds nothing measurable.</a:t>
             </a:r>
-            <a:endParaRPr lang="en-US" sz="1800" dirty="0"/>
+            <a:endParaRPr lang="en-US" sz="1700" dirty="0"/>
+          </a:p>
+          <a:p>
+            <a:pPr indent="0" marL="0">
+              <a:spcAft>
+                <a:spcPts val="1400"/>
+              </a:spcAft>
+              <a:buNone/>
+            </a:pPr>
+            <a:r>
+              <a:rPr lang="en-US" sz="1700" dirty="0">
+                <a:solidFill>
+                  <a:srgbClr val="1F2937"/>
+                </a:solidFill>
+                <a:latin typeface="Arial" pitchFamily="34" charset="0"/>
+                <a:ea typeface="Arial" pitchFamily="34" charset="-122"/>
+                <a:cs typeface="Arial" pitchFamily="34" charset="-120"/>
+              </a:rPr>
+              <a:t>Gradient boosting scores 0.5745, the highest of 13 models. This specification only.</a:t>
+            </a:r>
+            <a:endParaRPr lang="en-US" sz="1700" dirty="0"/>
           </a:p>
         </p:txBody>
       </p:sp>
@@ -7224,7 +8798,7 @@
                 <a:ea typeface="Arial" pitchFamily="34" charset="-122"/>
                 <a:cs typeface="Arial" pitchFamily="34" charset="-120"/>
               </a:rPr>
-              <a:t>Own calculation from forecast_log.csv, n = 261. Simple-beats-complex is the M4 and M5 competition finding (Makridakis et al. 2020, 2022).</a:t>
+              <a:t>Own calculation from forecast_log.csv, n = 261. Intervals: Newey-West, lag 3. None of 21 exploratory comparisons survives Holm adjustment.</a:t>
             </a:r>
             <a:endParaRPr lang="en-US" sz="1300" dirty="0"/>
           </a:p>
@@ -7335,7 +8909,7 @@
         <p:spPr>
           <a:xfrm>
             <a:off x="566928" y="1143000"/>
-            <a:ext cx="11064240" cy="4114800"/>
+            <a:ext cx="11064240" cy="4297680"/>
           </a:xfrm>
           <a:prstGeom prst="rect">
             <a:avLst/>
@@ -7362,7 +8936,7 @@
                 <a:ea typeface="Arial" pitchFamily="34" charset="-122"/>
                 <a:cs typeface="Arial" pitchFamily="34" charset="-120"/>
               </a:rPr>
-              <a:t>1.  The benchmark is beatable, and we can say why. </a:t>
+              <a:t>1.  A small gain over the AR(1). </a:t>
             </a:r>
             <a:pPr indent="0" marL="0">
               <a:spcAft>
@@ -7379,7 +8953,7 @@
                 <a:ea typeface="Arial" pitchFamily="34" charset="-122"/>
                 <a:cs typeface="Arial" pitchFamily="34" charset="-120"/>
               </a:rPr>
-              <a:t>Its implied long-run mean sat below spot at all 261 origins, by R2.11 on average.</a:t>
+              <a:t>0.44% lower RMSE, not statistically established (p = 0.449). Level with the random walk (p = 0.967).</a:t>
             </a:r>
             <a:endParaRPr lang="en-US" sz="1900" dirty="0"/>
           </a:p>
@@ -7399,7 +8973,7 @@
                 <a:ea typeface="Arial" pitchFamily="34" charset="-122"/>
                 <a:cs typeface="Arial" pitchFamily="34" charset="-120"/>
               </a:rPr>
-              <a:t>2.  The gain is real but small. </a:t>
+              <a:t>2.  Adaptive weighting adds nothing measurable. </a:t>
             </a:r>
             <a:pPr indent="0" marL="0">
               <a:spcAft>
@@ -7416,7 +8990,7 @@
                 <a:ea typeface="Arial" pitchFamily="34" charset="-122"/>
                 <a:cs typeface="Arial" pitchFamily="34" charset="-120"/>
               </a:rPr>
-              <a:t>0.42% in RMSE, holding in four of five years and on the strict robustness cut. That is the size of the true signal at one month.</a:t>
+              <a:t>Equal weights score 0.5599. The weights stayed between 0.306 and 0.353.</a:t>
             </a:r>
             <a:endParaRPr lang="en-US" sz="1900" dirty="0"/>
           </a:p>
@@ -7436,7 +9010,7 @@
                 <a:ea typeface="Arial" pitchFamily="34" charset="-122"/>
                 <a:cs typeface="Arial" pitchFamily="34" charset="-120"/>
               </a:rPr>
-              <a:t>3.  Discipline beat complexity. </a:t>
+              <a:t>3.  The AR(1) leans downward. </a:t>
             </a:r>
             <a:pPr indent="0" marL="0">
               <a:spcAft>
@@ -7453,7 +9027,7 @@
                 <a:ea typeface="Arial" pitchFamily="34" charset="-122"/>
                 <a:cs typeface="Arial" pitchFamily="34" charset="-120"/>
               </a:rPr>
-              <a:t>Gradient boosting, run under identical rules, lost by 2.2%.</a:t>
+              <a:t>Its implied level was below spot at 261 of 261 origins. That is an observation, not shown to be the full explanation.</a:t>
             </a:r>
             <a:endParaRPr lang="en-US" sz="1900" dirty="0"/>
           </a:p>
@@ -7490,7 +9064,7 @@
                 <a:ea typeface="Arial" pitchFamily="34" charset="-122"/>
                 <a:cs typeface="Arial" pitchFamily="34" charset="-120"/>
               </a:rPr>
-              <a:t>Not statistically significant (DM p = 0.45). The benchmark wins on MAE and in 2025. Untested as a trading strategy.</a:t>
+              <a:t>Significance, directional skill (the combination's 46.4% accuracy equals the share of rises), or profitability. All 2021 to 2025 results are exploratory.</a:t>
             </a:r>
             <a:endParaRPr lang="en-US" sz="1900" dirty="0"/>
           </a:p>
@@ -7751,26 +9325,6 @@
                 <a:ea typeface="Arial" pitchFamily="34" charset="-122"/>
                 <a:cs typeface="Arial" pitchFamily="34" charset="-120"/>
               </a:rPr>
-              <a:t>Codera Analytics (2024-25). What drives the rand?; USDZAR Forecasts. codera.co.za.</a:t>
-            </a:r>
-            <a:endParaRPr lang="en-US" sz="1400" dirty="0"/>
-          </a:p>
-          <a:p>
-            <a:pPr indent="0" marL="0">
-              <a:spcAft>
-                <a:spcPts val="900"/>
-              </a:spcAft>
-              <a:buNone/>
-            </a:pPr>
-            <a:r>
-              <a:rPr lang="en-US" sz="1400" dirty="0">
-                <a:solidFill>
-                  <a:srgbClr val="1F2937"/>
-                </a:solidFill>
-                <a:latin typeface="Arial" pitchFamily="34" charset="0"/>
-                <a:ea typeface="Arial" pitchFamily="34" charset="-122"/>
-                <a:cs typeface="Arial" pitchFamily="34" charset="-120"/>
-              </a:rPr>
               <a:t>Darvas, Z. (2020). Forecasting exchange rates of major currencies with long maturity interest rates. Bruegel Working Paper 2020/02.</a:t>
             </a:r>
             <a:endParaRPr lang="en-US" sz="1400" dirty="0"/>
@@ -7811,7 +9365,7 @@
                 <a:ea typeface="Arial" pitchFamily="34" charset="-122"/>
                 <a:cs typeface="Arial" pitchFamily="34" charset="-120"/>
               </a:rPr>
-              <a:t>Makridakis, S., Spiliotis, E. and Assimakopoulos, V. (2020, 2022). The M4 and M5 accuracy competitions: results, findings and conclusions. International Journal of Forecasting.</a:t>
+              <a:t>Makridakis, S., Spiliotis, E. and Assimakopoulos, V. (2022). M5 accuracy competition: results, findings, and conclusions. International Journal of Forecasting.</a:t>
             </a:r>
             <a:endParaRPr lang="en-US" sz="1400" dirty="0"/>
           </a:p>
@@ -7957,7 +9511,7 @@
         <p:spPr>
           <a:xfrm>
             <a:off x="566928" y="310896"/>
-            <a:ext cx="11064240" cy="603504"/>
+            <a:ext cx="11064240" cy="914400"/>
           </a:xfrm>
           <a:prstGeom prst="rect">
             <a:avLst/>
@@ -7981,7 +9535,7 @@
                 <a:ea typeface="Arial" pitchFamily="34" charset="-122"/>
                 <a:cs typeface="Arial" pitchFamily="34" charset="-120"/>
               </a:rPr>
-              <a:t>Full results for every model on every metric</a:t>
+              <a:t>Full results for every model: the leaders differ by 0.00068 in RMSE</a:t>
             </a:r>
             <a:endParaRPr lang="en-US" sz="2600" dirty="0"/>
           </a:p>
@@ -7995,7 +9549,7 @@
         </p:nvSpPr>
         <p:spPr>
           <a:xfrm>
-            <a:off x="566928" y="969264"/>
+            <a:off x="566928" y="1243584"/>
             <a:ext cx="11064240" cy="18288"/>
           </a:xfrm>
           <a:prstGeom prst="rect">
@@ -8066,7 +9620,7 @@
           </p:nvPr>
         </p:nvGraphicFramePr>
         <p:xfrm>
-          <a:off x="566928" y="1234440"/>
+          <a:off x="566928" y="1371600"/>
           <a:ext cx="11064240" cy="914400"/>
         </p:xfrm>
         <a:graphic>
@@ -8074,15 +9628,14 @@
             <a:tbl>
               <a:tblPr/>
               <a:tblGrid>
-                <a:gridCol w="2651760"/>
-                <a:gridCol w="1371600"/>
-                <a:gridCol w="1371600"/>
-                <a:gridCol w="1097280"/>
-                <a:gridCol w="1371600"/>
-                <a:gridCol w="1097280"/>
-                <a:gridCol w="2103120"/>
+                <a:gridCol w="3931920"/>
+                <a:gridCol w="1280160"/>
+                <a:gridCol w="1280160"/>
+                <a:gridCol w="1828800"/>
+                <a:gridCol w="1005840"/>
+                <a:gridCol w="1737360"/>
               </a:tblGrid>
-              <a:tr h="457200">
+              <a:tr h="310896">
                 <a:tc>
                   <a:txBody>
                     <a:bodyPr/>
@@ -8092,7 +9645,7 @@
                         <a:buNone/>
                       </a:pPr>
                       <a:r>
-                        <a:rPr lang="en-US" sz="1300" b="1" dirty="0">
+                        <a:rPr lang="en-US" sz="1200" b="1" dirty="0">
                           <a:solidFill>
                             <a:srgbClr val="FFFFFF"/>
                           </a:solidFill>
@@ -8102,14 +9655,14 @@
                         </a:rPr>
                         <a:t>Model</a:t>
                       </a:r>
-                      <a:endParaRPr lang="en-US" sz="1300" dirty="0">
+                      <a:endParaRPr lang="en-US" sz="1200" dirty="0">
                         <a:latin typeface="Arial" charset="0"/>
                         <a:ea typeface="Arial" charset="0"/>
                         <a:cs typeface="Arial" charset="0"/>
                       </a:endParaRPr>
                     </a:p>
                   </a:txBody>
-                  <a:tcPr marL="54864" marR="54864" marT="54864" marB="54864" anchor="ctr">
+                  <a:tcPr marL="45720" marR="45720" marT="45720" marB="45720" anchor="ctr">
                     <a:lnL w="6350" cap="flat" cmpd="sng" algn="ctr">
                       <a:solidFill>
                         <a:srgbClr val="D6DEE6"/>
@@ -8160,7 +9713,7 @@
                         <a:buNone/>
                       </a:pPr>
                       <a:r>
-                        <a:rPr lang="en-US" sz="1300" b="1" dirty="0">
+                        <a:rPr lang="en-US" sz="1200" b="1" dirty="0">
                           <a:solidFill>
                             <a:srgbClr val="FFFFFF"/>
                           </a:solidFill>
@@ -8170,14 +9723,14 @@
                         </a:rPr>
                         <a:t>RMSE</a:t>
                       </a:r>
-                      <a:endParaRPr lang="en-US" sz="1300" dirty="0">
+                      <a:endParaRPr lang="en-US" sz="1200" dirty="0">
                         <a:latin typeface="Arial" charset="0"/>
                         <a:ea typeface="Arial" charset="0"/>
                         <a:cs typeface="Arial" charset="0"/>
                       </a:endParaRPr>
                     </a:p>
                   </a:txBody>
-                  <a:tcPr marL="54864" marR="54864" marT="54864" marB="54864" anchor="ctr">
+                  <a:tcPr marL="45720" marR="45720" marT="45720" marB="45720" anchor="ctr">
                     <a:lnL w="6350" cap="flat" cmpd="sng" algn="ctr">
                       <a:solidFill>
                         <a:srgbClr val="D6DEE6"/>
@@ -8228,7 +9781,7 @@
                         <a:buNone/>
                       </a:pPr>
                       <a:r>
-                        <a:rPr lang="en-US" sz="1300" b="1" dirty="0">
+                        <a:rPr lang="en-US" sz="1200" b="1" dirty="0">
                           <a:solidFill>
                             <a:srgbClr val="FFFFFF"/>
                           </a:solidFill>
@@ -8238,14 +9791,14 @@
                         </a:rPr>
                         <a:t>MAE</a:t>
                       </a:r>
-                      <a:endParaRPr lang="en-US" sz="1300" dirty="0">
+                      <a:endParaRPr lang="en-US" sz="1200" dirty="0">
                         <a:latin typeface="Arial" charset="0"/>
                         <a:ea typeface="Arial" charset="0"/>
                         <a:cs typeface="Arial" charset="0"/>
                       </a:endParaRPr>
                     </a:p>
                   </a:txBody>
-                  <a:tcPr marL="54864" marR="54864" marT="54864" marB="54864" anchor="ctr">
+                  <a:tcPr marL="45720" marR="45720" marT="45720" marB="45720" anchor="ctr">
                     <a:lnL w="6350" cap="flat" cmpd="sng" algn="ctr">
                       <a:solidFill>
                         <a:srgbClr val="D6DEE6"/>
@@ -8296,7 +9849,7 @@
                         <a:buNone/>
                       </a:pPr>
                       <a:r>
-                        <a:rPr lang="en-US" sz="1300" b="1" dirty="0">
+                        <a:rPr lang="en-US" sz="1200" b="1" dirty="0">
                           <a:solidFill>
                             <a:srgbClr val="FFFFFF"/>
                           </a:solidFill>
@@ -8304,16 +9857,16 @@
                           <a:ea typeface="Arial" pitchFamily="34" charset="-122"/>
                           <a:cs typeface="Arial" pitchFamily="34" charset="-120"/>
                         </a:rPr>
-                        <a:t>Dir.</a:t>
+                        <a:t>RMSE below AR(1)</a:t>
                       </a:r>
-                      <a:endParaRPr lang="en-US" sz="1300" dirty="0">
+                      <a:endParaRPr lang="en-US" sz="1200" dirty="0">
                         <a:latin typeface="Arial" charset="0"/>
                         <a:ea typeface="Arial" charset="0"/>
                         <a:cs typeface="Arial" charset="0"/>
                       </a:endParaRPr>
                     </a:p>
                   </a:txBody>
-                  <a:tcPr marL="54864" marR="54864" marT="54864" marB="54864" anchor="ctr">
+                  <a:tcPr marL="45720" marR="45720" marT="45720" marB="45720" anchor="ctr">
                     <a:lnL w="6350" cap="flat" cmpd="sng" algn="ctr">
                       <a:solidFill>
                         <a:srgbClr val="D6DEE6"/>
@@ -8364,7 +9917,7 @@
                         <a:buNone/>
                       </a:pPr>
                       <a:r>
-                        <a:rPr lang="en-US" sz="1300" b="1" dirty="0">
+                        <a:rPr lang="en-US" sz="1200" b="1" dirty="0">
                           <a:solidFill>
                             <a:srgbClr val="FFFFFF"/>
                           </a:solidFill>
@@ -8372,16 +9925,16 @@
                           <a:ea typeface="Arial" pitchFamily="34" charset="-122"/>
                           <a:cs typeface="Arial" pitchFamily="34" charset="-120"/>
                         </a:rPr>
-                        <a:t>vs AR(1)</a:t>
+                        <a:t>Rank</a:t>
                       </a:r>
-                      <a:endParaRPr lang="en-US" sz="1300" dirty="0">
+                      <a:endParaRPr lang="en-US" sz="1200" dirty="0">
                         <a:latin typeface="Arial" charset="0"/>
                         <a:ea typeface="Arial" charset="0"/>
                         <a:cs typeface="Arial" charset="0"/>
                       </a:endParaRPr>
                     </a:p>
                   </a:txBody>
-                  <a:tcPr marL="54864" marR="54864" marT="54864" marB="54864" anchor="ctr">
+                  <a:tcPr marL="45720" marR="45720" marT="45720" marB="45720" anchor="ctr">
                     <a:lnL w="6350" cap="flat" cmpd="sng" algn="ctr">
                       <a:solidFill>
                         <a:srgbClr val="D6DEE6"/>
@@ -8432,7 +9985,7 @@
                         <a:buNone/>
                       </a:pPr>
                       <a:r>
-                        <a:rPr lang="en-US" sz="1300" b="1" dirty="0">
+                        <a:rPr lang="en-US" sz="1200" b="1" dirty="0">
                           <a:solidFill>
                             <a:srgbClr val="FFFFFF"/>
                           </a:solidFill>
@@ -8440,16 +9993,16 @@
                           <a:ea typeface="Arial" pitchFamily="34" charset="-122"/>
                           <a:cs typeface="Arial" pitchFamily="34" charset="-120"/>
                         </a:rPr>
-                        <a:t>DM p</a:t>
+                        <a:t>Calls a rise</a:t>
                       </a:r>
-                      <a:endParaRPr lang="en-US" sz="1300" dirty="0">
+                      <a:endParaRPr lang="en-US" sz="1200" dirty="0">
                         <a:latin typeface="Arial" charset="0"/>
                         <a:ea typeface="Arial" charset="0"/>
                         <a:cs typeface="Arial" charset="0"/>
                       </a:endParaRPr>
                     </a:p>
                   </a:txBody>
-                  <a:tcPr marL="54864" marR="54864" marT="54864" marB="54864" anchor="ctr">
+                  <a:tcPr marL="45720" marR="45720" marT="45720" marB="45720" anchor="ctr">
                     <a:lnL w="6350" cap="flat" cmpd="sng" algn="ctr">
                       <a:solidFill>
                         <a:srgbClr val="D6DEE6"/>
@@ -8491,6 +10044,8 @@
                     </a:solidFill>
                   </a:tcPr>
                 </a:tc>
+              </a:tr>
+              <a:tr h="310896">
                 <a:tc>
                   <a:txBody>
                     <a:bodyPr/>
@@ -8500,77 +10055,7 @@
                         <a:buNone/>
                       </a:pPr>
                       <a:r>
-                        <a:rPr lang="en-US" sz="1300" b="1" dirty="0">
-                          <a:solidFill>
-                            <a:srgbClr val="FFFFFF"/>
-                          </a:solidFill>
-                          <a:latin typeface="Arial" pitchFamily="34" charset="0"/>
-                          <a:ea typeface="Arial" pitchFamily="34" charset="-122"/>
-                          <a:cs typeface="Arial" pitchFamily="34" charset="-120"/>
-                        </a:rPr>
-                        <a:t>Targets &lt;=2025</a:t>
-                      </a:r>
-                      <a:endParaRPr lang="en-US" sz="1300" dirty="0">
-                        <a:latin typeface="Arial" charset="0"/>
-                        <a:ea typeface="Arial" charset="0"/>
-                        <a:cs typeface="Arial" charset="0"/>
-                      </a:endParaRPr>
-                    </a:p>
-                  </a:txBody>
-                  <a:tcPr marL="54864" marR="54864" marT="54864" marB="54864" anchor="ctr">
-                    <a:lnL w="6350" cap="flat" cmpd="sng" algn="ctr">
-                      <a:solidFill>
-                        <a:srgbClr val="D6DEE6"/>
-                      </a:solidFill>
-                      <a:prstDash val="solid"/>
-                      <a:round/>
-                      <a:headEnd type="none" w="med" len="med"/>
-                      <a:tailEnd type="none" w="med" len="med"/>
-                    </a:lnL>
-                    <a:lnR w="6350" cap="flat" cmpd="sng" algn="ctr">
-                      <a:solidFill>
-                        <a:srgbClr val="D6DEE6"/>
-                      </a:solidFill>
-                      <a:prstDash val="solid"/>
-                      <a:round/>
-                      <a:headEnd type="none" w="med" len="med"/>
-                      <a:tailEnd type="none" w="med" len="med"/>
-                    </a:lnR>
-                    <a:lnT w="6350" cap="flat" cmpd="sng" algn="ctr">
-                      <a:solidFill>
-                        <a:srgbClr val="D6DEE6"/>
-                      </a:solidFill>
-                      <a:prstDash val="solid"/>
-                      <a:round/>
-                      <a:headEnd type="none" w="med" len="med"/>
-                      <a:tailEnd type="none" w="med" len="med"/>
-                    </a:lnT>
-                    <a:lnB w="6350" cap="flat" cmpd="sng" algn="ctr">
-                      <a:solidFill>
-                        <a:srgbClr val="D6DEE6"/>
-                      </a:solidFill>
-                      <a:prstDash val="solid"/>
-                      <a:round/>
-                      <a:headEnd type="none" w="med" len="med"/>
-                      <a:tailEnd type="none" w="med" len="med"/>
-                    </a:lnB>
-                    <a:solidFill>
-                      <a:srgbClr val="0E2A3B"/>
-                    </a:solidFill>
-                  </a:tcPr>
-                </a:tc>
-              </a:tr>
-              <a:tr h="457200">
-                <a:tc>
-                  <a:txBody>
-                    <a:bodyPr/>
-                    <a:lstStyle/>
-                    <a:p>
-                      <a:pPr algn="ctr" indent="0" marL="0">
-                        <a:buNone/>
-                      </a:pPr>
-                      <a:r>
-                        <a:rPr lang="en-US" sz="1300" dirty="0">
+                        <a:rPr lang="en-US" sz="1200" dirty="0">
                           <a:solidFill>
                             <a:srgbClr val="1F2937"/>
                           </a:solidFill>
@@ -8578,16 +10063,16 @@
                           <a:ea typeface="Arial" pitchFamily="34" charset="-122"/>
                           <a:cs typeface="Arial" pitchFamily="34" charset="-120"/>
                         </a:rPr>
-                        <a:t>AR(1) log (baseline)</a:t>
+                        <a:t>AR(1), log level (benchmark)</a:t>
                       </a:r>
-                      <a:endParaRPr lang="en-US" sz="1300" dirty="0">
+                      <a:endParaRPr lang="en-US" sz="1200" dirty="0">
                         <a:latin typeface="Arial" charset="0"/>
                         <a:ea typeface="Arial" charset="0"/>
                         <a:cs typeface="Arial" charset="0"/>
                       </a:endParaRPr>
                     </a:p>
                   </a:txBody>
-                  <a:tcPr marL="54864" marR="54864" marT="54864" marB="54864" anchor="ctr">
+                  <a:tcPr marL="45720" marR="45720" marT="45720" marB="45720" anchor="ctr">
                     <a:lnL w="6350" cap="flat" cmpd="sng" algn="ctr">
                       <a:solidFill>
                         <a:srgbClr val="D6DEE6"/>
@@ -8635,7 +10120,7 @@
                         <a:buNone/>
                       </a:pPr>
                       <a:r>
-                        <a:rPr lang="en-US" sz="1300" dirty="0">
+                        <a:rPr lang="en-US" sz="1200" dirty="0">
                           <a:solidFill>
                             <a:srgbClr val="1F2937"/>
                           </a:solidFill>
@@ -8645,14 +10130,14 @@
                         </a:rPr>
                         <a:t>0.5624</a:t>
                       </a:r>
-                      <a:endParaRPr lang="en-US" sz="1300" dirty="0">
+                      <a:endParaRPr lang="en-US" sz="1200" dirty="0">
                         <a:latin typeface="Arial" charset="0"/>
                         <a:ea typeface="Arial" charset="0"/>
                         <a:cs typeface="Arial" charset="0"/>
                       </a:endParaRPr>
                     </a:p>
                   </a:txBody>
-                  <a:tcPr marL="54864" marR="54864" marT="54864" marB="54864" anchor="ctr">
+                  <a:tcPr marL="45720" marR="45720" marT="45720" marB="45720" anchor="ctr">
                     <a:lnL w="6350" cap="flat" cmpd="sng" algn="ctr">
                       <a:solidFill>
                         <a:srgbClr val="D6DEE6"/>
@@ -8700,7 +10185,7 @@
                         <a:buNone/>
                       </a:pPr>
                       <a:r>
-                        <a:rPr lang="en-US" sz="1300" dirty="0">
+                        <a:rPr lang="en-US" sz="1200" dirty="0">
                           <a:solidFill>
                             <a:srgbClr val="1F2937"/>
                           </a:solidFill>
@@ -8710,14 +10195,68 @@
                         </a:rPr>
                         <a:t>0.4478</a:t>
                       </a:r>
-                      <a:endParaRPr lang="en-US" sz="1300" dirty="0">
+                      <a:endParaRPr lang="en-US" sz="1200" dirty="0">
                         <a:latin typeface="Arial" charset="0"/>
                         <a:ea typeface="Arial" charset="0"/>
                         <a:cs typeface="Arial" charset="0"/>
                       </a:endParaRPr>
                     </a:p>
                   </a:txBody>
-                  <a:tcPr marL="54864" marR="54864" marT="54864" marB="54864" anchor="ctr">
+                  <a:tcPr marL="45720" marR="45720" marT="45720" marB="45720" anchor="ctr">
+                    <a:lnL w="6350" cap="flat" cmpd="sng" algn="ctr">
+                      <a:solidFill>
+                        <a:srgbClr val="D6DEE6"/>
+                      </a:solidFill>
+                      <a:prstDash val="solid"/>
+                      <a:round/>
+                      <a:headEnd type="none" w="med" len="med"/>
+                      <a:tailEnd type="none" w="med" len="med"/>
+                    </a:lnL>
+                    <a:lnR w="6350" cap="flat" cmpd="sng" algn="ctr">
+                      <a:solidFill>
+                        <a:srgbClr val="D6DEE6"/>
+                      </a:solidFill>
+                      <a:prstDash val="solid"/>
+                      <a:round/>
+                      <a:headEnd type="none" w="med" len="med"/>
+                      <a:tailEnd type="none" w="med" len="med"/>
+                    </a:lnR>
+                    <a:lnT w="6350" cap="flat" cmpd="sng" algn="ctr">
+                      <a:solidFill>
+                        <a:srgbClr val="D6DEE6"/>
+                      </a:solidFill>
+                      <a:prstDash val="solid"/>
+                      <a:round/>
+                      <a:headEnd type="none" w="med" len="med"/>
+                      <a:tailEnd type="none" w="med" len="med"/>
+                    </a:lnT>
+                    <a:lnB w="6350" cap="flat" cmpd="sng" algn="ctr">
+                      <a:solidFill>
+                        <a:srgbClr val="D6DEE6"/>
+                      </a:solidFill>
+                      <a:prstDash val="solid"/>
+                      <a:round/>
+                      <a:headEnd type="none" w="med" len="med"/>
+                      <a:tailEnd type="none" w="med" len="med"/>
+                    </a:lnB>
+                  </a:tcPr>
+                </a:tc>
+                <a:tc>
+                  <a:txBody>
+                    <a:bodyPr/>
+                    <a:lstStyle/>
+                    <a:p>
+                      <a:pPr algn="ctr" indent="0" marL="0">
+                        <a:buNone/>
+                      </a:pPr>
+                      <a:endParaRPr lang="en-US" sz="1200" dirty="0">
+                        <a:latin typeface="Arial" charset="0"/>
+                        <a:ea typeface="Arial" charset="0"/>
+                        <a:cs typeface="Arial" charset="0"/>
+                      </a:endParaRPr>
+                    </a:p>
+                  </a:txBody>
+                  <a:tcPr marL="45720" marR="45720" marT="45720" marB="45720" anchor="ctr">
                     <a:lnL w="6350" cap="flat" cmpd="sng" algn="ctr">
                       <a:solidFill>
                         <a:srgbClr val="D6DEE6"/>
@@ -8765,7 +10304,7 @@
                         <a:buNone/>
                       </a:pPr>
                       <a:r>
-                        <a:rPr lang="en-US" sz="1300" dirty="0">
+                        <a:rPr lang="en-US" sz="1200" dirty="0">
                           <a:solidFill>
                             <a:srgbClr val="1F2937"/>
                           </a:solidFill>
@@ -8773,16 +10312,16 @@
                           <a:ea typeface="Arial" pitchFamily="34" charset="-122"/>
                           <a:cs typeface="Arial" pitchFamily="34" charset="-120"/>
                         </a:rPr>
-                        <a:t>53.6%</a:t>
+                        <a:t>9</a:t>
                       </a:r>
-                      <a:endParaRPr lang="en-US" sz="1300" dirty="0">
+                      <a:endParaRPr lang="en-US" sz="1200" dirty="0">
                         <a:latin typeface="Arial" charset="0"/>
                         <a:ea typeface="Arial" charset="0"/>
                         <a:cs typeface="Arial" charset="0"/>
                       </a:endParaRPr>
                     </a:p>
                   </a:txBody>
-                  <a:tcPr marL="54864" marR="54864" marT="54864" marB="54864" anchor="ctr">
+                  <a:tcPr marL="45720" marR="45720" marT="45720" marB="45720" anchor="ctr">
                     <a:lnL w="6350" cap="flat" cmpd="sng" algn="ctr">
                       <a:solidFill>
                         <a:srgbClr val="D6DEE6"/>
@@ -8830,7 +10369,7 @@
                         <a:buNone/>
                       </a:pPr>
                       <a:r>
-                        <a:rPr lang="en-US" sz="1300" dirty="0">
+                        <a:rPr lang="en-US" sz="1200" dirty="0">
                           <a:solidFill>
                             <a:srgbClr val="1F2937"/>
                           </a:solidFill>
@@ -8838,16 +10377,83 @@
                           <a:ea typeface="Arial" pitchFamily="34" charset="-122"/>
                           <a:cs typeface="Arial" pitchFamily="34" charset="-120"/>
                         </a:rPr>
-                        <a:t>-</a:t>
+                        <a:t>0%</a:t>
                       </a:r>
-                      <a:endParaRPr lang="en-US" sz="1300" dirty="0">
+                      <a:endParaRPr lang="en-US" sz="1200" dirty="0">
                         <a:latin typeface="Arial" charset="0"/>
                         <a:ea typeface="Arial" charset="0"/>
                         <a:cs typeface="Arial" charset="0"/>
                       </a:endParaRPr>
                     </a:p>
                   </a:txBody>
-                  <a:tcPr marL="54864" marR="54864" marT="54864" marB="54864" anchor="ctr">
+                  <a:tcPr marL="45720" marR="45720" marT="45720" marB="45720" anchor="ctr">
+                    <a:lnL w="6350" cap="flat" cmpd="sng" algn="ctr">
+                      <a:solidFill>
+                        <a:srgbClr val="D6DEE6"/>
+                      </a:solidFill>
+                      <a:prstDash val="solid"/>
+                      <a:round/>
+                      <a:headEnd type="none" w="med" len="med"/>
+                      <a:tailEnd type="none" w="med" len="med"/>
+                    </a:lnL>
+                    <a:lnR w="6350" cap="flat" cmpd="sng" algn="ctr">
+                      <a:solidFill>
+                        <a:srgbClr val="D6DEE6"/>
+                      </a:solidFill>
+                      <a:prstDash val="solid"/>
+                      <a:round/>
+                      <a:headEnd type="none" w="med" len="med"/>
+                      <a:tailEnd type="none" w="med" len="med"/>
+                    </a:lnR>
+                    <a:lnT w="6350" cap="flat" cmpd="sng" algn="ctr">
+                      <a:solidFill>
+                        <a:srgbClr val="D6DEE6"/>
+                      </a:solidFill>
+                      <a:prstDash val="solid"/>
+                      <a:round/>
+                      <a:headEnd type="none" w="med" len="med"/>
+                      <a:tailEnd type="none" w="med" len="med"/>
+                    </a:lnT>
+                    <a:lnB w="6350" cap="flat" cmpd="sng" algn="ctr">
+                      <a:solidFill>
+                        <a:srgbClr val="D6DEE6"/>
+                      </a:solidFill>
+                      <a:prstDash val="solid"/>
+                      <a:round/>
+                      <a:headEnd type="none" w="med" len="med"/>
+                      <a:tailEnd type="none" w="med" len="med"/>
+                    </a:lnB>
+                  </a:tcPr>
+                </a:tc>
+              </a:tr>
+              <a:tr h="310896">
+                <a:tc>
+                  <a:txBody>
+                    <a:bodyPr/>
+                    <a:lstStyle/>
+                    <a:p>
+                      <a:pPr algn="ctr" indent="0" marL="0">
+                        <a:buNone/>
+                      </a:pPr>
+                      <a:r>
+                        <a:rPr lang="en-US" sz="1200" dirty="0">
+                          <a:solidFill>
+                            <a:srgbClr val="1F2937"/>
+                          </a:solidFill>
+                          <a:latin typeface="Arial" pitchFamily="34" charset="0"/>
+                          <a:ea typeface="Arial" pitchFamily="34" charset="-122"/>
+                          <a:cs typeface="Arial" pitchFamily="34" charset="-120"/>
+                        </a:rPr>
+                        <a:t>AR(1), level</a:t>
+                      </a:r>
+                      <a:endParaRPr lang="en-US" sz="1200" dirty="0">
+                        <a:latin typeface="Arial" charset="0"/>
+                        <a:ea typeface="Arial" charset="0"/>
+                        <a:cs typeface="Arial" charset="0"/>
+                      </a:endParaRPr>
+                    </a:p>
+                  </a:txBody>
+                  <a:tcPr marL="45720" marR="45720" marT="45720" marB="45720" anchor="ctr">
                     <a:lnL w="6350" cap="flat" cmpd="sng" algn="ctr">
                       <a:solidFill>
                         <a:srgbClr val="D6DEE6"/>
@@ -8895,7 +10501,7 @@
                         <a:buNone/>
                       </a:pPr>
                       <a:r>
-                        <a:rPr lang="en-US" sz="1300" dirty="0">
+                        <a:rPr lang="en-US" sz="1200" dirty="0">
                           <a:solidFill>
                             <a:srgbClr val="1F2937"/>
                           </a:solidFill>
@@ -8903,16 +10509,16 @@
                           <a:ea typeface="Arial" pitchFamily="34" charset="-122"/>
                           <a:cs typeface="Arial" pitchFamily="34" charset="-120"/>
                         </a:rPr>
-                        <a:t>-</a:t>
+                        <a:t>0.5629</a:t>
                       </a:r>
-                      <a:endParaRPr lang="en-US" sz="1300" dirty="0">
+                      <a:endParaRPr lang="en-US" sz="1200" dirty="0">
                         <a:latin typeface="Arial" charset="0"/>
                         <a:ea typeface="Arial" charset="0"/>
                         <a:cs typeface="Arial" charset="0"/>
                       </a:endParaRPr>
                     </a:p>
                   </a:txBody>
-                  <a:tcPr marL="54864" marR="54864" marT="54864" marB="54864" anchor="ctr">
+                  <a:tcPr marL="45720" marR="45720" marT="45720" marB="45720" anchor="ctr">
                     <a:lnL w="6350" cap="flat" cmpd="sng" algn="ctr">
                       <a:solidFill>
                         <a:srgbClr val="D6DEE6"/>
@@ -8960,7 +10566,7 @@
                         <a:buNone/>
                       </a:pPr>
                       <a:r>
-                        <a:rPr lang="en-US" sz="1300" dirty="0">
+                        <a:rPr lang="en-US" sz="1200" dirty="0">
                           <a:solidFill>
                             <a:srgbClr val="1F2937"/>
                           </a:solidFill>
@@ -8968,83 +10574,16 @@
                           <a:ea typeface="Arial" pitchFamily="34" charset="-122"/>
                           <a:cs typeface="Arial" pitchFamily="34" charset="-120"/>
                         </a:rPr>
-                        <a:t>0.5647</a:t>
+                        <a:t>0.4492</a:t>
                       </a:r>
-                      <a:endParaRPr lang="en-US" sz="1300" dirty="0">
+                      <a:endParaRPr lang="en-US" sz="1200" dirty="0">
                         <a:latin typeface="Arial" charset="0"/>
                         <a:ea typeface="Arial" charset="0"/>
                         <a:cs typeface="Arial" charset="0"/>
                       </a:endParaRPr>
                     </a:p>
                   </a:txBody>
-                  <a:tcPr marL="54864" marR="54864" marT="54864" marB="54864" anchor="ctr">
-                    <a:lnL w="6350" cap="flat" cmpd="sng" algn="ctr">
-                      <a:solidFill>
-                        <a:srgbClr val="D6DEE6"/>
-                      </a:solidFill>
-                      <a:prstDash val="solid"/>
-                      <a:round/>
-                      <a:headEnd type="none" w="med" len="med"/>
-                      <a:tailEnd type="none" w="med" len="med"/>
-                    </a:lnL>
-                    <a:lnR w="6350" cap="flat" cmpd="sng" algn="ctr">
-                      <a:solidFill>
-                        <a:srgbClr val="D6DEE6"/>
-                      </a:solidFill>
-                      <a:prstDash val="solid"/>
-                      <a:round/>
-                      <a:headEnd type="none" w="med" len="med"/>
-                      <a:tailEnd type="none" w="med" len="med"/>
-                    </a:lnR>
-                    <a:lnT w="6350" cap="flat" cmpd="sng" algn="ctr">
-                      <a:solidFill>
-                        <a:srgbClr val="D6DEE6"/>
-                      </a:solidFill>
-                      <a:prstDash val="solid"/>
-                      <a:round/>
-                      <a:headEnd type="none" w="med" len="med"/>
-                      <a:tailEnd type="none" w="med" len="med"/>
-                    </a:lnT>
-                    <a:lnB w="6350" cap="flat" cmpd="sng" algn="ctr">
-                      <a:solidFill>
-                        <a:srgbClr val="D6DEE6"/>
-                      </a:solidFill>
-                      <a:prstDash val="solid"/>
-                      <a:round/>
-                      <a:headEnd type="none" w="med" len="med"/>
-                      <a:tailEnd type="none" w="med" len="med"/>
-                    </a:lnB>
-                  </a:tcPr>
-                </a:tc>
-              </a:tr>
-              <a:tr h="457200">
-                <a:tc>
-                  <a:txBody>
-                    <a:bodyPr/>
-                    <a:lstStyle/>
-                    <a:p>
-                      <a:pPr algn="ctr" indent="0" marL="0">
-                        <a:buNone/>
-                      </a:pPr>
-                      <a:r>
-                        <a:rPr lang="en-US" sz="1300" dirty="0">
-                          <a:solidFill>
-                            <a:srgbClr val="1F2937"/>
-                          </a:solidFill>
-                          <a:latin typeface="Arial" pitchFamily="34" charset="0"/>
-                          <a:ea typeface="Arial" pitchFamily="34" charset="-122"/>
-                          <a:cs typeface="Arial" pitchFamily="34" charset="-120"/>
-                        </a:rPr>
-                        <a:t>AR(1) level</a:t>
-                      </a:r>
-                      <a:endParaRPr lang="en-US" sz="1300" dirty="0">
-                        <a:latin typeface="Arial" charset="0"/>
-                        <a:ea typeface="Arial" charset="0"/>
-                        <a:cs typeface="Arial" charset="0"/>
-                      </a:endParaRPr>
-                    </a:p>
-                  </a:txBody>
-                  <a:tcPr marL="54864" marR="54864" marT="54864" marB="54864" anchor="ctr">
+                  <a:tcPr marL="45720" marR="45720" marT="45720" marB="45720" anchor="ctr">
                     <a:lnL w="6350" cap="flat" cmpd="sng" algn="ctr">
                       <a:solidFill>
                         <a:srgbClr val="D6DEE6"/>
@@ -9092,7 +10631,7 @@
                         <a:buNone/>
                       </a:pPr>
                       <a:r>
-                        <a:rPr lang="en-US" sz="1300" dirty="0">
+                        <a:rPr lang="en-US" sz="1200" dirty="0">
                           <a:solidFill>
                             <a:srgbClr val="1F2937"/>
                           </a:solidFill>
@@ -9100,16 +10639,16 @@
                           <a:ea typeface="Arial" pitchFamily="34" charset="-122"/>
                           <a:cs typeface="Arial" pitchFamily="34" charset="-120"/>
                         </a:rPr>
-                        <a:t>0.5629</a:t>
+                        <a:t>-0.09%</a:t>
                       </a:r>
-                      <a:endParaRPr lang="en-US" sz="1300" dirty="0">
+                      <a:endParaRPr lang="en-US" sz="1200" dirty="0">
                         <a:latin typeface="Arial" charset="0"/>
                         <a:ea typeface="Arial" charset="0"/>
                         <a:cs typeface="Arial" charset="0"/>
                       </a:endParaRPr>
                     </a:p>
                   </a:txBody>
-                  <a:tcPr marL="54864" marR="54864" marT="54864" marB="54864" anchor="ctr">
+                  <a:tcPr marL="45720" marR="45720" marT="45720" marB="45720" anchor="ctr">
                     <a:lnL w="6350" cap="flat" cmpd="sng" algn="ctr">
                       <a:solidFill>
                         <a:srgbClr val="D6DEE6"/>
@@ -9157,7 +10696,7 @@
                         <a:buNone/>
                       </a:pPr>
                       <a:r>
-                        <a:rPr lang="en-US" sz="1300" dirty="0">
+                        <a:rPr lang="en-US" sz="1200" dirty="0">
                           <a:solidFill>
                             <a:srgbClr val="1F2937"/>
                           </a:solidFill>
@@ -9165,16 +10704,16 @@
                           <a:ea typeface="Arial" pitchFamily="34" charset="-122"/>
                           <a:cs typeface="Arial" pitchFamily="34" charset="-120"/>
                         </a:rPr>
-                        <a:t>0.4492</a:t>
+                        <a:t>11</a:t>
                       </a:r>
-                      <a:endParaRPr lang="en-US" sz="1300" dirty="0">
+                      <a:endParaRPr lang="en-US" sz="1200" dirty="0">
                         <a:latin typeface="Arial" charset="0"/>
                         <a:ea typeface="Arial" charset="0"/>
                         <a:cs typeface="Arial" charset="0"/>
                       </a:endParaRPr>
                     </a:p>
                   </a:txBody>
-                  <a:tcPr marL="54864" marR="54864" marT="54864" marB="54864" anchor="ctr">
+                  <a:tcPr marL="45720" marR="45720" marT="45720" marB="45720" anchor="ctr">
                     <a:lnL w="6350" cap="flat" cmpd="sng" algn="ctr">
                       <a:solidFill>
                         <a:srgbClr val="D6DEE6"/>
@@ -9222,7 +10761,7 @@
                         <a:buNone/>
                       </a:pPr>
                       <a:r>
-                        <a:rPr lang="en-US" sz="1300" dirty="0">
+                        <a:rPr lang="en-US" sz="1200" dirty="0">
                           <a:solidFill>
                             <a:srgbClr val="1F2937"/>
                           </a:solidFill>
@@ -9230,16 +10769,83 @@
                           <a:ea typeface="Arial" pitchFamily="34" charset="-122"/>
                           <a:cs typeface="Arial" pitchFamily="34" charset="-120"/>
                         </a:rPr>
-                        <a:t>47.5%</a:t>
+                        <a:t>31%</a:t>
                       </a:r>
-                      <a:endParaRPr lang="en-US" sz="1300" dirty="0">
+                      <a:endParaRPr lang="en-US" sz="1200" dirty="0">
                         <a:latin typeface="Arial" charset="0"/>
                         <a:ea typeface="Arial" charset="0"/>
                         <a:cs typeface="Arial" charset="0"/>
                       </a:endParaRPr>
                     </a:p>
                   </a:txBody>
-                  <a:tcPr marL="54864" marR="54864" marT="54864" marB="54864" anchor="ctr">
+                  <a:tcPr marL="45720" marR="45720" marT="45720" marB="45720" anchor="ctr">
+                    <a:lnL w="6350" cap="flat" cmpd="sng" algn="ctr">
+                      <a:solidFill>
+                        <a:srgbClr val="D6DEE6"/>
+                      </a:solidFill>
+                      <a:prstDash val="solid"/>
+                      <a:round/>
+                      <a:headEnd type="none" w="med" len="med"/>
+                      <a:tailEnd type="none" w="med" len="med"/>
+                    </a:lnL>
+                    <a:lnR w="6350" cap="flat" cmpd="sng" algn="ctr">
+                      <a:solidFill>
+                        <a:srgbClr val="D6DEE6"/>
+                      </a:solidFill>
+                      <a:prstDash val="solid"/>
+                      <a:round/>
+                      <a:headEnd type="none" w="med" len="med"/>
+                      <a:tailEnd type="none" w="med" len="med"/>
+                    </a:lnR>
+                    <a:lnT w="6350" cap="flat" cmpd="sng" algn="ctr">
+                      <a:solidFill>
+                        <a:srgbClr val="D6DEE6"/>
+                      </a:solidFill>
+                      <a:prstDash val="solid"/>
+                      <a:round/>
+                      <a:headEnd type="none" w="med" len="med"/>
+                      <a:tailEnd type="none" w="med" len="med"/>
+                    </a:lnT>
+                    <a:lnB w="6350" cap="flat" cmpd="sng" algn="ctr">
+                      <a:solidFill>
+                        <a:srgbClr val="D6DEE6"/>
+                      </a:solidFill>
+                      <a:prstDash val="solid"/>
+                      <a:round/>
+                      <a:headEnd type="none" w="med" len="med"/>
+                      <a:tailEnd type="none" w="med" len="med"/>
+                    </a:lnB>
+                  </a:tcPr>
+                </a:tc>
+              </a:tr>
+              <a:tr h="310896">
+                <a:tc>
+                  <a:txBody>
+                    <a:bodyPr/>
+                    <a:lstStyle/>
+                    <a:p>
+                      <a:pPr algn="ctr" indent="0" marL="0">
+                        <a:buNone/>
+                      </a:pPr>
+                      <a:r>
+                        <a:rPr lang="en-US" sz="1200" dirty="0">
+                          <a:solidFill>
+                            <a:srgbClr val="1F2937"/>
+                          </a:solidFill>
+                          <a:latin typeface="Arial" pitchFamily="34" charset="0"/>
+                          <a:ea typeface="Arial" pitchFamily="34" charset="-122"/>
+                          <a:cs typeface="Arial" pitchFamily="34" charset="-120"/>
+                        </a:rPr>
+                        <a:t>AR(1), 5-year window</a:t>
+                      </a:r>
+                      <a:endParaRPr lang="en-US" sz="1200" dirty="0">
+                        <a:latin typeface="Arial" charset="0"/>
+                        <a:ea typeface="Arial" charset="0"/>
+                        <a:cs typeface="Arial" charset="0"/>
+                      </a:endParaRPr>
+                    </a:p>
+                  </a:txBody>
+                  <a:tcPr marL="45720" marR="45720" marT="45720" marB="45720" anchor="ctr">
                     <a:lnL w="6350" cap="flat" cmpd="sng" algn="ctr">
                       <a:solidFill>
                         <a:srgbClr val="D6DEE6"/>
@@ -9287,7 +10893,7 @@
                         <a:buNone/>
                       </a:pPr>
                       <a:r>
-                        <a:rPr lang="en-US" sz="1300" dirty="0">
+                        <a:rPr lang="en-US" sz="1200" dirty="0">
                           <a:solidFill>
                             <a:srgbClr val="1F2937"/>
                           </a:solidFill>
@@ -9295,16 +10901,16 @@
                           <a:ea typeface="Arial" pitchFamily="34" charset="-122"/>
                           <a:cs typeface="Arial" pitchFamily="34" charset="-120"/>
                         </a:rPr>
-                        <a:t>-0.09%</a:t>
+                        <a:t>0.5724</a:t>
                       </a:r>
-                      <a:endParaRPr lang="en-US" sz="1300" dirty="0">
+                      <a:endParaRPr lang="en-US" sz="1200" dirty="0">
                         <a:latin typeface="Arial" charset="0"/>
                         <a:ea typeface="Arial" charset="0"/>
                         <a:cs typeface="Arial" charset="0"/>
                       </a:endParaRPr>
                     </a:p>
                   </a:txBody>
-                  <a:tcPr marL="54864" marR="54864" marT="54864" marB="54864" anchor="ctr">
+                  <a:tcPr marL="45720" marR="45720" marT="45720" marB="45720" anchor="ctr">
                     <a:lnL w="6350" cap="flat" cmpd="sng" algn="ctr">
                       <a:solidFill>
                         <a:srgbClr val="D6DEE6"/>
@@ -9352,7 +10958,7 @@
                         <a:buNone/>
                       </a:pPr>
                       <a:r>
-                        <a:rPr lang="en-US" sz="1300" dirty="0">
+                        <a:rPr lang="en-US" sz="1200" dirty="0">
                           <a:solidFill>
                             <a:srgbClr val="1F2937"/>
                           </a:solidFill>
@@ -9360,16 +10966,16 @@
                           <a:ea typeface="Arial" pitchFamily="34" charset="-122"/>
                           <a:cs typeface="Arial" pitchFamily="34" charset="-120"/>
                         </a:rPr>
-                        <a:t>-</a:t>
+                        <a:t>0.4502</a:t>
                       </a:r>
-                      <a:endParaRPr lang="en-US" sz="1300" dirty="0">
+                      <a:endParaRPr lang="en-US" sz="1200" dirty="0">
                         <a:latin typeface="Arial" charset="0"/>
                         <a:ea typeface="Arial" charset="0"/>
                         <a:cs typeface="Arial" charset="0"/>
                       </a:endParaRPr>
                     </a:p>
                   </a:txBody>
-                  <a:tcPr marL="54864" marR="54864" marT="54864" marB="54864" anchor="ctr">
+                  <a:tcPr marL="45720" marR="45720" marT="45720" marB="45720" anchor="ctr">
                     <a:lnL w="6350" cap="flat" cmpd="sng" algn="ctr">
                       <a:solidFill>
                         <a:srgbClr val="D6DEE6"/>
@@ -9417,7 +11023,7 @@
                         <a:buNone/>
                       </a:pPr>
                       <a:r>
-                        <a:rPr lang="en-US" sz="1300" dirty="0">
+                        <a:rPr lang="en-US" sz="1200" dirty="0">
                           <a:solidFill>
                             <a:srgbClr val="1F2937"/>
                           </a:solidFill>
@@ -9425,83 +11031,16 @@
                           <a:ea typeface="Arial" pitchFamily="34" charset="-122"/>
                           <a:cs typeface="Arial" pitchFamily="34" charset="-120"/>
                         </a:rPr>
-                        <a:t>0.5652</a:t>
+                        <a:t>-1.79%</a:t>
                       </a:r>
-                      <a:endParaRPr lang="en-US" sz="1300" dirty="0">
+                      <a:endParaRPr lang="en-US" sz="1200" dirty="0">
                         <a:latin typeface="Arial" charset="0"/>
                         <a:ea typeface="Arial" charset="0"/>
                         <a:cs typeface="Arial" charset="0"/>
                       </a:endParaRPr>
                     </a:p>
                   </a:txBody>
-                  <a:tcPr marL="54864" marR="54864" marT="54864" marB="54864" anchor="ctr">
-                    <a:lnL w="6350" cap="flat" cmpd="sng" algn="ctr">
-                      <a:solidFill>
-                        <a:srgbClr val="D6DEE6"/>
-                      </a:solidFill>
-                      <a:prstDash val="solid"/>
-                      <a:round/>
-                      <a:headEnd type="none" w="med" len="med"/>
-                      <a:tailEnd type="none" w="med" len="med"/>
-                    </a:lnL>
-                    <a:lnR w="6350" cap="flat" cmpd="sng" algn="ctr">
-                      <a:solidFill>
-                        <a:srgbClr val="D6DEE6"/>
-                      </a:solidFill>
-                      <a:prstDash val="solid"/>
-                      <a:round/>
-                      <a:headEnd type="none" w="med" len="med"/>
-                      <a:tailEnd type="none" w="med" len="med"/>
-                    </a:lnR>
-                    <a:lnT w="6350" cap="flat" cmpd="sng" algn="ctr">
-                      <a:solidFill>
-                        <a:srgbClr val="D6DEE6"/>
-                      </a:solidFill>
-                      <a:prstDash val="solid"/>
-                      <a:round/>
-                      <a:headEnd type="none" w="med" len="med"/>
-                      <a:tailEnd type="none" w="med" len="med"/>
-                    </a:lnT>
-                    <a:lnB w="6350" cap="flat" cmpd="sng" algn="ctr">
-                      <a:solidFill>
-                        <a:srgbClr val="D6DEE6"/>
-                      </a:solidFill>
-                      <a:prstDash val="solid"/>
-                      <a:round/>
-                      <a:headEnd type="none" w="med" len="med"/>
-                      <a:tailEnd type="none" w="med" len="med"/>
-                    </a:lnB>
-                  </a:tcPr>
-                </a:tc>
-              </a:tr>
-              <a:tr h="457200">
-                <a:tc>
-                  <a:txBody>
-                    <a:bodyPr/>
-                    <a:lstStyle/>
-                    <a:p>
-                      <a:pPr algn="ctr" indent="0" marL="0">
-                        <a:buNone/>
-                      </a:pPr>
-                      <a:r>
-                        <a:rPr lang="en-US" sz="1300" dirty="0">
-                          <a:solidFill>
-                            <a:srgbClr val="1F2937"/>
-                          </a:solidFill>
-                          <a:latin typeface="Arial" pitchFamily="34" charset="0"/>
-                          <a:ea typeface="Arial" pitchFamily="34" charset="-122"/>
-                          <a:cs typeface="Arial" pitchFamily="34" charset="-120"/>
-                        </a:rPr>
-                        <a:t>Random walk</a:t>
-                      </a:r>
-                      <a:endParaRPr lang="en-US" sz="1300" dirty="0">
-                        <a:latin typeface="Arial" charset="0"/>
-                        <a:ea typeface="Arial" charset="0"/>
-                        <a:cs typeface="Arial" charset="0"/>
-                      </a:endParaRPr>
-                    </a:p>
-                  </a:txBody>
-                  <a:tcPr marL="54864" marR="54864" marT="54864" marB="54864" anchor="ctr">
+                  <a:tcPr marL="45720" marR="45720" marT="45720" marB="45720" anchor="ctr">
                     <a:lnL w="6350" cap="flat" cmpd="sng" algn="ctr">
                       <a:solidFill>
                         <a:srgbClr val="D6DEE6"/>
@@ -9549,7 +11088,7 @@
                         <a:buNone/>
                       </a:pPr>
                       <a:r>
-                        <a:rPr lang="en-US" sz="1300" dirty="0">
+                        <a:rPr lang="en-US" sz="1200" dirty="0">
                           <a:solidFill>
                             <a:srgbClr val="1F2937"/>
                           </a:solidFill>
@@ -9557,16 +11096,16 @@
                           <a:ea typeface="Arial" pitchFamily="34" charset="-122"/>
                           <a:cs typeface="Arial" pitchFamily="34" charset="-120"/>
                         </a:rPr>
-                        <a:t>0.5600</a:t>
+                        <a:t>12</a:t>
                       </a:r>
-                      <a:endParaRPr lang="en-US" sz="1300" dirty="0">
+                      <a:endParaRPr lang="en-US" sz="1200" dirty="0">
                         <a:latin typeface="Arial" charset="0"/>
                         <a:ea typeface="Arial" charset="0"/>
                         <a:cs typeface="Arial" charset="0"/>
                       </a:endParaRPr>
                     </a:p>
                   </a:txBody>
-                  <a:tcPr marL="54864" marR="54864" marT="54864" marB="54864" anchor="ctr">
+                  <a:tcPr marL="45720" marR="45720" marT="45720" marB="45720" anchor="ctr">
                     <a:lnL w="6350" cap="flat" cmpd="sng" algn="ctr">
                       <a:solidFill>
                         <a:srgbClr val="D6DEE6"/>
@@ -9614,7 +11153,7 @@
                         <a:buNone/>
                       </a:pPr>
                       <a:r>
-                        <a:rPr lang="en-US" sz="1300" dirty="0">
+                        <a:rPr lang="en-US" sz="1200" dirty="0">
                           <a:solidFill>
                             <a:srgbClr val="1F2937"/>
                           </a:solidFill>
@@ -9622,16 +11161,83 @@
                           <a:ea typeface="Arial" pitchFamily="34" charset="-122"/>
                           <a:cs typeface="Arial" pitchFamily="34" charset="-120"/>
                         </a:rPr>
-                        <a:t>0.4480</a:t>
+                        <a:t>9%</a:t>
                       </a:r>
-                      <a:endParaRPr lang="en-US" sz="1300" dirty="0">
+                      <a:endParaRPr lang="en-US" sz="1200" dirty="0">
                         <a:latin typeface="Arial" charset="0"/>
                         <a:ea typeface="Arial" charset="0"/>
                         <a:cs typeface="Arial" charset="0"/>
                       </a:endParaRPr>
                     </a:p>
                   </a:txBody>
-                  <a:tcPr marL="54864" marR="54864" marT="54864" marB="54864" anchor="ctr">
+                  <a:tcPr marL="45720" marR="45720" marT="45720" marB="45720" anchor="ctr">
+                    <a:lnL w="6350" cap="flat" cmpd="sng" algn="ctr">
+                      <a:solidFill>
+                        <a:srgbClr val="D6DEE6"/>
+                      </a:solidFill>
+                      <a:prstDash val="solid"/>
+                      <a:round/>
+                      <a:headEnd type="none" w="med" len="med"/>
+                      <a:tailEnd type="none" w="med" len="med"/>
+                    </a:lnL>
+                    <a:lnR w="6350" cap="flat" cmpd="sng" algn="ctr">
+                      <a:solidFill>
+                        <a:srgbClr val="D6DEE6"/>
+                      </a:solidFill>
+                      <a:prstDash val="solid"/>
+                      <a:round/>
+                      <a:headEnd type="none" w="med" len="med"/>
+                      <a:tailEnd type="none" w="med" len="med"/>
+                    </a:lnR>
+                    <a:lnT w="6350" cap="flat" cmpd="sng" algn="ctr">
+                      <a:solidFill>
+                        <a:srgbClr val="D6DEE6"/>
+                      </a:solidFill>
+                      <a:prstDash val="solid"/>
+                      <a:round/>
+                      <a:headEnd type="none" w="med" len="med"/>
+                      <a:tailEnd type="none" w="med" len="med"/>
+                    </a:lnT>
+                    <a:lnB w="6350" cap="flat" cmpd="sng" algn="ctr">
+                      <a:solidFill>
+                        <a:srgbClr val="D6DEE6"/>
+                      </a:solidFill>
+                      <a:prstDash val="solid"/>
+                      <a:round/>
+                      <a:headEnd type="none" w="med" len="med"/>
+                      <a:tailEnd type="none" w="med" len="med"/>
+                    </a:lnB>
+                  </a:tcPr>
+                </a:tc>
+              </a:tr>
+              <a:tr h="310896">
+                <a:tc>
+                  <a:txBody>
+                    <a:bodyPr/>
+                    <a:lstStyle/>
+                    <a:p>
+                      <a:pPr algn="ctr" indent="0" marL="0">
+                        <a:buNone/>
+                      </a:pPr>
+                      <a:r>
+                        <a:rPr lang="en-US" sz="1200" dirty="0">
+                          <a:solidFill>
+                            <a:srgbClr val="1F2937"/>
+                          </a:solidFill>
+                          <a:latin typeface="Arial" pitchFamily="34" charset="0"/>
+                          <a:ea typeface="Arial" pitchFamily="34" charset="-122"/>
+                          <a:cs typeface="Arial" pitchFamily="34" charset="-120"/>
+                        </a:rPr>
+                        <a:t>AR(1), mean-corrected</a:t>
+                      </a:r>
+                      <a:endParaRPr lang="en-US" sz="1200" dirty="0">
+                        <a:latin typeface="Arial" charset="0"/>
+                        <a:ea typeface="Arial" charset="0"/>
+                        <a:cs typeface="Arial" charset="0"/>
+                      </a:endParaRPr>
+                    </a:p>
+                  </a:txBody>
+                  <a:tcPr marL="45720" marR="45720" marT="45720" marB="45720" anchor="ctr">
                     <a:lnL w="6350" cap="flat" cmpd="sng" algn="ctr">
                       <a:solidFill>
                         <a:srgbClr val="D6DEE6"/>
@@ -9679,7 +11285,7 @@
                         <a:buNone/>
                       </a:pPr>
                       <a:r>
-                        <a:rPr lang="en-US" sz="1300" dirty="0">
+                        <a:rPr lang="en-US" sz="1200" dirty="0">
                           <a:solidFill>
                             <a:srgbClr val="1F2937"/>
                           </a:solidFill>
@@ -9687,16 +11293,16 @@
                           <a:ea typeface="Arial" pitchFamily="34" charset="-122"/>
                           <a:cs typeface="Arial" pitchFamily="34" charset="-120"/>
                         </a:rPr>
-                        <a:t>n/a</a:t>
+                        <a:t>0.5617</a:t>
                       </a:r>
-                      <a:endParaRPr lang="en-US" sz="1300" dirty="0">
+                      <a:endParaRPr lang="en-US" sz="1200" dirty="0">
                         <a:latin typeface="Arial" charset="0"/>
                         <a:ea typeface="Arial" charset="0"/>
                         <a:cs typeface="Arial" charset="0"/>
                       </a:endParaRPr>
                     </a:p>
                   </a:txBody>
-                  <a:tcPr marL="54864" marR="54864" marT="54864" marB="54864" anchor="ctr">
+                  <a:tcPr marL="45720" marR="45720" marT="45720" marB="45720" anchor="ctr">
                     <a:lnL w="6350" cap="flat" cmpd="sng" algn="ctr">
                       <a:solidFill>
                         <a:srgbClr val="D6DEE6"/>
@@ -9744,7 +11350,7 @@
                         <a:buNone/>
                       </a:pPr>
                       <a:r>
-                        <a:rPr lang="en-US" sz="1300" dirty="0">
+                        <a:rPr lang="en-US" sz="1200" dirty="0">
                           <a:solidFill>
                             <a:srgbClr val="1F2937"/>
                           </a:solidFill>
@@ -9752,16 +11358,16 @@
                           <a:ea typeface="Arial" pitchFamily="34" charset="-122"/>
                           <a:cs typeface="Arial" pitchFamily="34" charset="-120"/>
                         </a:rPr>
-                        <a:t>+0.43%</a:t>
+                        <a:t>0.4492</a:t>
                       </a:r>
-                      <a:endParaRPr lang="en-US" sz="1300" dirty="0">
+                      <a:endParaRPr lang="en-US" sz="1200" dirty="0">
                         <a:latin typeface="Arial" charset="0"/>
                         <a:ea typeface="Arial" charset="0"/>
                         <a:cs typeface="Arial" charset="0"/>
                       </a:endParaRPr>
                     </a:p>
                   </a:txBody>
-                  <a:tcPr marL="54864" marR="54864" marT="54864" marB="54864" anchor="ctr">
+                  <a:tcPr marL="45720" marR="45720" marT="45720" marB="45720" anchor="ctr">
                     <a:lnL w="6350" cap="flat" cmpd="sng" algn="ctr">
                       <a:solidFill>
                         <a:srgbClr val="D6DEE6"/>
@@ -9809,7 +11415,7 @@
                         <a:buNone/>
                       </a:pPr>
                       <a:r>
-                        <a:rPr lang="en-US" sz="1300" dirty="0">
+                        <a:rPr lang="en-US" sz="1200" dirty="0">
                           <a:solidFill>
                             <a:srgbClr val="1F2937"/>
                           </a:solidFill>
@@ -9817,16 +11423,16 @@
                           <a:ea typeface="Arial" pitchFamily="34" charset="-122"/>
                           <a:cs typeface="Arial" pitchFamily="34" charset="-120"/>
                         </a:rPr>
-                        <a:t>0.218</a:t>
+                        <a:t>+0.11%</a:t>
                       </a:r>
-                      <a:endParaRPr lang="en-US" sz="1300" dirty="0">
+                      <a:endParaRPr lang="en-US" sz="1200" dirty="0">
                         <a:latin typeface="Arial" charset="0"/>
                         <a:ea typeface="Arial" charset="0"/>
                         <a:cs typeface="Arial" charset="0"/>
                       </a:endParaRPr>
                     </a:p>
                   </a:txBody>
-                  <a:tcPr marL="54864" marR="54864" marT="54864" marB="54864" anchor="ctr">
+                  <a:tcPr marL="45720" marR="45720" marT="45720" marB="45720" anchor="ctr">
                     <a:lnL w="6350" cap="flat" cmpd="sng" algn="ctr">
                       <a:solidFill>
                         <a:srgbClr val="D6DEE6"/>
@@ -9874,7 +11480,7 @@
                         <a:buNone/>
                       </a:pPr>
                       <a:r>
-                        <a:rPr lang="en-US" sz="1300" dirty="0">
+                        <a:rPr lang="en-US" sz="1200" dirty="0">
                           <a:solidFill>
                             <a:srgbClr val="1F2937"/>
                           </a:solidFill>
@@ -9882,83 +11488,16 @@
                           <a:ea typeface="Arial" pitchFamily="34" charset="-122"/>
                           <a:cs typeface="Arial" pitchFamily="34" charset="-120"/>
                         </a:rPr>
-                        <a:t>0.5622</a:t>
+                        <a:t>8</a:t>
                       </a:r>
-                      <a:endParaRPr lang="en-US" sz="1300" dirty="0">
+                      <a:endParaRPr lang="en-US" sz="1200" dirty="0">
                         <a:latin typeface="Arial" charset="0"/>
                         <a:ea typeface="Arial" charset="0"/>
                         <a:cs typeface="Arial" charset="0"/>
                       </a:endParaRPr>
                     </a:p>
                   </a:txBody>
-                  <a:tcPr marL="54864" marR="54864" marT="54864" marB="54864" anchor="ctr">
-                    <a:lnL w="6350" cap="flat" cmpd="sng" algn="ctr">
-                      <a:solidFill>
-                        <a:srgbClr val="D6DEE6"/>
-                      </a:solidFill>
-                      <a:prstDash val="solid"/>
-                      <a:round/>
-                      <a:headEnd type="none" w="med" len="med"/>
-                      <a:tailEnd type="none" w="med" len="med"/>
-                    </a:lnL>
-                    <a:lnR w="6350" cap="flat" cmpd="sng" algn="ctr">
-                      <a:solidFill>
-                        <a:srgbClr val="D6DEE6"/>
-                      </a:solidFill>
-                      <a:prstDash val="solid"/>
-                      <a:round/>
-                      <a:headEnd type="none" w="med" len="med"/>
-                      <a:tailEnd type="none" w="med" len="med"/>
-                    </a:lnR>
-                    <a:lnT w="6350" cap="flat" cmpd="sng" algn="ctr">
-                      <a:solidFill>
-                        <a:srgbClr val="D6DEE6"/>
-                      </a:solidFill>
-                      <a:prstDash val="solid"/>
-                      <a:round/>
-                      <a:headEnd type="none" w="med" len="med"/>
-                      <a:tailEnd type="none" w="med" len="med"/>
-                    </a:lnT>
-                    <a:lnB w="6350" cap="flat" cmpd="sng" algn="ctr">
-                      <a:solidFill>
-                        <a:srgbClr val="D6DEE6"/>
-                      </a:solidFill>
-                      <a:prstDash val="solid"/>
-                      <a:round/>
-                      <a:headEnd type="none" w="med" len="med"/>
-                      <a:tailEnd type="none" w="med" len="med"/>
-                    </a:lnB>
-                  </a:tcPr>
-                </a:tc>
-              </a:tr>
-              <a:tr h="457200">
-                <a:tc>
-                  <a:txBody>
-                    <a:bodyPr/>
-                    <a:lstStyle/>
-                    <a:p>
-                      <a:pPr algn="ctr" indent="0" marL="0">
-                        <a:buNone/>
-                      </a:pPr>
-                      <a:r>
-                        <a:rPr lang="en-US" sz="1300" dirty="0">
-                          <a:solidFill>
-                            <a:srgbClr val="1F2937"/>
-                          </a:solidFill>
-                          <a:latin typeface="Arial" pitchFamily="34" charset="0"/>
-                          <a:ea typeface="Arial" pitchFamily="34" charset="-122"/>
-                          <a:cs typeface="Arial" pitchFamily="34" charset="-120"/>
-                        </a:rPr>
-                        <a:t>Carry</a:t>
-                      </a:r>
-                      <a:endParaRPr lang="en-US" sz="1300" dirty="0">
-                        <a:latin typeface="Arial" charset="0"/>
-                        <a:ea typeface="Arial" charset="0"/>
-                        <a:cs typeface="Arial" charset="0"/>
-                      </a:endParaRPr>
-                    </a:p>
-                  </a:txBody>
-                  <a:tcPr marL="54864" marR="54864" marT="54864" marB="54864" anchor="ctr">
+                  <a:tcPr marL="45720" marR="45720" marT="45720" marB="45720" anchor="ctr">
                     <a:lnL w="6350" cap="flat" cmpd="sng" algn="ctr">
                       <a:solidFill>
                         <a:srgbClr val="D6DEE6"/>
@@ -10006,7 +11545,7 @@
                         <a:buNone/>
                       </a:pPr>
                       <a:r>
-                        <a:rPr lang="en-US" sz="1300" dirty="0">
+                        <a:rPr lang="en-US" sz="1200" dirty="0">
                           <a:solidFill>
                             <a:srgbClr val="1F2937"/>
                           </a:solidFill>
@@ -10014,16 +11553,83 @@
                           <a:ea typeface="Arial" pitchFamily="34" charset="-122"/>
                           <a:cs typeface="Arial" pitchFamily="34" charset="-120"/>
                         </a:rPr>
-                        <a:t>0.5606</a:t>
+                        <a:t>59%</a:t>
                       </a:r>
-                      <a:endParaRPr lang="en-US" sz="1300" dirty="0">
+                      <a:endParaRPr lang="en-US" sz="1200" dirty="0">
                         <a:latin typeface="Arial" charset="0"/>
                         <a:ea typeface="Arial" charset="0"/>
                         <a:cs typeface="Arial" charset="0"/>
                       </a:endParaRPr>
                     </a:p>
                   </a:txBody>
-                  <a:tcPr marL="54864" marR="54864" marT="54864" marB="54864" anchor="ctr">
+                  <a:tcPr marL="45720" marR="45720" marT="45720" marB="45720" anchor="ctr">
+                    <a:lnL w="6350" cap="flat" cmpd="sng" algn="ctr">
+                      <a:solidFill>
+                        <a:srgbClr val="D6DEE6"/>
+                      </a:solidFill>
+                      <a:prstDash val="solid"/>
+                      <a:round/>
+                      <a:headEnd type="none" w="med" len="med"/>
+                      <a:tailEnd type="none" w="med" len="med"/>
+                    </a:lnL>
+                    <a:lnR w="6350" cap="flat" cmpd="sng" algn="ctr">
+                      <a:solidFill>
+                        <a:srgbClr val="D6DEE6"/>
+                      </a:solidFill>
+                      <a:prstDash val="solid"/>
+                      <a:round/>
+                      <a:headEnd type="none" w="med" len="med"/>
+                      <a:tailEnd type="none" w="med" len="med"/>
+                    </a:lnR>
+                    <a:lnT w="6350" cap="flat" cmpd="sng" algn="ctr">
+                      <a:solidFill>
+                        <a:srgbClr val="D6DEE6"/>
+                      </a:solidFill>
+                      <a:prstDash val="solid"/>
+                      <a:round/>
+                      <a:headEnd type="none" w="med" len="med"/>
+                      <a:tailEnd type="none" w="med" len="med"/>
+                    </a:lnT>
+                    <a:lnB w="6350" cap="flat" cmpd="sng" algn="ctr">
+                      <a:solidFill>
+                        <a:srgbClr val="D6DEE6"/>
+                      </a:solidFill>
+                      <a:prstDash val="solid"/>
+                      <a:round/>
+                      <a:headEnd type="none" w="med" len="med"/>
+                      <a:tailEnd type="none" w="med" len="med"/>
+                    </a:lnB>
+                  </a:tcPr>
+                </a:tc>
+              </a:tr>
+              <a:tr h="310896">
+                <a:tc>
+                  <a:txBody>
+                    <a:bodyPr/>
+                    <a:lstStyle/>
+                    <a:p>
+                      <a:pPr algn="ctr" indent="0" marL="0">
+                        <a:buNone/>
+                      </a:pPr>
+                      <a:r>
+                        <a:rPr lang="en-US" sz="1200" dirty="0">
+                          <a:solidFill>
+                            <a:srgbClr val="1F2937"/>
+                          </a:solidFill>
+                          <a:latin typeface="Arial" pitchFamily="34" charset="0"/>
+                          <a:ea typeface="Arial" pitchFamily="34" charset="-122"/>
+                          <a:cs typeface="Arial" pitchFamily="34" charset="-120"/>
+                        </a:rPr>
+                        <a:t>Random walk</a:t>
+                      </a:r>
+                      <a:endParaRPr lang="en-US" sz="1200" dirty="0">
+                        <a:latin typeface="Arial" charset="0"/>
+                        <a:ea typeface="Arial" charset="0"/>
+                        <a:cs typeface="Arial" charset="0"/>
+                      </a:endParaRPr>
+                    </a:p>
+                  </a:txBody>
+                  <a:tcPr marL="45720" marR="45720" marT="45720" marB="45720" anchor="ctr">
                     <a:lnL w="6350" cap="flat" cmpd="sng" algn="ctr">
                       <a:solidFill>
                         <a:srgbClr val="D6DEE6"/>
@@ -10071,7 +11677,7 @@
                         <a:buNone/>
                       </a:pPr>
                       <a:r>
-                        <a:rPr lang="en-US" sz="1300" dirty="0">
+                        <a:rPr lang="en-US" sz="1200" dirty="0">
                           <a:solidFill>
                             <a:srgbClr val="1F2937"/>
                           </a:solidFill>
@@ -10079,16 +11685,16 @@
                           <a:ea typeface="Arial" pitchFamily="34" charset="-122"/>
                           <a:cs typeface="Arial" pitchFamily="34" charset="-120"/>
                         </a:rPr>
-                        <a:t>0.4540</a:t>
+                        <a:t>0.5600</a:t>
                       </a:r>
-                      <a:endParaRPr lang="en-US" sz="1300" dirty="0">
+                      <a:endParaRPr lang="en-US" sz="1200" dirty="0">
                         <a:latin typeface="Arial" charset="0"/>
                         <a:ea typeface="Arial" charset="0"/>
                         <a:cs typeface="Arial" charset="0"/>
                       </a:endParaRPr>
                     </a:p>
                   </a:txBody>
-                  <a:tcPr marL="54864" marR="54864" marT="54864" marB="54864" anchor="ctr">
+                  <a:tcPr marL="45720" marR="45720" marT="45720" marB="45720" anchor="ctr">
                     <a:lnL w="6350" cap="flat" cmpd="sng" algn="ctr">
                       <a:solidFill>
                         <a:srgbClr val="D6DEE6"/>
@@ -10136,7 +11742,7 @@
                         <a:buNone/>
                       </a:pPr>
                       <a:r>
-                        <a:rPr lang="en-US" sz="1300" dirty="0">
+                        <a:rPr lang="en-US" sz="1200" dirty="0">
                           <a:solidFill>
                             <a:srgbClr val="1F2937"/>
                           </a:solidFill>
@@ -10144,16 +11750,16 @@
                           <a:ea typeface="Arial" pitchFamily="34" charset="-122"/>
                           <a:cs typeface="Arial" pitchFamily="34" charset="-120"/>
                         </a:rPr>
-                        <a:t>46.4%</a:t>
+                        <a:t>0.4480</a:t>
                       </a:r>
-                      <a:endParaRPr lang="en-US" sz="1300" dirty="0">
+                      <a:endParaRPr lang="en-US" sz="1200" dirty="0">
                         <a:latin typeface="Arial" charset="0"/>
                         <a:ea typeface="Arial" charset="0"/>
                         <a:cs typeface="Arial" charset="0"/>
                       </a:endParaRPr>
                     </a:p>
                   </a:txBody>
-                  <a:tcPr marL="54864" marR="54864" marT="54864" marB="54864" anchor="ctr">
+                  <a:tcPr marL="45720" marR="45720" marT="45720" marB="45720" anchor="ctr">
                     <a:lnL w="6350" cap="flat" cmpd="sng" algn="ctr">
                       <a:solidFill>
                         <a:srgbClr val="D6DEE6"/>
@@ -10201,7 +11807,7 @@
                         <a:buNone/>
                       </a:pPr>
                       <a:r>
-                        <a:rPr lang="en-US" sz="1300" dirty="0">
+                        <a:rPr lang="en-US" sz="1200" dirty="0">
                           <a:solidFill>
                             <a:srgbClr val="1F2937"/>
                           </a:solidFill>
@@ -10209,16 +11815,16 @@
                           <a:ea typeface="Arial" pitchFamily="34" charset="-122"/>
                           <a:cs typeface="Arial" pitchFamily="34" charset="-120"/>
                         </a:rPr>
-                        <a:t>+0.32%</a:t>
+                        <a:t>+0.43%</a:t>
                       </a:r>
-                      <a:endParaRPr lang="en-US" sz="1300" dirty="0">
+                      <a:endParaRPr lang="en-US" sz="1200" dirty="0">
                         <a:latin typeface="Arial" charset="0"/>
                         <a:ea typeface="Arial" charset="0"/>
                         <a:cs typeface="Arial" charset="0"/>
                       </a:endParaRPr>
                     </a:p>
                   </a:txBody>
-                  <a:tcPr marL="54864" marR="54864" marT="54864" marB="54864" anchor="ctr">
+                  <a:tcPr marL="45720" marR="45720" marT="45720" marB="45720" anchor="ctr">
                     <a:lnL w="6350" cap="flat" cmpd="sng" algn="ctr">
                       <a:solidFill>
                         <a:srgbClr val="D6DEE6"/>
@@ -10266,7 +11872,7 @@
                         <a:buNone/>
                       </a:pPr>
                       <a:r>
-                        <a:rPr lang="en-US" sz="1300" dirty="0">
+                        <a:rPr lang="en-US" sz="1200" dirty="0">
                           <a:solidFill>
                             <a:srgbClr val="1F2937"/>
                           </a:solidFill>
@@ -10274,16 +11880,16 @@
                           <a:ea typeface="Arial" pitchFamily="34" charset="-122"/>
                           <a:cs typeface="Arial" pitchFamily="34" charset="-120"/>
                         </a:rPr>
-                        <a:t>0.760</a:t>
+                        <a:t>4</a:t>
                       </a:r>
-                      <a:endParaRPr lang="en-US" sz="1300" dirty="0">
+                      <a:endParaRPr lang="en-US" sz="1200" dirty="0">
                         <a:latin typeface="Arial" charset="0"/>
                         <a:ea typeface="Arial" charset="0"/>
                         <a:cs typeface="Arial" charset="0"/>
                       </a:endParaRPr>
                     </a:p>
                   </a:txBody>
-                  <a:tcPr marL="54864" marR="54864" marT="54864" marB="54864" anchor="ctr">
+                  <a:tcPr marL="45720" marR="45720" marT="45720" marB="45720" anchor="ctr">
                     <a:lnL w="6350" cap="flat" cmpd="sng" algn="ctr">
                       <a:solidFill>
                         <a:srgbClr val="D6DEE6"/>
@@ -10331,7 +11937,7 @@
                         <a:buNone/>
                       </a:pPr>
                       <a:r>
-                        <a:rPr lang="en-US" sz="1300" dirty="0">
+                        <a:rPr lang="en-US" sz="1200" dirty="0">
                           <a:solidFill>
                             <a:srgbClr val="1F2937"/>
                           </a:solidFill>
@@ -10339,16 +11945,16 @@
                           <a:ea typeface="Arial" pitchFamily="34" charset="-122"/>
                           <a:cs typeface="Arial" pitchFamily="34" charset="-120"/>
                         </a:rPr>
-                        <a:t>0.5623</a:t>
+                        <a:t>0%</a:t>
                       </a:r>
-                      <a:endParaRPr lang="en-US" sz="1300" dirty="0">
+                      <a:endParaRPr lang="en-US" sz="1200" dirty="0">
                         <a:latin typeface="Arial" charset="0"/>
                         <a:ea typeface="Arial" charset="0"/>
                         <a:cs typeface="Arial" charset="0"/>
                       </a:endParaRPr>
                     </a:p>
                   </a:txBody>
-                  <a:tcPr marL="54864" marR="54864" marT="54864" marB="54864" anchor="ctr">
+                  <a:tcPr marL="45720" marR="45720" marT="45720" marB="45720" anchor="ctr">
                     <a:lnL w="6350" cap="flat" cmpd="sng" algn="ctr">
                       <a:solidFill>
                         <a:srgbClr val="D6DEE6"/>
@@ -10388,7 +11994,7 @@
                   </a:tcPr>
                 </a:tc>
               </a:tr>
-              <a:tr h="457200">
+              <a:tr h="310896">
                 <a:tc>
                   <a:txBody>
                     <a:bodyPr/>
@@ -10398,7 +12004,7 @@
                         <a:buNone/>
                       </a:pPr>
                       <a:r>
-                        <a:rPr lang="en-US" sz="1300" dirty="0">
+                        <a:rPr lang="en-US" sz="1200" dirty="0">
                           <a:solidFill>
                             <a:srgbClr val="1F2937"/>
                           </a:solidFill>
@@ -10406,16 +12012,16 @@
                           <a:ea typeface="Arial" pitchFamily="34" charset="-122"/>
                           <a:cs typeface="Arial" pitchFamily="34" charset="-120"/>
                         </a:rPr>
-                        <a:t>Ridge</a:t>
+                        <a:t>Random walk with drift</a:t>
                       </a:r>
-                      <a:endParaRPr lang="en-US" sz="1300" dirty="0">
+                      <a:endParaRPr lang="en-US" sz="1200" dirty="0">
                         <a:latin typeface="Arial" charset="0"/>
                         <a:ea typeface="Arial" charset="0"/>
                         <a:cs typeface="Arial" charset="0"/>
                       </a:endParaRPr>
                     </a:p>
                   </a:txBody>
-                  <a:tcPr marL="54864" marR="54864" marT="54864" marB="54864" anchor="ctr">
+                  <a:tcPr marL="45720" marR="45720" marT="45720" marB="45720" anchor="ctr">
                     <a:lnL w="6350" cap="flat" cmpd="sng" algn="ctr">
                       <a:solidFill>
                         <a:srgbClr val="D6DEE6"/>
@@ -10463,7 +12069,7 @@
                         <a:buNone/>
                       </a:pPr>
                       <a:r>
-                        <a:rPr lang="en-US" sz="1300" dirty="0">
+                        <a:rPr lang="en-US" sz="1200" dirty="0">
                           <a:solidFill>
                             <a:srgbClr val="1F2937"/>
                           </a:solidFill>
@@ -10471,16 +12077,16 @@
                           <a:ea typeface="Arial" pitchFamily="34" charset="-122"/>
                           <a:cs typeface="Arial" pitchFamily="34" charset="-120"/>
                         </a:rPr>
-                        <a:t>0.5602</a:t>
+                        <a:t>0.5627</a:t>
                       </a:r>
-                      <a:endParaRPr lang="en-US" sz="1300" dirty="0">
+                      <a:endParaRPr lang="en-US" sz="1200" dirty="0">
                         <a:latin typeface="Arial" charset="0"/>
                         <a:ea typeface="Arial" charset="0"/>
                         <a:cs typeface="Arial" charset="0"/>
                       </a:endParaRPr>
                     </a:p>
                   </a:txBody>
-                  <a:tcPr marL="54864" marR="54864" marT="54864" marB="54864" anchor="ctr">
+                  <a:tcPr marL="45720" marR="45720" marT="45720" marB="45720" anchor="ctr">
                     <a:lnL w="6350" cap="flat" cmpd="sng" algn="ctr">
                       <a:solidFill>
                         <a:srgbClr val="D6DEE6"/>
@@ -10528,7 +12134,7 @@
                         <a:buNone/>
                       </a:pPr>
                       <a:r>
-                        <a:rPr lang="en-US" sz="1300" dirty="0">
+                        <a:rPr lang="en-US" sz="1200" dirty="0">
                           <a:solidFill>
                             <a:srgbClr val="1F2937"/>
                           </a:solidFill>
@@ -10536,16 +12142,16 @@
                           <a:ea typeface="Arial" pitchFamily="34" charset="-122"/>
                           <a:cs typeface="Arial" pitchFamily="34" charset="-120"/>
                         </a:rPr>
-                        <a:t>0.4479</a:t>
+                        <a:t>0.4577</a:t>
                       </a:r>
-                      <a:endParaRPr lang="en-US" sz="1300" dirty="0">
+                      <a:endParaRPr lang="en-US" sz="1200" dirty="0">
                         <a:latin typeface="Arial" charset="0"/>
                         <a:ea typeface="Arial" charset="0"/>
                         <a:cs typeface="Arial" charset="0"/>
                       </a:endParaRPr>
                     </a:p>
                   </a:txBody>
-                  <a:tcPr marL="54864" marR="54864" marT="54864" marB="54864" anchor="ctr">
+                  <a:tcPr marL="45720" marR="45720" marT="45720" marB="45720" anchor="ctr">
                     <a:lnL w="6350" cap="flat" cmpd="sng" algn="ctr">
                       <a:solidFill>
                         <a:srgbClr val="D6DEE6"/>
@@ -10593,7 +12199,7 @@
                         <a:buNone/>
                       </a:pPr>
                       <a:r>
-                        <a:rPr lang="en-US" sz="1300" dirty="0">
+                        <a:rPr lang="en-US" sz="1200" dirty="0">
                           <a:solidFill>
                             <a:srgbClr val="1F2937"/>
                           </a:solidFill>
@@ -10601,16 +12207,16 @@
                           <a:ea typeface="Arial" pitchFamily="34" charset="-122"/>
                           <a:cs typeface="Arial" pitchFamily="34" charset="-120"/>
                         </a:rPr>
-                        <a:t>52.5%</a:t>
+                        <a:t>-0.05%</a:t>
                       </a:r>
-                      <a:endParaRPr lang="en-US" sz="1300" dirty="0">
+                      <a:endParaRPr lang="en-US" sz="1200" dirty="0">
                         <a:latin typeface="Arial" charset="0"/>
                         <a:ea typeface="Arial" charset="0"/>
                         <a:cs typeface="Arial" charset="0"/>
                       </a:endParaRPr>
                     </a:p>
                   </a:txBody>
-                  <a:tcPr marL="54864" marR="54864" marT="54864" marB="54864" anchor="ctr">
+                  <a:tcPr marL="45720" marR="45720" marT="45720" marB="45720" anchor="ctr">
                     <a:lnL w="6350" cap="flat" cmpd="sng" algn="ctr">
                       <a:solidFill>
                         <a:srgbClr val="D6DEE6"/>
@@ -10658,7 +12264,7 @@
                         <a:buNone/>
                       </a:pPr>
                       <a:r>
-                        <a:rPr lang="en-US" sz="1300" dirty="0">
+                        <a:rPr lang="en-US" sz="1200" dirty="0">
                           <a:solidFill>
                             <a:srgbClr val="1F2937"/>
                           </a:solidFill>
@@ -10666,16 +12272,16 @@
                           <a:ea typeface="Arial" pitchFamily="34" charset="-122"/>
                           <a:cs typeface="Arial" pitchFamily="34" charset="-120"/>
                         </a:rPr>
-                        <a:t>+0.38%</a:t>
+                        <a:t>10</a:t>
                       </a:r>
-                      <a:endParaRPr lang="en-US" sz="1300" dirty="0">
+                      <a:endParaRPr lang="en-US" sz="1200" dirty="0">
                         <a:latin typeface="Arial" charset="0"/>
                         <a:ea typeface="Arial" charset="0"/>
                         <a:cs typeface="Arial" charset="0"/>
                       </a:endParaRPr>
                     </a:p>
                   </a:txBody>
-                  <a:tcPr marL="54864" marR="54864" marT="54864" marB="54864" anchor="ctr">
+                  <a:tcPr marL="45720" marR="45720" marT="45720" marB="45720" anchor="ctr">
                     <a:lnL w="6350" cap="flat" cmpd="sng" algn="ctr">
                       <a:solidFill>
                         <a:srgbClr val="D6DEE6"/>
@@ -10723,7 +12329,7 @@
                         <a:buNone/>
                       </a:pPr>
                       <a:r>
-                        <a:rPr lang="en-US" sz="1300" dirty="0">
+                        <a:rPr lang="en-US" sz="1200" dirty="0">
                           <a:solidFill>
                             <a:srgbClr val="1F2937"/>
                           </a:solidFill>
@@ -10731,16 +12337,83 @@
                           <a:ea typeface="Arial" pitchFamily="34" charset="-122"/>
                           <a:cs typeface="Arial" pitchFamily="34" charset="-120"/>
                         </a:rPr>
-                        <a:t>0.264</a:t>
+                        <a:t>100%</a:t>
                       </a:r>
-                      <a:endParaRPr lang="en-US" sz="1300" dirty="0">
+                      <a:endParaRPr lang="en-US" sz="1200" dirty="0">
                         <a:latin typeface="Arial" charset="0"/>
                         <a:ea typeface="Arial" charset="0"/>
                         <a:cs typeface="Arial" charset="0"/>
                       </a:endParaRPr>
                     </a:p>
                   </a:txBody>
-                  <a:tcPr marL="54864" marR="54864" marT="54864" marB="54864" anchor="ctr">
+                  <a:tcPr marL="45720" marR="45720" marT="45720" marB="45720" anchor="ctr">
+                    <a:lnL w="6350" cap="flat" cmpd="sng" algn="ctr">
+                      <a:solidFill>
+                        <a:srgbClr val="D6DEE6"/>
+                      </a:solidFill>
+                      <a:prstDash val="solid"/>
+                      <a:round/>
+                      <a:headEnd type="none" w="med" len="med"/>
+                      <a:tailEnd type="none" w="med" len="med"/>
+                    </a:lnL>
+                    <a:lnR w="6350" cap="flat" cmpd="sng" algn="ctr">
+                      <a:solidFill>
+                        <a:srgbClr val="D6DEE6"/>
+                      </a:solidFill>
+                      <a:prstDash val="solid"/>
+                      <a:round/>
+                      <a:headEnd type="none" w="med" len="med"/>
+                      <a:tailEnd type="none" w="med" len="med"/>
+                    </a:lnR>
+                    <a:lnT w="6350" cap="flat" cmpd="sng" algn="ctr">
+                      <a:solidFill>
+                        <a:srgbClr val="D6DEE6"/>
+                      </a:solidFill>
+                      <a:prstDash val="solid"/>
+                      <a:round/>
+                      <a:headEnd type="none" w="med" len="med"/>
+                      <a:tailEnd type="none" w="med" len="med"/>
+                    </a:lnT>
+                    <a:lnB w="6350" cap="flat" cmpd="sng" algn="ctr">
+                      <a:solidFill>
+                        <a:srgbClr val="D6DEE6"/>
+                      </a:solidFill>
+                      <a:prstDash val="solid"/>
+                      <a:round/>
+                      <a:headEnd type="none" w="med" len="med"/>
+                      <a:tailEnd type="none" w="med" len="med"/>
+                    </a:lnB>
+                  </a:tcPr>
+                </a:tc>
+              </a:tr>
+              <a:tr h="310896">
+                <a:tc>
+                  <a:txBody>
+                    <a:bodyPr/>
+                    <a:lstStyle/>
+                    <a:p>
+                      <a:pPr algn="ctr" indent="0" marL="0">
+                        <a:buNone/>
+                      </a:pPr>
+                      <a:r>
+                        <a:rPr lang="en-US" sz="1200" dirty="0">
+                          <a:solidFill>
+                            <a:srgbClr val="1F2937"/>
+                          </a:solidFill>
+                          <a:latin typeface="Arial" pitchFamily="34" charset="0"/>
+                          <a:ea typeface="Arial" pitchFamily="34" charset="-122"/>
+                          <a:cs typeface="Arial" pitchFamily="34" charset="-120"/>
+                        </a:rPr>
+                        <a:t>Carry</a:t>
+                      </a:r>
+                      <a:endParaRPr lang="en-US" sz="1200" dirty="0">
+                        <a:latin typeface="Arial" charset="0"/>
+                        <a:ea typeface="Arial" charset="0"/>
+                        <a:cs typeface="Arial" charset="0"/>
+                      </a:endParaRPr>
+                    </a:p>
+                  </a:txBody>
+                  <a:tcPr marL="45720" marR="45720" marT="45720" marB="45720" anchor="ctr">
                     <a:lnL w="6350" cap="flat" cmpd="sng" algn="ctr">
                       <a:solidFill>
                         <a:srgbClr val="D6DEE6"/>
@@ -10788,7 +12461,7 @@
                         <a:buNone/>
                       </a:pPr>
                       <a:r>
-                        <a:rPr lang="en-US" sz="1300" dirty="0">
+                        <a:rPr lang="en-US" sz="1200" dirty="0">
                           <a:solidFill>
                             <a:srgbClr val="1F2937"/>
                           </a:solidFill>
@@ -10796,83 +12469,16 @@
                           <a:ea typeface="Arial" pitchFamily="34" charset="-122"/>
                           <a:cs typeface="Arial" pitchFamily="34" charset="-120"/>
                         </a:rPr>
-                        <a:t>0.5623</a:t>
+                        <a:t>0.5606</a:t>
                       </a:r>
-                      <a:endParaRPr lang="en-US" sz="1300" dirty="0">
+                      <a:endParaRPr lang="en-US" sz="1200" dirty="0">
                         <a:latin typeface="Arial" charset="0"/>
                         <a:ea typeface="Arial" charset="0"/>
                         <a:cs typeface="Arial" charset="0"/>
                       </a:endParaRPr>
                     </a:p>
                   </a:txBody>
-                  <a:tcPr marL="54864" marR="54864" marT="54864" marB="54864" anchor="ctr">
-                    <a:lnL w="6350" cap="flat" cmpd="sng" algn="ctr">
-                      <a:solidFill>
-                        <a:srgbClr val="D6DEE6"/>
-                      </a:solidFill>
-                      <a:prstDash val="solid"/>
-                      <a:round/>
-                      <a:headEnd type="none" w="med" len="med"/>
-                      <a:tailEnd type="none" w="med" len="med"/>
-                    </a:lnL>
-                    <a:lnR w="6350" cap="flat" cmpd="sng" algn="ctr">
-                      <a:solidFill>
-                        <a:srgbClr val="D6DEE6"/>
-                      </a:solidFill>
-                      <a:prstDash val="solid"/>
-                      <a:round/>
-                      <a:headEnd type="none" w="med" len="med"/>
-                      <a:tailEnd type="none" w="med" len="med"/>
-                    </a:lnR>
-                    <a:lnT w="6350" cap="flat" cmpd="sng" algn="ctr">
-                      <a:solidFill>
-                        <a:srgbClr val="D6DEE6"/>
-                      </a:solidFill>
-                      <a:prstDash val="solid"/>
-                      <a:round/>
-                      <a:headEnd type="none" w="med" len="med"/>
-                      <a:tailEnd type="none" w="med" len="med"/>
-                    </a:lnT>
-                    <a:lnB w="6350" cap="flat" cmpd="sng" algn="ctr">
-                      <a:solidFill>
-                        <a:srgbClr val="D6DEE6"/>
-                      </a:solidFill>
-                      <a:prstDash val="solid"/>
-                      <a:round/>
-                      <a:headEnd type="none" w="med" len="med"/>
-                      <a:tailEnd type="none" w="med" len="med"/>
-                    </a:lnB>
-                  </a:tcPr>
-                </a:tc>
-              </a:tr>
-              <a:tr h="457200">
-                <a:tc>
-                  <a:txBody>
-                    <a:bodyPr/>
-                    <a:lstStyle/>
-                    <a:p>
-                      <a:pPr algn="ctr" indent="0" marL="0">
-                        <a:buNone/>
-                      </a:pPr>
-                      <a:r>
-                        <a:rPr lang="en-US" sz="1300" dirty="0">
-                          <a:solidFill>
-                            <a:srgbClr val="1F2937"/>
-                          </a:solidFill>
-                          <a:latin typeface="Arial" pitchFamily="34" charset="0"/>
-                          <a:ea typeface="Arial" pitchFamily="34" charset="-122"/>
-                          <a:cs typeface="Arial" pitchFamily="34" charset="-120"/>
-                        </a:rPr>
-                        <a:t>Gradient boosting</a:t>
-                      </a:r>
-                      <a:endParaRPr lang="en-US" sz="1300" dirty="0">
-                        <a:latin typeface="Arial" charset="0"/>
-                        <a:ea typeface="Arial" charset="0"/>
-                        <a:cs typeface="Arial" charset="0"/>
-                      </a:endParaRPr>
-                    </a:p>
-                  </a:txBody>
-                  <a:tcPr marL="54864" marR="54864" marT="54864" marB="54864" anchor="ctr">
+                  <a:tcPr marL="45720" marR="45720" marT="45720" marB="45720" anchor="ctr">
                     <a:lnL w="6350" cap="flat" cmpd="sng" algn="ctr">
                       <a:solidFill>
                         <a:srgbClr val="D6DEE6"/>
@@ -10920,7 +12526,7 @@
                         <a:buNone/>
                       </a:pPr>
                       <a:r>
-                        <a:rPr lang="en-US" sz="1300" dirty="0">
+                        <a:rPr lang="en-US" sz="1200" dirty="0">
                           <a:solidFill>
                             <a:srgbClr val="1F2937"/>
                           </a:solidFill>
@@ -10928,16 +12534,16 @@
                           <a:ea typeface="Arial" pitchFamily="34" charset="-122"/>
                           <a:cs typeface="Arial" pitchFamily="34" charset="-120"/>
                         </a:rPr>
-                        <a:t>0.5745</a:t>
+                        <a:t>0.4540</a:t>
                       </a:r>
-                      <a:endParaRPr lang="en-US" sz="1300" dirty="0">
+                      <a:endParaRPr lang="en-US" sz="1200" dirty="0">
                         <a:latin typeface="Arial" charset="0"/>
                         <a:ea typeface="Arial" charset="0"/>
                         <a:cs typeface="Arial" charset="0"/>
                       </a:endParaRPr>
                     </a:p>
                   </a:txBody>
-                  <a:tcPr marL="54864" marR="54864" marT="54864" marB="54864" anchor="ctr">
+                  <a:tcPr marL="45720" marR="45720" marT="45720" marB="45720" anchor="ctr">
                     <a:lnL w="6350" cap="flat" cmpd="sng" algn="ctr">
                       <a:solidFill>
                         <a:srgbClr val="D6DEE6"/>
@@ -10985,7 +12591,7 @@
                         <a:buNone/>
                       </a:pPr>
                       <a:r>
-                        <a:rPr lang="en-US" sz="1300" dirty="0">
+                        <a:rPr lang="en-US" sz="1200" dirty="0">
                           <a:solidFill>
                             <a:srgbClr val="1F2937"/>
                           </a:solidFill>
@@ -10993,16 +12599,16 @@
                           <a:ea typeface="Arial" pitchFamily="34" charset="-122"/>
                           <a:cs typeface="Arial" pitchFamily="34" charset="-120"/>
                         </a:rPr>
-                        <a:t>0.4723</a:t>
+                        <a:t>+0.32%</a:t>
                       </a:r>
-                      <a:endParaRPr lang="en-US" sz="1300" dirty="0">
+                      <a:endParaRPr lang="en-US" sz="1200" dirty="0">
                         <a:latin typeface="Arial" charset="0"/>
                         <a:ea typeface="Arial" charset="0"/>
                         <a:cs typeface="Arial" charset="0"/>
                       </a:endParaRPr>
                     </a:p>
                   </a:txBody>
-                  <a:tcPr marL="54864" marR="54864" marT="54864" marB="54864" anchor="ctr">
+                  <a:tcPr marL="45720" marR="45720" marT="45720" marB="45720" anchor="ctr">
                     <a:lnL w="6350" cap="flat" cmpd="sng" algn="ctr">
                       <a:solidFill>
                         <a:srgbClr val="D6DEE6"/>
@@ -11050,7 +12656,7 @@
                         <a:buNone/>
                       </a:pPr>
                       <a:r>
-                        <a:rPr lang="en-US" sz="1300" dirty="0">
+                        <a:rPr lang="en-US" sz="1200" dirty="0">
                           <a:solidFill>
                             <a:srgbClr val="1F2937"/>
                           </a:solidFill>
@@ -11058,16 +12664,16 @@
                           <a:ea typeface="Arial" pitchFamily="34" charset="-122"/>
                           <a:cs typeface="Arial" pitchFamily="34" charset="-120"/>
                         </a:rPr>
-                        <a:t>44.4%</a:t>
+                        <a:t>7</a:t>
                       </a:r>
-                      <a:endParaRPr lang="en-US" sz="1300" dirty="0">
+                      <a:endParaRPr lang="en-US" sz="1200" dirty="0">
                         <a:latin typeface="Arial" charset="0"/>
                         <a:ea typeface="Arial" charset="0"/>
                         <a:cs typeface="Arial" charset="0"/>
                       </a:endParaRPr>
                     </a:p>
                   </a:txBody>
-                  <a:tcPr marL="54864" marR="54864" marT="54864" marB="54864" anchor="ctr">
+                  <a:tcPr marL="45720" marR="45720" marT="45720" marB="45720" anchor="ctr">
                     <a:lnL w="6350" cap="flat" cmpd="sng" algn="ctr">
                       <a:solidFill>
                         <a:srgbClr val="D6DEE6"/>
@@ -11115,7 +12721,7 @@
                         <a:buNone/>
                       </a:pPr>
                       <a:r>
-                        <a:rPr lang="en-US" sz="1300" dirty="0">
+                        <a:rPr lang="en-US" sz="1200" dirty="0">
                           <a:solidFill>
                             <a:srgbClr val="1F2937"/>
                           </a:solidFill>
@@ -11123,16 +12729,83 @@
                           <a:ea typeface="Arial" pitchFamily="34" charset="-122"/>
                           <a:cs typeface="Arial" pitchFamily="34" charset="-120"/>
                         </a:rPr>
-                        <a:t>-2.16%</a:t>
+                        <a:t>100%</a:t>
                       </a:r>
-                      <a:endParaRPr lang="en-US" sz="1300" dirty="0">
+                      <a:endParaRPr lang="en-US" sz="1200" dirty="0">
                         <a:latin typeface="Arial" charset="0"/>
                         <a:ea typeface="Arial" charset="0"/>
                         <a:cs typeface="Arial" charset="0"/>
                       </a:endParaRPr>
                     </a:p>
                   </a:txBody>
-                  <a:tcPr marL="54864" marR="54864" marT="54864" marB="54864" anchor="ctr">
+                  <a:tcPr marL="45720" marR="45720" marT="45720" marB="45720" anchor="ctr">
+                    <a:lnL w="6350" cap="flat" cmpd="sng" algn="ctr">
+                      <a:solidFill>
+                        <a:srgbClr val="D6DEE6"/>
+                      </a:solidFill>
+                      <a:prstDash val="solid"/>
+                      <a:round/>
+                      <a:headEnd type="none" w="med" len="med"/>
+                      <a:tailEnd type="none" w="med" len="med"/>
+                    </a:lnL>
+                    <a:lnR w="6350" cap="flat" cmpd="sng" algn="ctr">
+                      <a:solidFill>
+                        <a:srgbClr val="D6DEE6"/>
+                      </a:solidFill>
+                      <a:prstDash val="solid"/>
+                      <a:round/>
+                      <a:headEnd type="none" w="med" len="med"/>
+                      <a:tailEnd type="none" w="med" len="med"/>
+                    </a:lnR>
+                    <a:lnT w="6350" cap="flat" cmpd="sng" algn="ctr">
+                      <a:solidFill>
+                        <a:srgbClr val="D6DEE6"/>
+                      </a:solidFill>
+                      <a:prstDash val="solid"/>
+                      <a:round/>
+                      <a:headEnd type="none" w="med" len="med"/>
+                      <a:tailEnd type="none" w="med" len="med"/>
+                    </a:lnT>
+                    <a:lnB w="6350" cap="flat" cmpd="sng" algn="ctr">
+                      <a:solidFill>
+                        <a:srgbClr val="D6DEE6"/>
+                      </a:solidFill>
+                      <a:prstDash val="solid"/>
+                      <a:round/>
+                      <a:headEnd type="none" w="med" len="med"/>
+                      <a:tailEnd type="none" w="med" len="med"/>
+                    </a:lnB>
+                  </a:tcPr>
+                </a:tc>
+              </a:tr>
+              <a:tr h="310896">
+                <a:tc>
+                  <a:txBody>
+                    <a:bodyPr/>
+                    <a:lstStyle/>
+                    <a:p>
+                      <a:pPr algn="ctr" indent="0" marL="0">
+                        <a:buNone/>
+                      </a:pPr>
+                      <a:r>
+                        <a:rPr lang="en-US" sz="1200" dirty="0">
+                          <a:solidFill>
+                            <a:srgbClr val="1F2937"/>
+                          </a:solidFill>
+                          <a:latin typeface="Arial" pitchFamily="34" charset="0"/>
+                          <a:ea typeface="Arial" pitchFamily="34" charset="-122"/>
+                          <a:cs typeface="Arial" pitchFamily="34" charset="-120"/>
+                        </a:rPr>
+                        <a:t>Ridge</a:t>
+                      </a:r>
+                      <a:endParaRPr lang="en-US" sz="1200" dirty="0">
+                        <a:latin typeface="Arial" charset="0"/>
+                        <a:ea typeface="Arial" charset="0"/>
+                        <a:cs typeface="Arial" charset="0"/>
+                      </a:endParaRPr>
+                    </a:p>
+                  </a:txBody>
+                  <a:tcPr marL="45720" marR="45720" marT="45720" marB="45720" anchor="ctr">
                     <a:lnL w="6350" cap="flat" cmpd="sng" algn="ctr">
                       <a:solidFill>
                         <a:srgbClr val="D6DEE6"/>
@@ -11180,7 +12853,7 @@
                         <a:buNone/>
                       </a:pPr>
                       <a:r>
-                        <a:rPr lang="en-US" sz="1300" dirty="0">
+                        <a:rPr lang="en-US" sz="1200" dirty="0">
                           <a:solidFill>
                             <a:srgbClr val="1F2937"/>
                           </a:solidFill>
@@ -11188,16 +12861,16 @@
                           <a:ea typeface="Arial" pitchFamily="34" charset="-122"/>
                           <a:cs typeface="Arial" pitchFamily="34" charset="-120"/>
                         </a:rPr>
-                        <a:t>0.362</a:t>
+                        <a:t>0.5602</a:t>
                       </a:r>
-                      <a:endParaRPr lang="en-US" sz="1300" dirty="0">
+                      <a:endParaRPr lang="en-US" sz="1200" dirty="0">
                         <a:latin typeface="Arial" charset="0"/>
                         <a:ea typeface="Arial" charset="0"/>
                         <a:cs typeface="Arial" charset="0"/>
                       </a:endParaRPr>
                     </a:p>
                   </a:txBody>
-                  <a:tcPr marL="54864" marR="54864" marT="54864" marB="54864" anchor="ctr">
+                  <a:tcPr marL="45720" marR="45720" marT="45720" marB="45720" anchor="ctr">
                     <a:lnL w="6350" cap="flat" cmpd="sng" algn="ctr">
                       <a:solidFill>
                         <a:srgbClr val="D6DEE6"/>
@@ -11245,7 +12918,7 @@
                         <a:buNone/>
                       </a:pPr>
                       <a:r>
-                        <a:rPr lang="en-US" sz="1300" dirty="0">
+                        <a:rPr lang="en-US" sz="1200" dirty="0">
                           <a:solidFill>
                             <a:srgbClr val="1F2937"/>
                           </a:solidFill>
@@ -11253,83 +12926,16 @@
                           <a:ea typeface="Arial" pitchFamily="34" charset="-122"/>
                           <a:cs typeface="Arial" pitchFamily="34" charset="-120"/>
                         </a:rPr>
-                        <a:t>0.5755</a:t>
+                        <a:t>0.4479</a:t>
                       </a:r>
-                      <a:endParaRPr lang="en-US" sz="1300" dirty="0">
+                      <a:endParaRPr lang="en-US" sz="1200" dirty="0">
                         <a:latin typeface="Arial" charset="0"/>
                         <a:ea typeface="Arial" charset="0"/>
                         <a:cs typeface="Arial" charset="0"/>
                       </a:endParaRPr>
                     </a:p>
                   </a:txBody>
-                  <a:tcPr marL="54864" marR="54864" marT="54864" marB="54864" anchor="ctr">
-                    <a:lnL w="6350" cap="flat" cmpd="sng" algn="ctr">
-                      <a:solidFill>
-                        <a:srgbClr val="D6DEE6"/>
-                      </a:solidFill>
-                      <a:prstDash val="solid"/>
-                      <a:round/>
-                      <a:headEnd type="none" w="med" len="med"/>
-                      <a:tailEnd type="none" w="med" len="med"/>
-                    </a:lnL>
-                    <a:lnR w="6350" cap="flat" cmpd="sng" algn="ctr">
-                      <a:solidFill>
-                        <a:srgbClr val="D6DEE6"/>
-                      </a:solidFill>
-                      <a:prstDash val="solid"/>
-                      <a:round/>
-                      <a:headEnd type="none" w="med" len="med"/>
-                      <a:tailEnd type="none" w="med" len="med"/>
-                    </a:lnR>
-                    <a:lnT w="6350" cap="flat" cmpd="sng" algn="ctr">
-                      <a:solidFill>
-                        <a:srgbClr val="D6DEE6"/>
-                      </a:solidFill>
-                      <a:prstDash val="solid"/>
-                      <a:round/>
-                      <a:headEnd type="none" w="med" len="med"/>
-                      <a:tailEnd type="none" w="med" len="med"/>
-                    </a:lnT>
-                    <a:lnB w="6350" cap="flat" cmpd="sng" algn="ctr">
-                      <a:solidFill>
-                        <a:srgbClr val="D6DEE6"/>
-                      </a:solidFill>
-                      <a:prstDash val="solid"/>
-                      <a:round/>
-                      <a:headEnd type="none" w="med" len="med"/>
-                      <a:tailEnd type="none" w="med" len="med"/>
-                    </a:lnB>
-                  </a:tcPr>
-                </a:tc>
-              </a:tr>
-              <a:tr h="457200">
-                <a:tc>
-                  <a:txBody>
-                    <a:bodyPr/>
-                    <a:lstStyle/>
-                    <a:p>
-                      <a:pPr algn="ctr" indent="0" marL="0">
-                        <a:buNone/>
-                      </a:pPr>
-                      <a:r>
-                        <a:rPr lang="en-US" sz="1300" b="1" dirty="0">
-                          <a:solidFill>
-                            <a:srgbClr val="1F2937"/>
-                          </a:solidFill>
-                          <a:latin typeface="Arial" pitchFamily="34" charset="0"/>
-                          <a:ea typeface="Arial" pitchFamily="34" charset="-122"/>
-                          <a:cs typeface="Arial" pitchFamily="34" charset="-120"/>
-                        </a:rPr>
-                        <a:t>Combination (ours)</a:t>
-                      </a:r>
-                      <a:endParaRPr lang="en-US" sz="1300" dirty="0">
-                        <a:latin typeface="Arial" charset="0"/>
-                        <a:ea typeface="Arial" charset="0"/>
-                        <a:cs typeface="Arial" charset="0"/>
-                      </a:endParaRPr>
-                    </a:p>
-                  </a:txBody>
-                  <a:tcPr marL="54864" marR="54864" marT="54864" marB="54864" anchor="ctr">
+                  <a:tcPr marL="45720" marR="45720" marT="45720" marB="45720" anchor="ctr">
                     <a:lnL w="6350" cap="flat" cmpd="sng" algn="ctr">
                       <a:solidFill>
                         <a:srgbClr val="D6DEE6"/>
@@ -11377,7 +12983,7 @@
                         <a:buNone/>
                       </a:pPr>
                       <a:r>
-                        <a:rPr lang="en-US" sz="1300" dirty="0">
+                        <a:rPr lang="en-US" sz="1200" dirty="0">
                           <a:solidFill>
                             <a:srgbClr val="1F2937"/>
                           </a:solidFill>
@@ -11385,16 +12991,16 @@
                           <a:ea typeface="Arial" pitchFamily="34" charset="-122"/>
                           <a:cs typeface="Arial" pitchFamily="34" charset="-120"/>
                         </a:rPr>
-                        <a:t>0.5599</a:t>
+                        <a:t>+0.38%</a:t>
                       </a:r>
-                      <a:endParaRPr lang="en-US" sz="1300" dirty="0">
+                      <a:endParaRPr lang="en-US" sz="1200" dirty="0">
                         <a:latin typeface="Arial" charset="0"/>
                         <a:ea typeface="Arial" charset="0"/>
                         <a:cs typeface="Arial" charset="0"/>
                       </a:endParaRPr>
                     </a:p>
                   </a:txBody>
-                  <a:tcPr marL="54864" marR="54864" marT="54864" marB="54864" anchor="ctr">
+                  <a:tcPr marL="45720" marR="45720" marT="45720" marB="45720" anchor="ctr">
                     <a:lnL w="6350" cap="flat" cmpd="sng" algn="ctr">
                       <a:solidFill>
                         <a:srgbClr val="D6DEE6"/>
@@ -11442,7 +13048,7 @@
                         <a:buNone/>
                       </a:pPr>
                       <a:r>
-                        <a:rPr lang="en-US" sz="1300" dirty="0">
+                        <a:rPr lang="en-US" sz="1200" dirty="0">
                           <a:solidFill>
                             <a:srgbClr val="1F2937"/>
                           </a:solidFill>
@@ -11450,16 +13056,16 @@
                           <a:ea typeface="Arial" pitchFamily="34" charset="-122"/>
                           <a:cs typeface="Arial" pitchFamily="34" charset="-120"/>
                         </a:rPr>
-                        <a:t>0.4495</a:t>
+                        <a:t>6</a:t>
                       </a:r>
-                      <a:endParaRPr lang="en-US" sz="1300" dirty="0">
+                      <a:endParaRPr lang="en-US" sz="1200" dirty="0">
                         <a:latin typeface="Arial" charset="0"/>
                         <a:ea typeface="Arial" charset="0"/>
                         <a:cs typeface="Arial" charset="0"/>
                       </a:endParaRPr>
                     </a:p>
                   </a:txBody>
-                  <a:tcPr marL="54864" marR="54864" marT="54864" marB="54864" anchor="ctr">
+                  <a:tcPr marL="45720" marR="45720" marT="45720" marB="45720" anchor="ctr">
                     <a:lnL w="6350" cap="flat" cmpd="sng" algn="ctr">
                       <a:solidFill>
                         <a:srgbClr val="D6DEE6"/>
@@ -11507,7 +13113,7 @@
                         <a:buNone/>
                       </a:pPr>
                       <a:r>
-                        <a:rPr lang="en-US" sz="1300" dirty="0">
+                        <a:rPr lang="en-US" sz="1200" dirty="0">
                           <a:solidFill>
                             <a:srgbClr val="1F2937"/>
                           </a:solidFill>
@@ -11515,16 +13121,83 @@
                           <a:ea typeface="Arial" pitchFamily="34" charset="-122"/>
                           <a:cs typeface="Arial" pitchFamily="34" charset="-120"/>
                         </a:rPr>
-                        <a:t>46.4%</a:t>
+                        <a:t>72%</a:t>
                       </a:r>
-                      <a:endParaRPr lang="en-US" sz="1300" dirty="0">
+                      <a:endParaRPr lang="en-US" sz="1200" dirty="0">
                         <a:latin typeface="Arial" charset="0"/>
                         <a:ea typeface="Arial" charset="0"/>
                         <a:cs typeface="Arial" charset="0"/>
                       </a:endParaRPr>
                     </a:p>
                   </a:txBody>
-                  <a:tcPr marL="54864" marR="54864" marT="54864" marB="54864" anchor="ctr">
+                  <a:tcPr marL="45720" marR="45720" marT="45720" marB="45720" anchor="ctr">
+                    <a:lnL w="6350" cap="flat" cmpd="sng" algn="ctr">
+                      <a:solidFill>
+                        <a:srgbClr val="D6DEE6"/>
+                      </a:solidFill>
+                      <a:prstDash val="solid"/>
+                      <a:round/>
+                      <a:headEnd type="none" w="med" len="med"/>
+                      <a:tailEnd type="none" w="med" len="med"/>
+                    </a:lnL>
+                    <a:lnR w="6350" cap="flat" cmpd="sng" algn="ctr">
+                      <a:solidFill>
+                        <a:srgbClr val="D6DEE6"/>
+                      </a:solidFill>
+                      <a:prstDash val="solid"/>
+                      <a:round/>
+                      <a:headEnd type="none" w="med" len="med"/>
+                      <a:tailEnd type="none" w="med" len="med"/>
+                    </a:lnR>
+                    <a:lnT w="6350" cap="flat" cmpd="sng" algn="ctr">
+                      <a:solidFill>
+                        <a:srgbClr val="D6DEE6"/>
+                      </a:solidFill>
+                      <a:prstDash val="solid"/>
+                      <a:round/>
+                      <a:headEnd type="none" w="med" len="med"/>
+                      <a:tailEnd type="none" w="med" len="med"/>
+                    </a:lnT>
+                    <a:lnB w="6350" cap="flat" cmpd="sng" algn="ctr">
+                      <a:solidFill>
+                        <a:srgbClr val="D6DEE6"/>
+                      </a:solidFill>
+                      <a:prstDash val="solid"/>
+                      <a:round/>
+                      <a:headEnd type="none" w="med" len="med"/>
+                      <a:tailEnd type="none" w="med" len="med"/>
+                    </a:lnB>
+                  </a:tcPr>
+                </a:tc>
+              </a:tr>
+              <a:tr h="310896">
+                <a:tc>
+                  <a:txBody>
+                    <a:bodyPr/>
+                    <a:lstStyle/>
+                    <a:p>
+                      <a:pPr algn="ctr" indent="0" marL="0">
+                        <a:buNone/>
+                      </a:pPr>
+                      <a:r>
+                        <a:rPr lang="en-US" sz="1200" dirty="0">
+                          <a:solidFill>
+                            <a:srgbClr val="1F2937"/>
+                          </a:solidFill>
+                          <a:latin typeface="Arial" pitchFamily="34" charset="0"/>
+                          <a:ea typeface="Arial" pitchFamily="34" charset="-122"/>
+                          <a:cs typeface="Arial" pitchFamily="34" charset="-120"/>
+                        </a:rPr>
+                        <a:t>Gradient boosting</a:t>
+                      </a:r>
+                      <a:endParaRPr lang="en-US" sz="1200" dirty="0">
+                        <a:latin typeface="Arial" charset="0"/>
+                        <a:ea typeface="Arial" charset="0"/>
+                        <a:cs typeface="Arial" charset="0"/>
+                      </a:endParaRPr>
+                    </a:p>
+                  </a:txBody>
+                  <a:tcPr marL="45720" marR="45720" marT="45720" marB="45720" anchor="ctr">
                     <a:lnL w="6350" cap="flat" cmpd="sng" algn="ctr">
                       <a:solidFill>
                         <a:srgbClr val="D6DEE6"/>
@@ -11572,7 +13245,7 @@
                         <a:buNone/>
                       </a:pPr>
                       <a:r>
-                        <a:rPr lang="en-US" sz="1300" dirty="0">
+                        <a:rPr lang="en-US" sz="1200" dirty="0">
                           <a:solidFill>
                             <a:srgbClr val="1F2937"/>
                           </a:solidFill>
@@ -11580,16 +13253,16 @@
                           <a:ea typeface="Arial" pitchFamily="34" charset="-122"/>
                           <a:cs typeface="Arial" pitchFamily="34" charset="-120"/>
                         </a:rPr>
-                        <a:t>+0.44%</a:t>
+                        <a:t>0.5745</a:t>
                       </a:r>
-                      <a:endParaRPr lang="en-US" sz="1300" dirty="0">
+                      <a:endParaRPr lang="en-US" sz="1200" dirty="0">
                         <a:latin typeface="Arial" charset="0"/>
                         <a:ea typeface="Arial" charset="0"/>
                         <a:cs typeface="Arial" charset="0"/>
                       </a:endParaRPr>
                     </a:p>
                   </a:txBody>
-                  <a:tcPr marL="54864" marR="54864" marT="54864" marB="54864" anchor="ctr">
+                  <a:tcPr marL="45720" marR="45720" marT="45720" marB="45720" anchor="ctr">
                     <a:lnL w="6350" cap="flat" cmpd="sng" algn="ctr">
                       <a:solidFill>
                         <a:srgbClr val="D6DEE6"/>
@@ -11637,7 +13310,7 @@
                         <a:buNone/>
                       </a:pPr>
                       <a:r>
-                        <a:rPr lang="en-US" sz="1300" dirty="0">
+                        <a:rPr lang="en-US" sz="1200" dirty="0">
                           <a:solidFill>
                             <a:srgbClr val="1F2937"/>
                           </a:solidFill>
@@ -11645,16 +13318,16 @@
                           <a:ea typeface="Arial" pitchFamily="34" charset="-122"/>
                           <a:cs typeface="Arial" pitchFamily="34" charset="-120"/>
                         </a:rPr>
-                        <a:t>0.449</a:t>
+                        <a:t>0.4723</a:t>
                       </a:r>
-                      <a:endParaRPr lang="en-US" sz="1300" dirty="0">
+                      <a:endParaRPr lang="en-US" sz="1200" dirty="0">
                         <a:latin typeface="Arial" charset="0"/>
                         <a:ea typeface="Arial" charset="0"/>
                         <a:cs typeface="Arial" charset="0"/>
                       </a:endParaRPr>
                     </a:p>
                   </a:txBody>
-                  <a:tcPr marL="54864" marR="54864" marT="54864" marB="54864" anchor="ctr">
+                  <a:tcPr marL="45720" marR="45720" marT="45720" marB="45720" anchor="ctr">
                     <a:lnL w="6350" cap="flat" cmpd="sng" algn="ctr">
                       <a:solidFill>
                         <a:srgbClr val="D6DEE6"/>
@@ -11702,7 +13375,7 @@
                         <a:buNone/>
                       </a:pPr>
                       <a:r>
-                        <a:rPr lang="en-US" sz="1300" dirty="0">
+                        <a:rPr lang="en-US" sz="1200" dirty="0">
                           <a:solidFill>
                             <a:srgbClr val="1F2937"/>
                           </a:solidFill>
@@ -11710,16 +13383,1714 @@
                           <a:ea typeface="Arial" pitchFamily="34" charset="-122"/>
                           <a:cs typeface="Arial" pitchFamily="34" charset="-120"/>
                         </a:rPr>
-                        <a:t>0.5619</a:t>
+                        <a:t>-2.16%</a:t>
                       </a:r>
-                      <a:endParaRPr lang="en-US" sz="1300" dirty="0">
+                      <a:endParaRPr lang="en-US" sz="1200" dirty="0">
                         <a:latin typeface="Arial" charset="0"/>
                         <a:ea typeface="Arial" charset="0"/>
                         <a:cs typeface="Arial" charset="0"/>
                       </a:endParaRPr>
                     </a:p>
                   </a:txBody>
-                  <a:tcPr marL="54864" marR="54864" marT="54864" marB="54864" anchor="ctr">
+                  <a:tcPr marL="45720" marR="45720" marT="45720" marB="45720" anchor="ctr">
+                    <a:lnL w="6350" cap="flat" cmpd="sng" algn="ctr">
+                      <a:solidFill>
+                        <a:srgbClr val="D6DEE6"/>
+                      </a:solidFill>
+                      <a:prstDash val="solid"/>
+                      <a:round/>
+                      <a:headEnd type="none" w="med" len="med"/>
+                      <a:tailEnd type="none" w="med" len="med"/>
+                    </a:lnL>
+                    <a:lnR w="6350" cap="flat" cmpd="sng" algn="ctr">
+                      <a:solidFill>
+                        <a:srgbClr val="D6DEE6"/>
+                      </a:solidFill>
+                      <a:prstDash val="solid"/>
+                      <a:round/>
+                      <a:headEnd type="none" w="med" len="med"/>
+                      <a:tailEnd type="none" w="med" len="med"/>
+                    </a:lnR>
+                    <a:lnT w="6350" cap="flat" cmpd="sng" algn="ctr">
+                      <a:solidFill>
+                        <a:srgbClr val="D6DEE6"/>
+                      </a:solidFill>
+                      <a:prstDash val="solid"/>
+                      <a:round/>
+                      <a:headEnd type="none" w="med" len="med"/>
+                      <a:tailEnd type="none" w="med" len="med"/>
+                    </a:lnT>
+                    <a:lnB w="6350" cap="flat" cmpd="sng" algn="ctr">
+                      <a:solidFill>
+                        <a:srgbClr val="D6DEE6"/>
+                      </a:solidFill>
+                      <a:prstDash val="solid"/>
+                      <a:round/>
+                      <a:headEnd type="none" w="med" len="med"/>
+                      <a:tailEnd type="none" w="med" len="med"/>
+                    </a:lnB>
+                  </a:tcPr>
+                </a:tc>
+                <a:tc>
+                  <a:txBody>
+                    <a:bodyPr/>
+                    <a:lstStyle/>
+                    <a:p>
+                      <a:pPr algn="ctr" indent="0" marL="0">
+                        <a:buNone/>
+                      </a:pPr>
+                      <a:r>
+                        <a:rPr lang="en-US" sz="1200" dirty="0">
+                          <a:solidFill>
+                            <a:srgbClr val="1F2937"/>
+                          </a:solidFill>
+                          <a:latin typeface="Arial" pitchFamily="34" charset="0"/>
+                          <a:ea typeface="Arial" pitchFamily="34" charset="-122"/>
+                          <a:cs typeface="Arial" pitchFamily="34" charset="-120"/>
+                        </a:rPr>
+                        <a:t>13</a:t>
+                      </a:r>
+                      <a:endParaRPr lang="en-US" sz="1200" dirty="0">
+                        <a:latin typeface="Arial" charset="0"/>
+                        <a:ea typeface="Arial" charset="0"/>
+                        <a:cs typeface="Arial" charset="0"/>
+                      </a:endParaRPr>
+                    </a:p>
+                  </a:txBody>
+                  <a:tcPr marL="45720" marR="45720" marT="45720" marB="45720" anchor="ctr">
+                    <a:lnL w="6350" cap="flat" cmpd="sng" algn="ctr">
+                      <a:solidFill>
+                        <a:srgbClr val="D6DEE6"/>
+                      </a:solidFill>
+                      <a:prstDash val="solid"/>
+                      <a:round/>
+                      <a:headEnd type="none" w="med" len="med"/>
+                      <a:tailEnd type="none" w="med" len="med"/>
+                    </a:lnL>
+                    <a:lnR w="6350" cap="flat" cmpd="sng" algn="ctr">
+                      <a:solidFill>
+                        <a:srgbClr val="D6DEE6"/>
+                      </a:solidFill>
+                      <a:prstDash val="solid"/>
+                      <a:round/>
+                      <a:headEnd type="none" w="med" len="med"/>
+                      <a:tailEnd type="none" w="med" len="med"/>
+                    </a:lnR>
+                    <a:lnT w="6350" cap="flat" cmpd="sng" algn="ctr">
+                      <a:solidFill>
+                        <a:srgbClr val="D6DEE6"/>
+                      </a:solidFill>
+                      <a:prstDash val="solid"/>
+                      <a:round/>
+                      <a:headEnd type="none" w="med" len="med"/>
+                      <a:tailEnd type="none" w="med" len="med"/>
+                    </a:lnT>
+                    <a:lnB w="6350" cap="flat" cmpd="sng" algn="ctr">
+                      <a:solidFill>
+                        <a:srgbClr val="D6DEE6"/>
+                      </a:solidFill>
+                      <a:prstDash val="solid"/>
+                      <a:round/>
+                      <a:headEnd type="none" w="med" len="med"/>
+                      <a:tailEnd type="none" w="med" len="med"/>
+                    </a:lnB>
+                  </a:tcPr>
+                </a:tc>
+                <a:tc>
+                  <a:txBody>
+                    <a:bodyPr/>
+                    <a:lstStyle/>
+                    <a:p>
+                      <a:pPr algn="ctr" indent="0" marL="0">
+                        <a:buNone/>
+                      </a:pPr>
+                      <a:r>
+                        <a:rPr lang="en-US" sz="1200" dirty="0">
+                          <a:solidFill>
+                            <a:srgbClr val="1F2937"/>
+                          </a:solidFill>
+                          <a:latin typeface="Arial" pitchFamily="34" charset="0"/>
+                          <a:ea typeface="Arial" pitchFamily="34" charset="-122"/>
+                          <a:cs typeface="Arial" pitchFamily="34" charset="-120"/>
+                        </a:rPr>
+                        <a:t>65%</a:t>
+                      </a:r>
+                      <a:endParaRPr lang="en-US" sz="1200" dirty="0">
+                        <a:latin typeface="Arial" charset="0"/>
+                        <a:ea typeface="Arial" charset="0"/>
+                        <a:cs typeface="Arial" charset="0"/>
+                      </a:endParaRPr>
+                    </a:p>
+                  </a:txBody>
+                  <a:tcPr marL="45720" marR="45720" marT="45720" marB="45720" anchor="ctr">
+                    <a:lnL w="6350" cap="flat" cmpd="sng" algn="ctr">
+                      <a:solidFill>
+                        <a:srgbClr val="D6DEE6"/>
+                      </a:solidFill>
+                      <a:prstDash val="solid"/>
+                      <a:round/>
+                      <a:headEnd type="none" w="med" len="med"/>
+                      <a:tailEnd type="none" w="med" len="med"/>
+                    </a:lnL>
+                    <a:lnR w="6350" cap="flat" cmpd="sng" algn="ctr">
+                      <a:solidFill>
+                        <a:srgbClr val="D6DEE6"/>
+                      </a:solidFill>
+                      <a:prstDash val="solid"/>
+                      <a:round/>
+                      <a:headEnd type="none" w="med" len="med"/>
+                      <a:tailEnd type="none" w="med" len="med"/>
+                    </a:lnR>
+                    <a:lnT w="6350" cap="flat" cmpd="sng" algn="ctr">
+                      <a:solidFill>
+                        <a:srgbClr val="D6DEE6"/>
+                      </a:solidFill>
+                      <a:prstDash val="solid"/>
+                      <a:round/>
+                      <a:headEnd type="none" w="med" len="med"/>
+                      <a:tailEnd type="none" w="med" len="med"/>
+                    </a:lnT>
+                    <a:lnB w="6350" cap="flat" cmpd="sng" algn="ctr">
+                      <a:solidFill>
+                        <a:srgbClr val="D6DEE6"/>
+                      </a:solidFill>
+                      <a:prstDash val="solid"/>
+                      <a:round/>
+                      <a:headEnd type="none" w="med" len="med"/>
+                      <a:tailEnd type="none" w="med" len="med"/>
+                    </a:lnB>
+                  </a:tcPr>
+                </a:tc>
+              </a:tr>
+              <a:tr h="310896">
+                <a:tc>
+                  <a:txBody>
+                    <a:bodyPr/>
+                    <a:lstStyle/>
+                    <a:p>
+                      <a:pPr algn="ctr" indent="0" marL="0">
+                        <a:buNone/>
+                      </a:pPr>
+                      <a:r>
+                        <a:rPr lang="en-US" sz="1200" b="1" dirty="0">
+                          <a:solidFill>
+                            <a:srgbClr val="1F2937"/>
+                          </a:solidFill>
+                          <a:latin typeface="Arial" pitchFamily="34" charset="0"/>
+                          <a:ea typeface="Arial" pitchFamily="34" charset="-122"/>
+                          <a:cs typeface="Arial" pitchFamily="34" charset="-120"/>
+                        </a:rPr>
+                        <a:t>Combination</a:t>
+                      </a:r>
+                      <a:endParaRPr lang="en-US" sz="1200" dirty="0">
+                        <a:latin typeface="Arial" charset="0"/>
+                        <a:ea typeface="Arial" charset="0"/>
+                        <a:cs typeface="Arial" charset="0"/>
+                      </a:endParaRPr>
+                    </a:p>
+                  </a:txBody>
+                  <a:tcPr marL="45720" marR="45720" marT="45720" marB="45720" anchor="ctr">
+                    <a:lnL w="6350" cap="flat" cmpd="sng" algn="ctr">
+                      <a:solidFill>
+                        <a:srgbClr val="D6DEE6"/>
+                      </a:solidFill>
+                      <a:prstDash val="solid"/>
+                      <a:round/>
+                      <a:headEnd type="none" w="med" len="med"/>
+                      <a:tailEnd type="none" w="med" len="med"/>
+                    </a:lnL>
+                    <a:lnR w="6350" cap="flat" cmpd="sng" algn="ctr">
+                      <a:solidFill>
+                        <a:srgbClr val="D6DEE6"/>
+                      </a:solidFill>
+                      <a:prstDash val="solid"/>
+                      <a:round/>
+                      <a:headEnd type="none" w="med" len="med"/>
+                      <a:tailEnd type="none" w="med" len="med"/>
+                    </a:lnR>
+                    <a:lnT w="6350" cap="flat" cmpd="sng" algn="ctr">
+                      <a:solidFill>
+                        <a:srgbClr val="D6DEE6"/>
+                      </a:solidFill>
+                      <a:prstDash val="solid"/>
+                      <a:round/>
+                      <a:headEnd type="none" w="med" len="med"/>
+                      <a:tailEnd type="none" w="med" len="med"/>
+                    </a:lnT>
+                    <a:lnB w="6350" cap="flat" cmpd="sng" algn="ctr">
+                      <a:solidFill>
+                        <a:srgbClr val="D6DEE6"/>
+                      </a:solidFill>
+                      <a:prstDash val="solid"/>
+                      <a:round/>
+                      <a:headEnd type="none" w="med" len="med"/>
+                      <a:tailEnd type="none" w="med" len="med"/>
+                    </a:lnB>
+                  </a:tcPr>
+                </a:tc>
+                <a:tc>
+                  <a:txBody>
+                    <a:bodyPr/>
+                    <a:lstStyle/>
+                    <a:p>
+                      <a:pPr algn="ctr" indent="0" marL="0">
+                        <a:buNone/>
+                      </a:pPr>
+                      <a:r>
+                        <a:rPr lang="en-US" sz="1200" b="1" dirty="0">
+                          <a:solidFill>
+                            <a:srgbClr val="1F2937"/>
+                          </a:solidFill>
+                          <a:latin typeface="Arial" pitchFamily="34" charset="0"/>
+                          <a:ea typeface="Arial" pitchFamily="34" charset="-122"/>
+                          <a:cs typeface="Arial" pitchFamily="34" charset="-120"/>
+                        </a:rPr>
+                        <a:t>0.5599</a:t>
+                      </a:r>
+                      <a:endParaRPr lang="en-US" sz="1200" dirty="0">
+                        <a:latin typeface="Arial" charset="0"/>
+                        <a:ea typeface="Arial" charset="0"/>
+                        <a:cs typeface="Arial" charset="0"/>
+                      </a:endParaRPr>
+                    </a:p>
+                  </a:txBody>
+                  <a:tcPr marL="45720" marR="45720" marT="45720" marB="45720" anchor="ctr">
+                    <a:lnL w="6350" cap="flat" cmpd="sng" algn="ctr">
+                      <a:solidFill>
+                        <a:srgbClr val="D6DEE6"/>
+                      </a:solidFill>
+                      <a:prstDash val="solid"/>
+                      <a:round/>
+                      <a:headEnd type="none" w="med" len="med"/>
+                      <a:tailEnd type="none" w="med" len="med"/>
+                    </a:lnL>
+                    <a:lnR w="6350" cap="flat" cmpd="sng" algn="ctr">
+                      <a:solidFill>
+                        <a:srgbClr val="D6DEE6"/>
+                      </a:solidFill>
+                      <a:prstDash val="solid"/>
+                      <a:round/>
+                      <a:headEnd type="none" w="med" len="med"/>
+                      <a:tailEnd type="none" w="med" len="med"/>
+                    </a:lnR>
+                    <a:lnT w="6350" cap="flat" cmpd="sng" algn="ctr">
+                      <a:solidFill>
+                        <a:srgbClr val="D6DEE6"/>
+                      </a:solidFill>
+                      <a:prstDash val="solid"/>
+                      <a:round/>
+                      <a:headEnd type="none" w="med" len="med"/>
+                      <a:tailEnd type="none" w="med" len="med"/>
+                    </a:lnT>
+                    <a:lnB w="6350" cap="flat" cmpd="sng" algn="ctr">
+                      <a:solidFill>
+                        <a:srgbClr val="D6DEE6"/>
+                      </a:solidFill>
+                      <a:prstDash val="solid"/>
+                      <a:round/>
+                      <a:headEnd type="none" w="med" len="med"/>
+                      <a:tailEnd type="none" w="med" len="med"/>
+                    </a:lnB>
+                  </a:tcPr>
+                </a:tc>
+                <a:tc>
+                  <a:txBody>
+                    <a:bodyPr/>
+                    <a:lstStyle/>
+                    <a:p>
+                      <a:pPr algn="ctr" indent="0" marL="0">
+                        <a:buNone/>
+                      </a:pPr>
+                      <a:r>
+                        <a:rPr lang="en-US" sz="1200" b="1" dirty="0">
+                          <a:solidFill>
+                            <a:srgbClr val="1F2937"/>
+                          </a:solidFill>
+                          <a:latin typeface="Arial" pitchFamily="34" charset="0"/>
+                          <a:ea typeface="Arial" pitchFamily="34" charset="-122"/>
+                          <a:cs typeface="Arial" pitchFamily="34" charset="-120"/>
+                        </a:rPr>
+                        <a:t>0.4495</a:t>
+                      </a:r>
+                      <a:endParaRPr lang="en-US" sz="1200" dirty="0">
+                        <a:latin typeface="Arial" charset="0"/>
+                        <a:ea typeface="Arial" charset="0"/>
+                        <a:cs typeface="Arial" charset="0"/>
+                      </a:endParaRPr>
+                    </a:p>
+                  </a:txBody>
+                  <a:tcPr marL="45720" marR="45720" marT="45720" marB="45720" anchor="ctr">
+                    <a:lnL w="6350" cap="flat" cmpd="sng" algn="ctr">
+                      <a:solidFill>
+                        <a:srgbClr val="D6DEE6"/>
+                      </a:solidFill>
+                      <a:prstDash val="solid"/>
+                      <a:round/>
+                      <a:headEnd type="none" w="med" len="med"/>
+                      <a:tailEnd type="none" w="med" len="med"/>
+                    </a:lnL>
+                    <a:lnR w="6350" cap="flat" cmpd="sng" algn="ctr">
+                      <a:solidFill>
+                        <a:srgbClr val="D6DEE6"/>
+                      </a:solidFill>
+                      <a:prstDash val="solid"/>
+                      <a:round/>
+                      <a:headEnd type="none" w="med" len="med"/>
+                      <a:tailEnd type="none" w="med" len="med"/>
+                    </a:lnR>
+                    <a:lnT w="6350" cap="flat" cmpd="sng" algn="ctr">
+                      <a:solidFill>
+                        <a:srgbClr val="D6DEE6"/>
+                      </a:solidFill>
+                      <a:prstDash val="solid"/>
+                      <a:round/>
+                      <a:headEnd type="none" w="med" len="med"/>
+                      <a:tailEnd type="none" w="med" len="med"/>
+                    </a:lnT>
+                    <a:lnB w="6350" cap="flat" cmpd="sng" algn="ctr">
+                      <a:solidFill>
+                        <a:srgbClr val="D6DEE6"/>
+                      </a:solidFill>
+                      <a:prstDash val="solid"/>
+                      <a:round/>
+                      <a:headEnd type="none" w="med" len="med"/>
+                      <a:tailEnd type="none" w="med" len="med"/>
+                    </a:lnB>
+                  </a:tcPr>
+                </a:tc>
+                <a:tc>
+                  <a:txBody>
+                    <a:bodyPr/>
+                    <a:lstStyle/>
+                    <a:p>
+                      <a:pPr algn="ctr" indent="0" marL="0">
+                        <a:buNone/>
+                      </a:pPr>
+                      <a:r>
+                        <a:rPr lang="en-US" sz="1200" b="1" dirty="0">
+                          <a:solidFill>
+                            <a:srgbClr val="1F2937"/>
+                          </a:solidFill>
+                          <a:latin typeface="Arial" pitchFamily="34" charset="0"/>
+                          <a:ea typeface="Arial" pitchFamily="34" charset="-122"/>
+                          <a:cs typeface="Arial" pitchFamily="34" charset="-120"/>
+                        </a:rPr>
+                        <a:t>+0.44%</a:t>
+                      </a:r>
+                      <a:endParaRPr lang="en-US" sz="1200" dirty="0">
+                        <a:latin typeface="Arial" charset="0"/>
+                        <a:ea typeface="Arial" charset="0"/>
+                        <a:cs typeface="Arial" charset="0"/>
+                      </a:endParaRPr>
+                    </a:p>
+                  </a:txBody>
+                  <a:tcPr marL="45720" marR="45720" marT="45720" marB="45720" anchor="ctr">
+                    <a:lnL w="6350" cap="flat" cmpd="sng" algn="ctr">
+                      <a:solidFill>
+                        <a:srgbClr val="D6DEE6"/>
+                      </a:solidFill>
+                      <a:prstDash val="solid"/>
+                      <a:round/>
+                      <a:headEnd type="none" w="med" len="med"/>
+                      <a:tailEnd type="none" w="med" len="med"/>
+                    </a:lnL>
+                    <a:lnR w="6350" cap="flat" cmpd="sng" algn="ctr">
+                      <a:solidFill>
+                        <a:srgbClr val="D6DEE6"/>
+                      </a:solidFill>
+                      <a:prstDash val="solid"/>
+                      <a:round/>
+                      <a:headEnd type="none" w="med" len="med"/>
+                      <a:tailEnd type="none" w="med" len="med"/>
+                    </a:lnR>
+                    <a:lnT w="6350" cap="flat" cmpd="sng" algn="ctr">
+                      <a:solidFill>
+                        <a:srgbClr val="D6DEE6"/>
+                      </a:solidFill>
+                      <a:prstDash val="solid"/>
+                      <a:round/>
+                      <a:headEnd type="none" w="med" len="med"/>
+                      <a:tailEnd type="none" w="med" len="med"/>
+                    </a:lnT>
+                    <a:lnB w="6350" cap="flat" cmpd="sng" algn="ctr">
+                      <a:solidFill>
+                        <a:srgbClr val="D6DEE6"/>
+                      </a:solidFill>
+                      <a:prstDash val="solid"/>
+                      <a:round/>
+                      <a:headEnd type="none" w="med" len="med"/>
+                      <a:tailEnd type="none" w="med" len="med"/>
+                    </a:lnB>
+                  </a:tcPr>
+                </a:tc>
+                <a:tc>
+                  <a:txBody>
+                    <a:bodyPr/>
+                    <a:lstStyle/>
+                    <a:p>
+                      <a:pPr algn="ctr" indent="0" marL="0">
+                        <a:buNone/>
+                      </a:pPr>
+                      <a:r>
+                        <a:rPr lang="en-US" sz="1200" b="1" dirty="0">
+                          <a:solidFill>
+                            <a:srgbClr val="1F2937"/>
+                          </a:solidFill>
+                          <a:latin typeface="Arial" pitchFamily="34" charset="0"/>
+                          <a:ea typeface="Arial" pitchFamily="34" charset="-122"/>
+                          <a:cs typeface="Arial" pitchFamily="34" charset="-120"/>
+                        </a:rPr>
+                        <a:t>3</a:t>
+                      </a:r>
+                      <a:endParaRPr lang="en-US" sz="1200" dirty="0">
+                        <a:latin typeface="Arial" charset="0"/>
+                        <a:ea typeface="Arial" charset="0"/>
+                        <a:cs typeface="Arial" charset="0"/>
+                      </a:endParaRPr>
+                    </a:p>
+                  </a:txBody>
+                  <a:tcPr marL="45720" marR="45720" marT="45720" marB="45720" anchor="ctr">
+                    <a:lnL w="6350" cap="flat" cmpd="sng" algn="ctr">
+                      <a:solidFill>
+                        <a:srgbClr val="D6DEE6"/>
+                      </a:solidFill>
+                      <a:prstDash val="solid"/>
+                      <a:round/>
+                      <a:headEnd type="none" w="med" len="med"/>
+                      <a:tailEnd type="none" w="med" len="med"/>
+                    </a:lnL>
+                    <a:lnR w="6350" cap="flat" cmpd="sng" algn="ctr">
+                      <a:solidFill>
+                        <a:srgbClr val="D6DEE6"/>
+                      </a:solidFill>
+                      <a:prstDash val="solid"/>
+                      <a:round/>
+                      <a:headEnd type="none" w="med" len="med"/>
+                      <a:tailEnd type="none" w="med" len="med"/>
+                    </a:lnR>
+                    <a:lnT w="6350" cap="flat" cmpd="sng" algn="ctr">
+                      <a:solidFill>
+                        <a:srgbClr val="D6DEE6"/>
+                      </a:solidFill>
+                      <a:prstDash val="solid"/>
+                      <a:round/>
+                      <a:headEnd type="none" w="med" len="med"/>
+                      <a:tailEnd type="none" w="med" len="med"/>
+                    </a:lnT>
+                    <a:lnB w="6350" cap="flat" cmpd="sng" algn="ctr">
+                      <a:solidFill>
+                        <a:srgbClr val="D6DEE6"/>
+                      </a:solidFill>
+                      <a:prstDash val="solid"/>
+                      <a:round/>
+                      <a:headEnd type="none" w="med" len="med"/>
+                      <a:tailEnd type="none" w="med" len="med"/>
+                    </a:lnB>
+                  </a:tcPr>
+                </a:tc>
+                <a:tc>
+                  <a:txBody>
+                    <a:bodyPr/>
+                    <a:lstStyle/>
+                    <a:p>
+                      <a:pPr algn="ctr" indent="0" marL="0">
+                        <a:buNone/>
+                      </a:pPr>
+                      <a:r>
+                        <a:rPr lang="en-US" sz="1200" b="1" dirty="0">
+                          <a:solidFill>
+                            <a:srgbClr val="1F2937"/>
+                          </a:solidFill>
+                          <a:latin typeface="Arial" pitchFamily="34" charset="0"/>
+                          <a:ea typeface="Arial" pitchFamily="34" charset="-122"/>
+                          <a:cs typeface="Arial" pitchFamily="34" charset="-120"/>
+                        </a:rPr>
+                        <a:t>100%</a:t>
+                      </a:r>
+                      <a:endParaRPr lang="en-US" sz="1200" dirty="0">
+                        <a:latin typeface="Arial" charset="0"/>
+                        <a:ea typeface="Arial" charset="0"/>
+                        <a:cs typeface="Arial" charset="0"/>
+                      </a:endParaRPr>
+                    </a:p>
+                  </a:txBody>
+                  <a:tcPr marL="45720" marR="45720" marT="45720" marB="45720" anchor="ctr">
+                    <a:lnL w="6350" cap="flat" cmpd="sng" algn="ctr">
+                      <a:solidFill>
+                        <a:srgbClr val="D6DEE6"/>
+                      </a:solidFill>
+                      <a:prstDash val="solid"/>
+                      <a:round/>
+                      <a:headEnd type="none" w="med" len="med"/>
+                      <a:tailEnd type="none" w="med" len="med"/>
+                    </a:lnL>
+                    <a:lnR w="6350" cap="flat" cmpd="sng" algn="ctr">
+                      <a:solidFill>
+                        <a:srgbClr val="D6DEE6"/>
+                      </a:solidFill>
+                      <a:prstDash val="solid"/>
+                      <a:round/>
+                      <a:headEnd type="none" w="med" len="med"/>
+                      <a:tailEnd type="none" w="med" len="med"/>
+                    </a:lnR>
+                    <a:lnT w="6350" cap="flat" cmpd="sng" algn="ctr">
+                      <a:solidFill>
+                        <a:srgbClr val="D6DEE6"/>
+                      </a:solidFill>
+                      <a:prstDash val="solid"/>
+                      <a:round/>
+                      <a:headEnd type="none" w="med" len="med"/>
+                      <a:tailEnd type="none" w="med" len="med"/>
+                    </a:lnT>
+                    <a:lnB w="6350" cap="flat" cmpd="sng" algn="ctr">
+                      <a:solidFill>
+                        <a:srgbClr val="D6DEE6"/>
+                      </a:solidFill>
+                      <a:prstDash val="solid"/>
+                      <a:round/>
+                      <a:headEnd type="none" w="med" len="med"/>
+                      <a:tailEnd type="none" w="med" len="med"/>
+                    </a:lnB>
+                  </a:tcPr>
+                </a:tc>
+              </a:tr>
+              <a:tr h="310896">
+                <a:tc>
+                  <a:txBody>
+                    <a:bodyPr/>
+                    <a:lstStyle/>
+                    <a:p>
+                      <a:pPr algn="ctr" indent="0" marL="0">
+                        <a:buNone/>
+                      </a:pPr>
+                      <a:r>
+                        <a:rPr lang="en-US" sz="1200" dirty="0">
+                          <a:solidFill>
+                            <a:srgbClr val="1F2937"/>
+                          </a:solidFill>
+                          <a:latin typeface="Arial" pitchFamily="34" charset="0"/>
+                          <a:ea typeface="Arial" pitchFamily="34" charset="-122"/>
+                          <a:cs typeface="Arial" pitchFamily="34" charset="-120"/>
+                        </a:rPr>
+                        <a:t>Equal-weight RW + carry + ridge</a:t>
+                      </a:r>
+                      <a:endParaRPr lang="en-US" sz="1200" dirty="0">
+                        <a:latin typeface="Arial" charset="0"/>
+                        <a:ea typeface="Arial" charset="0"/>
+                        <a:cs typeface="Arial" charset="0"/>
+                      </a:endParaRPr>
+                    </a:p>
+                  </a:txBody>
+                  <a:tcPr marL="45720" marR="45720" marT="45720" marB="45720" anchor="ctr">
+                    <a:lnL w="6350" cap="flat" cmpd="sng" algn="ctr">
+                      <a:solidFill>
+                        <a:srgbClr val="D6DEE6"/>
+                      </a:solidFill>
+                      <a:prstDash val="solid"/>
+                      <a:round/>
+                      <a:headEnd type="none" w="med" len="med"/>
+                      <a:tailEnd type="none" w="med" len="med"/>
+                    </a:lnL>
+                    <a:lnR w="6350" cap="flat" cmpd="sng" algn="ctr">
+                      <a:solidFill>
+                        <a:srgbClr val="D6DEE6"/>
+                      </a:solidFill>
+                      <a:prstDash val="solid"/>
+                      <a:round/>
+                      <a:headEnd type="none" w="med" len="med"/>
+                      <a:tailEnd type="none" w="med" len="med"/>
+                    </a:lnR>
+                    <a:lnT w="6350" cap="flat" cmpd="sng" algn="ctr">
+                      <a:solidFill>
+                        <a:srgbClr val="D6DEE6"/>
+                      </a:solidFill>
+                      <a:prstDash val="solid"/>
+                      <a:round/>
+                      <a:headEnd type="none" w="med" len="med"/>
+                      <a:tailEnd type="none" w="med" len="med"/>
+                    </a:lnT>
+                    <a:lnB w="6350" cap="flat" cmpd="sng" algn="ctr">
+                      <a:solidFill>
+                        <a:srgbClr val="D6DEE6"/>
+                      </a:solidFill>
+                      <a:prstDash val="solid"/>
+                      <a:round/>
+                      <a:headEnd type="none" w="med" len="med"/>
+                      <a:tailEnd type="none" w="med" len="med"/>
+                    </a:lnB>
+                  </a:tcPr>
+                </a:tc>
+                <a:tc>
+                  <a:txBody>
+                    <a:bodyPr/>
+                    <a:lstStyle/>
+                    <a:p>
+                      <a:pPr algn="ctr" indent="0" marL="0">
+                        <a:buNone/>
+                      </a:pPr>
+                      <a:r>
+                        <a:rPr lang="en-US" sz="1200" dirty="0">
+                          <a:solidFill>
+                            <a:srgbClr val="1F2937"/>
+                          </a:solidFill>
+                          <a:latin typeface="Arial" pitchFamily="34" charset="0"/>
+                          <a:ea typeface="Arial" pitchFamily="34" charset="-122"/>
+                          <a:cs typeface="Arial" pitchFamily="34" charset="-120"/>
+                        </a:rPr>
+                        <a:t>0.5599</a:t>
+                      </a:r>
+                      <a:endParaRPr lang="en-US" sz="1200" dirty="0">
+                        <a:latin typeface="Arial" charset="0"/>
+                        <a:ea typeface="Arial" charset="0"/>
+                        <a:cs typeface="Arial" charset="0"/>
+                      </a:endParaRPr>
+                    </a:p>
+                  </a:txBody>
+                  <a:tcPr marL="45720" marR="45720" marT="45720" marB="45720" anchor="ctr">
+                    <a:lnL w="6350" cap="flat" cmpd="sng" algn="ctr">
+                      <a:solidFill>
+                        <a:srgbClr val="D6DEE6"/>
+                      </a:solidFill>
+                      <a:prstDash val="solid"/>
+                      <a:round/>
+                      <a:headEnd type="none" w="med" len="med"/>
+                      <a:tailEnd type="none" w="med" len="med"/>
+                    </a:lnL>
+                    <a:lnR w="6350" cap="flat" cmpd="sng" algn="ctr">
+                      <a:solidFill>
+                        <a:srgbClr val="D6DEE6"/>
+                      </a:solidFill>
+                      <a:prstDash val="solid"/>
+                      <a:round/>
+                      <a:headEnd type="none" w="med" len="med"/>
+                      <a:tailEnd type="none" w="med" len="med"/>
+                    </a:lnR>
+                    <a:lnT w="6350" cap="flat" cmpd="sng" algn="ctr">
+                      <a:solidFill>
+                        <a:srgbClr val="D6DEE6"/>
+                      </a:solidFill>
+                      <a:prstDash val="solid"/>
+                      <a:round/>
+                      <a:headEnd type="none" w="med" len="med"/>
+                      <a:tailEnd type="none" w="med" len="med"/>
+                    </a:lnT>
+                    <a:lnB w="6350" cap="flat" cmpd="sng" algn="ctr">
+                      <a:solidFill>
+                        <a:srgbClr val="D6DEE6"/>
+                      </a:solidFill>
+                      <a:prstDash val="solid"/>
+                      <a:round/>
+                      <a:headEnd type="none" w="med" len="med"/>
+                      <a:tailEnd type="none" w="med" len="med"/>
+                    </a:lnB>
+                  </a:tcPr>
+                </a:tc>
+                <a:tc>
+                  <a:txBody>
+                    <a:bodyPr/>
+                    <a:lstStyle/>
+                    <a:p>
+                      <a:pPr algn="ctr" indent="0" marL="0">
+                        <a:buNone/>
+                      </a:pPr>
+                      <a:r>
+                        <a:rPr lang="en-US" sz="1200" dirty="0">
+                          <a:solidFill>
+                            <a:srgbClr val="1F2937"/>
+                          </a:solidFill>
+                          <a:latin typeface="Arial" pitchFamily="34" charset="0"/>
+                          <a:ea typeface="Arial" pitchFamily="34" charset="-122"/>
+                          <a:cs typeface="Arial" pitchFamily="34" charset="-120"/>
+                        </a:rPr>
+                        <a:t>0.4495</a:t>
+                      </a:r>
+                      <a:endParaRPr lang="en-US" sz="1200" dirty="0">
+                        <a:latin typeface="Arial" charset="0"/>
+                        <a:ea typeface="Arial" charset="0"/>
+                        <a:cs typeface="Arial" charset="0"/>
+                      </a:endParaRPr>
+                    </a:p>
+                  </a:txBody>
+                  <a:tcPr marL="45720" marR="45720" marT="45720" marB="45720" anchor="ctr">
+                    <a:lnL w="6350" cap="flat" cmpd="sng" algn="ctr">
+                      <a:solidFill>
+                        <a:srgbClr val="D6DEE6"/>
+                      </a:solidFill>
+                      <a:prstDash val="solid"/>
+                      <a:round/>
+                      <a:headEnd type="none" w="med" len="med"/>
+                      <a:tailEnd type="none" w="med" len="med"/>
+                    </a:lnL>
+                    <a:lnR w="6350" cap="flat" cmpd="sng" algn="ctr">
+                      <a:solidFill>
+                        <a:srgbClr val="D6DEE6"/>
+                      </a:solidFill>
+                      <a:prstDash val="solid"/>
+                      <a:round/>
+                      <a:headEnd type="none" w="med" len="med"/>
+                      <a:tailEnd type="none" w="med" len="med"/>
+                    </a:lnR>
+                    <a:lnT w="6350" cap="flat" cmpd="sng" algn="ctr">
+                      <a:solidFill>
+                        <a:srgbClr val="D6DEE6"/>
+                      </a:solidFill>
+                      <a:prstDash val="solid"/>
+                      <a:round/>
+                      <a:headEnd type="none" w="med" len="med"/>
+                      <a:tailEnd type="none" w="med" len="med"/>
+                    </a:lnT>
+                    <a:lnB w="6350" cap="flat" cmpd="sng" algn="ctr">
+                      <a:solidFill>
+                        <a:srgbClr val="D6DEE6"/>
+                      </a:solidFill>
+                      <a:prstDash val="solid"/>
+                      <a:round/>
+                      <a:headEnd type="none" w="med" len="med"/>
+                      <a:tailEnd type="none" w="med" len="med"/>
+                    </a:lnB>
+                  </a:tcPr>
+                </a:tc>
+                <a:tc>
+                  <a:txBody>
+                    <a:bodyPr/>
+                    <a:lstStyle/>
+                    <a:p>
+                      <a:pPr algn="ctr" indent="0" marL="0">
+                        <a:buNone/>
+                      </a:pPr>
+                      <a:r>
+                        <a:rPr lang="en-US" sz="1200" dirty="0">
+                          <a:solidFill>
+                            <a:srgbClr val="1F2937"/>
+                          </a:solidFill>
+                          <a:latin typeface="Arial" pitchFamily="34" charset="0"/>
+                          <a:ea typeface="Arial" pitchFamily="34" charset="-122"/>
+                          <a:cs typeface="Arial" pitchFamily="34" charset="-120"/>
+                        </a:rPr>
+                        <a:t>+0.44%</a:t>
+                      </a:r>
+                      <a:endParaRPr lang="en-US" sz="1200" dirty="0">
+                        <a:latin typeface="Arial" charset="0"/>
+                        <a:ea typeface="Arial" charset="0"/>
+                        <a:cs typeface="Arial" charset="0"/>
+                      </a:endParaRPr>
+                    </a:p>
+                  </a:txBody>
+                  <a:tcPr marL="45720" marR="45720" marT="45720" marB="45720" anchor="ctr">
+                    <a:lnL w="6350" cap="flat" cmpd="sng" algn="ctr">
+                      <a:solidFill>
+                        <a:srgbClr val="D6DEE6"/>
+                      </a:solidFill>
+                      <a:prstDash val="solid"/>
+                      <a:round/>
+                      <a:headEnd type="none" w="med" len="med"/>
+                      <a:tailEnd type="none" w="med" len="med"/>
+                    </a:lnL>
+                    <a:lnR w="6350" cap="flat" cmpd="sng" algn="ctr">
+                      <a:solidFill>
+                        <a:srgbClr val="D6DEE6"/>
+                      </a:solidFill>
+                      <a:prstDash val="solid"/>
+                      <a:round/>
+                      <a:headEnd type="none" w="med" len="med"/>
+                      <a:tailEnd type="none" w="med" len="med"/>
+                    </a:lnR>
+                    <a:lnT w="6350" cap="flat" cmpd="sng" algn="ctr">
+                      <a:solidFill>
+                        <a:srgbClr val="D6DEE6"/>
+                      </a:solidFill>
+                      <a:prstDash val="solid"/>
+                      <a:round/>
+                      <a:headEnd type="none" w="med" len="med"/>
+                      <a:tailEnd type="none" w="med" len="med"/>
+                    </a:lnT>
+                    <a:lnB w="6350" cap="flat" cmpd="sng" algn="ctr">
+                      <a:solidFill>
+                        <a:srgbClr val="D6DEE6"/>
+                      </a:solidFill>
+                      <a:prstDash val="solid"/>
+                      <a:round/>
+                      <a:headEnd type="none" w="med" len="med"/>
+                      <a:tailEnd type="none" w="med" len="med"/>
+                    </a:lnB>
+                  </a:tcPr>
+                </a:tc>
+                <a:tc>
+                  <a:txBody>
+                    <a:bodyPr/>
+                    <a:lstStyle/>
+                    <a:p>
+                      <a:pPr algn="ctr" indent="0" marL="0">
+                        <a:buNone/>
+                      </a:pPr>
+                      <a:r>
+                        <a:rPr lang="en-US" sz="1200" dirty="0">
+                          <a:solidFill>
+                            <a:srgbClr val="1F2937"/>
+                          </a:solidFill>
+                          <a:latin typeface="Arial" pitchFamily="34" charset="0"/>
+                          <a:ea typeface="Arial" pitchFamily="34" charset="-122"/>
+                          <a:cs typeface="Arial" pitchFamily="34" charset="-120"/>
+                        </a:rPr>
+                        <a:t>2</a:t>
+                      </a:r>
+                      <a:endParaRPr lang="en-US" sz="1200" dirty="0">
+                        <a:latin typeface="Arial" charset="0"/>
+                        <a:ea typeface="Arial" charset="0"/>
+                        <a:cs typeface="Arial" charset="0"/>
+                      </a:endParaRPr>
+                    </a:p>
+                  </a:txBody>
+                  <a:tcPr marL="45720" marR="45720" marT="45720" marB="45720" anchor="ctr">
+                    <a:lnL w="6350" cap="flat" cmpd="sng" algn="ctr">
+                      <a:solidFill>
+                        <a:srgbClr val="D6DEE6"/>
+                      </a:solidFill>
+                      <a:prstDash val="solid"/>
+                      <a:round/>
+                      <a:headEnd type="none" w="med" len="med"/>
+                      <a:tailEnd type="none" w="med" len="med"/>
+                    </a:lnL>
+                    <a:lnR w="6350" cap="flat" cmpd="sng" algn="ctr">
+                      <a:solidFill>
+                        <a:srgbClr val="D6DEE6"/>
+                      </a:solidFill>
+                      <a:prstDash val="solid"/>
+                      <a:round/>
+                      <a:headEnd type="none" w="med" len="med"/>
+                      <a:tailEnd type="none" w="med" len="med"/>
+                    </a:lnR>
+                    <a:lnT w="6350" cap="flat" cmpd="sng" algn="ctr">
+                      <a:solidFill>
+                        <a:srgbClr val="D6DEE6"/>
+                      </a:solidFill>
+                      <a:prstDash val="solid"/>
+                      <a:round/>
+                      <a:headEnd type="none" w="med" len="med"/>
+                      <a:tailEnd type="none" w="med" len="med"/>
+                    </a:lnT>
+                    <a:lnB w="6350" cap="flat" cmpd="sng" algn="ctr">
+                      <a:solidFill>
+                        <a:srgbClr val="D6DEE6"/>
+                      </a:solidFill>
+                      <a:prstDash val="solid"/>
+                      <a:round/>
+                      <a:headEnd type="none" w="med" len="med"/>
+                      <a:tailEnd type="none" w="med" len="med"/>
+                    </a:lnB>
+                  </a:tcPr>
+                </a:tc>
+                <a:tc>
+                  <a:txBody>
+                    <a:bodyPr/>
+                    <a:lstStyle/>
+                    <a:p>
+                      <a:pPr algn="ctr" indent="0" marL="0">
+                        <a:buNone/>
+                      </a:pPr>
+                      <a:r>
+                        <a:rPr lang="en-US" sz="1200" dirty="0">
+                          <a:solidFill>
+                            <a:srgbClr val="1F2937"/>
+                          </a:solidFill>
+                          <a:latin typeface="Arial" pitchFamily="34" charset="0"/>
+                          <a:ea typeface="Arial" pitchFamily="34" charset="-122"/>
+                          <a:cs typeface="Arial" pitchFamily="34" charset="-120"/>
+                        </a:rPr>
+                        <a:t>100%</a:t>
+                      </a:r>
+                      <a:endParaRPr lang="en-US" sz="1200" dirty="0">
+                        <a:latin typeface="Arial" charset="0"/>
+                        <a:ea typeface="Arial" charset="0"/>
+                        <a:cs typeface="Arial" charset="0"/>
+                      </a:endParaRPr>
+                    </a:p>
+                  </a:txBody>
+                  <a:tcPr marL="45720" marR="45720" marT="45720" marB="45720" anchor="ctr">
+                    <a:lnL w="6350" cap="flat" cmpd="sng" algn="ctr">
+                      <a:solidFill>
+                        <a:srgbClr val="D6DEE6"/>
+                      </a:solidFill>
+                      <a:prstDash val="solid"/>
+                      <a:round/>
+                      <a:headEnd type="none" w="med" len="med"/>
+                      <a:tailEnd type="none" w="med" len="med"/>
+                    </a:lnL>
+                    <a:lnR w="6350" cap="flat" cmpd="sng" algn="ctr">
+                      <a:solidFill>
+                        <a:srgbClr val="D6DEE6"/>
+                      </a:solidFill>
+                      <a:prstDash val="solid"/>
+                      <a:round/>
+                      <a:headEnd type="none" w="med" len="med"/>
+                      <a:tailEnd type="none" w="med" len="med"/>
+                    </a:lnR>
+                    <a:lnT w="6350" cap="flat" cmpd="sng" algn="ctr">
+                      <a:solidFill>
+                        <a:srgbClr val="D6DEE6"/>
+                      </a:solidFill>
+                      <a:prstDash val="solid"/>
+                      <a:round/>
+                      <a:headEnd type="none" w="med" len="med"/>
+                      <a:tailEnd type="none" w="med" len="med"/>
+                    </a:lnT>
+                    <a:lnB w="6350" cap="flat" cmpd="sng" algn="ctr">
+                      <a:solidFill>
+                        <a:srgbClr val="D6DEE6"/>
+                      </a:solidFill>
+                      <a:prstDash val="solid"/>
+                      <a:round/>
+                      <a:headEnd type="none" w="med" len="med"/>
+                      <a:tailEnd type="none" w="med" len="med"/>
+                    </a:lnB>
+                  </a:tcPr>
+                </a:tc>
+              </a:tr>
+              <a:tr h="310896">
+                <a:tc>
+                  <a:txBody>
+                    <a:bodyPr/>
+                    <a:lstStyle/>
+                    <a:p>
+                      <a:pPr algn="ctr" indent="0" marL="0">
+                        <a:buNone/>
+                      </a:pPr>
+                      <a:r>
+                        <a:rPr lang="en-US" sz="1200" dirty="0">
+                          <a:solidFill>
+                            <a:srgbClr val="1F2937"/>
+                          </a:solidFill>
+                          <a:latin typeface="Arial" pitchFamily="34" charset="0"/>
+                          <a:ea typeface="Arial" pitchFamily="34" charset="-122"/>
+                          <a:cs typeface="Arial" pitchFamily="34" charset="-120"/>
+                        </a:rPr>
+                        <a:t>Adaptive RW + carry</a:t>
+                      </a:r>
+                      <a:endParaRPr lang="en-US" sz="1200" dirty="0">
+                        <a:latin typeface="Arial" charset="0"/>
+                        <a:ea typeface="Arial" charset="0"/>
+                        <a:cs typeface="Arial" charset="0"/>
+                      </a:endParaRPr>
+                    </a:p>
+                  </a:txBody>
+                  <a:tcPr marL="45720" marR="45720" marT="45720" marB="45720" anchor="ctr">
+                    <a:lnL w="6350" cap="flat" cmpd="sng" algn="ctr">
+                      <a:solidFill>
+                        <a:srgbClr val="D6DEE6"/>
+                      </a:solidFill>
+                      <a:prstDash val="solid"/>
+                      <a:round/>
+                      <a:headEnd type="none" w="med" len="med"/>
+                      <a:tailEnd type="none" w="med" len="med"/>
+                    </a:lnL>
+                    <a:lnR w="6350" cap="flat" cmpd="sng" algn="ctr">
+                      <a:solidFill>
+                        <a:srgbClr val="D6DEE6"/>
+                      </a:solidFill>
+                      <a:prstDash val="solid"/>
+                      <a:round/>
+                      <a:headEnd type="none" w="med" len="med"/>
+                      <a:tailEnd type="none" w="med" len="med"/>
+                    </a:lnR>
+                    <a:lnT w="6350" cap="flat" cmpd="sng" algn="ctr">
+                      <a:solidFill>
+                        <a:srgbClr val="D6DEE6"/>
+                      </a:solidFill>
+                      <a:prstDash val="solid"/>
+                      <a:round/>
+                      <a:headEnd type="none" w="med" len="med"/>
+                      <a:tailEnd type="none" w="med" len="med"/>
+                    </a:lnT>
+                    <a:lnB w="6350" cap="flat" cmpd="sng" algn="ctr">
+                      <a:solidFill>
+                        <a:srgbClr val="D6DEE6"/>
+                      </a:solidFill>
+                      <a:prstDash val="solid"/>
+                      <a:round/>
+                      <a:headEnd type="none" w="med" len="med"/>
+                      <a:tailEnd type="none" w="med" len="med"/>
+                    </a:lnB>
+                  </a:tcPr>
+                </a:tc>
+                <a:tc>
+                  <a:txBody>
+                    <a:bodyPr/>
+                    <a:lstStyle/>
+                    <a:p>
+                      <a:pPr algn="ctr" indent="0" marL="0">
+                        <a:buNone/>
+                      </a:pPr>
+                      <a:r>
+                        <a:rPr lang="en-US" sz="1200" dirty="0">
+                          <a:solidFill>
+                            <a:srgbClr val="1F2937"/>
+                          </a:solidFill>
+                          <a:latin typeface="Arial" pitchFamily="34" charset="0"/>
+                          <a:ea typeface="Arial" pitchFamily="34" charset="-122"/>
+                          <a:cs typeface="Arial" pitchFamily="34" charset="-120"/>
+                        </a:rPr>
+                        <a:t>0.5599</a:t>
+                      </a:r>
+                      <a:endParaRPr lang="en-US" sz="1200" dirty="0">
+                        <a:latin typeface="Arial" charset="0"/>
+                        <a:ea typeface="Arial" charset="0"/>
+                        <a:cs typeface="Arial" charset="0"/>
+                      </a:endParaRPr>
+                    </a:p>
+                  </a:txBody>
+                  <a:tcPr marL="45720" marR="45720" marT="45720" marB="45720" anchor="ctr">
+                    <a:lnL w="6350" cap="flat" cmpd="sng" algn="ctr">
+                      <a:solidFill>
+                        <a:srgbClr val="D6DEE6"/>
+                      </a:solidFill>
+                      <a:prstDash val="solid"/>
+                      <a:round/>
+                      <a:headEnd type="none" w="med" len="med"/>
+                      <a:tailEnd type="none" w="med" len="med"/>
+                    </a:lnL>
+                    <a:lnR w="6350" cap="flat" cmpd="sng" algn="ctr">
+                      <a:solidFill>
+                        <a:srgbClr val="D6DEE6"/>
+                      </a:solidFill>
+                      <a:prstDash val="solid"/>
+                      <a:round/>
+                      <a:headEnd type="none" w="med" len="med"/>
+                      <a:tailEnd type="none" w="med" len="med"/>
+                    </a:lnR>
+                    <a:lnT w="6350" cap="flat" cmpd="sng" algn="ctr">
+                      <a:solidFill>
+                        <a:srgbClr val="D6DEE6"/>
+                      </a:solidFill>
+                      <a:prstDash val="solid"/>
+                      <a:round/>
+                      <a:headEnd type="none" w="med" len="med"/>
+                      <a:tailEnd type="none" w="med" len="med"/>
+                    </a:lnT>
+                    <a:lnB w="6350" cap="flat" cmpd="sng" algn="ctr">
+                      <a:solidFill>
+                        <a:srgbClr val="D6DEE6"/>
+                      </a:solidFill>
+                      <a:prstDash val="solid"/>
+                      <a:round/>
+                      <a:headEnd type="none" w="med" len="med"/>
+                      <a:tailEnd type="none" w="med" len="med"/>
+                    </a:lnB>
+                  </a:tcPr>
+                </a:tc>
+                <a:tc>
+                  <a:txBody>
+                    <a:bodyPr/>
+                    <a:lstStyle/>
+                    <a:p>
+                      <a:pPr algn="ctr" indent="0" marL="0">
+                        <a:buNone/>
+                      </a:pPr>
+                      <a:r>
+                        <a:rPr lang="en-US" sz="1200" dirty="0">
+                          <a:solidFill>
+                            <a:srgbClr val="1F2937"/>
+                          </a:solidFill>
+                          <a:latin typeface="Arial" pitchFamily="34" charset="0"/>
+                          <a:ea typeface="Arial" pitchFamily="34" charset="-122"/>
+                          <a:cs typeface="Arial" pitchFamily="34" charset="-120"/>
+                        </a:rPr>
+                        <a:t>0.4504</a:t>
+                      </a:r>
+                      <a:endParaRPr lang="en-US" sz="1200" dirty="0">
+                        <a:latin typeface="Arial" charset="0"/>
+                        <a:ea typeface="Arial" charset="0"/>
+                        <a:cs typeface="Arial" charset="0"/>
+                      </a:endParaRPr>
+                    </a:p>
+                  </a:txBody>
+                  <a:tcPr marL="45720" marR="45720" marT="45720" marB="45720" anchor="ctr">
+                    <a:lnL w="6350" cap="flat" cmpd="sng" algn="ctr">
+                      <a:solidFill>
+                        <a:srgbClr val="D6DEE6"/>
+                      </a:solidFill>
+                      <a:prstDash val="solid"/>
+                      <a:round/>
+                      <a:headEnd type="none" w="med" len="med"/>
+                      <a:tailEnd type="none" w="med" len="med"/>
+                    </a:lnL>
+                    <a:lnR w="6350" cap="flat" cmpd="sng" algn="ctr">
+                      <a:solidFill>
+                        <a:srgbClr val="D6DEE6"/>
+                      </a:solidFill>
+                      <a:prstDash val="solid"/>
+                      <a:round/>
+                      <a:headEnd type="none" w="med" len="med"/>
+                      <a:tailEnd type="none" w="med" len="med"/>
+                    </a:lnR>
+                    <a:lnT w="6350" cap="flat" cmpd="sng" algn="ctr">
+                      <a:solidFill>
+                        <a:srgbClr val="D6DEE6"/>
+                      </a:solidFill>
+                      <a:prstDash val="solid"/>
+                      <a:round/>
+                      <a:headEnd type="none" w="med" len="med"/>
+                      <a:tailEnd type="none" w="med" len="med"/>
+                    </a:lnT>
+                    <a:lnB w="6350" cap="flat" cmpd="sng" algn="ctr">
+                      <a:solidFill>
+                        <a:srgbClr val="D6DEE6"/>
+                      </a:solidFill>
+                      <a:prstDash val="solid"/>
+                      <a:round/>
+                      <a:headEnd type="none" w="med" len="med"/>
+                      <a:tailEnd type="none" w="med" len="med"/>
+                    </a:lnB>
+                  </a:tcPr>
+                </a:tc>
+                <a:tc>
+                  <a:txBody>
+                    <a:bodyPr/>
+                    <a:lstStyle/>
+                    <a:p>
+                      <a:pPr algn="ctr" indent="0" marL="0">
+                        <a:buNone/>
+                      </a:pPr>
+                      <a:r>
+                        <a:rPr lang="en-US" sz="1200" dirty="0">
+                          <a:solidFill>
+                            <a:srgbClr val="1F2937"/>
+                          </a:solidFill>
+                          <a:latin typeface="Arial" pitchFamily="34" charset="0"/>
+                          <a:ea typeface="Arial" pitchFamily="34" charset="-122"/>
+                          <a:cs typeface="Arial" pitchFamily="34" charset="-120"/>
+                        </a:rPr>
+                        <a:t>+0.44%</a:t>
+                      </a:r>
+                      <a:endParaRPr lang="en-US" sz="1200" dirty="0">
+                        <a:latin typeface="Arial" charset="0"/>
+                        <a:ea typeface="Arial" charset="0"/>
+                        <a:cs typeface="Arial" charset="0"/>
+                      </a:endParaRPr>
+                    </a:p>
+                  </a:txBody>
+                  <a:tcPr marL="45720" marR="45720" marT="45720" marB="45720" anchor="ctr">
+                    <a:lnL w="6350" cap="flat" cmpd="sng" algn="ctr">
+                      <a:solidFill>
+                        <a:srgbClr val="D6DEE6"/>
+                      </a:solidFill>
+                      <a:prstDash val="solid"/>
+                      <a:round/>
+                      <a:headEnd type="none" w="med" len="med"/>
+                      <a:tailEnd type="none" w="med" len="med"/>
+                    </a:lnL>
+                    <a:lnR w="6350" cap="flat" cmpd="sng" algn="ctr">
+                      <a:solidFill>
+                        <a:srgbClr val="D6DEE6"/>
+                      </a:solidFill>
+                      <a:prstDash val="solid"/>
+                      <a:round/>
+                      <a:headEnd type="none" w="med" len="med"/>
+                      <a:tailEnd type="none" w="med" len="med"/>
+                    </a:lnR>
+                    <a:lnT w="6350" cap="flat" cmpd="sng" algn="ctr">
+                      <a:solidFill>
+                        <a:srgbClr val="D6DEE6"/>
+                      </a:solidFill>
+                      <a:prstDash val="solid"/>
+                      <a:round/>
+                      <a:headEnd type="none" w="med" len="med"/>
+                      <a:tailEnd type="none" w="med" len="med"/>
+                    </a:lnT>
+                    <a:lnB w="6350" cap="flat" cmpd="sng" algn="ctr">
+                      <a:solidFill>
+                        <a:srgbClr val="D6DEE6"/>
+                      </a:solidFill>
+                      <a:prstDash val="solid"/>
+                      <a:round/>
+                      <a:headEnd type="none" w="med" len="med"/>
+                      <a:tailEnd type="none" w="med" len="med"/>
+                    </a:lnB>
+                  </a:tcPr>
+                </a:tc>
+                <a:tc>
+                  <a:txBody>
+                    <a:bodyPr/>
+                    <a:lstStyle/>
+                    <a:p>
+                      <a:pPr algn="ctr" indent="0" marL="0">
+                        <a:buNone/>
+                      </a:pPr>
+                      <a:r>
+                        <a:rPr lang="en-US" sz="1200" dirty="0">
+                          <a:solidFill>
+                            <a:srgbClr val="1F2937"/>
+                          </a:solidFill>
+                          <a:latin typeface="Arial" pitchFamily="34" charset="0"/>
+                          <a:ea typeface="Arial" pitchFamily="34" charset="-122"/>
+                          <a:cs typeface="Arial" pitchFamily="34" charset="-120"/>
+                        </a:rPr>
+                        <a:t>1</a:t>
+                      </a:r>
+                      <a:endParaRPr lang="en-US" sz="1200" dirty="0">
+                        <a:latin typeface="Arial" charset="0"/>
+                        <a:ea typeface="Arial" charset="0"/>
+                        <a:cs typeface="Arial" charset="0"/>
+                      </a:endParaRPr>
+                    </a:p>
+                  </a:txBody>
+                  <a:tcPr marL="45720" marR="45720" marT="45720" marB="45720" anchor="ctr">
+                    <a:lnL w="6350" cap="flat" cmpd="sng" algn="ctr">
+                      <a:solidFill>
+                        <a:srgbClr val="D6DEE6"/>
+                      </a:solidFill>
+                      <a:prstDash val="solid"/>
+                      <a:round/>
+                      <a:headEnd type="none" w="med" len="med"/>
+                      <a:tailEnd type="none" w="med" len="med"/>
+                    </a:lnL>
+                    <a:lnR w="6350" cap="flat" cmpd="sng" algn="ctr">
+                      <a:solidFill>
+                        <a:srgbClr val="D6DEE6"/>
+                      </a:solidFill>
+                      <a:prstDash val="solid"/>
+                      <a:round/>
+                      <a:headEnd type="none" w="med" len="med"/>
+                      <a:tailEnd type="none" w="med" len="med"/>
+                    </a:lnR>
+                    <a:lnT w="6350" cap="flat" cmpd="sng" algn="ctr">
+                      <a:solidFill>
+                        <a:srgbClr val="D6DEE6"/>
+                      </a:solidFill>
+                      <a:prstDash val="solid"/>
+                      <a:round/>
+                      <a:headEnd type="none" w="med" len="med"/>
+                      <a:tailEnd type="none" w="med" len="med"/>
+                    </a:lnT>
+                    <a:lnB w="6350" cap="flat" cmpd="sng" algn="ctr">
+                      <a:solidFill>
+                        <a:srgbClr val="D6DEE6"/>
+                      </a:solidFill>
+                      <a:prstDash val="solid"/>
+                      <a:round/>
+                      <a:headEnd type="none" w="med" len="med"/>
+                      <a:tailEnd type="none" w="med" len="med"/>
+                    </a:lnB>
+                  </a:tcPr>
+                </a:tc>
+                <a:tc>
+                  <a:txBody>
+                    <a:bodyPr/>
+                    <a:lstStyle/>
+                    <a:p>
+                      <a:pPr algn="ctr" indent="0" marL="0">
+                        <a:buNone/>
+                      </a:pPr>
+                      <a:r>
+                        <a:rPr lang="en-US" sz="1200" dirty="0">
+                          <a:solidFill>
+                            <a:srgbClr val="1F2937"/>
+                          </a:solidFill>
+                          <a:latin typeface="Arial" pitchFamily="34" charset="0"/>
+                          <a:ea typeface="Arial" pitchFamily="34" charset="-122"/>
+                          <a:cs typeface="Arial" pitchFamily="34" charset="-120"/>
+                        </a:rPr>
+                        <a:t>100%</a:t>
+                      </a:r>
+                      <a:endParaRPr lang="en-US" sz="1200" dirty="0">
+                        <a:latin typeface="Arial" charset="0"/>
+                        <a:ea typeface="Arial" charset="0"/>
+                        <a:cs typeface="Arial" charset="0"/>
+                      </a:endParaRPr>
+                    </a:p>
+                  </a:txBody>
+                  <a:tcPr marL="45720" marR="45720" marT="45720" marB="45720" anchor="ctr">
+                    <a:lnL w="6350" cap="flat" cmpd="sng" algn="ctr">
+                      <a:solidFill>
+                        <a:srgbClr val="D6DEE6"/>
+                      </a:solidFill>
+                      <a:prstDash val="solid"/>
+                      <a:round/>
+                      <a:headEnd type="none" w="med" len="med"/>
+                      <a:tailEnd type="none" w="med" len="med"/>
+                    </a:lnL>
+                    <a:lnR w="6350" cap="flat" cmpd="sng" algn="ctr">
+                      <a:solidFill>
+                        <a:srgbClr val="D6DEE6"/>
+                      </a:solidFill>
+                      <a:prstDash val="solid"/>
+                      <a:round/>
+                      <a:headEnd type="none" w="med" len="med"/>
+                      <a:tailEnd type="none" w="med" len="med"/>
+                    </a:lnR>
+                    <a:lnT w="6350" cap="flat" cmpd="sng" algn="ctr">
+                      <a:solidFill>
+                        <a:srgbClr val="D6DEE6"/>
+                      </a:solidFill>
+                      <a:prstDash val="solid"/>
+                      <a:round/>
+                      <a:headEnd type="none" w="med" len="med"/>
+                      <a:tailEnd type="none" w="med" len="med"/>
+                    </a:lnT>
+                    <a:lnB w="6350" cap="flat" cmpd="sng" algn="ctr">
+                      <a:solidFill>
+                        <a:srgbClr val="D6DEE6"/>
+                      </a:solidFill>
+                      <a:prstDash val="solid"/>
+                      <a:round/>
+                      <a:headEnd type="none" w="med" len="med"/>
+                      <a:tailEnd type="none" w="med" len="med"/>
+                    </a:lnB>
+                  </a:tcPr>
+                </a:tc>
+              </a:tr>
+              <a:tr h="310896">
+                <a:tc>
+                  <a:txBody>
+                    <a:bodyPr/>
+                    <a:lstStyle/>
+                    <a:p>
+                      <a:pPr algn="ctr" indent="0" marL="0">
+                        <a:buNone/>
+                      </a:pPr>
+                      <a:r>
+                        <a:rPr lang="en-US" sz="1200" dirty="0">
+                          <a:solidFill>
+                            <a:srgbClr val="1F2937"/>
+                          </a:solidFill>
+                          <a:latin typeface="Arial" pitchFamily="34" charset="0"/>
+                          <a:ea typeface="Arial" pitchFamily="34" charset="-122"/>
+                          <a:cs typeface="Arial" pitchFamily="34" charset="-120"/>
+                        </a:rPr>
+                        <a:t>Adaptive RW + ridge</a:t>
+                      </a:r>
+                      <a:endParaRPr lang="en-US" sz="1200" dirty="0">
+                        <a:latin typeface="Arial" charset="0"/>
+                        <a:ea typeface="Arial" charset="0"/>
+                        <a:cs typeface="Arial" charset="0"/>
+                      </a:endParaRPr>
+                    </a:p>
+                  </a:txBody>
+                  <a:tcPr marL="45720" marR="45720" marT="45720" marB="45720" anchor="ctr">
+                    <a:lnL w="6350" cap="flat" cmpd="sng" algn="ctr">
+                      <a:solidFill>
+                        <a:srgbClr val="D6DEE6"/>
+                      </a:solidFill>
+                      <a:prstDash val="solid"/>
+                      <a:round/>
+                      <a:headEnd type="none" w="med" len="med"/>
+                      <a:tailEnd type="none" w="med" len="med"/>
+                    </a:lnL>
+                    <a:lnR w="6350" cap="flat" cmpd="sng" algn="ctr">
+                      <a:solidFill>
+                        <a:srgbClr val="D6DEE6"/>
+                      </a:solidFill>
+                      <a:prstDash val="solid"/>
+                      <a:round/>
+                      <a:headEnd type="none" w="med" len="med"/>
+                      <a:tailEnd type="none" w="med" len="med"/>
+                    </a:lnR>
+                    <a:lnT w="6350" cap="flat" cmpd="sng" algn="ctr">
+                      <a:solidFill>
+                        <a:srgbClr val="D6DEE6"/>
+                      </a:solidFill>
+                      <a:prstDash val="solid"/>
+                      <a:round/>
+                      <a:headEnd type="none" w="med" len="med"/>
+                      <a:tailEnd type="none" w="med" len="med"/>
+                    </a:lnT>
+                    <a:lnB w="6350" cap="flat" cmpd="sng" algn="ctr">
+                      <a:solidFill>
+                        <a:srgbClr val="D6DEE6"/>
+                      </a:solidFill>
+                      <a:prstDash val="solid"/>
+                      <a:round/>
+                      <a:headEnd type="none" w="med" len="med"/>
+                      <a:tailEnd type="none" w="med" len="med"/>
+                    </a:lnB>
+                  </a:tcPr>
+                </a:tc>
+                <a:tc>
+                  <a:txBody>
+                    <a:bodyPr/>
+                    <a:lstStyle/>
+                    <a:p>
+                      <a:pPr algn="ctr" indent="0" marL="0">
+                        <a:buNone/>
+                      </a:pPr>
+                      <a:r>
+                        <a:rPr lang="en-US" sz="1200" dirty="0">
+                          <a:solidFill>
+                            <a:srgbClr val="1F2937"/>
+                          </a:solidFill>
+                          <a:latin typeface="Arial" pitchFamily="34" charset="0"/>
+                          <a:ea typeface="Arial" pitchFamily="34" charset="-122"/>
+                          <a:cs typeface="Arial" pitchFamily="34" charset="-120"/>
+                        </a:rPr>
+                        <a:t>0.5601</a:t>
+                      </a:r>
+                      <a:endParaRPr lang="en-US" sz="1200" dirty="0">
+                        <a:latin typeface="Arial" charset="0"/>
+                        <a:ea typeface="Arial" charset="0"/>
+                        <a:cs typeface="Arial" charset="0"/>
+                      </a:endParaRPr>
+                    </a:p>
+                  </a:txBody>
+                  <a:tcPr marL="45720" marR="45720" marT="45720" marB="45720" anchor="ctr">
+                    <a:lnL w="6350" cap="flat" cmpd="sng" algn="ctr">
+                      <a:solidFill>
+                        <a:srgbClr val="D6DEE6"/>
+                      </a:solidFill>
+                      <a:prstDash val="solid"/>
+                      <a:round/>
+                      <a:headEnd type="none" w="med" len="med"/>
+                      <a:tailEnd type="none" w="med" len="med"/>
+                    </a:lnL>
+                    <a:lnR w="6350" cap="flat" cmpd="sng" algn="ctr">
+                      <a:solidFill>
+                        <a:srgbClr val="D6DEE6"/>
+                      </a:solidFill>
+                      <a:prstDash val="solid"/>
+                      <a:round/>
+                      <a:headEnd type="none" w="med" len="med"/>
+                      <a:tailEnd type="none" w="med" len="med"/>
+                    </a:lnR>
+                    <a:lnT w="6350" cap="flat" cmpd="sng" algn="ctr">
+                      <a:solidFill>
+                        <a:srgbClr val="D6DEE6"/>
+                      </a:solidFill>
+                      <a:prstDash val="solid"/>
+                      <a:round/>
+                      <a:headEnd type="none" w="med" len="med"/>
+                      <a:tailEnd type="none" w="med" len="med"/>
+                    </a:lnT>
+                    <a:lnB w="6350" cap="flat" cmpd="sng" algn="ctr">
+                      <a:solidFill>
+                        <a:srgbClr val="D6DEE6"/>
+                      </a:solidFill>
+                      <a:prstDash val="solid"/>
+                      <a:round/>
+                      <a:headEnd type="none" w="med" len="med"/>
+                      <a:tailEnd type="none" w="med" len="med"/>
+                    </a:lnB>
+                  </a:tcPr>
+                </a:tc>
+                <a:tc>
+                  <a:txBody>
+                    <a:bodyPr/>
+                    <a:lstStyle/>
+                    <a:p>
+                      <a:pPr algn="ctr" indent="0" marL="0">
+                        <a:buNone/>
+                      </a:pPr>
+                      <a:r>
+                        <a:rPr lang="en-US" sz="1200" dirty="0">
+                          <a:solidFill>
+                            <a:srgbClr val="1F2937"/>
+                          </a:solidFill>
+                          <a:latin typeface="Arial" pitchFamily="34" charset="0"/>
+                          <a:ea typeface="Arial" pitchFamily="34" charset="-122"/>
+                          <a:cs typeface="Arial" pitchFamily="34" charset="-120"/>
+                        </a:rPr>
+                        <a:t>0.4479</a:t>
+                      </a:r>
+                      <a:endParaRPr lang="en-US" sz="1200" dirty="0">
+                        <a:latin typeface="Arial" charset="0"/>
+                        <a:ea typeface="Arial" charset="0"/>
+                        <a:cs typeface="Arial" charset="0"/>
+                      </a:endParaRPr>
+                    </a:p>
+                  </a:txBody>
+                  <a:tcPr marL="45720" marR="45720" marT="45720" marB="45720" anchor="ctr">
+                    <a:lnL w="6350" cap="flat" cmpd="sng" algn="ctr">
+                      <a:solidFill>
+                        <a:srgbClr val="D6DEE6"/>
+                      </a:solidFill>
+                      <a:prstDash val="solid"/>
+                      <a:round/>
+                      <a:headEnd type="none" w="med" len="med"/>
+                      <a:tailEnd type="none" w="med" len="med"/>
+                    </a:lnL>
+                    <a:lnR w="6350" cap="flat" cmpd="sng" algn="ctr">
+                      <a:solidFill>
+                        <a:srgbClr val="D6DEE6"/>
+                      </a:solidFill>
+                      <a:prstDash val="solid"/>
+                      <a:round/>
+                      <a:headEnd type="none" w="med" len="med"/>
+                      <a:tailEnd type="none" w="med" len="med"/>
+                    </a:lnR>
+                    <a:lnT w="6350" cap="flat" cmpd="sng" algn="ctr">
+                      <a:solidFill>
+                        <a:srgbClr val="D6DEE6"/>
+                      </a:solidFill>
+                      <a:prstDash val="solid"/>
+                      <a:round/>
+                      <a:headEnd type="none" w="med" len="med"/>
+                      <a:tailEnd type="none" w="med" len="med"/>
+                    </a:lnT>
+                    <a:lnB w="6350" cap="flat" cmpd="sng" algn="ctr">
+                      <a:solidFill>
+                        <a:srgbClr val="D6DEE6"/>
+                      </a:solidFill>
+                      <a:prstDash val="solid"/>
+                      <a:round/>
+                      <a:headEnd type="none" w="med" len="med"/>
+                      <a:tailEnd type="none" w="med" len="med"/>
+                    </a:lnB>
+                  </a:tcPr>
+                </a:tc>
+                <a:tc>
+                  <a:txBody>
+                    <a:bodyPr/>
+                    <a:lstStyle/>
+                    <a:p>
+                      <a:pPr algn="ctr" indent="0" marL="0">
+                        <a:buNone/>
+                      </a:pPr>
+                      <a:r>
+                        <a:rPr lang="en-US" sz="1200" dirty="0">
+                          <a:solidFill>
+                            <a:srgbClr val="1F2937"/>
+                          </a:solidFill>
+                          <a:latin typeface="Arial" pitchFamily="34" charset="0"/>
+                          <a:ea typeface="Arial" pitchFamily="34" charset="-122"/>
+                          <a:cs typeface="Arial" pitchFamily="34" charset="-120"/>
+                        </a:rPr>
+                        <a:t>+0.40%</a:t>
+                      </a:r>
+                      <a:endParaRPr lang="en-US" sz="1200" dirty="0">
+                        <a:latin typeface="Arial" charset="0"/>
+                        <a:ea typeface="Arial" charset="0"/>
+                        <a:cs typeface="Arial" charset="0"/>
+                      </a:endParaRPr>
+                    </a:p>
+                  </a:txBody>
+                  <a:tcPr marL="45720" marR="45720" marT="45720" marB="45720" anchor="ctr">
+                    <a:lnL w="6350" cap="flat" cmpd="sng" algn="ctr">
+                      <a:solidFill>
+                        <a:srgbClr val="D6DEE6"/>
+                      </a:solidFill>
+                      <a:prstDash val="solid"/>
+                      <a:round/>
+                      <a:headEnd type="none" w="med" len="med"/>
+                      <a:tailEnd type="none" w="med" len="med"/>
+                    </a:lnL>
+                    <a:lnR w="6350" cap="flat" cmpd="sng" algn="ctr">
+                      <a:solidFill>
+                        <a:srgbClr val="D6DEE6"/>
+                      </a:solidFill>
+                      <a:prstDash val="solid"/>
+                      <a:round/>
+                      <a:headEnd type="none" w="med" len="med"/>
+                      <a:tailEnd type="none" w="med" len="med"/>
+                    </a:lnR>
+                    <a:lnT w="6350" cap="flat" cmpd="sng" algn="ctr">
+                      <a:solidFill>
+                        <a:srgbClr val="D6DEE6"/>
+                      </a:solidFill>
+                      <a:prstDash val="solid"/>
+                      <a:round/>
+                      <a:headEnd type="none" w="med" len="med"/>
+                      <a:tailEnd type="none" w="med" len="med"/>
+                    </a:lnT>
+                    <a:lnB w="6350" cap="flat" cmpd="sng" algn="ctr">
+                      <a:solidFill>
+                        <a:srgbClr val="D6DEE6"/>
+                      </a:solidFill>
+                      <a:prstDash val="solid"/>
+                      <a:round/>
+                      <a:headEnd type="none" w="med" len="med"/>
+                      <a:tailEnd type="none" w="med" len="med"/>
+                    </a:lnB>
+                  </a:tcPr>
+                </a:tc>
+                <a:tc>
+                  <a:txBody>
+                    <a:bodyPr/>
+                    <a:lstStyle/>
+                    <a:p>
+                      <a:pPr algn="ctr" indent="0" marL="0">
+                        <a:buNone/>
+                      </a:pPr>
+                      <a:r>
+                        <a:rPr lang="en-US" sz="1200" dirty="0">
+                          <a:solidFill>
+                            <a:srgbClr val="1F2937"/>
+                          </a:solidFill>
+                          <a:latin typeface="Arial" pitchFamily="34" charset="0"/>
+                          <a:ea typeface="Arial" pitchFamily="34" charset="-122"/>
+                          <a:cs typeface="Arial" pitchFamily="34" charset="-120"/>
+                        </a:rPr>
+                        <a:t>5</a:t>
+                      </a:r>
+                      <a:endParaRPr lang="en-US" sz="1200" dirty="0">
+                        <a:latin typeface="Arial" charset="0"/>
+                        <a:ea typeface="Arial" charset="0"/>
+                        <a:cs typeface="Arial" charset="0"/>
+                      </a:endParaRPr>
+                    </a:p>
+                  </a:txBody>
+                  <a:tcPr marL="45720" marR="45720" marT="45720" marB="45720" anchor="ctr">
+                    <a:lnL w="6350" cap="flat" cmpd="sng" algn="ctr">
+                      <a:solidFill>
+                        <a:srgbClr val="D6DEE6"/>
+                      </a:solidFill>
+                      <a:prstDash val="solid"/>
+                      <a:round/>
+                      <a:headEnd type="none" w="med" len="med"/>
+                      <a:tailEnd type="none" w="med" len="med"/>
+                    </a:lnL>
+                    <a:lnR w="6350" cap="flat" cmpd="sng" algn="ctr">
+                      <a:solidFill>
+                        <a:srgbClr val="D6DEE6"/>
+                      </a:solidFill>
+                      <a:prstDash val="solid"/>
+                      <a:round/>
+                      <a:headEnd type="none" w="med" len="med"/>
+                      <a:tailEnd type="none" w="med" len="med"/>
+                    </a:lnR>
+                    <a:lnT w="6350" cap="flat" cmpd="sng" algn="ctr">
+                      <a:solidFill>
+                        <a:srgbClr val="D6DEE6"/>
+                      </a:solidFill>
+                      <a:prstDash val="solid"/>
+                      <a:round/>
+                      <a:headEnd type="none" w="med" len="med"/>
+                      <a:tailEnd type="none" w="med" len="med"/>
+                    </a:lnT>
+                    <a:lnB w="6350" cap="flat" cmpd="sng" algn="ctr">
+                      <a:solidFill>
+                        <a:srgbClr val="D6DEE6"/>
+                      </a:solidFill>
+                      <a:prstDash val="solid"/>
+                      <a:round/>
+                      <a:headEnd type="none" w="med" len="med"/>
+                      <a:tailEnd type="none" w="med" len="med"/>
+                    </a:lnB>
+                  </a:tcPr>
+                </a:tc>
+                <a:tc>
+                  <a:txBody>
+                    <a:bodyPr/>
+                    <a:lstStyle/>
+                    <a:p>
+                      <a:pPr algn="ctr" indent="0" marL="0">
+                        <a:buNone/>
+                      </a:pPr>
+                      <a:r>
+                        <a:rPr lang="en-US" sz="1200" dirty="0">
+                          <a:solidFill>
+                            <a:srgbClr val="1F2937"/>
+                          </a:solidFill>
+                          <a:latin typeface="Arial" pitchFamily="34" charset="0"/>
+                          <a:ea typeface="Arial" pitchFamily="34" charset="-122"/>
+                          <a:cs typeface="Arial" pitchFamily="34" charset="-120"/>
+                        </a:rPr>
+                        <a:t>72%</a:t>
+                      </a:r>
+                      <a:endParaRPr lang="en-US" sz="1200" dirty="0">
+                        <a:latin typeface="Arial" charset="0"/>
+                        <a:ea typeface="Arial" charset="0"/>
+                        <a:cs typeface="Arial" charset="0"/>
+                      </a:endParaRPr>
+                    </a:p>
+                  </a:txBody>
+                  <a:tcPr marL="45720" marR="45720" marT="45720" marB="45720" anchor="ctr">
                     <a:lnL w="6350" cap="flat" cmpd="sng" algn="ctr">
                       <a:solidFill>
                         <a:srgbClr val="D6DEE6"/>
@@ -11796,7 +15167,7 @@
                 <a:ea typeface="Arial" pitchFamily="34" charset="-122"/>
                 <a:cs typeface="Arial" pitchFamily="34" charset="-120"/>
               </a:rPr>
-              <a:t>Own calculation from forecast_log.csv, n = 261. DM = Diebold-Mariano against the AR(1), Newey-West variance at lag 3.</a:t>
+              <a:t>Own calculation from forecast_log.csv, n = 261. RMSE below AR(1) is positive when a model beats the benchmark. Only the first row and the two prespecified comparisons were fixed in advance.</a:t>
             </a:r>
             <a:endParaRPr lang="en-US" sz="1300" dirty="0"/>
           </a:p>
@@ -11867,7 +15238,7 @@
                 <a:ea typeface="Arial" pitchFamily="34" charset="-122"/>
                 <a:cs typeface="Arial" pitchFamily="34" charset="-120"/>
               </a:rPr>
-              <a:t>We win four years of five; 2025 goes the other way and we say so</a:t>
+              <a:t>The combination is below the AR(1) in 4 of 5 years; 2025 goes the other way</a:t>
             </a:r>
             <a:endParaRPr lang="en-US" sz="2600" dirty="0"/>
           </a:p>
@@ -11953,7 +15324,7 @@
         </p:blipFill>
         <p:spPr>
           <a:xfrm>
-            <a:off x="2194560" y="1280160"/>
+            <a:off x="2194560" y="1371600"/>
             <a:ext cx="7772400" cy="4297680"/>
           </a:xfrm>
           <a:prstGeom prst="rect">
@@ -11994,7 +15365,7 @@
                 <a:ea typeface="Arial" pitchFamily="34" charset="-122"/>
                 <a:cs typeface="Arial" pitchFamily="34" charset="-120"/>
               </a:rPr>
-              <a:t>Own calculation from forecast_log.csv.</a:t>
+              <a:t>Own calculation from forecast_log.csv. Five annual figures cannot show whether the pattern is stable. We have not tested why 2025 differs.</a:t>
             </a:r>
             <a:endParaRPr lang="en-US" sz="1300" dirty="0"/>
           </a:p>

--- a/reports/presentation.pptx
+++ b/reports/presentation.pptx
@@ -2157,7 +2157,7 @@
                 <a:ea typeface="Arial" pitchFamily="34" charset="-122"/>
                 <a:cs typeface="Arial" pitchFamily="34" charset="-120"/>
               </a:rPr>
-              <a:t>Don't fight the random walk.</a:t>
+              <a:t>Forecasting the rand</a:t>
             </a:r>
             <a:endParaRPr lang="en-US" sz="4200" dirty="0"/>
           </a:p>
@@ -2177,7 +2177,7 @@
                 <a:ea typeface="Arial" pitchFamily="34" charset="-122"/>
                 <a:cs typeface="Arial" pitchFamily="34" charset="-120"/>
               </a:rPr>
-              <a:t>Discipline it.</a:t>
+              <a:t>one month ahead</a:t>
             </a:r>
             <a:endParaRPr lang="en-US" sz="4200" dirty="0"/>
           </a:p>
@@ -8080,7 +8080,7 @@
                 <a:ea typeface="Arial" pitchFamily="34" charset="-122"/>
                 <a:cs typeface="Arial" pitchFamily="34" charset="-120"/>
               </a:rPr>
-              <a:t>Nothing here is a black box. </a:t>
+              <a:t>Small enough to derive by hand. </a:t>
             </a:r>
             <a:pPr indent="0" marL="0">
               <a:buNone/>
@@ -8094,7 +8094,7 @@
                 <a:ea typeface="Arial" pitchFamily="34" charset="-122"/>
                 <a:cs typeface="Arial" pitchFamily="34" charset="-120"/>
               </a:rPr>
-              <a:t>OLS, ridge regression and a weighted average. We can derive every component by hand under questioning.</a:t>
+              <a:t>The combination is OLS, ridge regression and a weighted average, so every component can be worked through under questioning.</a:t>
             </a:r>
             <a:endParaRPr lang="en-US" sz="1800" dirty="0"/>
           </a:p>
@@ -8292,7 +8292,7 @@
                 <a:ea typeface="Arial" pitchFamily="34" charset="-122"/>
                 <a:cs typeface="Arial" pitchFamily="34" charset="-120"/>
               </a:rPr>
-              <a:t>What to take away</a:t>
+              <a:t>Reading the chart</a:t>
             </a:r>
             <a:endParaRPr lang="en-US" sz="2000" dirty="0"/>
           </a:p>
@@ -8656,7 +8656,7 @@
                 <a:ea typeface="Arial" pitchFamily="34" charset="-122"/>
                 <a:cs typeface="Arial" pitchFamily="34" charset="-120"/>
               </a:rPr>
-              <a:t>What to take away</a:t>
+              <a:t>The numbers</a:t>
             </a:r>
             <a:endParaRPr lang="en-US" sz="2000" dirty="0"/>
           </a:p>
@@ -9027,7 +9027,7 @@
                 <a:ea typeface="Arial" pitchFamily="34" charset="-122"/>
                 <a:cs typeface="Arial" pitchFamily="34" charset="-120"/>
               </a:rPr>
-              <a:t>Its implied level was below spot at 261 of 261 origins. That is an observation, not shown to be the full explanation.</a:t>
+              <a:t>Its implied level was below spot at 261 of 261 origins. We have not tested whether that is why it lost.</a:t>
             </a:r>
             <a:endParaRPr lang="en-US" sz="1900" dirty="0"/>
           </a:p>
@@ -9289,46 +9289,6 @@
         <p:txBody>
           <a:bodyPr wrap="square" lIns="0" tIns="0" rIns="0" bIns="0" rtlCol="0" anchor="ctr"/>
           <a:lstStyle/>
-          <a:p>
-            <a:pPr indent="0" marL="0">
-              <a:spcAft>
-                <a:spcPts val="900"/>
-              </a:spcAft>
-              <a:buNone/>
-            </a:pPr>
-            <a:r>
-              <a:rPr lang="en-US" sz="1400" dirty="0">
-                <a:solidFill>
-                  <a:srgbClr val="1F2937"/>
-                </a:solidFill>
-                <a:latin typeface="Arial" pitchFamily="34" charset="0"/>
-                <a:ea typeface="Arial" pitchFamily="34" charset="-122"/>
-                <a:cs typeface="Arial" pitchFamily="34" charset="-120"/>
-              </a:rPr>
-              <a:t>Amat, C., Michalski, T. and Stoltz, G. (2018). Fundamentals and exchange rate forecastability with simple machine learning methods. Journal of International Money and Finance, 88, 1-24.</a:t>
-            </a:r>
-            <a:endParaRPr lang="en-US" sz="1400" dirty="0"/>
-          </a:p>
-          <a:p>
-            <a:pPr indent="0" marL="0">
-              <a:spcAft>
-                <a:spcPts val="900"/>
-              </a:spcAft>
-              <a:buNone/>
-            </a:pPr>
-            <a:r>
-              <a:rPr lang="en-US" sz="1400" dirty="0">
-                <a:solidFill>
-                  <a:srgbClr val="1F2937"/>
-                </a:solidFill>
-                <a:latin typeface="Arial" pitchFamily="34" charset="0"/>
-                <a:ea typeface="Arial" pitchFamily="34" charset="-122"/>
-                <a:cs typeface="Arial" pitchFamily="34" charset="-120"/>
-              </a:rPr>
-              <a:t>Darvas, Z. (2020). Forecasting exchange rates of major currencies with long maturity interest rates. Bruegel Working Paper 2020/02.</a:t>
-            </a:r>
-            <a:endParaRPr lang="en-US" sz="1400" dirty="0"/>
-          </a:p>
           <a:p>
             <a:pPr indent="0" marL="0">
               <a:spcAft>

--- a/reports/presentation.pptx
+++ b/reports/presentation.pptx
@@ -2940,7 +2940,7 @@
       </p:sp>
       <p:pic>
         <p:nvPicPr>
-          <p:cNvPr id="6" name="Image 0" descr="C:\Users\aakas\Documents\Projects\Hackathon\figures\input_series.png">    </p:cNvPr>
+          <p:cNvPr id="6" name="Image 0" descr="C:\t\hk\figures\input_series.png">    </p:cNvPr>
           <p:cNvPicPr>
             <a:picLocks noChangeAspect="1"/>
           </p:cNvPicPr>
@@ -3138,7 +3138,7 @@
       </p:sp>
       <p:pic>
         <p:nvPicPr>
-          <p:cNvPr id="5" name="Image 0" descr="C:\Users\aakas\Documents\Projects\Hackathon\figures\combination_weights.png">    </p:cNvPr>
+          <p:cNvPr id="5" name="Image 0" descr="C:\t\hk\figures\combination_weights.png">    </p:cNvPr>
           <p:cNvPicPr>
             <a:picLocks noChangeAspect="1"/>
           </p:cNvPicPr>
@@ -3882,7 +3882,7 @@
       </p:sp>
       <p:pic>
         <p:nvPicPr>
-          <p:cNvPr id="5" name="Image 0" descr="C:\Users\aakas\Documents\Projects\Hackathon\figures\forecasts_vs_actual.png">    </p:cNvPr>
+          <p:cNvPr id="5" name="Image 0" descr="C:\t\hk\figures\forecasts_vs_actual.png">    </p:cNvPr>
           <p:cNvPicPr>
             <a:picLocks noChangeAspect="1"/>
           </p:cNvPicPr>
@@ -8237,7 +8237,7 @@
       </p:sp>
       <p:pic>
         <p:nvPicPr>
-          <p:cNvPr id="4" name="Image 0" descr="C:\Users\aakas\Documents\Projects\Hackathon\figures\presentation\cumse.png">    </p:cNvPr>
+          <p:cNvPr id="4" name="Image 0" descr="C:\t\hk\figures\presentation\cumse.png">    </p:cNvPr>
           <p:cNvPicPr>
             <a:picLocks noChangeAspect="1"/>
           </p:cNvPicPr>
@@ -8601,7 +8601,7 @@
       </p:sp>
       <p:pic>
         <p:nvPicPr>
-          <p:cNvPr id="4" name="Image 0" descr="C:\Users\aakas\Documents\Projects\Hackathon\figures\presentation\rmse.png">    </p:cNvPr>
+          <p:cNvPr id="4" name="Image 0" descr="C:\t\hk\figures\presentation\rmse.png">    </p:cNvPr>
           <p:cNvPicPr>
             <a:picLocks noChangeAspect="1"/>
           </p:cNvPicPr>
@@ -15270,7 +15270,7 @@
       </p:sp>
       <p:pic>
         <p:nvPicPr>
-          <p:cNvPr id="5" name="Image 0" descr="C:\Users\aakas\Documents\Projects\Hackathon\figures\presentation\yearly.png">    </p:cNvPr>
+          <p:cNvPr id="5" name="Image 0" descr="C:\t\hk\figures\presentation\yearly.png">    </p:cNvPr>
           <p:cNvPicPr>
             <a:picLocks noChangeAspect="1"/>
           </p:cNvPicPr>

--- a/reports/presentation.pptx
+++ b/reports/presentation.pptx
@@ -2940,7 +2940,7 @@
       </p:sp>
       <p:pic>
         <p:nvPicPr>
-          <p:cNvPr id="6" name="Image 0" descr="C:\t\hk\figures\input_series.png">    </p:cNvPr>
+          <p:cNvPr id="6" name="Image 0" descr="Input series">    </p:cNvPr>
           <p:cNvPicPr>
             <a:picLocks noChangeAspect="1"/>
           </p:cNvPicPr>
@@ -3138,7 +3138,7 @@
       </p:sp>
       <p:pic>
         <p:nvPicPr>
-          <p:cNvPr id="5" name="Image 0" descr="C:\t\hk\figures\combination_weights.png">    </p:cNvPr>
+          <p:cNvPr id="5" name="Image 0" descr="Combination weights over time">    </p:cNvPr>
           <p:cNvPicPr>
             <a:picLocks noChangeAspect="1"/>
           </p:cNvPicPr>
@@ -3882,7 +3882,7 @@
       </p:sp>
       <p:pic>
         <p:nvPicPr>
-          <p:cNvPr id="5" name="Image 0" descr="C:\t\hk\figures\forecasts_vs_actual.png">    </p:cNvPr>
+          <p:cNvPr id="5" name="Image 0" descr="Forecasts against the realised rate">    </p:cNvPr>
           <p:cNvPicPr>
             <a:picLocks noChangeAspect="1"/>
           </p:cNvPicPr>
@@ -8237,7 +8237,7 @@
       </p:sp>
       <p:pic>
         <p:nvPicPr>
-          <p:cNvPr id="4" name="Image 0" descr="C:\t\hk\figures\presentation\cumse.png">    </p:cNvPr>
+          <p:cNvPr id="4" name="Image 0" descr="Cumulative squared-error gap against the AR(1)">    </p:cNvPr>
           <p:cNvPicPr>
             <a:picLocks noChangeAspect="1"/>
           </p:cNvPicPr>
@@ -8601,7 +8601,7 @@
       </p:sp>
       <p:pic>
         <p:nvPicPr>
-          <p:cNvPr id="4" name="Image 0" descr="C:\t\hk\figures\presentation\rmse.png">    </p:cNvPr>
+          <p:cNvPr id="4" name="Image 0" descr="RMSE by model">    </p:cNvPr>
           <p:cNvPicPr>
             <a:picLocks noChangeAspect="1"/>
           </p:cNvPicPr>
@@ -15270,7 +15270,7 @@
       </p:sp>
       <p:pic>
         <p:nvPicPr>
-          <p:cNvPr id="5" name="Image 0" descr="C:\t\hk\figures\presentation\yearly.png">    </p:cNvPr>
+          <p:cNvPr id="5" name="Image 0" descr="RMSE by year">    </p:cNvPr>
           <p:cNvPicPr>
             <a:picLocks noChangeAspect="1"/>
           </p:cNvPicPr>
